--- a/assets/finance/D18_Derivs_II_Options.pptx
+++ b/assets/finance/D18_Derivs_II_Options.pptx
@@ -1233,7 +1233,12 @@
           <a:p>
             <a:r>
               <a:rPr lang="en-US" dirty="0"/>
-              <a:t/>
+              <a:t>ANGLE — Two hours. By the end they should be able to price a put from a call in their head and a call from a two-branch tree on paper.
+•  Open cold: "You can buy the right to buy. What is that right worth?" — do not answer yet.
+•  Flag the one habit that survives the exam: payoff is gross, profit is net of premium.
+•  Warn them §3 (parity) is the single most-inverted equation in the volume.
+•  Pacing: §1 25 min · §2 30 min · §3 40 min · §4 35 min. Keep §1 tight.
+NEXT — Roadmap, then the payoff line itself.</a:t>
             </a:r>
             <a:endParaRPr lang="en-US" dirty="0"/>
           </a:p>
@@ -1321,7 +1326,10 @@
           <a:p>
             <a:r>
               <a:rPr lang="en-US" dirty="0"/>
-              <a:t/>
+              <a:t>ANGLE — Five slides, 30 minutes. This is where exam marks are won and lost.
+•  Two things must survive to the exam: PV(X) not X, and the six-factor sign table.
+•  Warn them the sign table is memorisation. There is no way to reason it out under time pressure.
+•  Keep the moneyness slide short — it is easy and they know it.</a:t>
             </a:r>
             <a:endParaRPr lang="en-US" dirty="0"/>
           </a:p>
@@ -1409,7 +1417,15 @@
           <a:p>
             <a:r>
               <a:rPr lang="en-US" dirty="0"/>
-              <a:t/>
+              <a:t>ANGLE — One equation, one trap. The trap is discounting — and the CFA built a distractor around it.
+•  Do the arithmetic with X first (7.50), let them nod, then redo it with PV(X). The 25p gap is the lesson.
+•  Time value is a residual: quoted price minus exercise value. Never computed directly at Level I.
+•  Time value is always positive before expiry and exactly zero at expiry. Draw the decay curve.
+•  For an OTM option exercise value is zero, so price = time value entirely. That is Question Set Q2.
+•  Note the risk-free rate touches exercise value only — it does not act on time value directly.
+FROM THE DESK — Time value decay is the only thing in an option book that is certain. Everything else is a view; theta is a fact. It is why sellers sleep well right up until the day they do not.
+ASK THE ROOM — A put is quoted at 5 with spot above the strike. How much of that 5 is exercise value?
+NEXT — The relationship between S and X has a name, and it drives everything else.</a:t>
             </a:r>
             <a:endParaRPr lang="en-US" dirty="0"/>
           </a:p>
@@ -1497,7 +1513,13 @@
           <a:p>
             <a:r>
               <a:rPr lang="en-US" dirty="0"/>
-              <a:t/>
+              <a:t>ANGLE — Easy slide — spend the time on the one thing they get wrong: moneyness is defined from the holder's side only.
+•  Call ITM when S &gt; X. Put ITM when S &lt; X. Make the room say both, in that order.
+•  ATM is S = X exactly. Note it is defined on the spot price, not on PV(X).
+•  Moneyness exists to compare options across strikes and maturities on one underlying.
+•  Degree of moneyness drives sensitivity: deep ITM moves nearly one-for-one, deep OTM barely moves.
+•  Careful: exercise value uses PV(X); moneyness uses X. Two different comparisons. Do not merge them.
+NEXT — Moneyness tells us where we are. Arbitrage tells us how far the price can stray.</a:t>
             </a:r>
             <a:endParaRPr lang="en-US" dirty="0"/>
           </a:p>
@@ -1585,7 +1607,15 @@
           <a:p>
             <a:r>
               <a:rPr lang="en-US" dirty="0"/>
-              <a:t/>
+              <a:t>ANGLE — Bounds are the first pricing result that needs no model at all — only the no-arbitrage argument.
+•  Upper bound for a call is S. Ask why: the right to buy cannot beat owning outright.
+•  Upper bound for a put is X, not S. The put can never deliver more than the strike.
+•  Lower bound is the exercise value with PV(X) — the same discounting point as the last slide.
+•  Note the inequality is strict on the low side: an option that trades AT its exercise value is arbitrageable.
+•  S₀ = 990 is a red herring in the question. Say so — the bound is computed at t, not at 0.
+FROM THE DESK — These bounds are the first thing a risk system checks overnight. A quote outside them is almost never free money — it is a stale mark, a wrong dividend, or a corporate action nobody booked.
+ASK THE ROOM — A one-year call on a 100 stock, strike 100, is quoted at 102. What do you do?
+NEXT — Bounds give a range. To narrow it, we need the factors that actually move the price.</a:t>
             </a:r>
             <a:endParaRPr lang="en-US" dirty="0"/>
           </a:p>
@@ -1673,7 +1703,15 @@
           <a:p>
             <a:r>
               <a:rPr lang="en-US" dirty="0"/>
-              <a:t/>
+              <a:t>ANGLE — The single highest-yield table in the deck. Get them to reproduce it from memory before they leave the room.
+•  Do not say "volatility is the only shared sign" — time to expiration usually shares it too. Two, not one.
+•  Volatility raises both because the downside is already capped at the premium. Say that out loud.
+•  Risk-free rate acts only through PV(X): higher r shrinks PV(X), so calls up, puts down.
+•  Income row is two-sided in the curriculum: income −/+, carry cost +/−. Both directions are examinable.
+•  The one genuine ambiguity is time on a deep-ITM put — the discounted X − ST argument.
+FROM THE DESK — Only volatility is unobservable, and that is precisely the column traders argue about. Everything else on this table is on a screen; vega is the only line item that is genuinely an opinion.
+ASK THE ROOM — Rates jump 200bp overnight. Which of your two option books just repriced, and in which direction?
+NEXT — We now know what moves an option. Next: how one option prices another, exactly.</a:t>
             </a:r>
             <a:endParaRPr lang="en-US" dirty="0"/>
           </a:p>
@@ -1761,7 +1799,10 @@
           <a:p>
             <a:r>
               <a:rPr lang="en-US" dirty="0"/>
-              <a:t/>
+              <a:t>ANGLE — Seven slides, 40 minutes — the heart of the afternoon and the most-tested identity in the volume.
+•  Write S + p = c + PV(X) on the board once and leave it there for the whole section.
+•  Every slide here is one rearrangement of that line. Say which one each time.
+•  Insist they rearrange algebraically on the spot rather than memorising four versions.</a:t>
             </a:r>
             <a:endParaRPr lang="en-US" dirty="0"/>
           </a:p>
@@ -1849,7 +1890,14 @@
           <a:p>
             <a:r>
               <a:rPr lang="en-US" dirty="0"/>
-              <a:t/>
+              <a:t>ANGLE — Do not present parity as a formula to memorise. Present it as a table they can rebuild in ninety seconds under exam pressure.
+•  Build the grid column by column with the room. Ask each cell before revealing it.
+•  Protective put pays Max(ST, X). Fiduciary call pays the same. That is the whole argument.
+•  Stress the assumptions: European, same X, same T, no dividends. Break any one and parity breaks.
+•  The bond is a zero-coupon paying exactly X at T — so it costs PV(X) today, not X.
+•  This is CFA Exhibit 4. Tell them to redraw it from scratch in revision, not to reread it.
+ASK THE ROOM — Which side of the identity is the expensive one if a stock suddenly becomes hard to borrow?
+NEXT — Once you believe the identity, it stops being theory and becomes a pricing engine.</a:t>
             </a:r>
             <a:endParaRPr lang="en-US" dirty="0"/>
           </a:p>
@@ -1937,7 +1985,13 @@
           <a:p>
             <a:r>
               <a:rPr lang="en-US" dirty="0"/>
-              <a:t/>
+              <a:t>ANGLE — The point is not the 23.85 — it is that no assumption about Biomian's future was used anywhere.
+•  Ask what we assumed about the share price distribution. Answer: nothing at all.
+•  Make them do the rearrangement live rather than reading it off the slide.
+•  Watch the sign on S₀. Subtracted, not added — the commonest slip in this whole deck.
+•  Always cross-check by evaluating both sides. Two seconds, catches every sign error.
+•  Same numbers reappear on slides 18, 20 and 21. Tell them so — one trade, four lessons.
+NEXT — So what if the traded put ignores the identity? Then somebody gets paid.</a:t>
             </a:r>
             <a:endParaRPr lang="en-US" dirty="0"/>
           </a:p>
@@ -2025,7 +2079,15 @@
           <a:p>
             <a:r>
               <a:rPr lang="en-US" dirty="0"/>
-              <a:t/>
+              <a:t>ANGLE — The mechanical rule: sell the expensive side of the identity, buy the cheap side. Everything else is bookkeeping.
+•  Compute both sides first — 325 versus 318.85 — before touching the grid.
+•  Protective put is dear, so SELL stock and SELL put. Fiduciary call is cheap, so BUY call and BUY bond.
+•  Walk one column at a time and let them see it collapse to zero. Do not rush the ST &lt; X column.
+•  The 6.15 equals the mispricing exactly, and it is received today. Emphasise "today".
+•  If the put were cheap instead, every sign flips. Make someone say the reversed trade aloud.
+FROM THE DESK — A textbook arbitrage assumes you can short the stock at S₀ and finance at r. Both are fictions for most names. Real parity trades live or die on the borrow rate, which is why the arbitrage is thinner than it looks and is usually gone before you can size it.
+ASK THE ROOM — The traded put is 20 instead of 30 — cheap. Give me the four legs, in order.
+NEXT — The same rearranging that finds arbitrage also builds any position out of the other three.</a:t>
             </a:r>
             <a:endParaRPr lang="en-US" dirty="0"/>
           </a:p>
@@ -2113,7 +2175,14 @@
           <a:p>
             <a:r>
               <a:rPr lang="en-US" dirty="0"/>
-              <a:t/>
+              <a:t>ANGLE — Do not let them memorise sixteen cells. Show them the table is one equation solved four ways.
+•  Derive row 3 on the board from scratch, then have the room derive row 4.
+•  A minus sign in the algebra is a short position on the table. Say that mapping explicitly.
+•  Sanity check any row by payoff: long call + short put is a straight 45-degree line — that is stock.
+•  Row 2 is the covered call from slide 7, read backwards. Point at it.
+•  This is CFA Exhibit 6 verbatim. They will see it again in the self-assessment.
+FROM THE DESK — Dealers build synthetic stock from options constantly — the option market can be deeper and far cheaper to finance than the cash market, and the synthetic never appears on the share register. That last point is why some of it is regulated.
+NEXT — Take row 1 and put real numbers on it.</a:t>
             </a:r>
             <a:endParaRPr lang="en-US" dirty="0"/>
           </a:p>
@@ -2201,7 +2270,12 @@
           <a:p>
             <a:r>
               <a:rPr lang="en-US" dirty="0"/>
-              <a:t/>
+              <a:t>ANGLE — Show them the arc: §1 and §2 describe options, §3 and §4 price them. Everything after §2 is arbitrage arithmetic.
+•  §1–§2 = LM 8. §3 = LM 9. §4 = LM 10. Say so — it maps to their reading.
+•  Point at §3 and say: this is the section the exam loves.
+•  Promise them one number twice — EUR 4.57 by two completely different routes in §4.
+•  Only two hard things all afternoon: PV(X) not X, and π is not a forecast.
+NEXT — Learning objectives, then straight into the payoff line.</a:t>
             </a:r>
             <a:endParaRPr lang="en-US" dirty="0"/>
           </a:p>
@@ -2289,7 +2363,13 @@
           <a:p>
             <a:r>
               <a:rPr lang="en-US" dirty="0"/>
-              <a:t/>
+              <a:t>ANGLE — Same cost, same payoff, no shares. If they believe this slide, they believe parity.
+•  Do step 5 on the board for both branches. It is the moment the synthetic clicks.
+•  The bond is what converts the option pair from a spread into an outright position.
+•  Long call + short put with the same strike is a straight line — the option kinks cancel.
+•  One thing the synthetic does NOT deliver: dividends and votes. Say so — the curriculum assumes none.
+•  Reverse it: short call, long put, short bond gives you synthetic short stock.
+NEXT — Replace the cash share with a forward and parity survives intact.</a:t>
             </a:r>
             <a:endParaRPr lang="en-US" dirty="0"/>
           </a:p>
@@ -2377,7 +2457,14 @@
           <a:p>
             <a:r>
               <a:rPr lang="en-US" dirty="0"/>
-              <a:t/>
+              <a:t>ANGLE — Nothing new is happening — S₀ has simply been rewritten as a forward plus a bond. Show that, and the slide takes four minutes.
+•  Start from S₀ = F₀(T)(1 + r)⁻ᵀ. Substitute into parity. That is the entire derivation.
+•  The rearranged form p₀ − c₀ = [X − F₀(T)]PV-factor is what the exam actually asks for.
+•  When X = F₀(T) the put and call are worth the same. Ask them why before you explain it.
+•  23.86 versus 23.85 is rounding, not a discrepancy. Say so before someone raises a hand.
+•  The curriculum calls the forward-plus-bond-plus-put version a synthetic protective put.
+FROM THE DESK — FX and commodity options are quoted off the forward as a matter of course, because the forward already embeds carry — rate differentials, storage, convenience yield. Trying to run those through a spot-based parity is how a book ends up with a systematic, invisible basis.
+NEXT — One last use of parity, and it has nothing to do with option trading.</a:t>
             </a:r>
             <a:endParaRPr lang="en-US" dirty="0"/>
           </a:p>
@@ -2465,7 +2552,15 @@
           <a:p>
             <a:r>
               <a:rPr lang="en-US" dirty="0"/>
-              <a:t/>
+              <a:t>ANGLE — The pay-off slide of the whole section: parity turns a balance sheet into two option positions.
+•  Start with the payoffs, not the options: shareholders get Max(0, VT − D), lenders get Min(VT, D).
+•  Watch the sign on the debtholder side. Long bond PLUS a SHORT put — they sold it to the shareholders.
+•  Min(VT, D) = D − Max(0, D − VT) is the algebra. Write it out; it settles every argument.
+•  Credit spread = the price of that sold put. This is where fixed income and derivatives meet.
+•  Risk-shifting falls straight out: more volatility raises the equity call and hurts the lenders.
+FROM THE DESK — This is why a covenant exists. Once you see equity as a call, you see that a distressed shareholder is long volatility and rationally wants the riskiest project on the list. Lenders are not being obstructive — they are trying to stop the strike price moving.
+ASK THE ROOM — A firm doubles its leverage. Whose option just got more valuable, and whose just got worse?
+NEXT — Parity prices one option from another. But something has to price the first one — and that needs a model.</a:t>
             </a:r>
             <a:endParaRPr lang="en-US" dirty="0"/>
           </a:p>
@@ -2553,7 +2648,10 @@
           <a:p>
             <a:r>
               <a:rPr lang="en-US" dirty="0"/>
-              <a:t/>
+              <a:t>ANGLE — Six slides, 35 minutes. The first genuine model of the afternoon — everything before this was arbitrage bookkeeping.
+•  Frame it: forwards need no model, options do. That single sentence justifies the section.
+•  They will meet EUR 4.57 twice, by two routes. Promise it now, deliver on slides 26 and 27.
+•  The hard sell is that q, the real probability, never appears. Expect resistance on slide 28.</a:t>
             </a:r>
             <a:endParaRPr lang="en-US" dirty="0"/>
           </a:p>
@@ -2641,7 +2739,13 @@
           <a:p>
             <a:r>
               <a:rPr lang="en-US" dirty="0"/>
-              <a:t/>
+              <a:t>ANGLE — Sell the model as a deliberate simplification, not a bad approximation. Two states are enough to pin one price.
+•  Open with the contrast: forward = no model needed. Option = model required. Ask them why.
+•  Rᵤ and R_d are GROSS returns — 1.2, not 20%. Students trip on this in the arithmetic.
+•  Introduce q, then say it will vanish. Planting it now makes slide 28 land harder.
+•  Volatility enters only as the spread. There is no sigma anywhere in the Level I formulas.
+•  The two-state world is not a claim about reality; it is the minimum needed to hedge exactly.
+NEXT — Two states, one hedge ratio, and the risk disappears.</a:t>
             </a:r>
             <a:endParaRPr lang="en-US" dirty="0"/>
           </a:p>
@@ -2729,7 +2833,14 @@
           <a:p>
             <a:r>
               <a:rPr lang="en-US" dirty="0"/>
-              <a:t/>
+              <a:t>ANGLE — Four steps, mechanical. Get the recipe into their hands before you show a single number.
+•  h* = option payoff range divided by asset payoff range. Ranges, not levels.
+•  The definition of h* IS the requirement that both branches give the same value. Say it that way.
+•  Once V₁ is the same in both states it is riskless, so it can only earn r. That is the whole argument.
+•  Compute V₁ from both branches every time. It is a free error check and takes five seconds.
+•  For a put h* is negative — buy the put and buy the stock. CFA Question Set Q5 and Practice Q2 both test it.
+FROM THE DESK — h* is delta, and on a desk it is a live number that has to be re-traded all day. The binomial tree hides the cost of that re-trading behind a single static h. It is the same simplification that made slide 9 matter.
+NEXT — Numbers on the recipe.</a:t>
             </a:r>
             <a:endParaRPr lang="en-US" dirty="0"/>
           </a:p>
@@ -2817,7 +2928,13 @@
           <a:p>
             <a:r>
               <a:rPr lang="en-US" dirty="0"/>
-              <a:t/>
+              <a:t>ANGLE — Slow, deliberate, every line on the board. This arithmetic is worth marks and they will replicate it in the exam.
+•  Make them compute c₁ᵘ and c₁ᵈ before you show step 1. It is the only step that needs thought.
+•  Do step 3 twice, once per branch. Watching the two 12s appear is the moment it lands.
+•  Step 4: stress that we discount at r ONLY because V₁ is certain. That is the licence.
+•  The final check — 11.43 × 1.05 = 12 — proves the portfolio really earns the risk-free rate.
+•  Ask what the call would be worth if S₁ᵈ were 80 instead of 60. Narrower tree, cheaper option.
+NEXT — Same tree, same answer, a much faster route — and one strange new object.</a:t>
             </a:r>
             <a:endParaRPr lang="en-US" dirty="0"/>
           </a:p>
@@ -2905,7 +3022,15 @@
           <a:p>
             <a:r>
               <a:rPr lang="en-US" dirty="0"/>
-              <a:t/>
+              <a:t>ANGLE — Two routes, one number. Then the hard part: π looks like a probability and is not one.
+•  Reveal 4.57 and stop. Let the coincidence sit for a beat before explaining it.
+•  It is not a coincidence — both routes are the same no-arbitrage condition, rearranged.
+•  π = 0.48 here while the real q is unknown and irrelevant. Say the word "weight", not "chance".
+•  Where π comes from: it is the weight that makes the underlying itself grow at exactly r.
+•  π between 0 and 1 is equivalent to no arbitrage. If it falls outside, the tree is mispriced.
+FROM THE DESK — Risk-neutral valuation is the workhorse of every pricing library on every desk. The reason it survives well past the binomial toy model is that it turns a hedging argument into an expectation, and expectations are what computers are good at.
+ASK THE ROOM — If π is not the real probability, why is it allowed to sit in an expected-value formula?
+NEXT — Now prove the real probability truly does not matter.</a:t>
             </a:r>
             <a:endParaRPr lang="en-US" dirty="0"/>
           </a:p>
@@ -2993,7 +3118,15 @@
           <a:p>
             <a:r>
               <a:rPr lang="en-US" dirty="0"/>
-              <a:t/>
+              <a:t>ANGLE — The single most counter-intuitive fact in options pricing, and the room will resist it. Use the table, not an argument.
+•  Reveal rows 3 and 4 last. Ask them to predict the price before you show it.
+•  The reason q vanishes: the seller hedges with h* shares, so a directional view has nothing to attach to.
+•  Rows 1 → 2 is the payoff: 2.98 to 8.04 is 2.7x, not 2x. Width matters more than they expect.
+•  Puts are from parity — 2.98 − 50 + 55/1.05 = 5.36. Make someone verify it on a calculator.
+•  Tie back to slide 14: volatility raises calls AND puts. Both columns rise from row 1 to row 2.
+FROM THE DESK — This is why a broker cannot sell you an option cheaply because they are bearish. The price is a hedging cost, not a bet. When someone does quote you off their view, you are not trading with a market maker — you are trading with a punter.
+ASK THE ROOM — You are certain the stock rises. Should you pay more than 2.98 for the call?
+NEXT — One step is enough for Level I. Where does the tree go from here?</a:t>
             </a:r>
             <a:endParaRPr lang="en-US" dirty="0"/>
           </a:p>
@@ -3081,7 +3214,14 @@
           <a:p>
             <a:r>
               <a:rPr lang="en-US" dirty="0"/>
-              <a:t/>
+              <a:t>ANGLE — Orientation slide, not an examinable one. Say clearly that the formula is outside Vol 7 before anyone writes it down as gospel.
+•  Open with the disclaimer: not in Vol 7, not on the Level I exam. Then teach it anyway, briefly.
+•  The link that matters: N(d₂) plays the role π played. Same idea, continuous time.
+•  σ finally appears explicitly. At Level I volatility only ever entered as the spread Rᵤ − R_d.
+•  Do NOT derive anything. Two minutes, then move on.
+•  The honest headline: the tree is not an approximation to Black-Scholes — Black-Scholes is a limit of the tree.
+FROM THE DESK — Nobody uses Black-Scholes to find a price; the market gives the price. It is run backwards to extract implied volatility, and the fact that the number differs by strike — the smile — is the market telling you the model's own assumption is wrong.
+NEXT — Eight lines to take away.</a:t>
             </a:r>
             <a:endParaRPr lang="en-US" dirty="0"/>
           </a:p>
@@ -3169,7 +3309,12 @@
           <a:p>
             <a:r>
               <a:rPr lang="en-US" dirty="0"/>
-              <a:t/>
+              <a:t>ANGLE — Read objective 4 aloud twice — the sign table is the highest-yield memorisation in this deck.
+•  Objective 1: make them say "unlimited" out loud for the short call only.
+•  Objective 3 is the half of the LM 8 outcome most decks skip. Slide 9 covers it.
+•  Objective 6: flag now that q (real probability) is a red herring — they will not believe it yet.
+•  Do not linger. Two minutes maximum.
+NEXT — Section one: what an option actually pays.</a:t>
             </a:r>
             <a:endParaRPr lang="en-US" dirty="0"/>
           </a:p>
@@ -3257,7 +3402,13 @@
           <a:p>
             <a:r>
               <a:rPr lang="en-US" dirty="0"/>
-              <a:t/>
+              <a:t>ANGLE — Close on the two things that must survive the week: parity and the sign table.
+•  Do not read the cards. Ask the room for the four positions and the one unlimited loss.
+•  Make someone rearrange parity to solve for c₀ out loud before anybody leaves.
+•  Homework: LM 8 practice problems 1–9 and LM 10 practice problems 1–4.
+•  Preview: deck 19 leaves listed markets entirely for alternative investments.
+•  Two minutes of questions, then stop. Do not reopen the risk-neutral debate at the door.
+FROM THE DESK — If they remember one line from the afternoon, make it this: the option premium is the only honest price of an opinion about volatility. Everything else on these thirty slides is bookkeeping around that fact.</a:t>
             </a:r>
             <a:endParaRPr lang="en-US" dirty="0"/>
           </a:p>
@@ -3345,7 +3496,10 @@
           <a:p>
             <a:r>
               <a:rPr lang="en-US" dirty="0"/>
-              <a:t/>
+              <a:t>ANGLE — Five slides, 25 minutes. Describe the instrument before pricing it.
+•  Nothing here needs a model — it is all arithmetic at expiry.
+•  Land the payoff/profit distinction early; it is the vocabulary for the whole afternoon.
+•  Do not let the covered call turn into a strategy debate. Two minutes each on 7 and 8.</a:t>
             </a:r>
             <a:endParaRPr lang="en-US" dirty="0"/>
           </a:p>
@@ -3433,7 +3587,14 @@
           <a:p>
             <a:r>
               <a:rPr lang="en-US" dirty="0"/>
-              <a:t/>
+              <a:t>ANGLE — One idea only: the Max(0, ·) operator. Everything for the next two hours is a consequence of that bracket.
+•  Draw the call kink on the board before showing the chart. Make them predict the put.
+•  These are PAYOFF lines, not profit — the premium is not in them. Say it explicitly.
+•  Profit = the same line shifted down by c₀ (or p₀). Breakeven is where it crosses zero.
+•  Contrast with a forward: one straight 45-degree line through F₀(T), losses included.
+•  Max(0, ·) is why we cannot price this by discounting a known cash flow.
+FROM THE DESK — On a desk nobody quotes the payoff — they quote implied volatility, because the premium is the only honest price of an opinion about how wide that kink will be crossed.
+NEXT — Now the same two lines seen from the other side of the trade.</a:t>
             </a:r>
             <a:endParaRPr lang="en-US" dirty="0"/>
           </a:p>
@@ -3521,7 +3682,15 @@
           <a:p>
             <a:r>
               <a:rPr lang="en-US" dirty="0"/>
-              <a:t/>
+              <a:t>ANGLE — The word "unlimited" belongs to exactly one cell in this table. Make them find it before you point at it.
+•  Build the table live, column by column, rather than revealing it whole.
+•  Force the symmetry: long call max loss = short call max gain = c₀. Same number, both signs.
+•  Breakeven column: calls X + c₀, puts X − p₀. The premium always widens the gap you must cross.
+•  Kill the myth early — a short put is NOT unlimited risk. It is bounded at X − p₀.
+•  Ask who has the obligation in each row. Only the seller ever has one.
+FROM THE DESK — Every retail "safe income" strategy is a short put or a covered call wearing a different name. The premium is real; so is the tail that pays for it, and it arrives on one day in ten years.
+ASK THE ROOM — You sell a 100-strike call for 5. At what spot do you start actually losing money?
+NEXT — Bolt the short call onto stock you already own and you get the most common overlay in the industry.</a:t>
             </a:r>
             <a:endParaRPr lang="en-US" dirty="0"/>
           </a:p>
@@ -3609,7 +3778,15 @@
           <a:p>
             <a:r>
               <a:rPr lang="en-US" dirty="0"/>
-              <a:t/>
+              <a:t>ANGLE — The CFA teaches the covered call as a parity identity, not as a strategy — it is a long bond plus a short put in disguise.
+•  Show the payoff Min(ST, X) first; only then do the algebra.
+•  Step 2 is the exam point: S₀ − c₀ = PV(X) − p₀. Covered call = long bond + short put.
+•  So a "conservative income" covered call has the exact risk profile of a naked short put.
+•  Watch the answer bar: max PAYOFF is 325, max PROFIT is 62.31. Do not let them merge.
+•  The premium is received at t = 0, so strictly it earns interest to T. Ignored here, as the CFA does.
+FROM THE DESK — Covered-call funds sell realised upside for premium income and market it as yield. It is not yield — it is the sale of the right tail. In a strong bull year the manager underperforms and the mandate gets fired for doing exactly what it promised.
+ASK THE ROOM — If a covered call is really a short put, why does anyone dress it up as the covered call?
+NEXT — Flip the option from short to long and you are buying insurance instead of selling it.</a:t>
             </a:r>
             <a:endParaRPr lang="en-US" dirty="0"/>
           </a:p>
@@ -3697,7 +3874,15 @@
           <a:p>
             <a:r>
               <a:rPr lang="en-US" dirty="0"/>
-              <a:t/>
+              <a:t>ANGLE — The protective put is the left-hand side of put-call parity. Teaching it here means §3 is already half-built.
+•  Payoff Max(ST, X): the position simply cannot end below the strike.
+•  Cost of the floor = p₀ = 23.85 on a 295 share — about 8% for six months. Let that land.
+•  Max loss = S₀ − X + p₀. Students forget the premium term every time.
+•  This is Portfolio 2 in LM 9 Exhibit 1. Say so — they will meet it again in twenty minutes.
+•  Contrast with slide 7: same stock, opposite option, opposite economics.
+FROM THE DESK — Almost nobody buys a naked protective put twice — the premium bleed is visible on every monthly report. They sell an out-of-the-money call to fund it, which the market calls a collar. Note that Vol 7 never mentions collars; it is desk vocabulary, not curriculum.
+ASK THE ROOM — The put costs 8% of the share price for six months. Would you still buy the floor?
+NEXT — Both overlays assumed the option already has a price. Where does that price come from? Replication.</a:t>
             </a:r>
             <a:endParaRPr lang="en-US" dirty="0"/>
           </a:p>
@@ -3785,7 +3970,14 @@
           <a:p>
             <a:r>
               <a:rPr lang="en-US" dirty="0"/>
-              <a:t/>
+              <a:t>ANGLE — Half the LM 8 learning outcome is replication, and it is the half everyone skips. It is also the bridge to §4.
+•  Call replication = borrow + buy. Put replication = short + lend. Mirror images.
+•  Selling a call replicates as short the underlying + lend — LM 8 practice problem 6 tests exactly that.
+•  The word to repeat is "fraction". A forward needs 1.0 unit; an option needs h &lt; 1.
+•  Symmetric payoff ⇒ static hedge. Asymmetric payoff ⇒ dynamic hedge. That is the whole contrast.
+•  Plant the flag: h reappears on slide 25 as (c_u − c_d)/(S_u − S_d).
+FROM THE DESK — Delta hedging is a promise that you can trade continuously at the quoted price. In a gap — a profit warning, a currency peg breaking — you cannot, and the hedge fails precisely when it is needed. Every option book carries that residual, and it is priced nowhere in the model.
+NEXT — Replication tells us how to build an option. Next: what its price is made of.</a:t>
             </a:r>
             <a:endParaRPr lang="en-US" dirty="0"/>
           </a:p>
@@ -4328,7 +4520,7 @@
                 <a:ea typeface="Trebuchet MS" pitchFamily="34" charset="-122"/>
                 <a:cs typeface="Trebuchet MS" pitchFamily="34" charset="-120"/>
               </a:rPr>
-              <a:t>From one-line payoffs to a discretized Black-Scholes</a:t>
+              <a:t>From a one-line payoff to the one-period binomial model</a:t>
             </a:r>
             <a:endParaRPr lang="en-US" sz="1500" dirty="0"/>
           </a:p>
@@ -4747,7 +4939,7 @@
                 <a:ea typeface="Trebuchet MS" pitchFamily="34" charset="-122"/>
                 <a:cs typeface="Trebuchet MS" pitchFamily="34" charset="-120"/>
               </a:rPr>
-              <a:t>An option's price decomposes exactly into exercise value plus time value — the sum must equal the traded premium</a:t>
+              <a:t>An option price splits exactly into exercise value plus time value — and exercise value discounts X, it does not use X</a:t>
             </a:r>
             <a:endParaRPr lang="en-US" sz="1700" dirty="0"/>
           </a:p>
@@ -4851,7 +5043,7 @@
                 <a:ea typeface="Calibri" pitchFamily="34" charset="-122"/>
                 <a:cs typeface="Calibri" pitchFamily="34" charset="-120"/>
               </a:rPr>
-              <a:t>Source: CFA Institute, Curriculum Vol 7, Learning Module 8, §3 &amp; §5 and Self-Assessment Q3, pp. 175–180.</a:t>
+              <a:t>Source: CFA Institute, Curriculum Vol 7, Learning Module 8, §3 "Option Exercise Value" and §5 "Option Time Value", Equations 1–4 and Exhibit 2, printed pp. 175–179; Self-Assessment Q3, printed p. 173.</a:t>
             </a:r>
             <a:endParaRPr lang="en-US" sz="750" dirty="0"/>
           </a:p>
@@ -4893,7 +5085,7 @@
                 <a:ea typeface="Calibri" pitchFamily="34" charset="-122"/>
                 <a:cs typeface="Calibri" pitchFamily="34" charset="-120"/>
               </a:rPr>
-              <a:t>Exercise value uses the PV of X (not X itself) — this difference is the first and most common mark-to-market error in practice.</a:t>
+              <a:t>Discounting X rather than using X is the single most common mark-to-market slip in practice — and the standard exam distractor.</a:t>
             </a:r>
             <a:endParaRPr lang="en-US" sz="1300" dirty="0"/>
           </a:p>
@@ -4955,7 +5147,24 @@
                 <a:ea typeface="Consolas" pitchFamily="34" charset="-122"/>
                 <a:cs typeface="Consolas" pitchFamily="34" charset="-120"/>
               </a:rPr>
-              <a:t>ct  =  Max(0, St − X(1+r)^(−(T−t)))  +  Time Valuet       (analogue for puts with X and St swapped)</a:t>
+              <a:t>ct = Max(0, St − PV(X)) + Time Value</a:t>
+            </a:r>
+            <a:endParaRPr lang="en-US" sz="1800" dirty="0"/>
+          </a:p>
+          <a:p>
+            <a:pPr algn="ctr" indent="0" marL="0">
+              <a:buNone/>
+            </a:pPr>
+            <a:r>
+              <a:rPr lang="en-US" sz="1800" b="1" dirty="0">
+                <a:solidFill>
+                  <a:srgbClr val="FFFFFF"/>
+                </a:solidFill>
+                <a:latin typeface="Consolas" pitchFamily="34" charset="0"/>
+                <a:ea typeface="Consolas" pitchFamily="34" charset="-122"/>
+                <a:cs typeface="Consolas" pitchFamily="34" charset="-120"/>
+              </a:rPr>
+              <a:t>pt = Max(0, PV(X) − St) + Time Value</a:t>
             </a:r>
             <a:endParaRPr lang="en-US" sz="1800" dirty="0"/>
           </a:p>
@@ -4997,7 +5206,7 @@
                 <a:ea typeface="Calibri" pitchFamily="34" charset="-122"/>
                 <a:cs typeface="Calibri" pitchFamily="34" charset="-120"/>
               </a:rPr>
-              <a:t>where: Time value ≥ 0 always, decays to zero at t = T. A deep-OTM option has price ≈ time value only.</a:t>
+              <a:t>where: PV(X) = X(1 + r)^−(T−t). Time value is always positive and decays to zero at t = T. An out-of-the-money option has zero exercise value, so its price is time value in full.</a:t>
             </a:r>
             <a:endParaRPr lang="en-US" sz="1100" dirty="0"/>
           </a:p>
@@ -5011,8 +5220,8 @@
         </p:nvSpPr>
         <p:spPr>
           <a:xfrm>
-            <a:off x="320040" y="2331720"/>
-            <a:ext cx="8503920" cy="1965960"/>
+            <a:off x="320040" y="2194560"/>
+            <a:ext cx="8503920" cy="2103120"/>
           </a:xfrm>
           <a:prstGeom prst="rect">
             <a:avLst/>
@@ -5036,7 +5245,7 @@
         </p:nvSpPr>
         <p:spPr>
           <a:xfrm>
-            <a:off x="457200" y="2377440"/>
+            <a:off x="457200" y="2240280"/>
             <a:ext cx="8229600" cy="256032"/>
           </a:xfrm>
           <a:prstGeom prst="rect">
@@ -5078,7 +5287,7 @@
         </p:nvSpPr>
         <p:spPr>
           <a:xfrm>
-            <a:off x="457200" y="2670048"/>
+            <a:off x="457200" y="2532888"/>
             <a:ext cx="8229600" cy="457200"/>
           </a:xfrm>
           <a:prstGeom prst="rect">
@@ -5106,7 +5315,7 @@
                 <a:ea typeface="Calibri" pitchFamily="34" charset="-122"/>
                 <a:cs typeface="Calibri" pitchFamily="34" charset="-120"/>
               </a:rPr>
-              <a:t>3-month European call on a no-dividend stock. X = GBP 50, r = 2%, St = GBP 57.50. Observed call premium ct = GBP 10.</a:t>
+              <a:t>A three-month European call on a no-dividend stock. X = GBP 50, r = 2%, St = GBP 57.50. The call is quoted at ct = GBP 10.</a:t>
             </a:r>
             <a:endParaRPr lang="en-US" sz="1200" dirty="0"/>
           </a:p>
@@ -5120,8 +5329,8 @@
         </p:nvSpPr>
         <p:spPr>
           <a:xfrm>
-            <a:off x="457200" y="3182112"/>
-            <a:ext cx="8229600" cy="603504"/>
+            <a:off x="457200" y="3044952"/>
+            <a:ext cx="8229600" cy="740664"/>
           </a:xfrm>
           <a:prstGeom prst="rect">
             <a:avLst/>
@@ -5143,7 +5352,7 @@
               <a:buNone/>
             </a:pPr>
             <a:r>
-              <a:rPr lang="en-US" sz="1050" b="1" dirty="0">
+              <a:rPr lang="en-US" sz="1150" b="1" dirty="0">
                 <a:solidFill>
                   <a:srgbClr val="1B2A4A"/>
                 </a:solidFill>
@@ -5160,7 +5369,7 @@
               <a:buNone/>
             </a:pPr>
             <a:r>
-              <a:rPr lang="en-US" sz="1050" dirty="0">
+              <a:rPr lang="en-US" sz="1150" dirty="0">
                 <a:solidFill>
                   <a:srgbClr val="334155"/>
                 </a:solidFill>
@@ -5168,7 +5377,7 @@
                 <a:ea typeface="Calibri" pitchFamily="34" charset="-122"/>
                 <a:cs typeface="Calibri" pitchFamily="34" charset="-120"/>
               </a:rPr>
-              <a:t>PV of exercise price: X(1 + r)⁻⁰·²⁵ = 50 × 1.02⁻⁰·²⁵ = GBP 49.75
+              <a:t>PV of the strike: X(1 + r)⁻⁰·²⁵ = 50 × 1.02⁻⁰·²⁵ = GBP 49.75
 </a:t>
             </a:r>
             <a:pPr indent="0" marL="0">
@@ -5178,7 +5387,7 @@
               <a:buNone/>
             </a:pPr>
             <a:r>
-              <a:rPr lang="en-US" sz="1050" b="1" dirty="0">
+              <a:rPr lang="en-US" sz="1150" b="1" dirty="0">
                 <a:solidFill>
                   <a:srgbClr val="1B2A4A"/>
                 </a:solidFill>
@@ -5195,7 +5404,7 @@
               <a:buNone/>
             </a:pPr>
             <a:r>
-              <a:rPr lang="en-US" sz="1050" dirty="0">
+              <a:rPr lang="en-US" sz="1150" dirty="0">
                 <a:solidFill>
                   <a:srgbClr val="334155"/>
                 </a:solidFill>
@@ -5213,7 +5422,7 @@
               <a:buNone/>
             </a:pPr>
             <a:r>
-              <a:rPr lang="en-US" sz="1050" b="1" dirty="0">
+              <a:rPr lang="en-US" sz="1150" b="1" dirty="0">
                 <a:solidFill>
                   <a:srgbClr val="1B2A4A"/>
                 </a:solidFill>
@@ -5230,7 +5439,7 @@
               <a:buNone/>
             </a:pPr>
             <a:r>
-              <a:rPr lang="en-US" sz="1050" dirty="0">
+              <a:rPr lang="en-US" sz="1150" dirty="0">
                 <a:solidFill>
                   <a:srgbClr val="334155"/>
                 </a:solidFill>
@@ -5238,44 +5447,9 @@
                 <a:ea typeface="Calibri" pitchFamily="34" charset="-122"/>
                 <a:cs typeface="Calibri" pitchFamily="34" charset="-120"/>
               </a:rPr>
-              <a:t>Time value = ct − exercise value = 10.00 − 7.75 = GBP 2.25
-</a:t>
-            </a:r>
-            <a:pPr indent="0" marL="0">
-              <a:spcAft>
-                <a:spcPts val="200"/>
-              </a:spcAft>
-              <a:buNone/>
-            </a:pPr>
-            <a:r>
-              <a:rPr lang="en-US" sz="1050" b="1" dirty="0">
-                <a:solidFill>
-                  <a:srgbClr val="1B2A4A"/>
-                </a:solidFill>
-                <a:latin typeface="Calibri" pitchFamily="34" charset="0"/>
-                <a:ea typeface="Calibri" pitchFamily="34" charset="-122"/>
-                <a:cs typeface="Calibri" pitchFamily="34" charset="-120"/>
-              </a:rPr>
-              <a:t>4. </a:t>
-            </a:r>
-            <a:pPr indent="0" marL="0">
-              <a:spcAft>
-                <a:spcPts val="200"/>
-              </a:spcAft>
-              <a:buNone/>
-            </a:pPr>
-            <a:r>
-              <a:rPr lang="en-US" sz="1050" dirty="0">
-                <a:solidFill>
-                  <a:srgbClr val="334155"/>
-                </a:solidFill>
-                <a:latin typeface="Calibri" pitchFamily="34" charset="0"/>
-                <a:ea typeface="Calibri" pitchFamily="34" charset="-122"/>
-                <a:cs typeface="Calibri" pitchFamily="34" charset="-120"/>
-              </a:rPr>
-              <a:t>Check: 7.75 + 2.25 = 10.00 ✓</a:t>
-            </a:r>
-            <a:endParaRPr lang="en-US" sz="1050" dirty="0"/>
+              <a:t>Time value = ct − exercise value = 10.00 − 7.75 = GBP 2.25</a:t>
+            </a:r>
+            <a:endParaRPr lang="en-US" sz="1150" dirty="0"/>
           </a:p>
         </p:txBody>
       </p:sp>
@@ -5335,7 +5509,7 @@
                 <a:ea typeface="Consolas" pitchFamily="34" charset="-122"/>
                 <a:cs typeface="Consolas" pitchFamily="34" charset="-120"/>
               </a:rPr>
-              <a:t>Exercise value GBP 7.75 + time value GBP 2.25 = traded premium GBP 10.</a:t>
+              <a:t>7.75 + 2.25 = the GBP 10 premium. Use X instead of PV(X) and you get 7.50 — the trap answer.</a:t>
             </a:r>
             <a:endParaRPr lang="en-US" sz="1150" dirty="0"/>
           </a:p>
@@ -5434,7 +5608,7 @@
               <a:buNone/>
             </a:pPr>
             <a:r>
-              <a:rPr lang="en-US" sz="1700" b="1" dirty="0">
+              <a:rPr lang="en-US" sz="1800" b="1" dirty="0">
                 <a:solidFill>
                   <a:srgbClr val="FFFFFF"/>
                 </a:solidFill>
@@ -5442,9 +5616,9 @@
                 <a:ea typeface="Trebuchet MS" pitchFamily="34" charset="-122"/>
                 <a:cs typeface="Trebuchet MS" pitchFamily="34" charset="-120"/>
               </a:rPr>
-              <a:t>Moneyness classifies options as ITM, ATM, or OTM — and drives how sensitive the option is to the underlying</a:t>
-            </a:r>
-            <a:endParaRPr lang="en-US" sz="1700" dirty="0"/>
+              <a:t>Moneyness is read from the holder’s side: a call is in the money when S &gt; X, a put when S &lt; X</a:t>
+            </a:r>
+            <a:endParaRPr lang="en-US" sz="1800" dirty="0"/>
           </a:p>
         </p:txBody>
       </p:sp>
@@ -5546,7 +5720,7 @@
                 <a:ea typeface="Calibri" pitchFamily="34" charset="-122"/>
                 <a:cs typeface="Calibri" pitchFamily="34" charset="-120"/>
               </a:rPr>
-              <a:t>Source: CFA Institute, Curriculum Vol 7, Learning Module 8, §4 "Option Moneyness", pp. 176–178.</a:t>
+              <a:t>Source: CFA Institute, Curriculum Vol 7, Learning Module 8, §4 "Option Moneyness", Exhibit 1 and Example 2, printed pp. 176–177.</a:t>
             </a:r>
             <a:endParaRPr lang="en-US" sz="750" dirty="0"/>
           </a:p>
@@ -5588,7 +5762,7 @@
                 <a:ea typeface="Calibri" pitchFamily="34" charset="-122"/>
                 <a:cs typeface="Calibri" pitchFamily="34" charset="-120"/>
               </a:rPr>
-              <a:t>Delta (∂c/∂S or ∂p/∂S) ≈ likelihood of ending in the money. Deep-ITM calls track the stock one-for-one; deep-OTM options barely move.</a:t>
+              <a:t>Always the buyer’s perspective. A short call is never "in the money" — its counterparty’s call is, and that is what the term describes.</a:t>
             </a:r>
             <a:endParaRPr lang="en-US" sz="1300" dirty="0"/>
           </a:p>
@@ -5617,11 +5791,11 @@
             <a:tbl>
               <a:tblPr/>
               <a:tblGrid>
-                <a:gridCol w="1737360"/>
-                <a:gridCol w="1554480"/>
-                <a:gridCol w="1554480"/>
-                <a:gridCol w="1920240"/>
-                <a:gridCol w="1737360"/>
+                <a:gridCol w="1828800"/>
+                <a:gridCol w="1417320"/>
+                <a:gridCol w="1417320"/>
+                <a:gridCol w="1828800"/>
+                <a:gridCol w="2011680"/>
               </a:tblGrid>
               <a:tr h="274320">
                 <a:tc>
@@ -5691,7 +5865,7 @@
                           <a:ea typeface="Trebuchet MS" pitchFamily="34" charset="-122"/>
                           <a:cs typeface="Trebuchet MS" pitchFamily="34" charset="-120"/>
                         </a:rPr>
-                        <a:t>Call condition</a:t>
+                        <a:t>Call</a:t>
                       </a:r>
                       <a:endParaRPr lang="en-US" sz="1100" dirty="0">
                         <a:latin typeface="Trebuchet MS" charset="0"/>
@@ -5741,7 +5915,7 @@
                           <a:ea typeface="Trebuchet MS" pitchFamily="34" charset="-122"/>
                           <a:cs typeface="Trebuchet MS" pitchFamily="34" charset="-120"/>
                         </a:rPr>
-                        <a:t>Put condition</a:t>
+                        <a:t>Put</a:t>
                       </a:r>
                       <a:endParaRPr lang="en-US" sz="1100" dirty="0">
                         <a:latin typeface="Trebuchet MS" charset="0"/>
@@ -5791,7 +5965,7 @@
                           <a:ea typeface="Trebuchet MS" pitchFamily="34" charset="-122"/>
                           <a:cs typeface="Trebuchet MS" pitchFamily="34" charset="-120"/>
                         </a:rPr>
-                        <a:t>Delta intuition</a:t>
+                        <a:t>Sensitivity to S</a:t>
                       </a:r>
                       <a:endParaRPr lang="en-US" sz="1100" dirty="0">
                         <a:latin typeface="Trebuchet MS" charset="0"/>
@@ -5893,7 +6067,7 @@
                           <a:ea typeface="Calibri" pitchFamily="34" charset="-122"/>
                           <a:cs typeface="Calibri" pitchFamily="34" charset="-120"/>
                         </a:rPr>
-                        <a:t>In-the-money (ITM)</a:t>
+                        <a:t>In the money (ITM)</a:t>
                       </a:r>
                       <a:endParaRPr lang="en-US" sz="1100" dirty="0">
                         <a:latin typeface="Calibri" charset="0"/>
@@ -6043,7 +6217,7 @@
                           <a:ea typeface="Consolas" pitchFamily="34" charset="-122"/>
                           <a:cs typeface="Consolas" pitchFamily="34" charset="-120"/>
                         </a:rPr>
-                        <a:t>Approaches ±1 when deep</a:t>
+                        <a:t>Near one-for-one</a:t>
                       </a:r>
                       <a:endParaRPr lang="en-US" sz="1100" dirty="0">
                         <a:latin typeface="Consolas" charset="0"/>
@@ -6093,7 +6267,7 @@
                           <a:ea typeface="Consolas" pitchFamily="34" charset="-122"/>
                           <a:cs typeface="Consolas" pitchFamily="34" charset="-120"/>
                         </a:rPr>
-                        <a:t>Substitute for the underlying</a:t>
+                        <a:t>Stock substitute</a:t>
                       </a:r>
                       <a:endParaRPr lang="en-US" sz="1100" dirty="0">
                         <a:latin typeface="Consolas" charset="0"/>
@@ -6145,7 +6319,7 @@
                           <a:ea typeface="Calibri" pitchFamily="34" charset="-122"/>
                           <a:cs typeface="Calibri" pitchFamily="34" charset="-120"/>
                         </a:rPr>
-                        <a:t>At-the-money (ATM)</a:t>
+                        <a:t>At the money (ATM)</a:t>
                       </a:r>
                       <a:endParaRPr lang="en-US" sz="1100" dirty="0">
                         <a:latin typeface="Calibri" charset="0"/>
@@ -6295,7 +6469,7 @@
                           <a:ea typeface="Consolas" pitchFamily="34" charset="-122"/>
                           <a:cs typeface="Consolas" pitchFamily="34" charset="-120"/>
                         </a:rPr>
-                        <a:t>≈ ±0.5</a:t>
+                        <a:t>Moderate</a:t>
                       </a:r>
                       <a:endParaRPr lang="en-US" sz="1100" dirty="0">
                         <a:latin typeface="Consolas" charset="0"/>
@@ -6345,7 +6519,7 @@
                           <a:ea typeface="Consolas" pitchFamily="34" charset="-122"/>
                           <a:cs typeface="Consolas" pitchFamily="34" charset="-120"/>
                         </a:rPr>
-                        <a:t>Most sensitive to volatility</a:t>
+                        <a:t>Peak time value</a:t>
                       </a:r>
                       <a:endParaRPr lang="en-US" sz="1100" dirty="0">
                         <a:latin typeface="Consolas" charset="0"/>
@@ -6397,7 +6571,7 @@
                           <a:ea typeface="Calibri" pitchFamily="34" charset="-122"/>
                           <a:cs typeface="Calibri" pitchFamily="34" charset="-120"/>
                         </a:rPr>
-                        <a:t>Out-of-the-money (OTM)</a:t>
+                        <a:t>Out of the money (OTM)</a:t>
                       </a:r>
                       <a:endParaRPr lang="en-US" sz="1100" dirty="0">
                         <a:latin typeface="Calibri" charset="0"/>
@@ -6547,7 +6721,7 @@
                           <a:ea typeface="Consolas" pitchFamily="34" charset="-122"/>
                           <a:cs typeface="Consolas" pitchFamily="34" charset="-120"/>
                         </a:rPr>
-                        <a:t>Approaches 0 when deep</a:t>
+                        <a:t>Very small</a:t>
                       </a:r>
                       <a:endParaRPr lang="en-US" sz="1100" dirty="0">
                         <a:latin typeface="Consolas" charset="0"/>
@@ -6597,7 +6771,7 @@
                           <a:ea typeface="Consolas" pitchFamily="34" charset="-122"/>
                           <a:cs typeface="Consolas" pitchFamily="34" charset="-120"/>
                         </a:rPr>
-                        <a:t>Cheap tail-risk insurance</a:t>
+                        <a:t>Cheap tail hedge</a:t>
                       </a:r>
                       <a:endParaRPr lang="en-US" sz="1100" dirty="0">
                         <a:latin typeface="Consolas" charset="0"/>
@@ -6643,8 +6817,8 @@
         </p:nvSpPr>
         <p:spPr>
           <a:xfrm>
-            <a:off x="320040" y="2560320"/>
-            <a:ext cx="4160520" cy="1691640"/>
+            <a:off x="320040" y="2514600"/>
+            <a:ext cx="4160520" cy="1783080"/>
           </a:xfrm>
           <a:prstGeom prst="rect">
             <a:avLst/>
@@ -6663,8 +6837,8 @@
         </p:nvSpPr>
         <p:spPr>
           <a:xfrm>
-            <a:off x="320040" y="2560320"/>
-            <a:ext cx="73152" cy="1691640"/>
+            <a:off x="320040" y="2514600"/>
+            <a:ext cx="73152" cy="1783080"/>
           </a:xfrm>
           <a:prstGeom prst="rect">
             <a:avLst/>
@@ -6683,7 +6857,7 @@
         </p:nvSpPr>
         <p:spPr>
           <a:xfrm>
-            <a:off x="457200" y="2606040"/>
+            <a:off x="457200" y="2560320"/>
             <a:ext cx="3931920" cy="256032"/>
           </a:xfrm>
           <a:prstGeom prst="rect">
@@ -6711,7 +6885,7 @@
                 <a:ea typeface="Trebuchet MS" pitchFamily="34" charset="-122"/>
                 <a:cs typeface="Trebuchet MS" pitchFamily="34" charset="-120"/>
               </a:rPr>
-              <a:t>ITM CALLS BEHAVE LIKE STOCK</a:t>
+              <a:t>DEEP ITM BEHAVES LIKE THE STOCK</a:t>
             </a:r>
             <a:endParaRPr lang="en-US" sz="1100" dirty="0"/>
           </a:p>
@@ -6725,8 +6899,8 @@
         </p:nvSpPr>
         <p:spPr>
           <a:xfrm>
-            <a:off x="457200" y="2880360"/>
-            <a:ext cx="3931920" cy="1325880"/>
+            <a:off x="457200" y="2834640"/>
+            <a:ext cx="3931920" cy="1417320"/>
           </a:xfrm>
           <a:prstGeom prst="rect">
             <a:avLst/>
@@ -6753,7 +6927,30 @@
                 <a:ea typeface="Calibri" pitchFamily="34" charset="-122"/>
                 <a:cs typeface="Calibri" pitchFamily="34" charset="-120"/>
               </a:rPr>
-              <a:t>A call 30% in-the-money with a week to expiry has delta near 1. A 10c move in the stock ⇒ ~10c move in the call. Useful for leveraged long exposure at controlled cost.</a:t>
+              <a:t>A deep-in-the-money option is highly likely to be exercised, so the curriculum describes "a nearly one-to-one correspondence between option price and underlying price changes".</a:t>
+            </a:r>
+            <a:endParaRPr lang="en-US" sz="1200" dirty="0"/>
+          </a:p>
+          <a:p>
+            <a:pPr algn="l" indent="0" marL="0">
+              <a:buNone/>
+            </a:pPr>
+            <a:endParaRPr lang="en-US" sz="1200" dirty="0"/>
+          </a:p>
+          <a:p>
+            <a:pPr algn="l" indent="0" marL="0">
+              <a:buNone/>
+            </a:pPr>
+            <a:r>
+              <a:rPr lang="en-US" sz="1200" dirty="0">
+                <a:solidFill>
+                  <a:srgbClr val="334155"/>
+                </a:solidFill>
+                <a:latin typeface="Calibri" pitchFamily="34" charset="0"/>
+                <a:ea typeface="Calibri" pitchFamily="34" charset="-122"/>
+                <a:cs typeface="Calibri" pitchFamily="34" charset="-120"/>
+              </a:rPr>
+              <a:t>That is why an ITM call is a financing-efficient way to hold equity exposure: near-identical participation, a fraction of the cash outlay.</a:t>
             </a:r>
             <a:endParaRPr lang="en-US" sz="1200" dirty="0"/>
           </a:p>
@@ -6767,8 +6964,8 @@
         </p:nvSpPr>
         <p:spPr>
           <a:xfrm>
-            <a:off x="4663440" y="2560320"/>
-            <a:ext cx="4160520" cy="1691640"/>
+            <a:off x="4663440" y="2514600"/>
+            <a:ext cx="4160520" cy="1783080"/>
           </a:xfrm>
           <a:prstGeom prst="rect">
             <a:avLst/>
@@ -6787,8 +6984,8 @@
         </p:nvSpPr>
         <p:spPr>
           <a:xfrm>
-            <a:off x="4663440" y="2560320"/>
-            <a:ext cx="73152" cy="1691640"/>
+            <a:off x="4663440" y="2514600"/>
+            <a:ext cx="73152" cy="1783080"/>
           </a:xfrm>
           <a:prstGeom prst="rect">
             <a:avLst/>
@@ -6807,7 +7004,7 @@
         </p:nvSpPr>
         <p:spPr>
           <a:xfrm>
-            <a:off x="4800600" y="2606040"/>
+            <a:off x="4800600" y="2560320"/>
             <a:ext cx="3931920" cy="256032"/>
           </a:xfrm>
           <a:prstGeom prst="rect">
@@ -6835,7 +7032,7 @@
                 <a:ea typeface="Trebuchet MS" pitchFamily="34" charset="-122"/>
                 <a:cs typeface="Trebuchet MS" pitchFamily="34" charset="-120"/>
               </a:rPr>
-              <a:t>OTM OPTIONS ARE ALL TIME VALUE</a:t>
+              <a:t>DEEP OTM IS ALL TIME VALUE</a:t>
             </a:r>
             <a:endParaRPr lang="en-US" sz="1100" dirty="0"/>
           </a:p>
@@ -6849,8 +7046,8 @@
         </p:nvSpPr>
         <p:spPr>
           <a:xfrm>
-            <a:off x="4800600" y="2880360"/>
-            <a:ext cx="3931920" cy="1325880"/>
+            <a:off x="4800600" y="2834640"/>
+            <a:ext cx="3931920" cy="1417320"/>
           </a:xfrm>
           <a:prstGeom prst="rect">
             <a:avLst/>
@@ -6877,7 +7074,30 @@
                 <a:ea typeface="Calibri" pitchFamily="34" charset="-122"/>
                 <a:cs typeface="Calibri" pitchFamily="34" charset="-120"/>
               </a:rPr>
-              <a:t>A call 30% out-of-the-money with a week to expiry has delta ≈ 0.02. It's a lottery ticket — cheap per share, but the expected payoff is tiny. Most OTM options expire worthless.</a:t>
+              <a:t>A deep-out-of-the-money option is very unlikely to be exercised and shows far less price sensitivity for the same move in the underlying. Its exercise value is zero, so what you are buying is entirely time value.</a:t>
+            </a:r>
+            <a:endParaRPr lang="en-US" sz="1200" dirty="0"/>
+          </a:p>
+          <a:p>
+            <a:pPr algn="l" indent="0" marL="0">
+              <a:buNone/>
+            </a:pPr>
+            <a:endParaRPr lang="en-US" sz="1200" dirty="0"/>
+          </a:p>
+          <a:p>
+            <a:pPr algn="l" indent="0" marL="0">
+              <a:buNone/>
+            </a:pPr>
+            <a:r>
+              <a:rPr lang="en-US" sz="1200" dirty="0">
+                <a:solidFill>
+                  <a:srgbClr val="334155"/>
+                </a:solidFill>
+                <a:latin typeface="Calibri" pitchFamily="34" charset="0"/>
+                <a:ea typeface="Calibri" pitchFamily="34" charset="-122"/>
+                <a:cs typeface="Calibri" pitchFamily="34" charset="-120"/>
+              </a:rPr>
+              <a:t>Cheap per contract, and most of it expires worthless. That is not a flaw — it is the price of a tail hedge.</a:t>
             </a:r>
             <a:endParaRPr lang="en-US" sz="1200" dirty="0"/>
           </a:p>
@@ -6976,7 +7196,7 @@
               <a:buNone/>
             </a:pPr>
             <a:r>
-              <a:rPr lang="en-US" sz="1700" b="1" dirty="0">
+              <a:rPr lang="en-US" sz="1800" b="1" dirty="0">
                 <a:solidFill>
                   <a:srgbClr val="FFFFFF"/>
                 </a:solidFill>
@@ -6984,9 +7204,9 @@
                 <a:ea typeface="Trebuchet MS" pitchFamily="34" charset="-122"/>
                 <a:cs typeface="Trebuchet MS" pitchFamily="34" charset="-120"/>
               </a:rPr>
-              <a:t>No-arbitrage bounds pin option prices: between Max(0, S − PV(X)) and S for a call, between Max(0, PV(X) − S) and X for a put</a:t>
-            </a:r>
-            <a:endParaRPr lang="en-US" sz="1700" dirty="0"/>
+              <a:t>No-arbitrage bounds pin every option: Max(0, S − PV(X)) &lt; c ≤ S, and Max(0, PV(X) − S) &lt; p ≤ X</a:t>
+            </a:r>
+            <a:endParaRPr lang="en-US" sz="1800" dirty="0"/>
           </a:p>
         </p:txBody>
       </p:sp>
@@ -7088,7 +7308,7 @@
                 <a:ea typeface="Calibri" pitchFamily="34" charset="-122"/>
                 <a:cs typeface="Calibri" pitchFamily="34" charset="-120"/>
               </a:rPr>
-              <a:t>Source: CFA Institute, Curriculum Vol 7, Learning Module 8, §6 "Arbitrage", Example 4, pp. 180–184.</a:t>
+              <a:t>Source: CFA Institute, Curriculum Vol 7, Learning Module 8, §6 "Arbitrage", Equations 9–14 and Example 4, printed pp. 181–182.</a:t>
             </a:r>
             <a:endParaRPr lang="en-US" sz="750" dirty="0"/>
           </a:p>
@@ -7130,7 +7350,7 @@
                 <a:ea typeface="Calibri" pitchFamily="34" charset="-122"/>
                 <a:cs typeface="Calibri" pitchFamily="34" charset="-120"/>
               </a:rPr>
-              <a:t>Price a call above S and I buy the stock / sell the call for free money. Price a call below S − PV(X) and I buy the call / short-synthetic-the-stock for free money.</a:t>
+              <a:t>Price a call above S and I buy the stock and sell the call for free money. Price it below its exercise value and I do the reverse.</a:t>
             </a:r>
             <a:endParaRPr lang="en-US" sz="1300" dirty="0"/>
           </a:p>
@@ -7192,22 +7412,81 @@
                 <a:ea typeface="Consolas" pitchFamily="34" charset="-122"/>
                 <a:cs typeface="Consolas" pitchFamily="34" charset="-120"/>
               </a:rPr>
-              <a:t>Max(0, St − PV(X))  ≤  ct  ≤  St             Max(0, PV(X) − St)  ≤  pt  ≤  X</a:t>
+              <a:t>Max(0, St − PV(X))  &lt;  ct  ≤  St</a:t>
             </a:r>
             <a:endParaRPr lang="en-US" sz="1800" dirty="0"/>
           </a:p>
+          <a:p>
+            <a:pPr algn="ctr" indent="0" marL="0">
+              <a:buNone/>
+            </a:pPr>
+            <a:r>
+              <a:rPr lang="en-US" sz="1800" b="1" dirty="0">
+                <a:solidFill>
+                  <a:srgbClr val="FFFFFF"/>
+                </a:solidFill>
+                <a:latin typeface="Consolas" pitchFamily="34" charset="0"/>
+                <a:ea typeface="Consolas" pitchFamily="34" charset="-122"/>
+                <a:cs typeface="Consolas" pitchFamily="34" charset="-120"/>
+              </a:rPr>
+              <a:t>Max(0, PV(X) − St)  &lt;  pt  ≤  X</a:t>
+            </a:r>
+            <a:endParaRPr lang="en-US" sz="1800" dirty="0"/>
+          </a:p>
         </p:txBody>
       </p:sp>
       <p:sp>
         <p:nvSpPr>
-          <p:cNvPr id="11" name="Shape 9"/>
+          <p:cNvPr id="11" name="Text 9"/>
+          <p:cNvSpPr txBox="1"/>
+          <p:nvPr/>
+        </p:nvSpPr>
+        <p:spPr>
+          <a:xfrm>
+            <a:off x="320040" y="1874520"/>
+            <a:ext cx="8503920" cy="256032"/>
+          </a:xfrm>
+          <a:prstGeom prst="rect">
+            <a:avLst/>
+          </a:prstGeom>
+          <a:noFill/>
+          <a:ln/>
+        </p:spPr>
+        <p:txBody>
+          <a:bodyPr wrap="square" lIns="508" tIns="508" rIns="508" bIns="508" rtlCol="0" anchor="ctr">
+            <a:normAutofit/>
+            <a:spAutoFit/>
+          </a:bodyPr>
+          <a:lstStyle/>
+          <a:p>
+            <a:pPr algn="l" indent="0" marL="0">
+              <a:buNone/>
+            </a:pPr>
+            <a:r>
+              <a:rPr lang="en-US" sz="1100" i="1" dirty="0">
+                <a:solidFill>
+                  <a:srgbClr val="334155"/>
+                </a:solidFill>
+                <a:latin typeface="Calibri" pitchFamily="34" charset="0"/>
+                <a:ea typeface="Calibri" pitchFamily="34" charset="-122"/>
+                <a:cs typeface="Calibri" pitchFamily="34" charset="-120"/>
+              </a:rPr>
+              <a:t>where: Upper bound: a call buyer will not pay more for the right to buy than the asset itself; a put can never be worth more than the strike it delivers.</a:t>
+            </a:r>
+            <a:endParaRPr lang="en-US" sz="1100" dirty="0"/>
+          </a:p>
+        </p:txBody>
+      </p:sp>
+      <p:sp>
+        <p:nvSpPr>
+          <p:cNvPr id="12" name="Shape 10"/>
           <p:cNvSpPr/>
           <p:nvPr/>
         </p:nvSpPr>
         <p:spPr>
           <a:xfrm>
-            <a:off x="320040" y="2331720"/>
-            <a:ext cx="8503920" cy="1965960"/>
+            <a:off x="320040" y="2194560"/>
+            <a:ext cx="8503920" cy="2103120"/>
           </a:xfrm>
           <a:prstGeom prst="rect">
             <a:avLst/>
@@ -7225,13 +7504,13 @@
       </p:sp>
       <p:sp>
         <p:nvSpPr>
-          <p:cNvPr id="12" name="Text 10"/>
+          <p:cNvPr id="13" name="Text 11"/>
           <p:cNvSpPr txBox="1"/>
           <p:nvPr/>
         </p:nvSpPr>
         <p:spPr>
           <a:xfrm>
-            <a:off x="457200" y="2377440"/>
+            <a:off x="457200" y="2240280"/>
             <a:ext cx="8229600" cy="256032"/>
           </a:xfrm>
           <a:prstGeom prst="rect">
@@ -7259,7 +7538,7 @@
                 <a:ea typeface="Trebuchet MS" pitchFamily="34" charset="-122"/>
                 <a:cs typeface="Trebuchet MS" pitchFamily="34" charset="-120"/>
               </a:rPr>
-              <a:t>CFA LM 8 EXAMPLE 4 — ONE-YEAR EUR CALL BOUNDS AT T − t = 0.5</a:t>
+              <a:t>CFA LM 8 EXAMPLE 4 — CALL BOUNDS SIX MONTHS INTO A ONE-YEAR CONTRACT</a:t>
             </a:r>
             <a:endParaRPr lang="en-US" sz="1100" dirty="0"/>
           </a:p>
@@ -7267,13 +7546,13 @@
       </p:sp>
       <p:sp>
         <p:nvSpPr>
-          <p:cNvPr id="13" name="Text 11"/>
+          <p:cNvPr id="14" name="Text 12"/>
           <p:cNvSpPr txBox="1"/>
           <p:nvPr/>
         </p:nvSpPr>
         <p:spPr>
           <a:xfrm>
-            <a:off x="457200" y="2670048"/>
+            <a:off x="457200" y="2532888"/>
             <a:ext cx="8229600" cy="457200"/>
           </a:xfrm>
           <a:prstGeom prst="rect">
@@ -7301,7 +7580,7 @@
                 <a:ea typeface="Calibri" pitchFamily="34" charset="-122"/>
                 <a:cs typeface="Calibri" pitchFamily="34" charset="-120"/>
               </a:rPr>
-              <a:t>Exercise price X = EUR 1,000. Six-month forward spot St = EUR 1,050. Risk-free rate r = 1%.</a:t>
+              <a:t>A one-year European call, X = EUR 1,000. At t = 0 the asset trades at S₀ = EUR 990 and r = 1%. Six months later (T − t = 0.5) the spot has risen to St = EUR 1,050.</a:t>
             </a:r>
             <a:endParaRPr lang="en-US" sz="1200" dirty="0"/>
           </a:p>
@@ -7309,14 +7588,14 @@
       </p:sp>
       <p:sp>
         <p:nvSpPr>
-          <p:cNvPr id="14" name="Text 12"/>
+          <p:cNvPr id="15" name="Text 13"/>
           <p:cNvSpPr txBox="1"/>
           <p:nvPr/>
         </p:nvSpPr>
         <p:spPr>
           <a:xfrm>
-            <a:off x="457200" y="3182112"/>
-            <a:ext cx="8229600" cy="603504"/>
+            <a:off x="457200" y="3044952"/>
+            <a:ext cx="8229600" cy="740664"/>
           </a:xfrm>
           <a:prstGeom prst="rect">
             <a:avLst/>
@@ -7338,7 +7617,7 @@
               <a:buNone/>
             </a:pPr>
             <a:r>
-              <a:rPr lang="en-US" sz="1050" b="1" dirty="0">
+              <a:rPr lang="en-US" sz="1150" b="1" dirty="0">
                 <a:solidFill>
                   <a:srgbClr val="1B2A4A"/>
                 </a:solidFill>
@@ -7355,7 +7634,7 @@
               <a:buNone/>
             </a:pPr>
             <a:r>
-              <a:rPr lang="en-US" sz="1050" dirty="0">
+              <a:rPr lang="en-US" sz="1150" dirty="0">
                 <a:solidFill>
                   <a:srgbClr val="334155"/>
                 </a:solidFill>
@@ -7363,7 +7642,7 @@
                 <a:ea typeface="Calibri" pitchFamily="34" charset="-122"/>
                 <a:cs typeface="Calibri" pitchFamily="34" charset="-120"/>
               </a:rPr>
-              <a:t>PV(X) over remaining 0.5y: 1,000 × 1.01⁻⁰·⁵ = EUR 995.04
+              <a:t>PV(X) over the remaining half-year: 1,000 × 1.01⁻⁰·⁵ = EUR 995.04
 </a:t>
             </a:r>
             <a:pPr indent="0" marL="0">
@@ -7373,7 +7652,7 @@
               <a:buNone/>
             </a:pPr>
             <a:r>
-              <a:rPr lang="en-US" sz="1050" b="1" dirty="0">
+              <a:rPr lang="en-US" sz="1150" b="1" dirty="0">
                 <a:solidFill>
                   <a:srgbClr val="1B2A4A"/>
                 </a:solidFill>
@@ -7390,7 +7669,7 @@
               <a:buNone/>
             </a:pPr>
             <a:r>
-              <a:rPr lang="en-US" sz="1050" dirty="0">
+              <a:rPr lang="en-US" sz="1150" dirty="0">
                 <a:solidFill>
                   <a:srgbClr val="334155"/>
                 </a:solidFill>
@@ -7398,7 +7677,7 @@
                 <a:ea typeface="Calibri" pitchFamily="34" charset="-122"/>
                 <a:cs typeface="Calibri" pitchFamily="34" charset="-120"/>
               </a:rPr>
-              <a:t>Lower bound: Max(0, 1,050 − 995.04) = EUR 54.96
+              <a:t>Lower bound = Max(0, St − PV(X)) = Max(0, 1,050 − 995.04) = EUR 54.96
 </a:t>
             </a:r>
             <a:pPr indent="0" marL="0">
@@ -7408,7 +7687,7 @@
               <a:buNone/>
             </a:pPr>
             <a:r>
-              <a:rPr lang="en-US" sz="1050" b="1" dirty="0">
+              <a:rPr lang="en-US" sz="1150" b="1" dirty="0">
                 <a:solidFill>
                   <a:srgbClr val="1B2A4A"/>
                 </a:solidFill>
@@ -7425,7 +7704,7 @@
               <a:buNone/>
             </a:pPr>
             <a:r>
-              <a:rPr lang="en-US" sz="1050" dirty="0">
+              <a:rPr lang="en-US" sz="1150" dirty="0">
                 <a:solidFill>
                   <a:srgbClr val="334155"/>
                 </a:solidFill>
@@ -7433,50 +7712,15 @@
                 <a:ea typeface="Calibri" pitchFamily="34" charset="-122"/>
                 <a:cs typeface="Calibri" pitchFamily="34" charset="-120"/>
               </a:rPr>
-              <a:t>Upper bound: St = EUR 1,050
-</a:t>
-            </a:r>
-            <a:pPr indent="0" marL="0">
-              <a:spcAft>
-                <a:spcPts val="200"/>
-              </a:spcAft>
-              <a:buNone/>
-            </a:pPr>
-            <a:r>
-              <a:rPr lang="en-US" sz="1050" b="1" dirty="0">
-                <a:solidFill>
-                  <a:srgbClr val="1B2A4A"/>
-                </a:solidFill>
-                <a:latin typeface="Calibri" pitchFamily="34" charset="0"/>
-                <a:ea typeface="Calibri" pitchFamily="34" charset="-122"/>
-                <a:cs typeface="Calibri" pitchFamily="34" charset="-120"/>
-              </a:rPr>
-              <a:t>4. </a:t>
-            </a:r>
-            <a:pPr indent="0" marL="0">
-              <a:spcAft>
-                <a:spcPts val="200"/>
-              </a:spcAft>
-              <a:buNone/>
-            </a:pPr>
-            <a:r>
-              <a:rPr lang="en-US" sz="1050" dirty="0">
-                <a:solidFill>
-                  <a:srgbClr val="334155"/>
-                </a:solidFill>
-                <a:latin typeface="Calibri" pitchFamily="34" charset="0"/>
-                <a:ea typeface="Calibri" pitchFamily="34" charset="-122"/>
-                <a:cs typeface="Calibri" pitchFamily="34" charset="-120"/>
-              </a:rPr>
-              <a:t>Any traded call price outside [54.96, 1,050] offers a riskless arbitrage.</a:t>
-            </a:r>
-            <a:endParaRPr lang="en-US" sz="1050" dirty="0"/>
+              <a:t>Upper bound = St = EUR 1,050</a:t>
+            </a:r>
+            <a:endParaRPr lang="en-US" sz="1150" dirty="0"/>
           </a:p>
         </p:txBody>
       </p:sp>
       <p:sp>
         <p:nvSpPr>
-          <p:cNvPr id="15" name="Shape 13"/>
+          <p:cNvPr id="16" name="Shape 14"/>
           <p:cNvSpPr/>
           <p:nvPr/>
         </p:nvSpPr>
@@ -7496,7 +7740,7 @@
       </p:sp>
       <p:sp>
         <p:nvSpPr>
-          <p:cNvPr id="16" name="Text 14"/>
+          <p:cNvPr id="17" name="Text 15"/>
           <p:cNvSpPr txBox="1"/>
           <p:nvPr/>
         </p:nvSpPr>
@@ -7530,7 +7774,7 @@
                 <a:ea typeface="Consolas" pitchFamily="34" charset="-122"/>
                 <a:cs typeface="Consolas" pitchFamily="34" charset="-120"/>
               </a:rPr>
-              <a:t>54.96 ≤ ct ≤ 1,050. At-the-money → lower bound small; deep-ITM → lower bound dominates.</a:t>
+              <a:t>54.96 &lt; ct ≤ 1,050. Quote below 54.96 and the call trades under its own exercise value.</a:t>
             </a:r>
             <a:endParaRPr lang="en-US" sz="1150" dirty="0"/>
           </a:p>
@@ -7629,7 +7873,7 @@
               <a:buNone/>
             </a:pPr>
             <a:r>
-              <a:rPr lang="en-US" sz="1600" b="1" dirty="0">
+              <a:rPr lang="en-US" sz="1700" b="1" dirty="0">
                 <a:solidFill>
                   <a:srgbClr val="FFFFFF"/>
                 </a:solidFill>
@@ -7637,9 +7881,9 @@
                 <a:ea typeface="Trebuchet MS" pitchFamily="34" charset="-122"/>
                 <a:cs typeface="Trebuchet MS" pitchFamily="34" charset="-120"/>
               </a:rPr>
-              <a:t>Six factors drive option value; all six signs are known, and volatility is the only factor whose sign is identical for calls and puts</a:t>
-            </a:r>
-            <a:endParaRPr lang="en-US" sz="1600" dirty="0"/>
+              <a:t>Six factors move option value; volatility and time move calls and puts the same way, the other four move them apart</a:t>
+            </a:r>
+            <a:endParaRPr lang="en-US" sz="1700" dirty="0"/>
           </a:p>
         </p:txBody>
       </p:sp>
@@ -7738,7 +7982,7 @@
                 <a:ea typeface="Calibri" pitchFamily="34" charset="-122"/>
                 <a:cs typeface="Calibri" pitchFamily="34" charset="-120"/>
               </a:rPr>
-              <a:t>¹ Longer time to expiration usually increases put value, but can lower it for deep-ITM puts because the payoff X − ST is discounted.
+              <a:t>¹ Longer expiry can LOWER a deep-in-the-money put when the risk-free rate is high (LM 8, printed p. 188).
 </a:t>
             </a:r>
             <a:pPr indent="0" marL="0">
@@ -7753,7 +7997,7 @@
                 <a:ea typeface="Calibri" pitchFamily="34" charset="-122"/>
                 <a:cs typeface="Calibri" pitchFamily="34" charset="-120"/>
               </a:rPr>
-              <a:t>² Income (dividends, coupons, convenience yield) lowers call value because it accrues to the holder of the underlying, not the option.
+              <a:t>² Income lowers a call and raises a put; a carry cost such as storage or insurance does the reverse.
 </a:t>
             </a:r>
             <a:endParaRPr lang="en-US" sz="1000" dirty="0"/>
@@ -7796,7 +8040,7 @@
                 <a:ea typeface="Calibri" pitchFamily="34" charset="-122"/>
                 <a:cs typeface="Calibri" pitchFamily="34" charset="-120"/>
               </a:rPr>
-              <a:t>Source: CFA Institute, Curriculum Vol 7, Learning Module 8, §8 "Factors Affecting Option Value", Exhibit 9, pp. 186–190.</a:t>
+              <a:t>Source: CFA Institute, Curriculum Vol 7, Learning Module 8, §8 "Factors Affecting Option Value", Exhibits 6–9, printed pp. 186–189.</a:t>
             </a:r>
             <a:endParaRPr lang="en-US" sz="750" dirty="0"/>
           </a:p>
@@ -7838,7 +8082,7 @@
                 <a:ea typeface="Calibri" pitchFamily="34" charset="-122"/>
                 <a:cs typeface="Calibri" pitchFamily="34" charset="-120"/>
               </a:rPr>
-              <a:t>Memorize this table once. The CFA L1 exam tests a sign-flip from it every single sitting — typically risk-free rate or income on underlying.</a:t>
+              <a:t>Memorise this table once. Level I tests a sign-flip from it every sitting — usually the risk-free rate or the income row.</a:t>
             </a:r>
             <a:endParaRPr lang="en-US" sz="1300" dirty="0"/>
           </a:p>
@@ -7890,7 +8134,7 @@
                           <a:ea typeface="Trebuchet MS" pitchFamily="34" charset="-122"/>
                           <a:cs typeface="Trebuchet MS" pitchFamily="34" charset="-120"/>
                         </a:rPr>
-                        <a:t>Factor (increase in ...)</a:t>
+                        <a:t>Factor (an increase in ...)</a:t>
                       </a:r>
                       <a:endParaRPr lang="en-US" sz="1100" dirty="0">
                         <a:latin typeface="Trebuchet MS" charset="0"/>
@@ -7940,7 +8184,7 @@
                           <a:ea typeface="Trebuchet MS" pitchFamily="34" charset="-122"/>
                           <a:cs typeface="Trebuchet MS" pitchFamily="34" charset="-120"/>
                         </a:rPr>
-                        <a:t>Call value</a:t>
+                        <a:t>Call</a:t>
                       </a:r>
                       <a:endParaRPr lang="en-US" sz="1100" dirty="0">
                         <a:latin typeface="Trebuchet MS" charset="0"/>
@@ -7990,7 +8234,7 @@
                           <a:ea typeface="Trebuchet MS" pitchFamily="34" charset="-122"/>
                           <a:cs typeface="Trebuchet MS" pitchFamily="34" charset="-120"/>
                         </a:rPr>
-                        <a:t>Put value</a:t>
+                        <a:t>Put</a:t>
                       </a:r>
                       <a:endParaRPr lang="en-US" sz="1100" dirty="0">
                         <a:latin typeface="Trebuchet MS" charset="0"/>
@@ -8092,7 +8336,7 @@
                           <a:ea typeface="Calibri" pitchFamily="34" charset="-122"/>
                           <a:cs typeface="Calibri" pitchFamily="34" charset="-120"/>
                         </a:rPr>
-                        <a:t>Underlying price (S)</a:t>
+                        <a:t>Value of the underlying (S)</a:t>
                       </a:r>
                       <a:endParaRPr lang="en-US" sz="1100" dirty="0">
                         <a:latin typeface="Calibri" charset="0"/>
@@ -8444,7 +8688,7 @@
                           <a:ea typeface="Consolas" pitchFamily="34" charset="-122"/>
                           <a:cs typeface="Consolas" pitchFamily="34" charset="-120"/>
                         </a:rPr>
-                        <a:t>Calls are cheaper to exercise when X is low</a:t>
+                        <a:t>Low X is cheap to buy at</a:t>
                       </a:r>
                       <a:endParaRPr lang="en-US" sz="1100" dirty="0">
                         <a:latin typeface="Consolas" charset="0"/>
@@ -8646,7 +8890,7 @@
                           <a:ea typeface="Consolas" pitchFamily="34" charset="-122"/>
                           <a:cs typeface="Consolas" pitchFamily="34" charset="-120"/>
                         </a:rPr>
-                        <a:t>More time → wider distribution; put exception¹</a:t>
+                        <a:t>Wider outcome range; put caveat¹</a:t>
                       </a:r>
                       <a:endParaRPr lang="en-US" sz="1100" dirty="0">
                         <a:latin typeface="Consolas" charset="0"/>
@@ -8698,7 +8942,7 @@
                           <a:ea typeface="Calibri" pitchFamily="34" charset="-122"/>
                           <a:cs typeface="Calibri" pitchFamily="34" charset="-120"/>
                         </a:rPr>
-                        <a:t>Risk-free rate (r)</a:t>
+                        <a:t>Risk-free interest rate (r)</a:t>
                       </a:r>
                       <a:endParaRPr lang="en-US" sz="1100" dirty="0">
                         <a:latin typeface="Calibri" charset="0"/>
@@ -8848,7 +9092,7 @@
                           <a:ea typeface="Consolas" pitchFamily="34" charset="-122"/>
                           <a:cs typeface="Consolas" pitchFamily="34" charset="-120"/>
                         </a:rPr>
-                        <a:t>Higher r ⇒ lower PV(X) ⇒ calls up, puts down</a:t>
+                        <a:t>Higher r ⇒ lower PV(X)</a:t>
                       </a:r>
                       <a:endParaRPr lang="en-US" sz="1100" dirty="0">
                         <a:latin typeface="Consolas" charset="0"/>
@@ -8900,7 +9144,7 @@
                           <a:ea typeface="Calibri" pitchFamily="34" charset="-122"/>
                           <a:cs typeface="Calibri" pitchFamily="34" charset="-120"/>
                         </a:rPr>
-                        <a:t>Volatility (σ)</a:t>
+                        <a:t>Volatility of the underlying</a:t>
                       </a:r>
                       <a:endParaRPr lang="en-US" sz="1100" dirty="0">
                         <a:latin typeface="Calibri" charset="0"/>
@@ -9050,7 +9294,7 @@
                           <a:ea typeface="Consolas" pitchFamily="34" charset="-122"/>
                           <a:cs typeface="Consolas" pitchFamily="34" charset="-120"/>
                         </a:rPr>
-                        <a:t>Both sides: asymmetric payoff likes wide tails</a:t>
+                        <a:t>One-sided payoff likes fat tails</a:t>
                       </a:r>
                       <a:endParaRPr lang="en-US" sz="1100" dirty="0">
                         <a:latin typeface="Consolas" charset="0"/>
@@ -9102,7 +9346,7 @@
                           <a:ea typeface="Calibri" pitchFamily="34" charset="-122"/>
                           <a:cs typeface="Calibri" pitchFamily="34" charset="-120"/>
                         </a:rPr>
-                        <a:t>Income on underlying</a:t>
+                        <a:t>Income / cost of owning S</a:t>
                       </a:r>
                       <a:endParaRPr lang="en-US" sz="1100" dirty="0">
                         <a:latin typeface="Calibri" charset="0"/>
@@ -9152,7 +9396,7 @@
                           <a:ea typeface="Consolas" pitchFamily="34" charset="-122"/>
                           <a:cs typeface="Consolas" pitchFamily="34" charset="-120"/>
                         </a:rPr>
-                        <a:t>−</a:t>
+                        <a:t>−/+</a:t>
                       </a:r>
                       <a:endParaRPr lang="en-US" sz="1100" dirty="0">
                         <a:latin typeface="Consolas" charset="0"/>
@@ -9202,7 +9446,7 @@
                           <a:ea typeface="Consolas" pitchFamily="34" charset="-122"/>
                           <a:cs typeface="Consolas" pitchFamily="34" charset="-120"/>
                         </a:rPr>
-                        <a:t>+</a:t>
+                        <a:t>+/−</a:t>
                       </a:r>
                       <a:endParaRPr lang="en-US" sz="1100" dirty="0">
                         <a:latin typeface="Consolas" charset="0"/>
@@ -9252,7 +9496,7 @@
                           <a:ea typeface="Consolas" pitchFamily="34" charset="-122"/>
                           <a:cs typeface="Consolas" pitchFamily="34" charset="-120"/>
                         </a:rPr>
-                        <a:t>Div/yield accrues to holder, not to call²</a:t>
+                        <a:t>Income goes to the holder, not you²</a:t>
                       </a:r>
                       <a:endParaRPr lang="en-US" sz="1100" dirty="0">
                         <a:latin typeface="Consolas" charset="0"/>
@@ -9290,6 +9534,130 @@
           </a:graphicData>
         </a:graphic>
       </p:graphicFrame>
+      <p:sp>
+        <p:nvSpPr>
+          <p:cNvPr id="11" name="Shape 8"/>
+          <p:cNvSpPr/>
+          <p:nvPr/>
+        </p:nvSpPr>
+        <p:spPr>
+          <a:xfrm>
+            <a:off x="320040" y="3246120"/>
+            <a:ext cx="8503920" cy="960120"/>
+          </a:xfrm>
+          <a:prstGeom prst="rect">
+            <a:avLst/>
+          </a:prstGeom>
+          <a:solidFill>
+            <a:srgbClr val="FEF0E7"/>
+          </a:solidFill>
+          <a:ln/>
+        </p:spPr>
+      </p:sp>
+      <p:sp>
+        <p:nvSpPr>
+          <p:cNvPr id="12" name="Shape 9"/>
+          <p:cNvSpPr/>
+          <p:nvPr/>
+        </p:nvSpPr>
+        <p:spPr>
+          <a:xfrm>
+            <a:off x="320040" y="3246120"/>
+            <a:ext cx="73152" cy="960120"/>
+          </a:xfrm>
+          <a:prstGeom prst="rect">
+            <a:avLst/>
+          </a:prstGeom>
+          <a:solidFill>
+            <a:srgbClr val="E8600A"/>
+          </a:solidFill>
+          <a:ln/>
+        </p:spPr>
+      </p:sp>
+      <p:sp>
+        <p:nvSpPr>
+          <p:cNvPr id="13" name="Text 10"/>
+          <p:cNvSpPr txBox="1"/>
+          <p:nvPr/>
+        </p:nvSpPr>
+        <p:spPr>
+          <a:xfrm>
+            <a:off x="457200" y="3291840"/>
+            <a:ext cx="8275320" cy="256032"/>
+          </a:xfrm>
+          <a:prstGeom prst="rect">
+            <a:avLst/>
+          </a:prstGeom>
+          <a:noFill/>
+          <a:ln/>
+        </p:spPr>
+        <p:txBody>
+          <a:bodyPr wrap="square" lIns="508" tIns="508" rIns="508" bIns="508" rtlCol="0" anchor="ctr">
+            <a:normAutofit/>
+            <a:spAutoFit/>
+          </a:bodyPr>
+          <a:lstStyle/>
+          <a:p>
+            <a:pPr algn="l" indent="0" marL="0">
+              <a:buNone/>
+            </a:pPr>
+            <a:r>
+              <a:rPr lang="en-US" sz="1100" b="1" spc="400" kern="0" dirty="0">
+                <a:solidFill>
+                  <a:srgbClr val="E8600A"/>
+                </a:solidFill>
+                <a:latin typeface="Trebuchet MS" pitchFamily="34" charset="0"/>
+                <a:ea typeface="Trebuchet MS" pitchFamily="34" charset="-122"/>
+                <a:cs typeface="Trebuchet MS" pitchFamily="34" charset="-120"/>
+              </a:rPr>
+              <a:t>THE PAIRING THE EXAM TESTS</a:t>
+            </a:r>
+            <a:endParaRPr lang="en-US" sz="1100" dirty="0"/>
+          </a:p>
+        </p:txBody>
+      </p:sp>
+      <p:sp>
+        <p:nvSpPr>
+          <p:cNvPr id="14" name="Text 11"/>
+          <p:cNvSpPr txBox="1"/>
+          <p:nvPr/>
+        </p:nvSpPr>
+        <p:spPr>
+          <a:xfrm>
+            <a:off x="457200" y="3566160"/>
+            <a:ext cx="8275320" cy="594360"/>
+          </a:xfrm>
+          <a:prstGeom prst="rect">
+            <a:avLst/>
+          </a:prstGeom>
+          <a:noFill/>
+          <a:ln/>
+        </p:spPr>
+        <p:txBody>
+          <a:bodyPr wrap="square" lIns="508" tIns="508" rIns="508" bIns="508" rtlCol="0" anchor="t">
+            <a:normAutofit/>
+            <a:spAutoFit/>
+          </a:bodyPr>
+          <a:lstStyle/>
+          <a:p>
+            <a:pPr algn="l" indent="0" marL="0">
+              <a:buNone/>
+            </a:pPr>
+            <a:r>
+              <a:rPr lang="en-US" sz="1200" dirty="0">
+                <a:solidFill>
+                  <a:srgbClr val="334155"/>
+                </a:solidFill>
+                <a:latin typeface="Calibri" pitchFamily="34" charset="0"/>
+                <a:ea typeface="Calibri" pitchFamily="34" charset="-122"/>
+                <a:cs typeface="Calibri" pitchFamily="34" charset="-120"/>
+              </a:rPr>
+              <a:t>Two factors move calls and puts in the SAME direction: volatility (always) and time to expiration (usually — the exception is a deep-ITM put at a high rate). The other four — underlying, exercise price, risk-free rate and income/carry — move them in OPPOSITE directions.</a:t>
+            </a:r>
+            <a:endParaRPr lang="en-US" sz="1200" dirty="0"/>
+          </a:p>
+        </p:txBody>
+      </p:sp>
     </p:spTree>
   </p:cSld>
   <p:clrMapOvr>
@@ -9602,7 +9970,7 @@
                 <a:ea typeface="Trebuchet MS" pitchFamily="34" charset="-122"/>
                 <a:cs typeface="Trebuchet MS" pitchFamily="34" charset="-120"/>
               </a:rPr>
-              <a:t>A protective put and a fiduciary call share every future cash flow — so no-arbitrage forces S₀ + p₀ = c₀ + X(1+r)⁻ᵀ</a:t>
+              <a:t>A protective put and a fiduciary call pay the same in every state — so no-arbitrage forces S₀ + p₀ = c₀ + PV(X)</a:t>
             </a:r>
             <a:endParaRPr lang="en-US" sz="1700" dirty="0"/>
           </a:p>
@@ -9706,7 +10074,7 @@
                 <a:ea typeface="Calibri" pitchFamily="34" charset="-122"/>
                 <a:cs typeface="Calibri" pitchFamily="34" charset="-120"/>
               </a:rPr>
-              <a:t>Source: CFA Institute, Curriculum Vol 7, Learning Module 9, §2 "Put-Call Parity", Exhibits 1–4, pp. 200–203.</a:t>
+              <a:t>Source: CFA Institute, Curriculum Vol 7, Learning Module 9, §2 "Put–Call Parity", Exhibits 1–4, printed pp. 200–202.</a:t>
             </a:r>
             <a:endParaRPr lang="en-US" sz="750" dirty="0"/>
           </a:p>
@@ -9748,7 +10116,7 @@
                 <a:ea typeface="Calibri" pitchFamily="34" charset="-122"/>
                 <a:cs typeface="Calibri" pitchFamily="34" charset="-120"/>
               </a:rPr>
-              <a:t>Two portfolios that pay the same thing in every state of the world must cost the same today — otherwise, arbitrage.</a:t>
+              <a:t>Two portfolios that pay the same thing in every state of the world must cost the same today. That is the entire proof.</a:t>
             </a:r>
             <a:endParaRPr lang="en-US" sz="1300" dirty="0"/>
           </a:p>
@@ -9810,7 +10178,24 @@
                 <a:ea typeface="Consolas" pitchFamily="34" charset="-122"/>
                 <a:cs typeface="Consolas" pitchFamily="34" charset="-120"/>
               </a:rPr>
-              <a:t>Protective put:   S₀ + p₀           ≡           Fiduciary call:   c₀ + X(1 + r)⁻ᵀ</a:t>
+              <a:t>Protective put:  S₀ + p₀   ≡</a:t>
+            </a:r>
+            <a:endParaRPr lang="en-US" sz="1800" dirty="0"/>
+          </a:p>
+          <a:p>
+            <a:pPr algn="ctr" indent="0" marL="0">
+              <a:buNone/>
+            </a:pPr>
+            <a:r>
+              <a:rPr lang="en-US" sz="1800" b="1" dirty="0">
+                <a:solidFill>
+                  <a:srgbClr val="FFFFFF"/>
+                </a:solidFill>
+                <a:latin typeface="Consolas" pitchFamily="34" charset="0"/>
+                <a:ea typeface="Consolas" pitchFamily="34" charset="-122"/>
+                <a:cs typeface="Consolas" pitchFamily="34" charset="-120"/>
+              </a:rPr>
+              <a:t>Fiduciary call:  c₀ + X(1 + r)⁻ᵀ</a:t>
             </a:r>
             <a:endParaRPr lang="en-US" sz="1800" dirty="0"/>
           </a:p>
@@ -9852,7 +10237,7 @@
                 <a:ea typeface="Calibri" pitchFamily="34" charset="-122"/>
                 <a:cs typeface="Calibri" pitchFamily="34" charset="-120"/>
               </a:rPr>
-              <a:t>where: European options, same X, same T, no dividends on the underlying, one risk-free rate r.</a:t>
+              <a:t>where: European options only, same X, same T, no income on the underlying, one risk-free rate r. A fiduciary call is a purchased call plus a bond paying X at T.</a:t>
             </a:r>
             <a:endParaRPr lang="en-US" sz="1100" dirty="0"/>
           </a:p>
@@ -9873,7 +10258,7 @@
           </p:nvPr>
         </p:nvGraphicFramePr>
         <p:xfrm>
-          <a:off x="320040" y="2240280"/>
+          <a:off x="320040" y="2194560"/>
           <a:ext cx="8503920" cy="914400"/>
         </p:xfrm>
         <a:graphic>
@@ -9881,10 +10266,10 @@
             <a:tbl>
               <a:tblPr/>
               <a:tblGrid>
-                <a:gridCol w="4114800"/>
-                <a:gridCol w="1463040"/>
-                <a:gridCol w="1463040"/>
-                <a:gridCol w="1463040"/>
+                <a:gridCol w="3017520"/>
+                <a:gridCol w="1828800"/>
+                <a:gridCol w="1828800"/>
+                <a:gridCol w="1828800"/>
               </a:tblGrid>
               <a:tr h="274320">
                 <a:tc>
@@ -9904,7 +10289,7 @@
                           <a:ea typeface="Trebuchet MS" pitchFamily="34" charset="-122"/>
                           <a:cs typeface="Trebuchet MS" pitchFamily="34" charset="-120"/>
                         </a:rPr>
-                        <a:t>Portfolio @ t = T</a:t>
+                        <a:t>Portfolio value at t = T</a:t>
                       </a:r>
                       <a:endParaRPr lang="en-US" sz="1100" dirty="0">
                         <a:latin typeface="Trebuchet MS" charset="0"/>
@@ -10106,7 +10491,7 @@
                           <a:ea typeface="Calibri" pitchFamily="34" charset="-122"/>
                           <a:cs typeface="Calibri" pitchFamily="34" charset="-120"/>
                         </a:rPr>
-                        <a:t>Protective put: S + p</a:t>
+                        <a:t>Protective put: S₀ + p₀</a:t>
                       </a:r>
                       <a:endParaRPr lang="en-US" sz="1100" dirty="0">
                         <a:latin typeface="Calibri" charset="0"/>
@@ -10308,7 +10693,7 @@
                           <a:ea typeface="Calibri" pitchFamily="34" charset="-122"/>
                           <a:cs typeface="Calibri" pitchFamily="34" charset="-120"/>
                         </a:rPr>
-                        <a:t>Fiduciary call: c + PV(X)→X</a:t>
+                        <a:t>Fiduciary call: c₀ + PV(X)</a:t>
                       </a:r>
                       <a:endParaRPr lang="en-US" sz="1100" dirty="0">
                         <a:latin typeface="Calibri" charset="0"/>
@@ -10408,7 +10793,7 @@
                           <a:ea typeface="Consolas" pitchFamily="34" charset="-122"/>
                           <a:cs typeface="Consolas" pitchFamily="34" charset="-120"/>
                         </a:rPr>
-                        <a:t>X</a:t>
+                        <a:t>X = ST</a:t>
                       </a:r>
                       <a:endParaRPr lang="en-US" sz="1100" dirty="0">
                         <a:latin typeface="Consolas" charset="0"/>
@@ -10510,7 +10895,7 @@
                           <a:ea typeface="Calibri" pitchFamily="34" charset="-122"/>
                           <a:cs typeface="Calibri" pitchFamily="34" charset="-120"/>
                         </a:rPr>
-                        <a:t>Cash-flow difference</a:t>
+                        <a:t>Difference</a:t>
                       </a:r>
                       <a:endParaRPr lang="en-US" sz="1100" dirty="0">
                         <a:latin typeface="Calibri" charset="0"/>
@@ -10548,7 +10933,7 @@
                     <a:bodyPr/>
                     <a:lstStyle/>
                     <a:p>
-                      <a:pPr algn="r" indent="0" marL="0">
+                      <a:pPr algn="ctr" indent="0" marL="0">
                         <a:buNone/>
                       </a:pPr>
                       <a:r>
@@ -10560,7 +10945,7 @@
                           <a:ea typeface="Consolas" pitchFamily="34" charset="-122"/>
                           <a:cs typeface="Consolas" pitchFamily="34" charset="-120"/>
                         </a:rPr>
-                        <a:t>0</a:t>
+                        <a:t>zero</a:t>
                       </a:r>
                       <a:endParaRPr lang="en-US" sz="1100" dirty="0">
                         <a:latin typeface="Consolas" charset="0"/>
@@ -10598,7 +10983,7 @@
                     <a:bodyPr/>
                     <a:lstStyle/>
                     <a:p>
-                      <a:pPr algn="r" indent="0" marL="0">
+                      <a:pPr algn="ctr" indent="0" marL="0">
                         <a:buNone/>
                       </a:pPr>
                       <a:r>
@@ -10610,7 +10995,7 @@
                           <a:ea typeface="Consolas" pitchFamily="34" charset="-122"/>
                           <a:cs typeface="Consolas" pitchFamily="34" charset="-120"/>
                         </a:rPr>
-                        <a:t>0</a:t>
+                        <a:t>zero</a:t>
                       </a:r>
                       <a:endParaRPr lang="en-US" sz="1100" dirty="0">
                         <a:latin typeface="Consolas" charset="0"/>
@@ -10648,7 +11033,7 @@
                     <a:bodyPr/>
                     <a:lstStyle/>
                     <a:p>
-                      <a:pPr algn="r" indent="0" marL="0">
+                      <a:pPr algn="ctr" indent="0" marL="0">
                         <a:buNone/>
                       </a:pPr>
                       <a:r>
@@ -10660,7 +11045,7 @@
                           <a:ea typeface="Consolas" pitchFamily="34" charset="-122"/>
                           <a:cs typeface="Consolas" pitchFamily="34" charset="-120"/>
                         </a:rPr>
-                        <a:t>0</a:t>
+                        <a:t>zero</a:t>
                       </a:r>
                       <a:endParaRPr lang="en-US" sz="1100" dirty="0">
                         <a:latin typeface="Consolas" charset="0"/>
@@ -10712,7 +11097,7 @@
                           <a:ea typeface="Consolas" pitchFamily="34" charset="-122"/>
                           <a:cs typeface="Consolas" pitchFamily="34" charset="-120"/>
                         </a:rPr>
-                        <a:t>Therefore prices must match at t = 0</a:t>
+                        <a:t>No-arbitrage ⇒ equal cost now</a:t>
                       </a:r>
                       <a:endParaRPr lang="en-US" sz="1100" dirty="0">
                         <a:latin typeface="Consolas" charset="0"/>
@@ -10924,6 +11309,88 @@
           </a:graphicData>
         </a:graphic>
       </p:graphicFrame>
+      <p:sp>
+        <p:nvSpPr>
+          <p:cNvPr id="13" name="Shape 10"/>
+          <p:cNvSpPr/>
+          <p:nvPr/>
+        </p:nvSpPr>
+        <p:spPr>
+          <a:xfrm>
+            <a:off x="320040" y="3703320"/>
+            <a:ext cx="8503920" cy="530352"/>
+          </a:xfrm>
+          <a:prstGeom prst="rect">
+            <a:avLst/>
+          </a:prstGeom>
+          <a:solidFill>
+            <a:srgbClr val="FEF0E7"/>
+          </a:solidFill>
+          <a:ln/>
+        </p:spPr>
+      </p:sp>
+      <p:sp>
+        <p:nvSpPr>
+          <p:cNvPr id="14" name="Shape 11"/>
+          <p:cNvSpPr/>
+          <p:nvPr/>
+        </p:nvSpPr>
+        <p:spPr>
+          <a:xfrm>
+            <a:off x="320040" y="3703320"/>
+            <a:ext cx="73152" cy="530352"/>
+          </a:xfrm>
+          <a:prstGeom prst="rect">
+            <a:avLst/>
+          </a:prstGeom>
+          <a:solidFill>
+            <a:srgbClr val="E8600A"/>
+          </a:solidFill>
+          <a:ln/>
+        </p:spPr>
+      </p:sp>
+      <p:sp>
+        <p:nvSpPr>
+          <p:cNvPr id="15" name="Text 12"/>
+          <p:cNvSpPr txBox="1"/>
+          <p:nvPr/>
+        </p:nvSpPr>
+        <p:spPr>
+          <a:xfrm>
+            <a:off x="457200" y="3776472"/>
+            <a:ext cx="8275320" cy="420624"/>
+          </a:xfrm>
+          <a:prstGeom prst="rect">
+            <a:avLst/>
+          </a:prstGeom>
+          <a:noFill/>
+          <a:ln/>
+        </p:spPr>
+        <p:txBody>
+          <a:bodyPr wrap="square" lIns="508" tIns="508" rIns="508" bIns="508" rtlCol="0" anchor="t">
+            <a:normAutofit/>
+            <a:spAutoFit/>
+          </a:bodyPr>
+          <a:lstStyle/>
+          <a:p>
+            <a:pPr algn="l" indent="0" marL="0">
+              <a:buNone/>
+            </a:pPr>
+            <a:r>
+              <a:rPr lang="en-US" sz="1200" dirty="0">
+                <a:solidFill>
+                  <a:srgbClr val="334155"/>
+                </a:solidFill>
+                <a:latin typeface="Calibri" pitchFamily="34" charset="0"/>
+                <a:ea typeface="Calibri" pitchFamily="34" charset="-122"/>
+                <a:cs typeface="Calibri" pitchFamily="34" charset="-120"/>
+              </a:rPr>
+              <a:t>Same payoff in every state ⇒ same price today. No distribution, no probabilities, no model — this result is pure arbitrage.</a:t>
+            </a:r>
+            <a:endParaRPr lang="en-US" sz="1200" dirty="0"/>
+          </a:p>
+        </p:txBody>
+      </p:sp>
     </p:spTree>
   </p:cSld>
   <p:clrMapOvr>
@@ -11025,7 +11492,7 @@
                 <a:ea typeface="Trebuchet MS" pitchFamily="34" charset="-122"/>
                 <a:cs typeface="Trebuchet MS" pitchFamily="34" charset="-120"/>
               </a:rPr>
-              <a:t>CFA LM 9 Example 1 prices a put directly off a traded call — parity is a pricing engine, not just an identity</a:t>
+              <a:t>CFA LM 9 Example 1 prices a put straight off a traded call — parity is a pricing engine, not just an identity</a:t>
             </a:r>
             <a:endParaRPr lang="en-US" sz="1700" dirty="0"/>
           </a:p>
@@ -11129,7 +11596,7 @@
                 <a:ea typeface="Calibri" pitchFamily="34" charset="-122"/>
                 <a:cs typeface="Calibri" pitchFamily="34" charset="-120"/>
               </a:rPr>
-              <a:t>Source: CFA Institute, Curriculum Vol 7, Learning Module 9, Example 1 "Biomian Put-Call Parity", pp. 202–203.</a:t>
+              <a:t>Source: CFA Institute, Curriculum Vol 7, Learning Module 9, §2 Example 1 "Biomian Put–Call Parity", printed p. 202.</a:t>
             </a:r>
             <a:endParaRPr lang="en-US" sz="750" dirty="0"/>
           </a:p>
@@ -11171,7 +11638,7 @@
                 <a:ea typeface="Calibri" pitchFamily="34" charset="-122"/>
                 <a:cs typeface="Calibri" pitchFamily="34" charset="-120"/>
               </a:rPr>
-              <a:t>Whenever a liquid call and illiquid put exist on the same name and strike, parity gives the put's mark — instantly.</a:t>
+              <a:t>Whenever a liquid call and an illiquid put share a name, a strike and a date, parity gives the put its mark — instantly.</a:t>
             </a:r>
             <a:endParaRPr lang="en-US" sz="1300" dirty="0"/>
           </a:p>
@@ -11300,7 +11767,7 @@
                 <a:ea typeface="Trebuchet MS" pitchFamily="34" charset="-122"/>
                 <a:cs typeface="Trebuchet MS" pitchFamily="34" charset="-120"/>
               </a:rPr>
-              <a:t>BIOMIAN 6-MONTH PUT FROM TRADED CALL</a:t>
+              <a:t>BIOMIAN — A SIX-MONTH PUT FROM A TRADED CALL</a:t>
             </a:r>
             <a:endParaRPr lang="en-US" sz="1100" dirty="0"/>
           </a:p>
@@ -11342,7 +11809,7 @@
                 <a:ea typeface="Calibri" pitchFamily="34" charset="-122"/>
                 <a:cs typeface="Calibri" pitchFamily="34" charset="-120"/>
               </a:rPr>
-              <a:t>Biomian shares S₀ = INR 295. Observed 6-month European call at X = INR 265 trades at c₀ = INR 59. r = 4%, T = 0.5. No dividends.</a:t>
+              <a:t>Biomian shares at S₀ = INR 295, no dividends. An observed six-month European call at X = INR 265 trades at c₀ = INR 59. r = 4%, T = 0.5.</a:t>
             </a:r>
             <a:endParaRPr lang="en-US" sz="1200" dirty="0"/>
           </a:p>
@@ -11379,7 +11846,7 @@
               <a:buNone/>
             </a:pPr>
             <a:r>
-              <a:rPr lang="en-US" sz="1150" b="1" dirty="0">
+              <a:rPr lang="en-US" sz="1200" b="1" dirty="0">
                 <a:solidFill>
                   <a:srgbClr val="1B2A4A"/>
                 </a:solidFill>
@@ -11396,7 +11863,7 @@
               <a:buNone/>
             </a:pPr>
             <a:r>
-              <a:rPr lang="en-US" sz="1150" dirty="0">
+              <a:rPr lang="en-US" sz="1200" dirty="0">
                 <a:solidFill>
                   <a:srgbClr val="334155"/>
                 </a:solidFill>
@@ -11404,7 +11871,7 @@
                 <a:ea typeface="Calibri" pitchFamily="34" charset="-122"/>
                 <a:cs typeface="Calibri" pitchFamily="34" charset="-120"/>
               </a:rPr>
-              <a:t>Compute PV of strike: X(1 + r)⁻ᵀ = 265 × 1.04⁻⁰·⁵ = 265 / 1.0198 = INR 259.85
+              <a:t>PV of the strike: X(1 + r)⁻ᵀ = 265 × 1.04⁻⁰·⁵ = 265 / 1.0198 = INR 259.85
 </a:t>
             </a:r>
             <a:pPr indent="0" marL="0">
@@ -11414,7 +11881,7 @@
               <a:buNone/>
             </a:pPr>
             <a:r>
-              <a:rPr lang="en-US" sz="1150" b="1" dirty="0">
+              <a:rPr lang="en-US" sz="1200" b="1" dirty="0">
                 <a:solidFill>
                   <a:srgbClr val="1B2A4A"/>
                 </a:solidFill>
@@ -11431,7 +11898,7 @@
               <a:buNone/>
             </a:pPr>
             <a:r>
-              <a:rPr lang="en-US" sz="1150" dirty="0">
+              <a:rPr lang="en-US" sz="1200" dirty="0">
                 <a:solidFill>
                   <a:srgbClr val="334155"/>
                 </a:solidFill>
@@ -11439,7 +11906,7 @@
                 <a:ea typeface="Calibri" pitchFamily="34" charset="-122"/>
                 <a:cs typeface="Calibri" pitchFamily="34" charset="-120"/>
               </a:rPr>
-              <a:t>Substitute into rearranged parity: p₀ = c₀ + PV(X) − S₀
+              <a:t>Rearrange parity to isolate the put: p₀ = c₀ + PV(X) − S₀
 </a:t>
             </a:r>
             <a:pPr indent="0" marL="0">
@@ -11449,7 +11916,7 @@
               <a:buNone/>
             </a:pPr>
             <a:r>
-              <a:rPr lang="en-US" sz="1150" b="1" dirty="0">
+              <a:rPr lang="en-US" sz="1200" b="1" dirty="0">
                 <a:solidFill>
                   <a:srgbClr val="1B2A4A"/>
                 </a:solidFill>
@@ -11466,7 +11933,7 @@
               <a:buNone/>
             </a:pPr>
             <a:r>
-              <a:rPr lang="en-US" sz="1150" dirty="0">
+              <a:rPr lang="en-US" sz="1200" dirty="0">
                 <a:solidFill>
                   <a:srgbClr val="334155"/>
                 </a:solidFill>
@@ -11474,7 +11941,7 @@
                 <a:ea typeface="Calibri" pitchFamily="34" charset="-122"/>
                 <a:cs typeface="Calibri" pitchFamily="34" charset="-120"/>
               </a:rPr>
-              <a:t>p₀ = 59 + 259.85 − 295
+              <a:t>p₀ = 59 + 259.85 − 295 = 318.85 − 295 = INR 23.85
 </a:t>
             </a:r>
             <a:pPr indent="0" marL="0">
@@ -11484,7 +11951,7 @@
               <a:buNone/>
             </a:pPr>
             <a:r>
-              <a:rPr lang="en-US" sz="1150" b="1" dirty="0">
+              <a:rPr lang="en-US" sz="1200" b="1" dirty="0">
                 <a:solidFill>
                   <a:srgbClr val="1B2A4A"/>
                 </a:solidFill>
@@ -11501,7 +11968,7 @@
               <a:buNone/>
             </a:pPr>
             <a:r>
-              <a:rPr lang="en-US" sz="1150" dirty="0">
+              <a:rPr lang="en-US" sz="1200" dirty="0">
                 <a:solidFill>
                   <a:srgbClr val="334155"/>
                 </a:solidFill>
@@ -11509,44 +11976,9 @@
                 <a:ea typeface="Calibri" pitchFamily="34" charset="-122"/>
                 <a:cs typeface="Calibri" pitchFamily="34" charset="-120"/>
               </a:rPr>
-              <a:t>p₀ = 318.85 − 295 = INR 23.85
-</a:t>
-            </a:r>
-            <a:pPr indent="0" marL="0">
-              <a:spcAft>
-                <a:spcPts val="200"/>
-              </a:spcAft>
-              <a:buNone/>
-            </a:pPr>
-            <a:r>
-              <a:rPr lang="en-US" sz="1150" b="1" dirty="0">
-                <a:solidFill>
-                  <a:srgbClr val="1B2A4A"/>
-                </a:solidFill>
-                <a:latin typeface="Calibri" pitchFamily="34" charset="0"/>
-                <a:ea typeface="Calibri" pitchFamily="34" charset="-122"/>
-                <a:cs typeface="Calibri" pitchFamily="34" charset="-120"/>
-              </a:rPr>
-              <a:t>5. </a:t>
-            </a:r>
-            <a:pPr indent="0" marL="0">
-              <a:spcAft>
-                <a:spcPts val="200"/>
-              </a:spcAft>
-              <a:buNone/>
-            </a:pPr>
-            <a:r>
-              <a:rPr lang="en-US" sz="1150" dirty="0">
-                <a:solidFill>
-                  <a:srgbClr val="334155"/>
-                </a:solidFill>
-                <a:latin typeface="Calibri" pitchFamily="34" charset="0"/>
-                <a:ea typeface="Calibri" pitchFamily="34" charset="-122"/>
-                <a:cs typeface="Calibri" pitchFamily="34" charset="-120"/>
-              </a:rPr>
-              <a:t>Cross-check: S₀ + p₀ = 295 + 23.85 = 318.85  =  c₀ + PV(X) = 59 + 259.85 = 318.85 ✓</a:t>
-            </a:r>
-            <a:endParaRPr lang="en-US" sz="1150" dirty="0"/>
+              <a:t>Cross-check both sides: S₀ + p₀ = 318.85 and c₀ + PV(X) = 318.85 ✓</a:t>
+            </a:r>
+            <a:endParaRPr lang="en-US" sz="1200" dirty="0"/>
           </a:p>
         </p:txBody>
       </p:sp>
@@ -11606,7 +12038,7 @@
                 <a:ea typeface="Consolas" pitchFamily="34" charset="-122"/>
                 <a:cs typeface="Consolas" pitchFamily="34" charset="-120"/>
               </a:rPr>
-              <a:t>No-arbitrage 6-month put premium = INR 23.85.</a:t>
+              <a:t>No-arbitrage six-month put premium = INR 23.85, computed without any model of Biomian.</a:t>
             </a:r>
             <a:endParaRPr lang="en-US" sz="1150" dirty="0"/>
           </a:p>
@@ -11705,7 +12137,7 @@
               <a:buNone/>
             </a:pPr>
             <a:r>
-              <a:rPr lang="en-US" sz="1800" b="1" dirty="0">
+              <a:rPr lang="en-US" sz="1700" b="1" dirty="0">
                 <a:solidFill>
                   <a:srgbClr val="FFFFFF"/>
                 </a:solidFill>
@@ -11713,9 +12145,9 @@
                 <a:ea typeface="Trebuchet MS" pitchFamily="34" charset="-122"/>
                 <a:cs typeface="Trebuchet MS" pitchFamily="34" charset="-120"/>
               </a:rPr>
-              <a:t>CFA LM 9 Example 2 locks in a riskless INR 6.15 per share when the traded put is too rich vs parity</a:t>
-            </a:r>
-            <a:endParaRPr lang="en-US" sz="1800" dirty="0"/>
+              <a:t>CFA LM 9 Example 2 locks in a riskless INR 6.15 a share when the traded put is richer than parity allows</a:t>
+            </a:r>
+            <a:endParaRPr lang="en-US" sz="1700" dirty="0"/>
           </a:p>
         </p:txBody>
       </p:sp>
@@ -11817,7 +12249,7 @@
                 <a:ea typeface="Calibri" pitchFamily="34" charset="-122"/>
                 <a:cs typeface="Calibri" pitchFamily="34" charset="-120"/>
               </a:rPr>
-              <a:t>Source: CFA Institute, Curriculum Vol 7, Learning Module 9, Example 2 "VFO Parity Arbitrage", pp. 203–204.</a:t>
+              <a:t>Source: CFA Institute, Curriculum Vol 7, Learning Module 9, §2 Example 2 "VFO Put–Call Parity Arbitrage Opportunity", printed p. 203.</a:t>
             </a:r>
             <a:endParaRPr lang="en-US" sz="750" dirty="0"/>
           </a:p>
@@ -11859,7 +12291,7 @@
                 <a:ea typeface="Calibri" pitchFamily="34" charset="-122"/>
                 <a:cs typeface="Calibri" pitchFamily="34" charset="-120"/>
               </a:rPr>
-              <a:t>If S + p &gt; c + PV(X), the expensive side is sold and the cheap side is bought. Cash flows net to zero at T; the initial surplus is pure profit.</a:t>
+              <a:t>S₀ + p₀ = 325 but c₀ + PV(X) = 318.85. Sell the expensive portfolio, buy the cheap one, and the difference is yours today.</a:t>
             </a:r>
             <a:endParaRPr lang="en-US" sz="1300" dirty="0"/>
           </a:p>
@@ -11912,7 +12344,7 @@
                           <a:ea typeface="Trebuchet MS" pitchFamily="34" charset="-122"/>
                           <a:cs typeface="Trebuchet MS" pitchFamily="34" charset="-120"/>
                         </a:rPr>
-                        <a:t>Leg @ t = 0</a:t>
+                        <a:t>Leg at t = 0</a:t>
                       </a:r>
                       <a:endParaRPr lang="en-US" sz="1100" dirty="0">
                         <a:latin typeface="Trebuchet MS" charset="0"/>
@@ -11962,7 +12394,7 @@
                           <a:ea typeface="Trebuchet MS" pitchFamily="34" charset="-122"/>
                           <a:cs typeface="Trebuchet MS" pitchFamily="34" charset="-120"/>
                         </a:rPr>
-                        <a:t>Cash flow @ t = 0</a:t>
+                        <a:t>Cash at t = 0</a:t>
                       </a:r>
                       <a:endParaRPr lang="en-US" sz="1100" dirty="0">
                         <a:latin typeface="Trebuchet MS" charset="0"/>
@@ -12164,7 +12596,7 @@
                           <a:ea typeface="Calibri" pitchFamily="34" charset="-122"/>
                           <a:cs typeface="Calibri" pitchFamily="34" charset="-120"/>
                         </a:rPr>
-                        <a:t>Sell stock at S₀</a:t>
+                        <a:t>Sell the underlying at S₀</a:t>
                       </a:r>
                       <a:endParaRPr lang="en-US" sz="1100" dirty="0">
                         <a:latin typeface="Calibri" charset="0"/>
@@ -12214,7 +12646,7 @@
                           <a:ea typeface="Consolas" pitchFamily="34" charset="-122"/>
                           <a:cs typeface="Consolas" pitchFamily="34" charset="-120"/>
                         </a:rPr>
-                        <a:t>+295</a:t>
+                        <a:t>+295.00</a:t>
                       </a:r>
                       <a:endParaRPr lang="en-US" sz="1100" dirty="0">
                         <a:latin typeface="Consolas" charset="0"/>
@@ -12314,7 +12746,7 @@
                           <a:ea typeface="Consolas" pitchFamily="34" charset="-122"/>
                           <a:cs typeface="Consolas" pitchFamily="34" charset="-120"/>
                         </a:rPr>
-                        <a:t>−ST (=−X)</a:t>
+                        <a:t>−ST</a:t>
                       </a:r>
                       <a:endParaRPr lang="en-US" sz="1100" dirty="0">
                         <a:latin typeface="Consolas" charset="0"/>
@@ -12416,7 +12848,7 @@
                           <a:ea typeface="Calibri" pitchFamily="34" charset="-122"/>
                           <a:cs typeface="Calibri" pitchFamily="34" charset="-120"/>
                         </a:rPr>
-                        <a:t>Sell put at p₀ (traded, overpriced)</a:t>
+                        <a:t>Sell the put at its rich price</a:t>
                       </a:r>
                       <a:endParaRPr lang="en-US" sz="1100" dirty="0">
                         <a:latin typeface="Calibri" charset="0"/>
@@ -12466,7 +12898,7 @@
                           <a:ea typeface="Consolas" pitchFamily="34" charset="-122"/>
                           <a:cs typeface="Consolas" pitchFamily="34" charset="-120"/>
                         </a:rPr>
-                        <a:t>+30</a:t>
+                        <a:t>+30.00</a:t>
                       </a:r>
                       <a:endParaRPr lang="en-US" sz="1100" dirty="0">
                         <a:latin typeface="Consolas" charset="0"/>
@@ -12516,7 +12948,7 @@
                           <a:ea typeface="Consolas" pitchFamily="34" charset="-122"/>
                           <a:cs typeface="Consolas" pitchFamily="34" charset="-120"/>
                         </a:rPr>
-                        <a:t>−(X−ST) = ST−X</a:t>
+                        <a:t>ST − X</a:t>
                       </a:r>
                       <a:endParaRPr lang="en-US" sz="1100" dirty="0">
                         <a:latin typeface="Consolas" charset="0"/>
@@ -12554,7 +12986,7 @@
                     <a:bodyPr/>
                     <a:lstStyle/>
                     <a:p>
-                      <a:pPr algn="r" indent="0" marL="0">
+                      <a:pPr algn="ctr" indent="0" marL="0">
                         <a:buNone/>
                       </a:pPr>
                       <a:r>
@@ -12566,7 +12998,7 @@
                           <a:ea typeface="Consolas" pitchFamily="34" charset="-122"/>
                           <a:cs typeface="Consolas" pitchFamily="34" charset="-120"/>
                         </a:rPr>
-                        <a:t>0</a:t>
+                        <a:t>zero</a:t>
                       </a:r>
                       <a:endParaRPr lang="en-US" sz="1100" dirty="0">
                         <a:latin typeface="Consolas" charset="0"/>
@@ -12604,7 +13036,7 @@
                     <a:bodyPr/>
                     <a:lstStyle/>
                     <a:p>
-                      <a:pPr algn="r" indent="0" marL="0">
+                      <a:pPr algn="ctr" indent="0" marL="0">
                         <a:buNone/>
                       </a:pPr>
                       <a:r>
@@ -12616,7 +13048,7 @@
                           <a:ea typeface="Consolas" pitchFamily="34" charset="-122"/>
                           <a:cs typeface="Consolas" pitchFamily="34" charset="-120"/>
                         </a:rPr>
-                        <a:t>0</a:t>
+                        <a:t>zero</a:t>
                       </a:r>
                       <a:endParaRPr lang="en-US" sz="1100" dirty="0">
                         <a:latin typeface="Consolas" charset="0"/>
@@ -12668,7 +13100,7 @@
                           <a:ea typeface="Calibri" pitchFamily="34" charset="-122"/>
                           <a:cs typeface="Calibri" pitchFamily="34" charset="-120"/>
                         </a:rPr>
-                        <a:t>Buy call at c₀</a:t>
+                        <a:t>Buy the call</a:t>
                       </a:r>
                       <a:endParaRPr lang="en-US" sz="1100" dirty="0">
                         <a:latin typeface="Calibri" charset="0"/>
@@ -12718,7 +13150,7 @@
                           <a:ea typeface="Consolas" pitchFamily="34" charset="-122"/>
                           <a:cs typeface="Consolas" pitchFamily="34" charset="-120"/>
                         </a:rPr>
-                        <a:t>−59</a:t>
+                        <a:t>−59.00</a:t>
                       </a:r>
                       <a:endParaRPr lang="en-US" sz="1100" dirty="0">
                         <a:latin typeface="Consolas" charset="0"/>
@@ -12756,7 +13188,7 @@
                     <a:bodyPr/>
                     <a:lstStyle/>
                     <a:p>
-                      <a:pPr algn="r" indent="0" marL="0">
+                      <a:pPr algn="ctr" indent="0" marL="0">
                         <a:buNone/>
                       </a:pPr>
                       <a:r>
@@ -12768,7 +13200,7 @@
                           <a:ea typeface="Consolas" pitchFamily="34" charset="-122"/>
                           <a:cs typeface="Consolas" pitchFamily="34" charset="-120"/>
                         </a:rPr>
-                        <a:t>0</a:t>
+                        <a:t>zero</a:t>
                       </a:r>
                       <a:endParaRPr lang="en-US" sz="1100" dirty="0">
                         <a:latin typeface="Consolas" charset="0"/>
@@ -12806,7 +13238,7 @@
                     <a:bodyPr/>
                     <a:lstStyle/>
                     <a:p>
-                      <a:pPr algn="r" indent="0" marL="0">
+                      <a:pPr algn="ctr" indent="0" marL="0">
                         <a:buNone/>
                       </a:pPr>
                       <a:r>
@@ -12818,7 +13250,7 @@
                           <a:ea typeface="Consolas" pitchFamily="34" charset="-122"/>
                           <a:cs typeface="Consolas" pitchFamily="34" charset="-120"/>
                         </a:rPr>
-                        <a:t>0</a:t>
+                        <a:t>zero</a:t>
                       </a:r>
                       <a:endParaRPr lang="en-US" sz="1100" dirty="0">
                         <a:latin typeface="Consolas" charset="0"/>
@@ -12920,7 +13352,7 @@
                           <a:ea typeface="Calibri" pitchFamily="34" charset="-122"/>
                           <a:cs typeface="Calibri" pitchFamily="34" charset="-120"/>
                         </a:rPr>
-                        <a:t>Buy risk-free bond to receive X @ T</a:t>
+                        <a:t>Buy a bond that pays X at T</a:t>
                       </a:r>
                       <a:endParaRPr lang="en-US" sz="1100" dirty="0">
                         <a:latin typeface="Calibri" charset="0"/>
@@ -13448,8 +13880,8 @@
         </p:nvSpPr>
         <p:spPr>
           <a:xfrm>
-            <a:off x="320040" y="3246120"/>
-            <a:ext cx="8503920" cy="1051560"/>
+            <a:off x="320040" y="2926080"/>
+            <a:ext cx="8503920" cy="1371600"/>
           </a:xfrm>
           <a:prstGeom prst="rect">
             <a:avLst/>
@@ -13468,8 +13900,8 @@
         </p:nvSpPr>
         <p:spPr>
           <a:xfrm>
-            <a:off x="320040" y="3246120"/>
-            <a:ext cx="73152" cy="1051560"/>
+            <a:off x="320040" y="2926080"/>
+            <a:ext cx="73152" cy="1371600"/>
           </a:xfrm>
           <a:prstGeom prst="rect">
             <a:avLst/>
@@ -13488,7 +13920,7 @@
         </p:nvSpPr>
         <p:spPr>
           <a:xfrm>
-            <a:off x="457200" y="3291840"/>
+            <a:off x="457200" y="2971800"/>
             <a:ext cx="8275320" cy="256032"/>
           </a:xfrm>
           <a:prstGeom prst="rect">
@@ -13530,8 +13962,8 @@
         </p:nvSpPr>
         <p:spPr>
           <a:xfrm>
-            <a:off x="457200" y="3566160"/>
-            <a:ext cx="8275320" cy="685800"/>
+            <a:off x="457200" y="3246120"/>
+            <a:ext cx="8275320" cy="1005840"/>
           </a:xfrm>
           <a:prstGeom prst="rect">
             <a:avLst/>
@@ -13558,7 +13990,30 @@
                 <a:ea typeface="Calibri" pitchFamily="34" charset="-122"/>
                 <a:cs typeface="Calibri" pitchFamily="34" charset="-120"/>
               </a:rPr>
-              <a:t>At t = 0 the investor pockets INR 6.15 in cash. At t = T, in every possible ending price ST, the four legs net to exactly zero — there's no residual exposure. This is the textbook definition of a riskless arbitrage: positive cash today, no risk tomorrow.</a:t>
+              <a:t>At t = 0 the investor banks INR 6.15 in cash. At t = T, in every single ending price ST, the four legs net to exactly zero — no residual exposure of any kind, in any state.</a:t>
+            </a:r>
+            <a:endParaRPr lang="en-US" sz="1200" dirty="0"/>
+          </a:p>
+          <a:p>
+            <a:pPr algn="l" indent="0" marL="0">
+              <a:buNone/>
+            </a:pPr>
+            <a:endParaRPr lang="en-US" sz="1200" dirty="0"/>
+          </a:p>
+          <a:p>
+            <a:pPr algn="l" indent="0" marL="0">
+              <a:buNone/>
+            </a:pPr>
+            <a:r>
+              <a:rPr lang="en-US" sz="1200" dirty="0">
+                <a:solidFill>
+                  <a:srgbClr val="334155"/>
+                </a:solidFill>
+                <a:latin typeface="Calibri" pitchFamily="34" charset="0"/>
+                <a:ea typeface="Calibri" pitchFamily="34" charset="-122"/>
+                <a:cs typeface="Calibri" pitchFamily="34" charset="-120"/>
+              </a:rPr>
+              <a:t>Positive cash today, zero risk tomorrow: that is the textbook definition of a riskless arbitrage. Note the profit is exactly the mispricing, 30.00 − 23.85 = 6.15, and it is banked immediately, not at expiry.</a:t>
             </a:r>
             <a:endParaRPr lang="en-US" sz="1200" dirty="0"/>
           </a:p>
@@ -13665,7 +14120,7 @@
                 <a:ea typeface="Trebuchet MS" pitchFamily="34" charset="-122"/>
                 <a:cs typeface="Trebuchet MS" pitchFamily="34" charset="-120"/>
               </a:rPr>
-              <a:t>Parity rearranges into a synthetic-position cookbook — each position is replicable from the other three</a:t>
+              <a:t>Parity rearranges into a synthetic cookbook — each of the four positions is replicable from the other three</a:t>
             </a:r>
             <a:endParaRPr lang="en-US" sz="1700" dirty="0"/>
           </a:p>
@@ -13769,7 +14224,7 @@
                 <a:ea typeface="Calibri" pitchFamily="34" charset="-122"/>
                 <a:cs typeface="Calibri" pitchFamily="34" charset="-120"/>
               </a:rPr>
-              <a:t>Source: CFA Institute, Curriculum Vol 7, Learning Module 9, §3 Exhibit 6 "Replication of Positions", pp. 204–205.</a:t>
+              <a:t>Source: CFA Institute, Curriculum Vol 7, Learning Module 9, §3 Exhibit 6 "Replication of Individual Positions under Put–Call Parity", printed p. 205.</a:t>
             </a:r>
             <a:endParaRPr lang="en-US" sz="750" dirty="0"/>
           </a:p>
@@ -13811,7 +14266,7 @@
                 <a:ea typeface="Calibri" pitchFamily="34" charset="-122"/>
                 <a:cs typeface="Calibri" pitchFamily="34" charset="-120"/>
               </a:rPr>
-              <a:t>Read the rows: to synthesize the position on the left, build the combination on the right.</a:t>
+              <a:t>Read a row: to build the position on the left, take the combination on the right. Every row is one rearrangement of S + p = c + PV(X).</a:t>
             </a:r>
             <a:endParaRPr lang="en-US" sz="1300" dirty="0"/>
           </a:p>
@@ -13864,7 +14319,7 @@
                           <a:ea typeface="Trebuchet MS" pitchFamily="34" charset="-122"/>
                           <a:cs typeface="Trebuchet MS" pitchFamily="34" charset="-120"/>
                         </a:rPr>
-                        <a:t>Target position</a:t>
+                        <a:t>Position to build</a:t>
                       </a:r>
                       <a:endParaRPr lang="en-US" sz="1100" dirty="0">
                         <a:latin typeface="Trebuchet MS" charset="0"/>
@@ -14116,7 +14571,7 @@
                           <a:ea typeface="Calibri" pitchFamily="34" charset="-122"/>
                           <a:cs typeface="Calibri" pitchFamily="34" charset="-120"/>
                         </a:rPr>
-                        <a:t>Long underlying (S₀)</a:t>
+                        <a:t>Underlying (S₀)</a:t>
                       </a:r>
                       <a:endParaRPr lang="en-US" sz="1100" dirty="0">
                         <a:latin typeface="Calibri" charset="0"/>
@@ -14216,7 +14671,7 @@
                           <a:ea typeface="Consolas" pitchFamily="34" charset="-122"/>
                           <a:cs typeface="Consolas" pitchFamily="34" charset="-120"/>
                         </a:rPr>
-                        <a:t>Long X·PV</a:t>
+                        <a:t>Long</a:t>
                       </a:r>
                       <a:endParaRPr lang="en-US" sz="1100" dirty="0">
                         <a:latin typeface="Consolas" charset="0"/>
@@ -14368,7 +14823,7 @@
                           <a:ea typeface="Calibri" pitchFamily="34" charset="-122"/>
                           <a:cs typeface="Calibri" pitchFamily="34" charset="-120"/>
                         </a:rPr>
-                        <a:t>Long risk-free bond (PV(X))</a:t>
+                        <a:t>Risk-free bond (PV(X))</a:t>
                       </a:r>
                       <a:endParaRPr lang="en-US" sz="1100" dirty="0">
                         <a:latin typeface="Calibri" charset="0"/>
@@ -14620,7 +15075,7 @@
                           <a:ea typeface="Calibri" pitchFamily="34" charset="-122"/>
                           <a:cs typeface="Calibri" pitchFamily="34" charset="-120"/>
                         </a:rPr>
-                        <a:t>Long call (c₀)</a:t>
+                        <a:t>Call option (c₀)</a:t>
                       </a:r>
                       <a:endParaRPr lang="en-US" sz="1100" dirty="0">
                         <a:latin typeface="Calibri" charset="0"/>
@@ -14720,7 +15175,7 @@
                           <a:ea typeface="Consolas" pitchFamily="34" charset="-122"/>
                           <a:cs typeface="Consolas" pitchFamily="34" charset="-120"/>
                         </a:rPr>
-                        <a:t>Short X·PV</a:t>
+                        <a:t>Short</a:t>
                       </a:r>
                       <a:endParaRPr lang="en-US" sz="1100" dirty="0">
                         <a:latin typeface="Consolas" charset="0"/>
@@ -14872,7 +15327,7 @@
                           <a:ea typeface="Calibri" pitchFamily="34" charset="-122"/>
                           <a:cs typeface="Calibri" pitchFamily="34" charset="-120"/>
                         </a:rPr>
-                        <a:t>Long put (p₀)</a:t>
+                        <a:t>Put option (p₀)</a:t>
                       </a:r>
                       <a:endParaRPr lang="en-US" sz="1100" dirty="0">
                         <a:latin typeface="Calibri" charset="0"/>
@@ -14972,7 +15427,7 @@
                           <a:ea typeface="Consolas" pitchFamily="34" charset="-122"/>
                           <a:cs typeface="Consolas" pitchFamily="34" charset="-120"/>
                         </a:rPr>
-                        <a:t>Long X·PV</a:t>
+                        <a:t>Long</a:t>
                       </a:r>
                       <a:endParaRPr lang="en-US" sz="1100" dirty="0">
                         <a:latin typeface="Consolas" charset="0"/>
@@ -15118,8 +15573,8 @@
         </p:nvSpPr>
         <p:spPr>
           <a:xfrm>
-            <a:off x="320040" y="3246120"/>
-            <a:ext cx="8503920" cy="1051560"/>
+            <a:off x="320040" y="2697480"/>
+            <a:ext cx="8503920" cy="1600200"/>
           </a:xfrm>
           <a:prstGeom prst="rect">
             <a:avLst/>
@@ -15138,8 +15593,8 @@
         </p:nvSpPr>
         <p:spPr>
           <a:xfrm>
-            <a:off x="320040" y="3246120"/>
-            <a:ext cx="73152" cy="1051560"/>
+            <a:off x="320040" y="2697480"/>
+            <a:ext cx="73152" cy="1600200"/>
           </a:xfrm>
           <a:prstGeom prst="rect">
             <a:avLst/>
@@ -15158,7 +15613,7 @@
         </p:nvSpPr>
         <p:spPr>
           <a:xfrm>
-            <a:off x="457200" y="3291840"/>
+            <a:off x="457200" y="2743200"/>
             <a:ext cx="8275320" cy="256032"/>
           </a:xfrm>
           <a:prstGeom prst="rect">
@@ -15186,7 +15641,7 @@
                 <a:ea typeface="Trebuchet MS" pitchFamily="34" charset="-122"/>
                 <a:cs typeface="Trebuchet MS" pitchFamily="34" charset="-120"/>
               </a:rPr>
-              <a:t>WHY THIS MATTERS IN PRACTICE</a:t>
+              <a:t>HOW TO REBUILD THIS TABLE INSTEAD OF MEMORISING IT</a:t>
             </a:r>
             <a:endParaRPr lang="en-US" sz="1100" dirty="0"/>
           </a:p>
@@ -15200,8 +15655,8 @@
         </p:nvSpPr>
         <p:spPr>
           <a:xfrm>
-            <a:off x="457200" y="3566160"/>
-            <a:ext cx="8275320" cy="685800"/>
+            <a:off x="457200" y="3017520"/>
+            <a:ext cx="8275320" cy="1234440"/>
           </a:xfrm>
           <a:prstGeom prst="rect">
             <a:avLst/>
@@ -15228,7 +15683,81 @@
                 <a:ea typeface="Calibri" pitchFamily="34" charset="-122"/>
                 <a:cs typeface="Calibri" pitchFamily="34" charset="-120"/>
               </a:rPr>
-              <a:t>Dealers synthesize stock exposure from options daily — because the option market can be deeper and cheaper to finance than the cash market. An equity-like payoff built from call − put + bond is the single most common use of put-call parity in sell-side flow desks.</a:t>
+              <a:t>Start from S₀ + p₀ = c₀ + PV(X) and move one term at a time.</a:t>
+            </a:r>
+            <a:endParaRPr lang="en-US" sz="1200" dirty="0"/>
+          </a:p>
+          <a:p>
+            <a:pPr algn="l" indent="0" marL="0">
+              <a:buNone/>
+            </a:pPr>
+            <a:endParaRPr lang="en-US" sz="1200" dirty="0"/>
+          </a:p>
+          <a:p>
+            <a:pPr algn="l" indent="0" marL="0">
+              <a:buNone/>
+            </a:pPr>
+            <a:r>
+              <a:rPr lang="en-US" sz="1200" dirty="0">
+                <a:solidFill>
+                  <a:srgbClr val="334155"/>
+                </a:solidFill>
+                <a:latin typeface="Calibri" pitchFamily="34" charset="0"/>
+                <a:ea typeface="Calibri" pitchFamily="34" charset="-122"/>
+                <a:cs typeface="Calibri" pitchFamily="34" charset="-120"/>
+              </a:rPr>
+              <a:t>• Solve for S₀:  S₀ = c₀ − p₀ + PV(X)  →  long call, short put, long bond. Row 1.</a:t>
+            </a:r>
+            <a:endParaRPr lang="en-US" sz="1200" dirty="0"/>
+          </a:p>
+          <a:p>
+            <a:pPr algn="l" indent="0" marL="0">
+              <a:buNone/>
+            </a:pPr>
+            <a:r>
+              <a:rPr lang="en-US" sz="1200" dirty="0">
+                <a:solidFill>
+                  <a:srgbClr val="334155"/>
+                </a:solidFill>
+                <a:latin typeface="Calibri" pitchFamily="34" charset="0"/>
+                <a:ea typeface="Calibri" pitchFamily="34" charset="-122"/>
+                <a:cs typeface="Calibri" pitchFamily="34" charset="-120"/>
+              </a:rPr>
+              <a:t>• Solve for PV(X):  PV(X) = S₀ − c₀ + p₀  →  long underlying, short call, long put. Row 2.</a:t>
+            </a:r>
+            <a:endParaRPr lang="en-US" sz="1200" dirty="0"/>
+          </a:p>
+          <a:p>
+            <a:pPr algn="l" indent="0" marL="0">
+              <a:buNone/>
+            </a:pPr>
+            <a:r>
+              <a:rPr lang="en-US" sz="1200" dirty="0">
+                <a:solidFill>
+                  <a:srgbClr val="334155"/>
+                </a:solidFill>
+                <a:latin typeface="Calibri" pitchFamily="34" charset="0"/>
+                <a:ea typeface="Calibri" pitchFamily="34" charset="-122"/>
+                <a:cs typeface="Calibri" pitchFamily="34" charset="-120"/>
+              </a:rPr>
+              <a:t>• Solve for c₀:  c₀ = S₀ + p₀ − PV(X)  →  long underlying, long put, short bond. Row 3.</a:t>
+            </a:r>
+            <a:endParaRPr lang="en-US" sz="1200" dirty="0"/>
+          </a:p>
+          <a:p>
+            <a:pPr algn="l" indent="0" marL="0">
+              <a:buNone/>
+            </a:pPr>
+            <a:r>
+              <a:rPr lang="en-US" sz="1200" dirty="0">
+                <a:solidFill>
+                  <a:srgbClr val="334155"/>
+                </a:solidFill>
+                <a:latin typeface="Calibri" pitchFamily="34" charset="0"/>
+                <a:ea typeface="Calibri" pitchFamily="34" charset="-122"/>
+                <a:cs typeface="Calibri" pitchFamily="34" charset="-120"/>
+              </a:rPr>
+              <a:t>• Solve for p₀:  p₀ = c₀ + PV(X) − S₀  →  long call, long bond, short underlying. Row 4.</a:t>
             </a:r>
             <a:endParaRPr lang="en-US" sz="1200" dirty="0"/>
           </a:p>
@@ -15605,7 +16134,7 @@
                 <a:ea typeface="Calibri" pitchFamily="34" charset="-122"/>
                 <a:cs typeface="Calibri" pitchFamily="34" charset="-120"/>
               </a:rPr>
-              <a:t>Call/put payoffs · long vs short · covered call · protective put · VFO Biomian hedge examples</a:t>
+              <a:t>Call/put payoffs at expiry · the four basic positions · covered call · protective put · replicating an option</a:t>
             </a:r>
             <a:endParaRPr lang="en-US" sz="1100" dirty="0"/>
           </a:p>
@@ -15771,7 +16300,7 @@
                 <a:ea typeface="Calibri" pitchFamily="34" charset="-122"/>
                 <a:cs typeface="Calibri" pitchFamily="34" charset="-120"/>
               </a:rPr>
-              <a:t>Exercise + time value split · ITM/ATM/OTM · no-arbitrage bounds · six-factor sensitivity table</a:t>
+              <a:t>Exercise value + time value · ITM/ATM/OTM from the holder side · no-arbitrage bounds · the six-factor sign table</a:t>
             </a:r>
             <a:endParaRPr lang="en-US" sz="1100" dirty="0"/>
           </a:p>
@@ -15937,7 +16466,7 @@
                 <a:ea typeface="Calibri" pitchFamily="34" charset="-122"/>
                 <a:cs typeface="Calibri" pitchFamily="34" charset="-120"/>
               </a:rPr>
-              <a:t>Protective put = fiduciary call · S + p = c + PV(X) · synthetics · arbitrage trade · forward parity · firm value</a:t>
+              <a:t>Protective put = fiduciary call · S + p = c + PV(X) · the arbitrage trade · synthetics · forward parity · firm value</a:t>
             </a:r>
             <a:endParaRPr lang="en-US" sz="1100" dirty="0"/>
           </a:p>
@@ -16103,7 +16632,7 @@
                 <a:ea typeface="Calibri" pitchFamily="34" charset="-122"/>
                 <a:cs typeface="Calibri" pitchFamily="34" charset="-120"/>
               </a:rPr>
-              <a:t>u/d factors · hedge ratio · risk-neutral probability · Hightest Capital example · Black-Scholes as limit</a:t>
+              <a:t>Up/down gross returns · hedge ratio · risk-neutral probability π · Hightest Capital · where the tree leads next</a:t>
             </a:r>
             <a:endParaRPr lang="en-US" sz="1100" dirty="0"/>
           </a:p>
@@ -16202,7 +16731,7 @@
               <a:buNone/>
             </a:pPr>
             <a:r>
-              <a:rPr lang="en-US" sz="1800" b="1" dirty="0">
+              <a:rPr lang="en-US" sz="1700" b="1" dirty="0">
                 <a:solidFill>
                   <a:srgbClr val="FFFFFF"/>
                 </a:solidFill>
@@ -16210,9 +16739,9 @@
                 <a:ea typeface="Trebuchet MS" pitchFamily="34" charset="-122"/>
                 <a:cs typeface="Trebuchet MS" pitchFamily="34" charset="-120"/>
               </a:rPr>
-              <a:t>A synthetic long stock is +call − put + cash — identical payoff to owning the underlying outright</a:t>
-            </a:r>
-            <a:endParaRPr lang="en-US" sz="1800" dirty="0"/>
+              <a:t>A synthetic long stock is long call − short put + PV(X) in cash — same payoff, same cost, no share ever bought</a:t>
+            </a:r>
+            <a:endParaRPr lang="en-US" sz="1700" dirty="0"/>
           </a:p>
         </p:txBody>
       </p:sp>
@@ -16314,7 +16843,7 @@
                 <a:ea typeface="Calibri" pitchFamily="34" charset="-122"/>
                 <a:cs typeface="Calibri" pitchFamily="34" charset="-120"/>
               </a:rPr>
-              <a:t>Source: CFA Institute, Curriculum Vol 7, Learning Module 9, §3 Synthetic Positions, pp. 204–206.</a:t>
+              <a:t>Source: CFA Institute, Curriculum Vol 7, Learning Module 9, §3 Equation 2 and Exhibit 6, printed pp. 204–205.</a:t>
             </a:r>
             <a:endParaRPr lang="en-US" sz="750" dirty="0"/>
           </a:p>
@@ -16356,7 +16885,7 @@
                 <a:ea typeface="Calibri" pitchFamily="34" charset="-122"/>
                 <a:cs typeface="Calibri" pitchFamily="34" charset="-120"/>
               </a:rPr>
-              <a:t>Useful when direct share purchase is expensive (dividends to miss, short-borrow to avoid, regulatory capital). The replicating portfolio bypasses the cash market entirely.</a:t>
+              <a:t>Useful when the cash share is awkward to hold: expensive to borrow, capital-heavy, or restricted. The replicating portfolio bypasses the register.</a:t>
             </a:r>
             <a:endParaRPr lang="en-US" sz="1300" dirty="0"/>
           </a:p>
@@ -16485,7 +17014,7 @@
                 <a:ea typeface="Trebuchet MS" pitchFamily="34" charset="-122"/>
                 <a:cs typeface="Trebuchet MS" pitchFamily="34" charset="-120"/>
               </a:rPr>
-              <a:t>SYNTHETIC LONG STOCK — BIOMIAN NUMBERS</a:t>
+              <a:t>SYNTHETIC LONG STOCK — THE BIOMIAN NUMBERS</a:t>
             </a:r>
             <a:endParaRPr lang="en-US" sz="1100" dirty="0"/>
           </a:p>
@@ -16527,7 +17056,7 @@
                 <a:ea typeface="Calibri" pitchFamily="34" charset="-122"/>
                 <a:cs typeface="Calibri" pitchFamily="34" charset="-120"/>
               </a:rPr>
-              <a:t>Same inputs as parity example: 6-month options at X = INR 265, c₀ = 59, p₀ = 23.85, r = 4%, T = 0.5, S₀ = INR 295.</a:t>
+              <a:t>The same trade as before: six-month options at X = INR 265, c₀ = 59, p₀ = 23.85, r = 4%, S₀ = INR 295.</a:t>
             </a:r>
             <a:endParaRPr lang="en-US" sz="1200" dirty="0"/>
           </a:p>
@@ -16589,7 +17118,7 @@
                 <a:ea typeface="Calibri" pitchFamily="34" charset="-122"/>
                 <a:cs typeface="Calibri" pitchFamily="34" charset="-120"/>
               </a:rPr>
-              <a:t>Buy call: −INR 59
+              <a:t>Buy the call:  −INR 59.00
 </a:t>
             </a:r>
             <a:pPr indent="0" marL="0">
@@ -16624,7 +17153,7 @@
                 <a:ea typeface="Calibri" pitchFamily="34" charset="-122"/>
                 <a:cs typeface="Calibri" pitchFamily="34" charset="-120"/>
               </a:rPr>
-              <a:t>Sell put: +INR 23.85
+              <a:t>Sell the put:  +INR 23.85
 </a:t>
             </a:r>
             <a:pPr indent="0" marL="0">
@@ -16659,7 +17188,7 @@
                 <a:ea typeface="Calibri" pitchFamily="34" charset="-122"/>
                 <a:cs typeface="Calibri" pitchFamily="34" charset="-120"/>
               </a:rPr>
-              <a:t>Buy zero-coupon bond maturing at X = 265: −PV(X) = −INR 259.85
+              <a:t>Buy a zero-coupon bond paying X = 265 at T:  −INR 259.85
 </a:t>
             </a:r>
             <a:pPr indent="0" marL="0">
@@ -16694,7 +17223,7 @@
                 <a:ea typeface="Calibri" pitchFamily="34" charset="-122"/>
                 <a:cs typeface="Calibri" pitchFamily="34" charset="-120"/>
               </a:rPr>
-              <a:t>Total initial outlay: 59 − 23.85 + 259.85 = INR 295  ⇒  equal to buying stock
+              <a:t>Net outlay = 59 − 23.85 + 259.85 = INR 295.00 — exactly S₀
 </a:t>
             </a:r>
             <a:pPr indent="0" marL="0">
@@ -16729,7 +17258,7 @@
                 <a:ea typeface="Calibri" pitchFamily="34" charset="-122"/>
                 <a:cs typeface="Calibri" pitchFamily="34" charset="-120"/>
               </a:rPr>
-              <a:t>At T: if ST &gt; 265, call pays ST − 265 + bond 265 = ST; if ST &lt; 265, assigned on put: pay ST − 265 + bond 265 = ST. Payoff = ST either way.</a:t>
+              <a:t>At T either branch nets ST: (ST − 265) or −(265 − ST), plus the bond’s 265</a:t>
             </a:r>
             <a:endParaRPr lang="en-US" sz="1150" dirty="0"/>
           </a:p>
@@ -16791,7 +17320,7 @@
                 <a:ea typeface="Consolas" pitchFamily="34" charset="-122"/>
                 <a:cs typeface="Consolas" pitchFamily="34" charset="-120"/>
               </a:rPr>
-              <a:t>Synthetic long stock costs exactly S₀ = 295 today and pays ST at expiry — indistinguishable from the cash stock.</a:t>
+              <a:t>Costs S₀ = 295 today, pays ST at expiry — indistinguishable from the cash share.</a:t>
             </a:r>
             <a:endParaRPr lang="en-US" sz="1150" dirty="0"/>
           </a:p>
@@ -16890,7 +17419,7 @@
               <a:buNone/>
             </a:pPr>
             <a:r>
-              <a:rPr lang="en-US" sz="1600" b="1" dirty="0">
+              <a:rPr lang="en-US" sz="1700" b="1" dirty="0">
                 <a:solidFill>
                   <a:srgbClr val="FFFFFF"/>
                 </a:solidFill>
@@ -16898,9 +17427,9 @@
                 <a:ea typeface="Trebuchet MS" pitchFamily="34" charset="-122"/>
                 <a:cs typeface="Trebuchet MS" pitchFamily="34" charset="-120"/>
               </a:rPr>
-              <a:t>Put-call forward parity replaces S₀ with PV of the forward price — useful when the cash asset is hard to hold but the forward is liquid</a:t>
-            </a:r>
-            <a:endParaRPr lang="en-US" sz="1600" dirty="0"/>
+              <a:t>Put-call forward parity swaps S₀ for the PV of the forward — the version you use when the cash asset is hard to hold</a:t>
+            </a:r>
+            <a:endParaRPr lang="en-US" sz="1700" dirty="0"/>
           </a:p>
         </p:txBody>
       </p:sp>
@@ -17002,7 +17531,7 @@
                 <a:ea typeface="Calibri" pitchFamily="34" charset="-122"/>
                 <a:cs typeface="Calibri" pitchFamily="34" charset="-120"/>
               </a:rPr>
-              <a:t>Source: CFA Institute, Curriculum Vol 7, Learning Module 9, §5 Example 4 "VFO Put-Call Forward Parity", pp. 207–209.</a:t>
+              <a:t>Source: CFA Institute, Curriculum Vol 7, Learning Module 9, §5 "Put–Call Forward Parity", Equation 3, Exhibits 7–8 and Example 4, printed pp. 207–209.</a:t>
             </a:r>
             <a:endParaRPr lang="en-US" sz="750" dirty="0"/>
           </a:p>
@@ -17044,7 +17573,7 @@
                 <a:ea typeface="Calibri" pitchFamily="34" charset="-122"/>
                 <a:cs typeface="Calibri" pitchFamily="34" charset="-120"/>
               </a:rPr>
-              <a:t>For commodities, currencies, or shares with complex carry, traders often start pricing options from the forward, not the spot.</a:t>
+              <a:t>For commodities, currencies and shares with awkward carry, traders price options off the forward rather than the spot.</a:t>
             </a:r>
             <a:endParaRPr lang="en-US" sz="1300" dirty="0"/>
           </a:p>
@@ -17106,7 +17635,24 @@
                 <a:ea typeface="Consolas" pitchFamily="34" charset="-122"/>
                 <a:cs typeface="Consolas" pitchFamily="34" charset="-120"/>
               </a:rPr>
-              <a:t>F₀(T)·(1 + r)⁻ᵀ  +  p₀   =   c₀  +  X(1 + r)⁻ᵀ       ⇒       p₀ − c₀  =  [X − F₀(T)]·(1 + r)⁻ᵀ</a:t>
+              <a:t>F₀(T)(1+r)⁻ᵀ + p₀  =  c₀ + X(1+r)⁻ᵀ</a:t>
+            </a:r>
+            <a:endParaRPr lang="en-US" sz="1800" dirty="0"/>
+          </a:p>
+          <a:p>
+            <a:pPr algn="ctr" indent="0" marL="0">
+              <a:buNone/>
+            </a:pPr>
+            <a:r>
+              <a:rPr lang="en-US" sz="1800" b="1" dirty="0">
+                <a:solidFill>
+                  <a:srgbClr val="FFFFFF"/>
+                </a:solidFill>
+                <a:latin typeface="Consolas" pitchFamily="34" charset="0"/>
+                <a:ea typeface="Consolas" pitchFamily="34" charset="-122"/>
+                <a:cs typeface="Consolas" pitchFamily="34" charset="-120"/>
+              </a:rPr>
+              <a:t>⇒   p₀ − c₀  =  [X − F₀(T)](1+r)⁻ᵀ</a:t>
             </a:r>
             <a:endParaRPr lang="en-US" sz="1800" dirty="0"/>
           </a:p>
@@ -17148,7 +17694,7 @@
                 <a:ea typeface="Calibri" pitchFamily="34" charset="-122"/>
                 <a:cs typeface="Calibri" pitchFamily="34" charset="-120"/>
               </a:rPr>
-              <a:t>where: F₀(T) = no-arbitrage forward price. When F₀(T) = X, p₀ = c₀ — the famous at-the-money-forward equivalence.</a:t>
+              <a:t>where: A forward purchase plus a bond of face F₀(T) replicates the underlying. When F₀(T) = X the right side is zero, so p₀ = c₀ — the at-the-money-forward equivalence.</a:t>
             </a:r>
             <a:endParaRPr lang="en-US" sz="1100" dirty="0"/>
           </a:p>
@@ -17162,8 +17708,8 @@
         </p:nvSpPr>
         <p:spPr>
           <a:xfrm>
-            <a:off x="320040" y="2286000"/>
-            <a:ext cx="8503920" cy="2011680"/>
+            <a:off x="320040" y="2148840"/>
+            <a:ext cx="8503920" cy="2148840"/>
           </a:xfrm>
           <a:prstGeom prst="rect">
             <a:avLst/>
@@ -17187,7 +17733,7 @@
         </p:nvSpPr>
         <p:spPr>
           <a:xfrm>
-            <a:off x="457200" y="2331720"/>
+            <a:off x="457200" y="2194560"/>
             <a:ext cx="8229600" cy="256032"/>
           </a:xfrm>
           <a:prstGeom prst="rect">
@@ -17215,7 +17761,7 @@
                 <a:ea typeface="Trebuchet MS" pitchFamily="34" charset="-122"/>
                 <a:cs typeface="Trebuchet MS" pitchFamily="34" charset="-120"/>
               </a:rPr>
-              <a:t>CFA LM 9 EXAMPLE 4 — BIOMIAN FROM FORWARD + BOND</a:t>
+              <a:t>CFA LM 9 EXAMPLE 4 — VFO PUT–CALL FORWARD PARITY</a:t>
             </a:r>
             <a:endParaRPr lang="en-US" sz="1100" dirty="0"/>
           </a:p>
@@ -17229,7 +17775,7 @@
         </p:nvSpPr>
         <p:spPr>
           <a:xfrm>
-            <a:off x="457200" y="2624328"/>
+            <a:off x="457200" y="2487168"/>
             <a:ext cx="8229600" cy="457200"/>
           </a:xfrm>
           <a:prstGeom prst="rect">
@@ -17257,7 +17803,7 @@
                 <a:ea typeface="Calibri" pitchFamily="34" charset="-122"/>
                 <a:cs typeface="Calibri" pitchFamily="34" charset="-120"/>
               </a:rPr>
-              <a:t>S₀ = 295, r = 4%, T = 0.5  ⇒  forward F₀(T) = 295 × 1.04⁰·⁵ = INR 300.84. Same X = 265, c₀ = 59.</a:t>
+              <a:t>The same Biomian trade priced off the forward: S₀ = 295, r = 4%, T = 0.5, so F₀(T) = 295 × 1.04⁰·⁵ = INR 300.84. Still X = 265 and c₀ = INR 59.</a:t>
             </a:r>
             <a:endParaRPr lang="en-US" sz="1200" dirty="0"/>
           </a:p>
@@ -17271,8 +17817,8 @@
         </p:nvSpPr>
         <p:spPr>
           <a:xfrm>
-            <a:off x="457200" y="3136392"/>
-            <a:ext cx="8229600" cy="649224"/>
+            <a:off x="457200" y="2999232"/>
+            <a:ext cx="8229600" cy="786384"/>
           </a:xfrm>
           <a:prstGeom prst="rect">
             <a:avLst/>
@@ -17294,7 +17840,7 @@
               <a:buNone/>
             </a:pPr>
             <a:r>
-              <a:rPr lang="en-US" sz="1150" b="1" dirty="0">
+              <a:rPr lang="en-US" sz="1200" b="1" dirty="0">
                 <a:solidFill>
                   <a:srgbClr val="1B2A4A"/>
                 </a:solidFill>
@@ -17311,7 +17857,7 @@
               <a:buNone/>
             </a:pPr>
             <a:r>
-              <a:rPr lang="en-US" sz="1150" dirty="0">
+              <a:rPr lang="en-US" sz="1200" dirty="0">
                 <a:solidFill>
                   <a:srgbClr val="334155"/>
                 </a:solidFill>
@@ -17319,7 +17865,7 @@
                 <a:ea typeface="Calibri" pitchFamily="34" charset="-122"/>
                 <a:cs typeface="Calibri" pitchFamily="34" charset="-120"/>
               </a:rPr>
-              <a:t>Forward-parity form: p₀ − c₀ = (X − F₀(T)) · (1 + r)⁻ᵀ
+              <a:t>Rearranged forward parity: p₀ − c₀ = [X − F₀(T)](1 + r)⁻ᵀ
 </a:t>
             </a:r>
             <a:pPr indent="0" marL="0">
@@ -17329,7 +17875,7 @@
               <a:buNone/>
             </a:pPr>
             <a:r>
-              <a:rPr lang="en-US" sz="1150" b="1" dirty="0">
+              <a:rPr lang="en-US" sz="1200" b="1" dirty="0">
                 <a:solidFill>
                   <a:srgbClr val="1B2A4A"/>
                 </a:solidFill>
@@ -17346,7 +17892,7 @@
               <a:buNone/>
             </a:pPr>
             <a:r>
-              <a:rPr lang="en-US" sz="1150" dirty="0">
+              <a:rPr lang="en-US" sz="1200" dirty="0">
                 <a:solidFill>
                   <a:srgbClr val="334155"/>
                 </a:solidFill>
@@ -17354,7 +17900,7 @@
                 <a:ea typeface="Calibri" pitchFamily="34" charset="-122"/>
                 <a:cs typeface="Calibri" pitchFamily="34" charset="-120"/>
               </a:rPr>
-              <a:t>p₀ − 59 = (265 − 300.84) × 1.04⁻⁰·⁵ = −35.84 / 1.0198
+              <a:t>p₀ − 59 = (265 − 300.84) × 1.04⁻⁰·⁵ = −35.84 / 1.0198 = −35.14
 </a:t>
             </a:r>
             <a:pPr indent="0" marL="0">
@@ -17364,7 +17910,7 @@
               <a:buNone/>
             </a:pPr>
             <a:r>
-              <a:rPr lang="en-US" sz="1150" b="1" dirty="0">
+              <a:rPr lang="en-US" sz="1200" b="1" dirty="0">
                 <a:solidFill>
                   <a:srgbClr val="1B2A4A"/>
                 </a:solidFill>
@@ -17381,7 +17927,7 @@
               <a:buNone/>
             </a:pPr>
             <a:r>
-              <a:rPr lang="en-US" sz="1150" dirty="0">
+              <a:rPr lang="en-US" sz="1200" dirty="0">
                 <a:solidFill>
                   <a:srgbClr val="334155"/>
                 </a:solidFill>
@@ -17389,9 +17935,9 @@
                 <a:ea typeface="Calibri" pitchFamily="34" charset="-122"/>
                 <a:cs typeface="Calibri" pitchFamily="34" charset="-120"/>
               </a:rPr>
-              <a:t>p₀ − 59 = −35.14   ⇒   p₀ = INR 23.86</a:t>
-            </a:r>
-            <a:endParaRPr lang="en-US" sz="1150" dirty="0"/>
+              <a:t>p₀ = 59 − 35.14 = INR 23.86</a:t>
+            </a:r>
+            <a:endParaRPr lang="en-US" sz="1200" dirty="0"/>
           </a:p>
         </p:txBody>
       </p:sp>
@@ -17451,7 +17997,7 @@
                 <a:ea typeface="Consolas" pitchFamily="34" charset="-122"/>
                 <a:cs typeface="Consolas" pitchFamily="34" charset="-120"/>
               </a:rPr>
-              <a:t>Same INR 23.86 answer — confirms forward and spot parities are algebraically equivalent.</a:t>
+              <a:t>INR 23.86 — the same put, to a rounding penny. Spot parity and forward parity are one equation.</a:t>
             </a:r>
             <a:endParaRPr lang="en-US" sz="1150" dirty="0"/>
           </a:p>
@@ -17558,7 +18104,7 @@
                 <a:ea typeface="Trebuchet MS" pitchFamily="34" charset="-122"/>
                 <a:cs typeface="Trebuchet MS" pitchFamily="34" charset="-120"/>
               </a:rPr>
-              <a:t>Put-call parity prices claims on a levered firm: equity is a long call on assets, risky debt is a risk-free bond minus a short put</a:t>
+              <a:t>Parity prices a levered firm: equity is a call on the assets, risky debt is a risk-free bond plus a sold put</a:t>
             </a:r>
             <a:endParaRPr lang="en-US" sz="1700" dirty="0"/>
           </a:p>
@@ -17662,7 +18208,7 @@
                 <a:ea typeface="Calibri" pitchFamily="34" charset="-122"/>
                 <a:cs typeface="Calibri" pitchFamily="34" charset="-120"/>
               </a:rPr>
-              <a:t>Source: CFA Institute, Curriculum Vol 7, Learning Module 9, §6 "Firm Value Application", pp. 209–212.</a:t>
+              <a:t>Source: CFA Institute, Curriculum Vol 7, Learning Module 9, §6 "Option Put–Call Parity Applications: Firm Value", Exhibit 9 and Equation 5, printed pp. 209–211.</a:t>
             </a:r>
             <a:endParaRPr lang="en-US" sz="750" dirty="0"/>
           </a:p>
@@ -17704,7 +18250,7 @@
                 <a:ea typeface="Calibri" pitchFamily="34" charset="-122"/>
                 <a:cs typeface="Calibri" pitchFamily="34" charset="-120"/>
               </a:rPr>
-              <a:t>Merton (1974): treat the firm as assets V, a zero-coupon debt face D, and equity as the residual — the option analogy falls out.</a:t>
+              <a:t>V₀ + p₀ = c₀ + PV(D), so V₀ = c₀ + PV(D) − p₀. Substitute firm value for the underlying and debt face for the strike — parity does the rest.</a:t>
             </a:r>
             <a:endParaRPr lang="en-US" sz="1300" dirty="0"/>
           </a:p>
@@ -17828,7 +18374,7 @@
                 <a:ea typeface="Calibri" pitchFamily="34" charset="-122"/>
                 <a:cs typeface="Calibri" pitchFamily="34" charset="-120"/>
               </a:rPr>
-              <a:t>Payoff at T: Max(0, VT − D)</a:t>
+              <a:t>Payoff at T:  Max(0, VT − D)</a:t>
             </a:r>
             <a:endParaRPr lang="en-US" sz="1150" dirty="0"/>
           </a:p>
@@ -17851,14 +18397,8 @@
                 <a:ea typeface="Calibri" pitchFamily="34" charset="-122"/>
                 <a:cs typeface="Calibri" pitchFamily="34" charset="-120"/>
               </a:rPr>
-              <a:t>= Long call on firm value with strike D</a:t>
-            </a:r>
-            <a:endParaRPr lang="en-US" sz="1150" dirty="0"/>
-          </a:p>
-          <a:p>
-            <a:pPr algn="l" indent="0" marL="0">
-              <a:buNone/>
-            </a:pPr>
+              <a:t>= long firm assets + a LONG put struck at D</a:t>
+            </a:r>
             <a:endParaRPr lang="en-US" sz="1150" dirty="0"/>
           </a:p>
           <a:p>
@@ -17874,8 +18414,14 @@
                 <a:ea typeface="Calibri" pitchFamily="34" charset="-122"/>
                 <a:cs typeface="Calibri" pitchFamily="34" charset="-120"/>
               </a:rPr>
-              <a:t>• Unlimited upside (residual claim)</a:t>
-            </a:r>
+              <a:t>= a LONG CALL on firm value, strike D</a:t>
+            </a:r>
+            <a:endParaRPr lang="en-US" sz="1150" dirty="0"/>
+          </a:p>
+          <a:p>
+            <a:pPr algn="l" indent="0" marL="0">
+              <a:buNone/>
+            </a:pPr>
             <a:endParaRPr lang="en-US" sz="1150" dirty="0"/>
           </a:p>
           <a:p>
@@ -17891,7 +18437,7 @@
                 <a:ea typeface="Calibri" pitchFamily="34" charset="-122"/>
                 <a:cs typeface="Calibri" pitchFamily="34" charset="-120"/>
               </a:rPr>
-              <a:t>• Downside limited to zero (limited liability)</a:t>
+              <a:t>• Unlimited upside — the residual claim</a:t>
             </a:r>
             <a:endParaRPr lang="en-US" sz="1150" dirty="0"/>
           </a:p>
@@ -17908,7 +18454,58 @@
                 <a:ea typeface="Calibri" pitchFamily="34" charset="-122"/>
                 <a:cs typeface="Calibri" pitchFamily="34" charset="-120"/>
               </a:rPr>
-              <a:t>• Value-creating projects &amp; vol both boost equity — textbook risk-shifting incentive</a:t>
+              <a:t>• Downside stops at zero: limited liability IS the put</a:t>
+            </a:r>
+            <a:endParaRPr lang="en-US" sz="1150" dirty="0"/>
+          </a:p>
+          <a:p>
+            <a:pPr algn="l" indent="0" marL="0">
+              <a:buNone/>
+            </a:pPr>
+            <a:r>
+              <a:rPr lang="en-US" sz="1150" dirty="0">
+                <a:solidFill>
+                  <a:srgbClr val="334155"/>
+                </a:solidFill>
+                <a:latin typeface="Calibri" pitchFamily="34" charset="0"/>
+                <a:ea typeface="Calibri" pitchFamily="34" charset="-122"/>
+                <a:cs typeface="Calibri" pitchFamily="34" charset="-120"/>
+              </a:rPr>
+              <a:t>• Both new projects and more volatility raise the call, which is the risk-shifting incentive in one line</a:t>
+            </a:r>
+            <a:endParaRPr lang="en-US" sz="1150" dirty="0"/>
+          </a:p>
+          <a:p>
+            <a:pPr algn="l" indent="0" marL="0">
+              <a:buNone/>
+            </a:pPr>
+            <a:r>
+              <a:rPr lang="en-US" sz="1150" dirty="0">
+                <a:solidFill>
+                  <a:srgbClr val="334155"/>
+                </a:solidFill>
+                <a:latin typeface="Calibri" pitchFamily="34" charset="0"/>
+                <a:ea typeface="Calibri" pitchFamily="34" charset="-122"/>
+                <a:cs typeface="Calibri" pitchFamily="34" charset="-120"/>
+              </a:rPr>
+              <a:t>• The put shareholders hold is written by the lenders. That single transfer is what leverage really is</a:t>
+            </a:r>
+            <a:endParaRPr lang="en-US" sz="1150" dirty="0"/>
+          </a:p>
+          <a:p>
+            <a:pPr algn="l" indent="0" marL="0">
+              <a:buNone/>
+            </a:pPr>
+            <a:r>
+              <a:rPr lang="en-US" sz="1150" dirty="0">
+                <a:solidFill>
+                  <a:srgbClr val="334155"/>
+                </a:solidFill>
+                <a:latin typeface="Calibri" pitchFamily="34" charset="0"/>
+                <a:ea typeface="Calibri" pitchFamily="34" charset="-122"/>
+                <a:cs typeface="Calibri" pitchFamily="34" charset="-120"/>
+              </a:rPr>
+              <a:t>• Raise leverage and the call moves closer to the money — good for equity, paid for by the other panel</a:t>
             </a:r>
             <a:endParaRPr lang="en-US" sz="1150" dirty="0"/>
           </a:p>
@@ -18032,7 +18629,7 @@
                 <a:ea typeface="Calibri" pitchFamily="34" charset="-122"/>
                 <a:cs typeface="Calibri" pitchFamily="34" charset="-120"/>
               </a:rPr>
-              <a:t>Payoff at T: Min(VT, D)</a:t>
+              <a:t>Payoff at T:  Min(VT, D) = D − Max(0, D − VT)</a:t>
             </a:r>
             <a:endParaRPr lang="en-US" sz="1150" dirty="0"/>
           </a:p>
@@ -18055,7 +18652,7 @@
                 <a:ea typeface="Calibri" pitchFamily="34" charset="-122"/>
                 <a:cs typeface="Calibri" pitchFamily="34" charset="-120"/>
               </a:rPr>
-              <a:t>= Risk-free bond of face D  −  Short put on VT with strike D</a:t>
+              <a:t>= long risk-free bond of face D + a SHORT put</a:t>
             </a:r>
             <a:endParaRPr lang="en-US" sz="1150" dirty="0"/>
           </a:p>
@@ -18078,7 +18675,7 @@
                 <a:ea typeface="Calibri" pitchFamily="34" charset="-122"/>
                 <a:cs typeface="Calibri" pitchFamily="34" charset="-120"/>
               </a:rPr>
-              <a:t>• Upside capped at D (face amount)</a:t>
+              <a:t>• Upside capped at D — you can only be repaid</a:t>
             </a:r>
             <a:endParaRPr lang="en-US" sz="1150" dirty="0"/>
           </a:p>
@@ -18095,7 +18692,7 @@
                 <a:ea typeface="Calibri" pitchFamily="34" charset="-122"/>
                 <a:cs typeface="Calibri" pitchFamily="34" charset="-120"/>
               </a:rPr>
-              <a:t>• Downside when VT &lt; D (default)</a:t>
+              <a:t>• Downside below D on default: that is the sold put</a:t>
             </a:r>
             <a:endParaRPr lang="en-US" sz="1150" dirty="0"/>
           </a:p>
@@ -18112,7 +18709,41 @@
                 <a:ea typeface="Calibri" pitchFamily="34" charset="-122"/>
                 <a:cs typeface="Calibri" pitchFamily="34" charset="-120"/>
               </a:rPr>
-              <a:t>• Credit spread = price of the sold put — and grows with firm volatility</a:t>
+              <a:t>• The credit spread IS the premium on that put, and it widens with the volatility of firm value</a:t>
+            </a:r>
+            <a:endParaRPr lang="en-US" sz="1150" dirty="0"/>
+          </a:p>
+          <a:p>
+            <a:pPr algn="l" indent="0" marL="0">
+              <a:buNone/>
+            </a:pPr>
+            <a:r>
+              <a:rPr lang="en-US" sz="1150" dirty="0">
+                <a:solidFill>
+                  <a:srgbClr val="334155"/>
+                </a:solidFill>
+                <a:latin typeface="Calibri" pitchFamily="34" charset="0"/>
+                <a:ea typeface="Calibri" pitchFamily="34" charset="-122"/>
+                <a:cs typeface="Calibri" pitchFamily="34" charset="-120"/>
+              </a:rPr>
+              <a:t>• Recovery in default is VT, not D. The gap is the sold put paying out</a:t>
+            </a:r>
+            <a:endParaRPr lang="en-US" sz="1150" dirty="0"/>
+          </a:p>
+          <a:p>
+            <a:pPr algn="l" indent="0" marL="0">
+              <a:buNone/>
+            </a:pPr>
+            <a:r>
+              <a:rPr lang="en-US" sz="1150" dirty="0">
+                <a:solidFill>
+                  <a:srgbClr val="334155"/>
+                </a:solidFill>
+                <a:latin typeface="Calibri" pitchFamily="34" charset="0"/>
+                <a:ea typeface="Calibri" pitchFamily="34" charset="-122"/>
+                <a:cs typeface="Calibri" pitchFamily="34" charset="-120"/>
+              </a:rPr>
+              <a:t>• Subordinating the debt does not change the argument — it only moves the strike</a:t>
             </a:r>
             <a:endParaRPr lang="en-US" sz="1150" dirty="0"/>
           </a:p>
@@ -18430,7 +19061,7 @@
                 <a:ea typeface="Trebuchet MS" pitchFamily="34" charset="-122"/>
                 <a:cs typeface="Trebuchet MS" pitchFamily="34" charset="-120"/>
               </a:rPr>
-              <a:t>Pricing a contingent claim requires a model of future prices — the binomial tree gives the simplest honest one</a:t>
+              <a:t>Options need a model of the future because the payoff is kinked — the binomial tree is the simplest honest one</a:t>
             </a:r>
             <a:endParaRPr lang="en-US" sz="1700" dirty="0"/>
           </a:p>
@@ -18534,7 +19165,7 @@
                 <a:ea typeface="Calibri" pitchFamily="34" charset="-122"/>
                 <a:cs typeface="Calibri" pitchFamily="34" charset="-120"/>
               </a:rPr>
-              <a:t>Source: CFA Institute, Curriculum Vol 7, Learning Module 10, §2–3 "The Binomial Model", pp. 221–223.</a:t>
+              <a:t>Source: CFA Institute, Curriculum Vol 7, Learning Module 10, §2 "Binomial Valuation" and §3 "The Binomial Model", Equations 1–2 and Exhibit 1, printed pp. 221–223.</a:t>
             </a:r>
             <a:endParaRPr lang="en-US" sz="750" dirty="0"/>
           </a:p>
@@ -18576,7 +19207,7 @@
                 <a:ea typeface="Calibri" pitchFamily="34" charset="-122"/>
                 <a:cs typeface="Calibri" pitchFamily="34" charset="-120"/>
               </a:rPr>
-              <a:t>Forwards need no model of the future (payoff is linear). Options do (payoff has a kink) — the binomial tree is the MVP of that model class.</a:t>
+              <a:t>A forward payoff is linear, so it replicates without any view of the future. An option payoff bends at X, and that bend forces a model.</a:t>
             </a:r>
             <a:endParaRPr lang="en-US" sz="1300" dirty="0"/>
           </a:p>
@@ -18638,7 +19269,7 @@
                 <a:ea typeface="Consolas" pitchFamily="34" charset="-122"/>
                 <a:cs typeface="Consolas" pitchFamily="34" charset="-120"/>
               </a:rPr>
-              <a:t>S_u  =  R_u · S₀       S_d  =  R_d · S₀      (R_u &gt; 1 &gt; R_d;  spread R_u − R_d = volatility proxy)</a:t>
+              <a:t>S₁ᵘ = Rᵤ · S₀        S₁ᵈ = R_d · S₀        (Rᵤ &gt; 1 &gt; R_d)</a:t>
             </a:r>
             <a:endParaRPr lang="en-US" sz="1800" dirty="0"/>
           </a:p>
@@ -18680,7 +19311,7 @@
                 <a:ea typeface="Calibri" pitchFamily="34" charset="-122"/>
                 <a:cs typeface="Calibri" pitchFamily="34" charset="-120"/>
               </a:rPr>
-              <a:t>where: q = real-world probability of an up move; 1 − q = probability of a down move. q turns out to be irrelevant for the price.</a:t>
+              <a:t>where: Rᵤ and R_d are gross returns. q is the real-world probability of an up move — it is never needed. The SPREAD Rᵤ − R_d is what carries the volatility assumption.</a:t>
             </a:r>
             <a:endParaRPr lang="en-US" sz="1100" dirty="0"/>
           </a:p>
@@ -18694,8 +19325,8 @@
         </p:nvSpPr>
         <p:spPr>
           <a:xfrm>
-            <a:off x="320040" y="2331720"/>
-            <a:ext cx="2743200" cy="1965960"/>
+            <a:off x="320040" y="2286000"/>
+            <a:ext cx="2743200" cy="2011680"/>
           </a:xfrm>
           <a:prstGeom prst="rect">
             <a:avLst/>
@@ -18714,8 +19345,8 @@
         </p:nvSpPr>
         <p:spPr>
           <a:xfrm>
-            <a:off x="320040" y="2331720"/>
-            <a:ext cx="73152" cy="1965960"/>
+            <a:off x="320040" y="2286000"/>
+            <a:ext cx="73152" cy="2011680"/>
           </a:xfrm>
           <a:prstGeom prst="rect">
             <a:avLst/>
@@ -18734,7 +19365,7 @@
         </p:nvSpPr>
         <p:spPr>
           <a:xfrm>
-            <a:off x="457200" y="2377440"/>
+            <a:off x="457200" y="2331720"/>
             <a:ext cx="2514600" cy="256032"/>
           </a:xfrm>
           <a:prstGeom prst="rect">
@@ -18762,7 +19393,7 @@
                 <a:ea typeface="Trebuchet MS" pitchFamily="34" charset="-122"/>
                 <a:cs typeface="Trebuchet MS" pitchFamily="34" charset="-120"/>
               </a:rPr>
-              <a:t>TWO OUTCOMES</a:t>
+              <a:t>TWO OUTCOMES, NO MORE</a:t>
             </a:r>
             <a:endParaRPr lang="en-US" sz="1100" dirty="0"/>
           </a:p>
@@ -18776,8 +19407,8 @@
         </p:nvSpPr>
         <p:spPr>
           <a:xfrm>
-            <a:off x="457200" y="2651760"/>
-            <a:ext cx="2514600" cy="1600200"/>
+            <a:off x="457200" y="2606040"/>
+            <a:ext cx="2514600" cy="1645920"/>
           </a:xfrm>
           <a:prstGeom prst="rect">
             <a:avLst/>
@@ -18804,7 +19435,7 @@
                 <a:ea typeface="Calibri" pitchFamily="34" charset="-122"/>
                 <a:cs typeface="Calibri" pitchFamily="34" charset="-120"/>
               </a:rPr>
-              <a:t>Over one period, the underlying goes from S₀ to either S_u or S_d. No third state. That's it — everything else follows from arbitrage.</a:t>
+              <a:t>Over one period the underlying goes to S₁ᵘ or S₁ᵈ. No third state. The curriculum calls it a Bernoulli trial. Everything else on the next four slides follows from arbitrage alone.</a:t>
             </a:r>
             <a:endParaRPr lang="en-US" sz="1200" dirty="0"/>
           </a:p>
@@ -18818,8 +19449,8 @@
         </p:nvSpPr>
         <p:spPr>
           <a:xfrm>
-            <a:off x="3200400" y="2331720"/>
-            <a:ext cx="2743200" cy="1965960"/>
+            <a:off x="3200400" y="2286000"/>
+            <a:ext cx="2743200" cy="2011680"/>
           </a:xfrm>
           <a:prstGeom prst="rect">
             <a:avLst/>
@@ -18838,8 +19469,8 @@
         </p:nvSpPr>
         <p:spPr>
           <a:xfrm>
-            <a:off x="3200400" y="2331720"/>
-            <a:ext cx="73152" cy="1965960"/>
+            <a:off x="3200400" y="2286000"/>
+            <a:ext cx="73152" cy="2011680"/>
           </a:xfrm>
           <a:prstGeom prst="rect">
             <a:avLst/>
@@ -18858,7 +19489,7 @@
         </p:nvSpPr>
         <p:spPr>
           <a:xfrm>
-            <a:off x="3337560" y="2377440"/>
+            <a:off x="3337560" y="2331720"/>
             <a:ext cx="2514600" cy="256032"/>
           </a:xfrm>
           <a:prstGeom prst="rect">
@@ -18886,7 +19517,7 @@
                 <a:ea typeface="Trebuchet MS" pitchFamily="34" charset="-122"/>
                 <a:cs typeface="Trebuchet MS" pitchFamily="34" charset="-120"/>
               </a:rPr>
-              <a:t>VOLATILITY = SPREAD</a:t>
+              <a:t>SPREAD = VOLATILITY</a:t>
             </a:r>
             <a:endParaRPr lang="en-US" sz="1100" dirty="0"/>
           </a:p>
@@ -18900,8 +19531,8 @@
         </p:nvSpPr>
         <p:spPr>
           <a:xfrm>
-            <a:off x="3337560" y="2651760"/>
-            <a:ext cx="2514600" cy="1600200"/>
+            <a:off x="3337560" y="2606040"/>
+            <a:ext cx="2514600" cy="1645920"/>
           </a:xfrm>
           <a:prstGeom prst="rect">
             <a:avLst/>
@@ -18928,7 +19559,7 @@
                 <a:ea typeface="Calibri" pitchFamily="34" charset="-122"/>
                 <a:cs typeface="Calibri" pitchFamily="34" charset="-120"/>
               </a:rPr>
-              <a:t>The gap between S_u and S_d is the model's view of volatility. Doubling the spread doubles range of possible payoffs ⇒ option value rises.</a:t>
+              <a:t>Rᵤ − R_d is the model’s entire view of volatility. Widen it — raise Rᵤ, lower R_d, or both — and the range of possible payoffs widens, so BOTH the call and the put get more valuable.</a:t>
             </a:r>
             <a:endParaRPr lang="en-US" sz="1200" dirty="0"/>
           </a:p>
@@ -18942,8 +19573,8 @@
         </p:nvSpPr>
         <p:spPr>
           <a:xfrm>
-            <a:off x="6080760" y="2331720"/>
-            <a:ext cx="2743200" cy="1965960"/>
+            <a:off x="6080760" y="2286000"/>
+            <a:ext cx="2743200" cy="2011680"/>
           </a:xfrm>
           <a:prstGeom prst="rect">
             <a:avLst/>
@@ -18962,8 +19593,8 @@
         </p:nvSpPr>
         <p:spPr>
           <a:xfrm>
-            <a:off x="6080760" y="2331720"/>
-            <a:ext cx="73152" cy="1965960"/>
+            <a:off x="6080760" y="2286000"/>
+            <a:ext cx="73152" cy="2011680"/>
           </a:xfrm>
           <a:prstGeom prst="rect">
             <a:avLst/>
@@ -18982,7 +19613,7 @@
         </p:nvSpPr>
         <p:spPr>
           <a:xfrm>
-            <a:off x="6217920" y="2377440"/>
+            <a:off x="6217920" y="2331720"/>
             <a:ext cx="2514600" cy="256032"/>
           </a:xfrm>
           <a:prstGeom prst="rect">
@@ -19010,7 +19641,7 @@
                 <a:ea typeface="Trebuchet MS" pitchFamily="34" charset="-122"/>
                 <a:cs typeface="Trebuchet MS" pitchFamily="34" charset="-120"/>
               </a:rPr>
-              <a:t>MULTI-PERIOD → TREE</a:t>
+              <a:t>ONE STEP → A TREE</a:t>
             </a:r>
             <a:endParaRPr lang="en-US" sz="1100" dirty="0"/>
           </a:p>
@@ -19024,8 +19655,8 @@
         </p:nvSpPr>
         <p:spPr>
           <a:xfrm>
-            <a:off x="6217920" y="2651760"/>
-            <a:ext cx="2514600" cy="1600200"/>
+            <a:off x="6217920" y="2606040"/>
+            <a:ext cx="2514600" cy="1645920"/>
           </a:xfrm>
           <a:prstGeom prst="rect">
             <a:avLst/>
@@ -19052,7 +19683,7 @@
                 <a:ea typeface="Calibri" pitchFamily="34" charset="-122"/>
                 <a:cs typeface="Calibri" pitchFamily="34" charset="-120"/>
               </a:rPr>
-              <a:t>Chain N one-period steps ⇒ N-period binomial tree with N+1 terminal nodes. As N → ∞, approaches the Black-Scholes continuous-time model.</a:t>
+              <a:t>Chain N one-period steps and you have an N-period tree with N + 1 terminal nodes. The curriculum stops at one period at Level I, but the machinery is identical at every node.</a:t>
             </a:r>
             <a:endParaRPr lang="en-US" sz="1200" dirty="0"/>
           </a:p>
@@ -19151,7 +19782,7 @@
               <a:buNone/>
             </a:pPr>
             <a:r>
-              <a:rPr lang="en-US" sz="1700" b="1" dirty="0">
+              <a:rPr lang="en-US" sz="1800" b="1" dirty="0">
                 <a:solidFill>
                   <a:srgbClr val="FFFFFF"/>
                 </a:solidFill>
@@ -19159,9 +19790,9 @@
                 <a:ea typeface="Trebuchet MS" pitchFamily="34" charset="-122"/>
                 <a:cs typeface="Trebuchet MS" pitchFamily="34" charset="-120"/>
               </a:rPr>
-              <a:t>A portfolio of h shares minus one call can be made risk-free — h is the option's payoff range divided by the asset's</a:t>
-            </a:r>
-            <a:endParaRPr lang="en-US" sz="1700" dirty="0"/>
+              <a:t>Buy h shares against one short call and the portfolio stops caring which branch the tree takes</a:t>
+            </a:r>
+            <a:endParaRPr lang="en-US" sz="1800" dirty="0"/>
           </a:p>
         </p:txBody>
       </p:sp>
@@ -19263,7 +19894,7 @@
                 <a:ea typeface="Calibri" pitchFamily="34" charset="-122"/>
                 <a:cs typeface="Calibri" pitchFamily="34" charset="-120"/>
               </a:rPr>
-              <a:t>Source: CFA Institute, Curriculum Vol 7, Learning Module 10, §4 "Pricing a European Call Option", pp. 223–226.</a:t>
+              <a:t>Source: CFA Institute, Curriculum Vol 7, Learning Module 10, §4 "Pricing a European Call Option", Equations 3–7 and Exhibits 2–3, printed pp. 223–226.</a:t>
             </a:r>
             <a:endParaRPr lang="en-US" sz="750" dirty="0"/>
           </a:p>
@@ -19305,7 +19936,7 @@
                 <a:ea typeface="Calibri" pitchFamily="34" charset="-122"/>
                 <a:cs typeface="Calibri" pitchFamily="34" charset="-120"/>
               </a:rPr>
-              <a:t>The hedge ratio is the binomial-world delta: the exact share count that makes a short-call / long-stock portfolio invariant to which branch the tree takes.</a:t>
+              <a:t>The hedge ratio is the binomial-world delta: the exact share count that makes a long-stock / short-call portfolio worth the same in both states.</a:t>
             </a:r>
             <a:endParaRPr lang="en-US" sz="1300" dirty="0"/>
           </a:p>
@@ -19367,7 +19998,24 @@
                 <a:ea typeface="Consolas" pitchFamily="34" charset="-122"/>
                 <a:cs typeface="Consolas" pitchFamily="34" charset="-120"/>
               </a:rPr>
-              <a:t>h*  =  (c_u − c_d) / (S_u − S_d)          ⇒         V_u  =  h*·S_u − c_u  =  V_d  =  h*·S_d − c_d</a:t>
+              <a:t>h*  =  (c₁ᵘ − c₁ᵈ) / (S₁ᵘ − S₁ᵈ)</a:t>
+            </a:r>
+            <a:endParaRPr lang="en-US" sz="1800" dirty="0"/>
+          </a:p>
+          <a:p>
+            <a:pPr algn="ctr" indent="0" marL="0">
+              <a:buNone/>
+            </a:pPr>
+            <a:r>
+              <a:rPr lang="en-US" sz="1800" b="1" dirty="0">
+                <a:solidFill>
+                  <a:srgbClr val="FFFFFF"/>
+                </a:solidFill>
+                <a:latin typeface="Consolas" pitchFamily="34" charset="0"/>
+                <a:ea typeface="Consolas" pitchFamily="34" charset="-122"/>
+                <a:cs typeface="Consolas" pitchFamily="34" charset="-120"/>
+              </a:rPr>
+              <a:t>V₁  =  h*S₁ᵘ − c₁ᵘ  =  h*S₁ᵈ − c₁ᵈ</a:t>
             </a:r>
             <a:endParaRPr lang="en-US" sz="1800" dirty="0"/>
           </a:p>
@@ -19409,7 +20057,7 @@
                 <a:ea typeface="Calibri" pitchFamily="34" charset="-122"/>
                 <a:cs typeface="Calibri" pitchFamily="34" charset="-120"/>
               </a:rPr>
-              <a:t>where: Choose h* so portfolio value is identical in both states ⇒ portfolio earns r ⇒ c₀ = h*·S₀ − V₁/(1 + r).</a:t>
+              <a:t>where: Choose h* so the portfolio is worth the same either way. It is then riskless, so it must earn r — which gives c₀ = h*S₀ − V₁(1 + r)⁻¹.</a:t>
             </a:r>
             <a:endParaRPr lang="en-US" sz="1100" dirty="0"/>
           </a:p>
@@ -19423,8 +20071,8 @@
         </p:nvSpPr>
         <p:spPr>
           <a:xfrm>
-            <a:off x="320040" y="2331720"/>
-            <a:ext cx="8503920" cy="1965960"/>
+            <a:off x="320040" y="2286000"/>
+            <a:ext cx="8503920" cy="2011680"/>
           </a:xfrm>
           <a:prstGeom prst="rect">
             <a:avLst/>
@@ -19443,8 +20091,8 @@
         </p:nvSpPr>
         <p:spPr>
           <a:xfrm>
-            <a:off x="320040" y="2331720"/>
-            <a:ext cx="73152" cy="1965960"/>
+            <a:off x="320040" y="2286000"/>
+            <a:ext cx="73152" cy="2011680"/>
           </a:xfrm>
           <a:prstGeom prst="rect">
             <a:avLst/>
@@ -19463,7 +20111,7 @@
         </p:nvSpPr>
         <p:spPr>
           <a:xfrm>
-            <a:off x="457200" y="2377440"/>
+            <a:off x="457200" y="2331720"/>
             <a:ext cx="8275320" cy="256032"/>
           </a:xfrm>
           <a:prstGeom prst="rect">
@@ -19491,7 +20139,7 @@
                 <a:ea typeface="Trebuchet MS" pitchFamily="34" charset="-122"/>
                 <a:cs typeface="Trebuchet MS" pitchFamily="34" charset="-120"/>
               </a:rPr>
-              <a:t>THE THREE-STEP RECIPE</a:t>
+              <a:t>THE FOUR-STEP RECIPE</a:t>
             </a:r>
             <a:endParaRPr lang="en-US" sz="1100" dirty="0"/>
           </a:p>
@@ -19505,8 +20153,8 @@
         </p:nvSpPr>
         <p:spPr>
           <a:xfrm>
-            <a:off x="457200" y="2651760"/>
-            <a:ext cx="8275320" cy="1600200"/>
+            <a:off x="457200" y="2606040"/>
+            <a:ext cx="8275320" cy="1645920"/>
           </a:xfrm>
           <a:prstGeom prst="rect">
             <a:avLst/>
@@ -19533,7 +20181,7 @@
                 <a:ea typeface="Calibri" pitchFamily="34" charset="-122"/>
                 <a:cs typeface="Calibri" pitchFamily="34" charset="-120"/>
               </a:rPr>
-              <a:t>1.  Tree the underlying: compute S_u and S_d from R_u, R_d.</a:t>
+              <a:t>1.  Tree the underlying: S₁ᵘ = RᵤS₀ and S₁ᵈ = R_dS₀.</a:t>
             </a:r>
             <a:endParaRPr lang="en-US" sz="1200" dirty="0"/>
           </a:p>
@@ -19550,7 +20198,7 @@
                 <a:ea typeface="Calibri" pitchFamily="34" charset="-122"/>
                 <a:cs typeface="Calibri" pitchFamily="34" charset="-120"/>
               </a:rPr>
-              <a:t>2.  Tree the option payoffs: c_u = Max(0, S_u − X), c_d = Max(0, S_d − X).</a:t>
+              <a:t>2.  Tree the option: c₁ᵘ = Max(0, S₁ᵘ − X) and c₁ᵈ = Max(0, S₁ᵈ − X). For a put, Max(0, X − S₁).</a:t>
             </a:r>
             <a:endParaRPr lang="en-US" sz="1200" dirty="0"/>
           </a:p>
@@ -19567,7 +20215,7 @@
                 <a:ea typeface="Calibri" pitchFamily="34" charset="-122"/>
                 <a:cs typeface="Calibri" pitchFamily="34" charset="-120"/>
               </a:rPr>
-              <a:t>3.  Compute h* from the payoff ratio, then V₁ = h*·S_u − c_u (or − c_d, they're equal by construction).</a:t>
+              <a:t>3.  Compute h* from the payoff ratio, then V₁ = h*S₁ᵘ − c₁ᵘ (or the down branch — equal by construction).</a:t>
             </a:r>
             <a:endParaRPr lang="en-US" sz="1200" dirty="0"/>
           </a:p>
@@ -19584,7 +20232,7 @@
                 <a:ea typeface="Calibri" pitchFamily="34" charset="-122"/>
                 <a:cs typeface="Calibri" pitchFamily="34" charset="-120"/>
               </a:rPr>
-              <a:t>4.  Discount V₁ at r to get V₀; solve c₀ = h*·S₀ − V₀.</a:t>
+              <a:t>4.  V₁ is certain, so discount it at r and solve c₀ = h*S₀ − V₁(1 + r)⁻¹.</a:t>
             </a:r>
             <a:endParaRPr lang="en-US" sz="1200" dirty="0"/>
           </a:p>
@@ -19607,7 +20255,24 @@
                 <a:ea typeface="Calibri" pitchFamily="34" charset="-122"/>
                 <a:cs typeface="Calibri" pitchFamily="34" charset="-120"/>
               </a:rPr>
-              <a:t>➤  No probabilities appear anywhere. Just R_u, R_d, r and the option payoff.</a:t>
+              <a:t>➤  No probability appears anywhere. Only Rᵤ, R_d, r and the option payoff.</a:t>
+            </a:r>
+            <a:endParaRPr lang="en-US" sz="1200" dirty="0"/>
+          </a:p>
+          <a:p>
+            <a:pPr algn="l" indent="0" marL="0">
+              <a:buNone/>
+            </a:pPr>
+            <a:r>
+              <a:rPr lang="en-US" sz="1200" dirty="0">
+                <a:solidFill>
+                  <a:srgbClr val="334155"/>
+                </a:solidFill>
+                <a:latin typeface="Calibri" pitchFamily="34" charset="0"/>
+                <a:ea typeface="Calibri" pitchFamily="34" charset="-122"/>
+                <a:cs typeface="Calibri" pitchFamily="34" charset="-120"/>
+              </a:rPr>
+              <a:t>➤  For a PUT, h* comes out negative — the curriculum notes that you then buy the option AND buy the underlying, rather than one against the other.</a:t>
             </a:r>
             <a:endParaRPr lang="en-US" sz="1200" dirty="0"/>
           </a:p>
@@ -19714,7 +20379,7 @@
                 <a:ea typeface="Trebuchet MS" pitchFamily="34" charset="-122"/>
                 <a:cs typeface="Trebuchet MS" pitchFamily="34" charset="-120"/>
               </a:rPr>
-              <a:t>CFA LM 10 §4 canonical example: S₀ = 80, X = 100, up to 110 / down to 60, r = 5% — delta-hedge gives c₀ = 4.57</a:t>
+              <a:t>CFA LM 10: S₀ = 80, X = 100, up to 110 or down to 60, r = 5% — the delta hedge prices the call at EUR 4.57</a:t>
             </a:r>
             <a:endParaRPr lang="en-US" sz="1700" dirty="0"/>
           </a:p>
@@ -19818,7 +20483,7 @@
                 <a:ea typeface="Calibri" pitchFamily="34" charset="-122"/>
                 <a:cs typeface="Calibri" pitchFamily="34" charset="-120"/>
               </a:rPr>
-              <a:t>Source: CFA Institute, Curriculum Vol 7, Learning Module 10, §4 Exhibit 2–3 worked case, pp. 223–226.</a:t>
+              <a:t>Source: CFA Institute, Curriculum Vol 7, Learning Module 10, §4, Exhibits 2–3 and Equation 7, printed pp. 223–226.</a:t>
             </a:r>
             <a:endParaRPr lang="en-US" sz="750" dirty="0"/>
           </a:p>
@@ -19860,7 +20525,7 @@
                 <a:ea typeface="Calibri" pitchFamily="34" charset="-122"/>
                 <a:cs typeface="Calibri" pitchFamily="34" charset="-120"/>
               </a:rPr>
-              <a:t>Numbers chosen deliberately: option is OTM today (S₀ &lt; X) but ITM in the up state. Walks through every step of the recipe.</a:t>
+              <a:t>Deliberately chosen numbers: the call is out of the money today (S₀ &lt; X) but in the money in the up state. Every step of the recipe fires.</a:t>
             </a:r>
             <a:endParaRPr lang="en-US" sz="1300" dirty="0"/>
           </a:p>
@@ -19875,7 +20540,7 @@
         <p:spPr>
           <a:xfrm>
             <a:off x="320040" y="1097280"/>
-            <a:ext cx="8503920" cy="3200400"/>
+            <a:ext cx="8503920" cy="2514600"/>
           </a:xfrm>
           <a:prstGeom prst="rect">
             <a:avLst/>
@@ -19927,7 +20592,7 @@
                 <a:ea typeface="Trebuchet MS" pitchFamily="34" charset="-122"/>
                 <a:cs typeface="Trebuchet MS" pitchFamily="34" charset="-120"/>
               </a:rPr>
-              <a:t>ONE-YEAR EUROPEAN CALL · DELTA-HEDGE METHOD</a:t>
+              <a:t>ONE-YEAR EUROPEAN CALL · THE DELTA-HEDGE ROUTE</a:t>
             </a:r>
             <a:endParaRPr lang="en-US" sz="1100" dirty="0"/>
           </a:p>
@@ -19969,7 +20634,7 @@
                 <a:ea typeface="Calibri" pitchFamily="34" charset="-122"/>
                 <a:cs typeface="Calibri" pitchFamily="34" charset="-120"/>
               </a:rPr>
-              <a:t>S₀ = 80, X = 100, S_u = 110 (R_u = 1.375), S_d = 60 (R_d = 0.75), r = 5%, T = 1.</a:t>
+              <a:t>S₀ = EUR 80, X = EUR 100, S₁ᵘ = EUR 110 (Rᵤ = 1.375), S₁ᵈ = EUR 60 (R_d = 0.75), r = 5%, T = 1.</a:t>
             </a:r>
             <a:endParaRPr lang="en-US" sz="1200" dirty="0"/>
           </a:p>
@@ -19984,7 +20649,7 @@
         <p:spPr>
           <a:xfrm>
             <a:off x="457200" y="1947672"/>
-            <a:ext cx="8229600" cy="1837944"/>
+            <a:ext cx="8229600" cy="1152144"/>
           </a:xfrm>
           <a:prstGeom prst="rect">
             <a:avLst/>
@@ -20006,7 +20671,7 @@
               <a:buNone/>
             </a:pPr>
             <a:r>
-              <a:rPr lang="en-US" sz="1200" b="1" dirty="0">
+              <a:rPr lang="en-US" sz="1150" b="1" dirty="0">
                 <a:solidFill>
                   <a:srgbClr val="1B2A4A"/>
                 </a:solidFill>
@@ -20023,7 +20688,7 @@
               <a:buNone/>
             </a:pPr>
             <a:r>
-              <a:rPr lang="en-US" sz="1200" dirty="0">
+              <a:rPr lang="en-US" sz="1150" dirty="0">
                 <a:solidFill>
                   <a:srgbClr val="334155"/>
                 </a:solidFill>
@@ -20031,7 +20696,7 @@
                 <a:ea typeface="Calibri" pitchFamily="34" charset="-122"/>
                 <a:cs typeface="Calibri" pitchFamily="34" charset="-120"/>
               </a:rPr>
-              <a:t>Option payoffs: c_u = Max(0, 110 − 100) = 10, c_d = Max(0, 60 − 100) = 0
+              <a:t>Option payoffs: c₁ᵘ = Max(0, 110 − 100) = EUR 10;  c₁ᵈ = Max(0, 60 − 100) = 0
 </a:t>
             </a:r>
             <a:pPr indent="0" marL="0">
@@ -20041,7 +20706,7 @@
               <a:buNone/>
             </a:pPr>
             <a:r>
-              <a:rPr lang="en-US" sz="1200" b="1" dirty="0">
+              <a:rPr lang="en-US" sz="1150" b="1" dirty="0">
                 <a:solidFill>
                   <a:srgbClr val="1B2A4A"/>
                 </a:solidFill>
@@ -20058,7 +20723,7 @@
               <a:buNone/>
             </a:pPr>
             <a:r>
-              <a:rPr lang="en-US" sz="1200" dirty="0">
+              <a:rPr lang="en-US" sz="1150" dirty="0">
                 <a:solidFill>
                   <a:srgbClr val="334155"/>
                 </a:solidFill>
@@ -20066,7 +20731,7 @@
                 <a:ea typeface="Calibri" pitchFamily="34" charset="-122"/>
                 <a:cs typeface="Calibri" pitchFamily="34" charset="-120"/>
               </a:rPr>
-              <a:t>Hedge ratio h* = (c_u − c_d)/(S_u − S_d) = (10 − 0)/(110 − 60) = 10/50 = 0.20
+              <a:t>Hedge ratio: h* = (10 − 0) / (110 − 60) = 10 / 50 = 0.20 shares per call sold
 </a:t>
             </a:r>
             <a:pPr indent="0" marL="0">
@@ -20076,7 +20741,7 @@
               <a:buNone/>
             </a:pPr>
             <a:r>
-              <a:rPr lang="en-US" sz="1200" b="1" dirty="0">
+              <a:rPr lang="en-US" sz="1150" b="1" dirty="0">
                 <a:solidFill>
                   <a:srgbClr val="1B2A4A"/>
                 </a:solidFill>
@@ -20093,7 +20758,7 @@
               <a:buNone/>
             </a:pPr>
             <a:r>
-              <a:rPr lang="en-US" sz="1200" dirty="0">
+              <a:rPr lang="en-US" sz="1150" dirty="0">
                 <a:solidFill>
                   <a:srgbClr val="334155"/>
                 </a:solidFill>
@@ -20101,7 +20766,7 @@
                 <a:ea typeface="Calibri" pitchFamily="34" charset="-122"/>
                 <a:cs typeface="Calibri" pitchFamily="34" charset="-120"/>
               </a:rPr>
-              <a:t>Portfolio value at T (both branches): V_u = 0.20·110 − 10 = 12; V_d = 0.20·60 − 0 = 12. ✓ Equal by construction.
+              <a:t>Portfolio at T: V₁ᵘ = 0.20 × 110 − 10 = 12;  V₁ᵈ = 0.20 × 60 − 0 = 12 ✓ equal by construction
 </a:t>
             </a:r>
             <a:pPr indent="0" marL="0">
@@ -20111,7 +20776,7 @@
               <a:buNone/>
             </a:pPr>
             <a:r>
-              <a:rPr lang="en-US" sz="1200" b="1" dirty="0">
+              <a:rPr lang="en-US" sz="1150" b="1" dirty="0">
                 <a:solidFill>
                   <a:srgbClr val="1B2A4A"/>
                 </a:solidFill>
@@ -20128,7 +20793,7 @@
               <a:buNone/>
             </a:pPr>
             <a:r>
-              <a:rPr lang="en-US" sz="1200" dirty="0">
+              <a:rPr lang="en-US" sz="1150" dirty="0">
                 <a:solidFill>
                   <a:srgbClr val="334155"/>
                 </a:solidFill>
@@ -20136,7 +20801,7 @@
                 <a:ea typeface="Calibri" pitchFamily="34" charset="-122"/>
                 <a:cs typeface="Calibri" pitchFamily="34" charset="-120"/>
               </a:rPr>
-              <a:t>PV the certain V₁ = 12: V₀ = 12 / 1.05 = 11.43
+              <a:t>That 12 is certain, so discount it at r: V₀ = 12 / 1.05 = EUR 11.43
 </a:t>
             </a:r>
             <a:pPr indent="0" marL="0">
@@ -20146,7 +20811,7 @@
               <a:buNone/>
             </a:pPr>
             <a:r>
-              <a:rPr lang="en-US" sz="1200" b="1" dirty="0">
+              <a:rPr lang="en-US" sz="1150" b="1" dirty="0">
                 <a:solidFill>
                   <a:srgbClr val="1B2A4A"/>
                 </a:solidFill>
@@ -20163,7 +20828,7 @@
               <a:buNone/>
             </a:pPr>
             <a:r>
-              <a:rPr lang="en-US" sz="1200" dirty="0">
+              <a:rPr lang="en-US" sz="1150" dirty="0">
                 <a:solidFill>
                   <a:srgbClr val="334155"/>
                 </a:solidFill>
@@ -20171,9 +20836,9 @@
                 <a:ea typeface="Calibri" pitchFamily="34" charset="-122"/>
                 <a:cs typeface="Calibri" pitchFamily="34" charset="-120"/>
               </a:rPr>
-              <a:t>Call price: c₀ = h*·S₀ − V₀ = 0.20·80 − 11.43 = 16.00 − 11.43 = 4.57</a:t>
-            </a:r>
-            <a:endParaRPr lang="en-US" sz="1200" dirty="0"/>
+              <a:t>c₀ = h*S₀ − V₀ = 0.20 × 80 − 11.43 = 16.00 − 11.43 = EUR 4.57</a:t>
+            </a:r>
+            <a:endParaRPr lang="en-US" sz="1150" dirty="0"/>
           </a:p>
         </p:txBody>
       </p:sp>
@@ -20185,7 +20850,7 @@
         </p:nvSpPr>
         <p:spPr>
           <a:xfrm>
-            <a:off x="411480" y="3858768"/>
+            <a:off x="411480" y="3172968"/>
             <a:ext cx="8321040" cy="365760"/>
           </a:xfrm>
           <a:prstGeom prst="rect">
@@ -20205,7 +20870,7 @@
         </p:nvSpPr>
         <p:spPr>
           <a:xfrm>
-            <a:off x="457200" y="3858768"/>
+            <a:off x="457200" y="3172968"/>
             <a:ext cx="8229600" cy="365760"/>
           </a:xfrm>
           <a:prstGeom prst="rect">
@@ -20233,9 +20898,91 @@
                 <a:ea typeface="Consolas" pitchFamily="34" charset="-122"/>
                 <a:cs typeface="Consolas" pitchFamily="34" charset="-120"/>
               </a:rPr>
-              <a:t>Fair 1-year call price = 4.57. Check: short 1 call, buy 0.20 stock ⇒ invests 11.43, grows to 12 ⇒ earns exactly 5% ✓</a:t>
+              <a:t>c₀ = EUR 4.57. Check: the 11.43 invested grows to 12 — exactly 5%, the risk-free rate.</a:t>
             </a:r>
             <a:endParaRPr lang="en-US" sz="1150" dirty="0"/>
+          </a:p>
+        </p:txBody>
+      </p:sp>
+      <p:sp>
+        <p:nvSpPr>
+          <p:cNvPr id="15" name="Shape 13"/>
+          <p:cNvSpPr/>
+          <p:nvPr/>
+        </p:nvSpPr>
+        <p:spPr>
+          <a:xfrm>
+            <a:off x="320040" y="3703320"/>
+            <a:ext cx="8503920" cy="548640"/>
+          </a:xfrm>
+          <a:prstGeom prst="rect">
+            <a:avLst/>
+          </a:prstGeom>
+          <a:solidFill>
+            <a:srgbClr val="F5F7FA"/>
+          </a:solidFill>
+          <a:ln/>
+        </p:spPr>
+      </p:sp>
+      <p:sp>
+        <p:nvSpPr>
+          <p:cNvPr id="16" name="Shape 14"/>
+          <p:cNvSpPr/>
+          <p:nvPr/>
+        </p:nvSpPr>
+        <p:spPr>
+          <a:xfrm>
+            <a:off x="320040" y="3703320"/>
+            <a:ext cx="73152" cy="548640"/>
+          </a:xfrm>
+          <a:prstGeom prst="rect">
+            <a:avLst/>
+          </a:prstGeom>
+          <a:solidFill>
+            <a:srgbClr val="1B2A4A"/>
+          </a:solidFill>
+          <a:ln/>
+        </p:spPr>
+      </p:sp>
+      <p:sp>
+        <p:nvSpPr>
+          <p:cNvPr id="17" name="Text 15"/>
+          <p:cNvSpPr txBox="1"/>
+          <p:nvPr/>
+        </p:nvSpPr>
+        <p:spPr>
+          <a:xfrm>
+            <a:off x="457200" y="3776472"/>
+            <a:ext cx="8275320" cy="438912"/>
+          </a:xfrm>
+          <a:prstGeom prst="rect">
+            <a:avLst/>
+          </a:prstGeom>
+          <a:noFill/>
+          <a:ln/>
+        </p:spPr>
+        <p:txBody>
+          <a:bodyPr wrap="square" lIns="508" tIns="508" rIns="508" bIns="508" rtlCol="0" anchor="t">
+            <a:normAutofit/>
+            <a:spAutoFit/>
+          </a:bodyPr>
+          <a:lstStyle/>
+          <a:p>
+            <a:pPr algn="l" indent="0" marL="0">
+              <a:buNone/>
+            </a:pPr>
+            <a:r>
+              <a:rPr lang="en-US" sz="1200" dirty="0">
+                <a:solidFill>
+                  <a:srgbClr val="334155"/>
+                </a:solidFill>
+                <a:latin typeface="Calibri" pitchFamily="34" charset="0"/>
+                <a:ea typeface="Calibri" pitchFamily="34" charset="-122"/>
+                <a:cs typeface="Calibri" pitchFamily="34" charset="-120"/>
+              </a:rPr>
+              <a:t>Notice what never appears: no expected return on the stock, no risk premium, no view. The price came out of a hedge.</a:t>
+            </a:r>
+            <a:endParaRPr lang="en-US" sz="1200" dirty="0"/>
           </a:p>
         </p:txBody>
       </p:sp>
@@ -20332,7 +21079,7 @@
               <a:buNone/>
             </a:pPr>
             <a:r>
-              <a:rPr lang="en-US" sz="1700" b="1" dirty="0">
+              <a:rPr lang="en-US" sz="1800" b="1" dirty="0">
                 <a:solidFill>
                   <a:srgbClr val="FFFFFF"/>
                 </a:solidFill>
@@ -20340,9 +21087,9 @@
                 <a:ea typeface="Trebuchet MS" pitchFamily="34" charset="-122"/>
                 <a:cs typeface="Trebuchet MS" pitchFamily="34" charset="-120"/>
               </a:rPr>
-              <a:t>The same price falls out of a risk-neutral expectation — π acts as if investors were risk-neutral, even though they're not</a:t>
-            </a:r>
-            <a:endParaRPr lang="en-US" sz="1700" dirty="0"/>
+              <a:t>The same 4.57 falls out of a risk-neutral expectation — π is a pricing weight, not a forecast</a:t>
+            </a:r>
+            <a:endParaRPr lang="en-US" sz="1800" dirty="0"/>
           </a:p>
         </p:txBody>
       </p:sp>
@@ -20444,7 +21191,7 @@
                 <a:ea typeface="Calibri" pitchFamily="34" charset="-122"/>
                 <a:cs typeface="Calibri" pitchFamily="34" charset="-120"/>
               </a:rPr>
-              <a:t>Source: CFA Institute, Curriculum Vol 7, Learning Module 10, §5 "Risk Neutrality", pp. 230–233.</a:t>
+              <a:t>Source: CFA Institute, Curriculum Vol 7, Learning Module 10, §5 "Risk Neutrality", Equations 9–10, printed pp. 230–231.</a:t>
             </a:r>
             <a:endParaRPr lang="en-US" sz="750" dirty="0"/>
           </a:p>
@@ -20486,7 +21233,7 @@
                 <a:ea typeface="Calibri" pitchFamily="34" charset="-122"/>
                 <a:cs typeface="Calibri" pitchFamily="34" charset="-120"/>
               </a:rPr>
-              <a:t>π is a computation tool, not a real probability. It makes the discounted underlying a martingale — the mathematical magic trick of derivatives pricing.</a:t>
+              <a:t>π is built out of Rᵤ, R_d and r alone. Nobody’s opinion about the stock enters it, which is exactly why everyone can agree on it.</a:t>
             </a:r>
             <a:endParaRPr lang="en-US" sz="1300" dirty="0"/>
           </a:p>
@@ -20548,7 +21295,24 @@
                 <a:ea typeface="Consolas" pitchFamily="34" charset="-122"/>
                 <a:cs typeface="Consolas" pitchFamily="34" charset="-120"/>
               </a:rPr>
-              <a:t>π  =  (1 + r − R_d) / (R_u − R_d)         c₀  =  [ π · c_u  +  (1 − π) · c_d ]  /  (1 + r)</a:t>
+              <a:t>π  =  (1 + r − R_d) / (Rᵤ − R_d)</a:t>
+            </a:r>
+            <a:endParaRPr lang="en-US" sz="1800" dirty="0"/>
+          </a:p>
+          <a:p>
+            <a:pPr algn="ctr" indent="0" marL="0">
+              <a:buNone/>
+            </a:pPr>
+            <a:r>
+              <a:rPr lang="en-US" sz="1800" b="1" dirty="0">
+                <a:solidFill>
+                  <a:srgbClr val="FFFFFF"/>
+                </a:solidFill>
+                <a:latin typeface="Consolas" pitchFamily="34" charset="0"/>
+                <a:ea typeface="Consolas" pitchFamily="34" charset="-122"/>
+                <a:cs typeface="Consolas" pitchFamily="34" charset="-120"/>
+              </a:rPr>
+              <a:t>c₀  =  [ π·c₁ᵘ + (1 − π)·c₁ᵈ ] / (1 + r)ᵀ</a:t>
             </a:r>
             <a:endParaRPr lang="en-US" sz="1800" dirty="0"/>
           </a:p>
@@ -20590,7 +21354,7 @@
                 <a:ea typeface="Calibri" pitchFamily="34" charset="-122"/>
                 <a:cs typeface="Calibri" pitchFamily="34" charset="-120"/>
               </a:rPr>
-              <a:t>where: π = risk-neutral probability of an up move. Always 0 &lt; π &lt; 1 if r is between R_d − 1 and R_u − 1.</a:t>
+              <a:t>where: π is the risk-neutral probability of an up move; 1 − π of a down move. It sits strictly between 0 and 1 whenever R_d − 1 &lt; r &lt; Rᵤ − 1, which is the no-arbitrage condition itself.</a:t>
             </a:r>
             <a:endParaRPr lang="en-US" sz="1100" dirty="0"/>
           </a:p>
@@ -20604,8 +21368,8 @@
         </p:nvSpPr>
         <p:spPr>
           <a:xfrm>
-            <a:off x="320040" y="2331720"/>
-            <a:ext cx="8503920" cy="1965960"/>
+            <a:off x="320040" y="2212848"/>
+            <a:ext cx="8503920" cy="2084832"/>
           </a:xfrm>
           <a:prstGeom prst="rect">
             <a:avLst/>
@@ -20629,7 +21393,7 @@
         </p:nvSpPr>
         <p:spPr>
           <a:xfrm>
-            <a:off x="457200" y="2377440"/>
+            <a:off x="457200" y="2258568"/>
             <a:ext cx="8229600" cy="256032"/>
           </a:xfrm>
           <a:prstGeom prst="rect">
@@ -20657,7 +21421,7 @@
                 <a:ea typeface="Trebuchet MS" pitchFamily="34" charset="-122"/>
                 <a:cs typeface="Trebuchet MS" pitchFamily="34" charset="-120"/>
               </a:rPr>
-              <a:t>SAME NUMBERS — RISK-NEUTRAL METHOD</a:t>
+              <a:t>THE SAME TREE — THE RISK-NEUTRAL ROUTE</a:t>
             </a:r>
             <a:endParaRPr lang="en-US" sz="1100" dirty="0"/>
           </a:p>
@@ -20671,7 +21435,7 @@
         </p:nvSpPr>
         <p:spPr>
           <a:xfrm>
-            <a:off x="457200" y="2670048"/>
+            <a:off x="457200" y="2551176"/>
             <a:ext cx="8229600" cy="457200"/>
           </a:xfrm>
           <a:prstGeom prst="rect">
@@ -20699,7 +21463,7 @@
                 <a:ea typeface="Calibri" pitchFamily="34" charset="-122"/>
                 <a:cs typeface="Calibri" pitchFamily="34" charset="-120"/>
               </a:rPr>
-              <a:t>Reuse the canonical example: S₀ = 80, X = 100, R_u = 1.375, R_d = 0.75, r = 5%, c_u = 10, c_d = 0.</a:t>
+              <a:t>Reuse the canonical example: S₀ = EUR 80, X = EUR 100, Rᵤ = 1.375, R_d = 0.75, r = 5%, c₁ᵘ = EUR 10, c₁ᵈ = 0.</a:t>
             </a:r>
             <a:endParaRPr lang="en-US" sz="1200" dirty="0"/>
           </a:p>
@@ -20713,8 +21477,8 @@
         </p:nvSpPr>
         <p:spPr>
           <a:xfrm>
-            <a:off x="457200" y="3182112"/>
-            <a:ext cx="8229600" cy="603504"/>
+            <a:off x="457200" y="3063240"/>
+            <a:ext cx="8229600" cy="722376"/>
           </a:xfrm>
           <a:prstGeom prst="rect">
             <a:avLst/>
@@ -20736,7 +21500,7 @@
               <a:buNone/>
             </a:pPr>
             <a:r>
-              <a:rPr lang="en-US" sz="1050" b="1" dirty="0">
+              <a:rPr lang="en-US" sz="1150" b="1" dirty="0">
                 <a:solidFill>
                   <a:srgbClr val="1B2A4A"/>
                 </a:solidFill>
@@ -20753,7 +21517,7 @@
               <a:buNone/>
             </a:pPr>
             <a:r>
-              <a:rPr lang="en-US" sz="1050" dirty="0">
+              <a:rPr lang="en-US" sz="1150" dirty="0">
                 <a:solidFill>
                   <a:srgbClr val="334155"/>
                 </a:solidFill>
@@ -20761,7 +21525,7 @@
                 <a:ea typeface="Calibri" pitchFamily="34" charset="-122"/>
                 <a:cs typeface="Calibri" pitchFamily="34" charset="-120"/>
               </a:rPr>
-              <a:t>π = (1 + 0.05 − 0.75) / (1.375 − 0.75) = 0.30 / 0.625 = 0.48
+              <a:t>π = (1 + 0.05 − 0.75) / (1.375 − 0.75) = 0.30 / 0.625 = 0.48,  so 1 − π = 0.52
 </a:t>
             </a:r>
             <a:pPr indent="0" marL="0">
@@ -20771,7 +21535,7 @@
               <a:buNone/>
             </a:pPr>
             <a:r>
-              <a:rPr lang="en-US" sz="1050" b="1" dirty="0">
+              <a:rPr lang="en-US" sz="1150" b="1" dirty="0">
                 <a:solidFill>
                   <a:srgbClr val="1B2A4A"/>
                 </a:solidFill>
@@ -20788,7 +21552,7 @@
               <a:buNone/>
             </a:pPr>
             <a:r>
-              <a:rPr lang="en-US" sz="1050" dirty="0">
+              <a:rPr lang="en-US" sz="1150" dirty="0">
                 <a:solidFill>
                   <a:srgbClr val="334155"/>
                 </a:solidFill>
@@ -20796,7 +21560,7 @@
                 <a:ea typeface="Calibri" pitchFamily="34" charset="-122"/>
                 <a:cs typeface="Calibri" pitchFamily="34" charset="-120"/>
               </a:rPr>
-              <a:t>1 − π = 0.52
+              <a:t>Risk-neutral expected payoff = 0.48 × 10 + 0.52 × 0 = EUR 4.80
 </a:t>
             </a:r>
             <a:pPr indent="0" marL="0">
@@ -20806,7 +21570,7 @@
               <a:buNone/>
             </a:pPr>
             <a:r>
-              <a:rPr lang="en-US" sz="1050" b="1" dirty="0">
+              <a:rPr lang="en-US" sz="1150" b="1" dirty="0">
                 <a:solidFill>
                   <a:srgbClr val="1B2A4A"/>
                 </a:solidFill>
@@ -20823,7 +21587,7 @@
               <a:buNone/>
             </a:pPr>
             <a:r>
-              <a:rPr lang="en-US" sz="1050" dirty="0">
+              <a:rPr lang="en-US" sz="1150" dirty="0">
                 <a:solidFill>
                   <a:srgbClr val="334155"/>
                 </a:solidFill>
@@ -20831,79 +21595,9 @@
                 <a:ea typeface="Calibri" pitchFamily="34" charset="-122"/>
                 <a:cs typeface="Calibri" pitchFamily="34" charset="-120"/>
               </a:rPr>
-              <a:t>Expected payoff = 0.48 · 10 + 0.52 · 0 = 4.80
-</a:t>
-            </a:r>
-            <a:pPr indent="0" marL="0">
-              <a:spcAft>
-                <a:spcPts val="200"/>
-              </a:spcAft>
-              <a:buNone/>
-            </a:pPr>
-            <a:r>
-              <a:rPr lang="en-US" sz="1050" b="1" dirty="0">
-                <a:solidFill>
-                  <a:srgbClr val="1B2A4A"/>
-                </a:solidFill>
-                <a:latin typeface="Calibri" pitchFamily="34" charset="0"/>
-                <a:ea typeface="Calibri" pitchFamily="34" charset="-122"/>
-                <a:cs typeface="Calibri" pitchFamily="34" charset="-120"/>
-              </a:rPr>
-              <a:t>4. </a:t>
-            </a:r>
-            <a:pPr indent="0" marL="0">
-              <a:spcAft>
-                <a:spcPts val="200"/>
-              </a:spcAft>
-              <a:buNone/>
-            </a:pPr>
-            <a:r>
-              <a:rPr lang="en-US" sz="1050" dirty="0">
-                <a:solidFill>
-                  <a:srgbClr val="334155"/>
-                </a:solidFill>
-                <a:latin typeface="Calibri" pitchFamily="34" charset="0"/>
-                <a:ea typeface="Calibri" pitchFamily="34" charset="-122"/>
-                <a:cs typeface="Calibri" pitchFamily="34" charset="-120"/>
-              </a:rPr>
-              <a:t>Discount: c₀ = 4.80 / 1.05 = 4.57
-</a:t>
-            </a:r>
-            <a:pPr indent="0" marL="0">
-              <a:spcAft>
-                <a:spcPts val="200"/>
-              </a:spcAft>
-              <a:buNone/>
-            </a:pPr>
-            <a:r>
-              <a:rPr lang="en-US" sz="1050" b="1" dirty="0">
-                <a:solidFill>
-                  <a:srgbClr val="1B2A4A"/>
-                </a:solidFill>
-                <a:latin typeface="Calibri" pitchFamily="34" charset="0"/>
-                <a:ea typeface="Calibri" pitchFamily="34" charset="-122"/>
-                <a:cs typeface="Calibri" pitchFamily="34" charset="-120"/>
-              </a:rPr>
-              <a:t>5. </a:t>
-            </a:r>
-            <a:pPr indent="0" marL="0">
-              <a:spcAft>
-                <a:spcPts val="200"/>
-              </a:spcAft>
-              <a:buNone/>
-            </a:pPr>
-            <a:r>
-              <a:rPr lang="en-US" sz="1050" dirty="0">
-                <a:solidFill>
-                  <a:srgbClr val="334155"/>
-                </a:solidFill>
-                <a:latin typeface="Calibri" pitchFamily="34" charset="0"/>
-                <a:ea typeface="Calibri" pitchFamily="34" charset="-122"/>
-                <a:cs typeface="Calibri" pitchFamily="34" charset="-120"/>
-              </a:rPr>
-              <a:t>Matches the delta-hedge answer exactly — as it must, both follow from the same no-arbitrage condition.</a:t>
-            </a:r>
-            <a:endParaRPr lang="en-US" sz="1050" dirty="0"/>
+              <a:t>Discount one period at r: c₀ = 4.80 / 1.05 = EUR 4.57</a:t>
+            </a:r>
+            <a:endParaRPr lang="en-US" sz="1150" dirty="0"/>
           </a:p>
         </p:txBody>
       </p:sp>
@@ -20963,7 +21657,7 @@
                 <a:ea typeface="Consolas" pitchFamily="34" charset="-122"/>
                 <a:cs typeface="Consolas" pitchFamily="34" charset="-120"/>
               </a:rPr>
-              <a:t>c₀ = 4.57 ✓  Same number, faster route. Risk-neutral pricing scales directly to N-period trees &amp; Black-Scholes.</a:t>
+              <a:t>Same 4.57. Faster route, and the only one that scales to an N-period tree.</a:t>
             </a:r>
             <a:endParaRPr lang="en-US" sz="1150" dirty="0"/>
           </a:p>
@@ -21070,7 +21764,7 @@
                 <a:ea typeface="Trebuchet MS" pitchFamily="34" charset="-122"/>
                 <a:cs typeface="Trebuchet MS" pitchFamily="34" charset="-120"/>
               </a:rPr>
-              <a:t>Actual probabilities do not affect the price — only volatility and the risk-free rate do</a:t>
+              <a:t>Real-world probabilities do not move the price; the width of the tree and the risk-free rate do</a:t>
             </a:r>
             <a:endParaRPr lang="en-US" sz="1800" dirty="0"/>
           </a:p>
@@ -21174,7 +21868,7 @@
                 <a:ea typeface="Calibri" pitchFamily="34" charset="-122"/>
                 <a:cs typeface="Calibri" pitchFamily="34" charset="-120"/>
               </a:rPr>
-              <a:t>Source: CFA Institute, Curriculum Vol 7, Learning Module 10, §4 Example 1 "Hightest Capital", pp. 226–228.</a:t>
+              <a:t>Source: CFA Institute, Curriculum Vol 7, Learning Module 10, §4 Example 1 "Hightest Capital", printed pp. 226–228, and §5 Example 2 "Hightest Capital (revisited)", printed pp. 231–232.</a:t>
             </a:r>
             <a:endParaRPr lang="en-US" sz="750" dirty="0"/>
           </a:p>
@@ -21216,7 +21910,7 @@
                 <a:ea typeface="Calibri" pitchFamily="34" charset="-122"/>
                 <a:cs typeface="Calibri" pitchFamily="34" charset="-120"/>
               </a:rPr>
-              <a:t>The CIO's bullish view is irrelevant to the premium. Doubling the move width (from ±20% to ±40%) roughly doubles the call premium.</a:t>
+              <a:t>One-year options on a non-dividend stock: S₀ = USD 50, X = USD 55, r = 5%. Puts follow from parity. Only the first two rows differ.</a:t>
             </a:r>
             <a:endParaRPr lang="en-US" sz="1300" dirty="0"/>
           </a:p>
@@ -21245,14 +21939,13 @@
             <a:tbl>
               <a:tblPr/>
               <a:tblGrid>
-                <a:gridCol w="2148840"/>
-                <a:gridCol w="822960"/>
-                <a:gridCol w="822960"/>
-                <a:gridCol w="777240"/>
-                <a:gridCol w="777240"/>
-                <a:gridCol w="822960"/>
-                <a:gridCol w="822960"/>
-                <a:gridCol w="1417320"/>
+                <a:gridCol w="2651760"/>
+                <a:gridCol w="868680"/>
+                <a:gridCol w="868680"/>
+                <a:gridCol w="914400"/>
+                <a:gridCol w="960120"/>
+                <a:gridCol w="1097280"/>
+                <a:gridCol w="1143000"/>
               </a:tblGrid>
               <a:tr h="274320">
                 <a:tc>
@@ -21322,7 +22015,7 @@
                           <a:ea typeface="Trebuchet MS" pitchFamily="34" charset="-122"/>
                           <a:cs typeface="Trebuchet MS" pitchFamily="34" charset="-120"/>
                         </a:rPr>
-                        <a:t>S_u</a:t>
+                        <a:t>S₁ᵘ</a:t>
                       </a:r>
                       <a:endParaRPr lang="en-US" sz="1100" dirty="0">
                         <a:latin typeface="Trebuchet MS" charset="0"/>
@@ -21372,107 +22065,7 @@
                           <a:ea typeface="Trebuchet MS" pitchFamily="34" charset="-122"/>
                           <a:cs typeface="Trebuchet MS" pitchFamily="34" charset="-120"/>
                         </a:rPr>
-                        <a:t>S_d</a:t>
-                      </a:r>
-                      <a:endParaRPr lang="en-US" sz="1100" dirty="0">
-                        <a:latin typeface="Trebuchet MS" charset="0"/>
-                        <a:ea typeface="Trebuchet MS" charset="0"/>
-                        <a:cs typeface="Trebuchet MS" charset="0"/>
-                      </a:endParaRPr>
-                    </a:p>
-                  </a:txBody>
-                  <a:tcPr marL="91440" marR="91440" marT="45720" marB="45720" anchor="ctr">
-                    <a:lnL w="0" cap="flat" cmpd="sng" algn="ctr">
-                      <a:noFill/>
-                    </a:lnL>
-                    <a:lnR w="0" cap="flat" cmpd="sng" algn="ctr">
-                      <a:noFill/>
-                    </a:lnR>
-                    <a:lnT w="6350" cap="flat" cmpd="sng" algn="ctr">
-                      <a:solidFill>
-                        <a:srgbClr val="1B2A4A"/>
-                      </a:solidFill>
-                      <a:prstDash val="solid"/>
-                      <a:round/>
-                      <a:headEnd type="none" w="med" len="med"/>
-                      <a:tailEnd type="none" w="med" len="med"/>
-                    </a:lnT>
-                    <a:lnB w="0" cap="flat" cmpd="sng" algn="ctr">
-                      <a:noFill/>
-                    </a:lnB>
-                    <a:solidFill>
-                      <a:srgbClr val="1B2A4A"/>
-                    </a:solidFill>
-                  </a:tcPr>
-                </a:tc>
-                <a:tc>
-                  <a:txBody>
-                    <a:bodyPr/>
-                    <a:lstStyle/>
-                    <a:p>
-                      <a:pPr algn="ctr" indent="0" marL="0">
-                        <a:buNone/>
-                      </a:pPr>
-                      <a:r>
-                        <a:rPr lang="en-US" sz="1100" b="1" dirty="0">
-                          <a:solidFill>
-                            <a:srgbClr val="FFFFFF"/>
-                          </a:solidFill>
-                          <a:latin typeface="Trebuchet MS" pitchFamily="34" charset="0"/>
-                          <a:ea typeface="Trebuchet MS" pitchFamily="34" charset="-122"/>
-                          <a:cs typeface="Trebuchet MS" pitchFamily="34" charset="-120"/>
-                        </a:rPr>
-                        <a:t>R_u</a:t>
-                      </a:r>
-                      <a:endParaRPr lang="en-US" sz="1100" dirty="0">
-                        <a:latin typeface="Trebuchet MS" charset="0"/>
-                        <a:ea typeface="Trebuchet MS" charset="0"/>
-                        <a:cs typeface="Trebuchet MS" charset="0"/>
-                      </a:endParaRPr>
-                    </a:p>
-                  </a:txBody>
-                  <a:tcPr marL="91440" marR="91440" marT="45720" marB="45720" anchor="ctr">
-                    <a:lnL w="0" cap="flat" cmpd="sng" algn="ctr">
-                      <a:noFill/>
-                    </a:lnL>
-                    <a:lnR w="0" cap="flat" cmpd="sng" algn="ctr">
-                      <a:noFill/>
-                    </a:lnR>
-                    <a:lnT w="6350" cap="flat" cmpd="sng" algn="ctr">
-                      <a:solidFill>
-                        <a:srgbClr val="1B2A4A"/>
-                      </a:solidFill>
-                      <a:prstDash val="solid"/>
-                      <a:round/>
-                      <a:headEnd type="none" w="med" len="med"/>
-                      <a:tailEnd type="none" w="med" len="med"/>
-                    </a:lnT>
-                    <a:lnB w="0" cap="flat" cmpd="sng" algn="ctr">
-                      <a:noFill/>
-                    </a:lnB>
-                    <a:solidFill>
-                      <a:srgbClr val="1B2A4A"/>
-                    </a:solidFill>
-                  </a:tcPr>
-                </a:tc>
-                <a:tc>
-                  <a:txBody>
-                    <a:bodyPr/>
-                    <a:lstStyle/>
-                    <a:p>
-                      <a:pPr algn="ctr" indent="0" marL="0">
-                        <a:buNone/>
-                      </a:pPr>
-                      <a:r>
-                        <a:rPr lang="en-US" sz="1100" b="1" dirty="0">
-                          <a:solidFill>
-                            <a:srgbClr val="FFFFFF"/>
-                          </a:solidFill>
-                          <a:latin typeface="Trebuchet MS" pitchFamily="34" charset="0"/>
-                          <a:ea typeface="Trebuchet MS" pitchFamily="34" charset="-122"/>
-                          <a:cs typeface="Trebuchet MS" pitchFamily="34" charset="-120"/>
-                        </a:rPr>
-                        <a:t>R_d</a:t>
+                        <a:t>S₁ᵈ</a:t>
                       </a:r>
                       <a:endParaRPr lang="en-US" sz="1100" dirty="0">
                         <a:latin typeface="Trebuchet MS" charset="0"/>
@@ -21622,7 +22215,57 @@
                           <a:ea typeface="Trebuchet MS" pitchFamily="34" charset="-122"/>
                           <a:cs typeface="Trebuchet MS" pitchFamily="34" charset="-120"/>
                         </a:rPr>
-                        <a:t>c₀</a:t>
+                        <a:t>Call c₀</a:t>
+                      </a:r>
+                      <a:endParaRPr lang="en-US" sz="1100" dirty="0">
+                        <a:latin typeface="Trebuchet MS" charset="0"/>
+                        <a:ea typeface="Trebuchet MS" charset="0"/>
+                        <a:cs typeface="Trebuchet MS" charset="0"/>
+                      </a:endParaRPr>
+                    </a:p>
+                  </a:txBody>
+                  <a:tcPr marL="91440" marR="91440" marT="45720" marB="45720" anchor="ctr">
+                    <a:lnL w="0" cap="flat" cmpd="sng" algn="ctr">
+                      <a:noFill/>
+                    </a:lnL>
+                    <a:lnR w="0" cap="flat" cmpd="sng" algn="ctr">
+                      <a:noFill/>
+                    </a:lnR>
+                    <a:lnT w="6350" cap="flat" cmpd="sng" algn="ctr">
+                      <a:solidFill>
+                        <a:srgbClr val="1B2A4A"/>
+                      </a:solidFill>
+                      <a:prstDash val="solid"/>
+                      <a:round/>
+                      <a:headEnd type="none" w="med" len="med"/>
+                      <a:tailEnd type="none" w="med" len="med"/>
+                    </a:lnT>
+                    <a:lnB w="0" cap="flat" cmpd="sng" algn="ctr">
+                      <a:noFill/>
+                    </a:lnB>
+                    <a:solidFill>
+                      <a:srgbClr val="1B2A4A"/>
+                    </a:solidFill>
+                  </a:tcPr>
+                </a:tc>
+                <a:tc>
+                  <a:txBody>
+                    <a:bodyPr/>
+                    <a:lstStyle/>
+                    <a:p>
+                      <a:pPr algn="ctr" indent="0" marL="0">
+                        <a:buNone/>
+                      </a:pPr>
+                      <a:r>
+                        <a:rPr lang="en-US" sz="1100" b="1" dirty="0">
+                          <a:solidFill>
+                            <a:srgbClr val="FFFFFF"/>
+                          </a:solidFill>
+                          <a:latin typeface="Trebuchet MS" pitchFamily="34" charset="0"/>
+                          <a:ea typeface="Trebuchet MS" pitchFamily="34" charset="-122"/>
+                          <a:cs typeface="Trebuchet MS" pitchFamily="34" charset="-120"/>
+                        </a:rPr>
+                        <a:t>Put p₀</a:t>
                       </a:r>
                       <a:endParaRPr lang="en-US" sz="1100" dirty="0">
                         <a:latin typeface="Trebuchet MS" charset="0"/>
@@ -21674,7 +22317,7 @@
                           <a:ea typeface="Calibri" pitchFamily="34" charset="-122"/>
                           <a:cs typeface="Calibri" pitchFamily="34" charset="-120"/>
                         </a:rPr>
-                        <a:t>±20% move (S₀=50, X=55, r=5%)</a:t>
+                        <a:t>±20% move — base case</a:t>
                       </a:r>
                       <a:endParaRPr lang="en-US" sz="1100" dirty="0">
                         <a:latin typeface="Calibri" charset="0"/>
@@ -21824,7 +22467,7 @@
                           <a:ea typeface="Consolas" pitchFamily="34" charset="-122"/>
                           <a:cs typeface="Consolas" pitchFamily="34" charset="-120"/>
                         </a:rPr>
-                        <a:t>1.20</a:t>
+                        <a:t>0.25</a:t>
                       </a:r>
                       <a:endParaRPr lang="en-US" sz="1100" dirty="0">
                         <a:latin typeface="Consolas" charset="0"/>
@@ -21874,7 +22517,611 @@
                           <a:ea typeface="Consolas" pitchFamily="34" charset="-122"/>
                           <a:cs typeface="Consolas" pitchFamily="34" charset="-120"/>
                         </a:rPr>
-                        <a:t>0.80</a:t>
+                        <a:t>0.625</a:t>
+                      </a:r>
+                      <a:endParaRPr lang="en-US" sz="1100" dirty="0">
+                        <a:latin typeface="Consolas" charset="0"/>
+                        <a:ea typeface="Consolas" charset="0"/>
+                        <a:cs typeface="Consolas" charset="0"/>
+                      </a:endParaRPr>
+                    </a:p>
+                  </a:txBody>
+                  <a:tcPr marL="91440" marR="91440" marT="45720" marB="45720" anchor="ctr">
+                    <a:lnL w="0" cap="flat" cmpd="sng" algn="ctr">
+                      <a:noFill/>
+                    </a:lnL>
+                    <a:lnR w="0" cap="flat" cmpd="sng" algn="ctr">
+                      <a:noFill/>
+                    </a:lnR>
+                    <a:lnT w="0" cap="flat" cmpd="sng" algn="ctr">
+                      <a:noFill/>
+                    </a:lnT>
+                    <a:lnB w="3175" cap="flat" cmpd="sng" algn="ctr">
+                      <a:solidFill>
+                        <a:srgbClr val="D0D8E8"/>
+                      </a:solidFill>
+                      <a:prstDash val="solid"/>
+                      <a:round/>
+                      <a:headEnd type="none" w="med" len="med"/>
+                      <a:tailEnd type="none" w="med" len="med"/>
+                    </a:lnB>
+                    <a:solidFill>
+                      <a:srgbClr val="FFFFFF"/>
+                    </a:solidFill>
+                  </a:tcPr>
+                </a:tc>
+                <a:tc>
+                  <a:txBody>
+                    <a:bodyPr/>
+                    <a:lstStyle/>
+                    <a:p>
+                      <a:pPr algn="r" indent="0" marL="0">
+                        <a:buNone/>
+                      </a:pPr>
+                      <a:r>
+                        <a:rPr lang="en-US" sz="1100" dirty="0">
+                          <a:solidFill>
+                            <a:srgbClr val="334155"/>
+                          </a:solidFill>
+                          <a:latin typeface="Consolas" pitchFamily="34" charset="0"/>
+                          <a:ea typeface="Consolas" pitchFamily="34" charset="-122"/>
+                          <a:cs typeface="Consolas" pitchFamily="34" charset="-120"/>
+                        </a:rPr>
+                        <a:t>2.98</a:t>
+                      </a:r>
+                      <a:endParaRPr lang="en-US" sz="1100" dirty="0">
+                        <a:latin typeface="Consolas" charset="0"/>
+                        <a:ea typeface="Consolas" charset="0"/>
+                        <a:cs typeface="Consolas" charset="0"/>
+                      </a:endParaRPr>
+                    </a:p>
+                  </a:txBody>
+                  <a:tcPr marL="91440" marR="91440" marT="45720" marB="45720" anchor="ctr">
+                    <a:lnL w="0" cap="flat" cmpd="sng" algn="ctr">
+                      <a:noFill/>
+                    </a:lnL>
+                    <a:lnR w="0" cap="flat" cmpd="sng" algn="ctr">
+                      <a:noFill/>
+                    </a:lnR>
+                    <a:lnT w="0" cap="flat" cmpd="sng" algn="ctr">
+                      <a:noFill/>
+                    </a:lnT>
+                    <a:lnB w="3175" cap="flat" cmpd="sng" algn="ctr">
+                      <a:solidFill>
+                        <a:srgbClr val="D0D8E8"/>
+                      </a:solidFill>
+                      <a:prstDash val="solid"/>
+                      <a:round/>
+                      <a:headEnd type="none" w="med" len="med"/>
+                      <a:tailEnd type="none" w="med" len="med"/>
+                    </a:lnB>
+                    <a:solidFill>
+                      <a:srgbClr val="FFFFFF"/>
+                    </a:solidFill>
+                  </a:tcPr>
+                </a:tc>
+                <a:tc>
+                  <a:txBody>
+                    <a:bodyPr/>
+                    <a:lstStyle/>
+                    <a:p>
+                      <a:pPr algn="r" indent="0" marL="0">
+                        <a:buNone/>
+                      </a:pPr>
+                      <a:r>
+                        <a:rPr lang="en-US" sz="1100" dirty="0">
+                          <a:solidFill>
+                            <a:srgbClr val="334155"/>
+                          </a:solidFill>
+                          <a:latin typeface="Consolas" pitchFamily="34" charset="0"/>
+                          <a:ea typeface="Consolas" pitchFamily="34" charset="-122"/>
+                          <a:cs typeface="Consolas" pitchFamily="34" charset="-120"/>
+                        </a:rPr>
+                        <a:t>5.36</a:t>
+                      </a:r>
+                      <a:endParaRPr lang="en-US" sz="1100" dirty="0">
+                        <a:latin typeface="Consolas" charset="0"/>
+                        <a:ea typeface="Consolas" charset="0"/>
+                        <a:cs typeface="Consolas" charset="0"/>
+                      </a:endParaRPr>
+                    </a:p>
+                  </a:txBody>
+                  <a:tcPr marL="91440" marR="91440" marT="45720" marB="45720" anchor="ctr">
+                    <a:lnL w="0" cap="flat" cmpd="sng" algn="ctr">
+                      <a:noFill/>
+                    </a:lnL>
+                    <a:lnR w="0" cap="flat" cmpd="sng" algn="ctr">
+                      <a:noFill/>
+                    </a:lnR>
+                    <a:lnT w="0" cap="flat" cmpd="sng" algn="ctr">
+                      <a:noFill/>
+                    </a:lnT>
+                    <a:lnB w="3175" cap="flat" cmpd="sng" algn="ctr">
+                      <a:solidFill>
+                        <a:srgbClr val="D0D8E8"/>
+                      </a:solidFill>
+                      <a:prstDash val="solid"/>
+                      <a:round/>
+                      <a:headEnd type="none" w="med" len="med"/>
+                      <a:tailEnd type="none" w="med" len="med"/>
+                    </a:lnB>
+                    <a:solidFill>
+                      <a:srgbClr val="FFFFFF"/>
+                    </a:solidFill>
+                  </a:tcPr>
+                </a:tc>
+              </a:tr>
+              <a:tr h="274320">
+                <a:tc>
+                  <a:txBody>
+                    <a:bodyPr/>
+                    <a:lstStyle/>
+                    <a:p>
+                      <a:pPr algn="l" indent="0" marL="0">
+                        <a:buNone/>
+                      </a:pPr>
+                      <a:r>
+                        <a:rPr lang="en-US" sz="1100" dirty="0">
+                          <a:solidFill>
+                            <a:srgbClr val="334155"/>
+                          </a:solidFill>
+                          <a:latin typeface="Calibri" pitchFamily="34" charset="0"/>
+                          <a:ea typeface="Calibri" pitchFamily="34" charset="-122"/>
+                          <a:cs typeface="Calibri" pitchFamily="34" charset="-120"/>
+                        </a:rPr>
+                        <a:t>±40% move — tree twice as wide</a:t>
+                      </a:r>
+                      <a:endParaRPr lang="en-US" sz="1100" dirty="0">
+                        <a:latin typeface="Calibri" charset="0"/>
+                        <a:ea typeface="Calibri" charset="0"/>
+                        <a:cs typeface="Calibri" charset="0"/>
+                      </a:endParaRPr>
+                    </a:p>
+                  </a:txBody>
+                  <a:tcPr marL="91440" marR="91440" marT="45720" marB="45720" anchor="ctr">
+                    <a:lnL w="0" cap="flat" cmpd="sng" algn="ctr">
+                      <a:noFill/>
+                    </a:lnL>
+                    <a:lnR w="0" cap="flat" cmpd="sng" algn="ctr">
+                      <a:noFill/>
+                    </a:lnR>
+                    <a:lnT w="0" cap="flat" cmpd="sng" algn="ctr">
+                      <a:noFill/>
+                    </a:lnT>
+                    <a:lnB w="3175" cap="flat" cmpd="sng" algn="ctr">
+                      <a:solidFill>
+                        <a:srgbClr val="D0D8E8"/>
+                      </a:solidFill>
+                      <a:prstDash val="solid"/>
+                      <a:round/>
+                      <a:headEnd type="none" w="med" len="med"/>
+                      <a:tailEnd type="none" w="med" len="med"/>
+                    </a:lnB>
+                    <a:solidFill>
+                      <a:srgbClr val="F5F7FA"/>
+                    </a:solidFill>
+                  </a:tcPr>
+                </a:tc>
+                <a:tc>
+                  <a:txBody>
+                    <a:bodyPr/>
+                    <a:lstStyle/>
+                    <a:p>
+                      <a:pPr algn="r" indent="0" marL="0">
+                        <a:buNone/>
+                      </a:pPr>
+                      <a:r>
+                        <a:rPr lang="en-US" sz="1100" dirty="0">
+                          <a:solidFill>
+                            <a:srgbClr val="334155"/>
+                          </a:solidFill>
+                          <a:latin typeface="Consolas" pitchFamily="34" charset="0"/>
+                          <a:ea typeface="Consolas" pitchFamily="34" charset="-122"/>
+                          <a:cs typeface="Consolas" pitchFamily="34" charset="-120"/>
+                        </a:rPr>
+                        <a:t>70</a:t>
+                      </a:r>
+                      <a:endParaRPr lang="en-US" sz="1100" dirty="0">
+                        <a:latin typeface="Consolas" charset="0"/>
+                        <a:ea typeface="Consolas" charset="0"/>
+                        <a:cs typeface="Consolas" charset="0"/>
+                      </a:endParaRPr>
+                    </a:p>
+                  </a:txBody>
+                  <a:tcPr marL="91440" marR="91440" marT="45720" marB="45720" anchor="ctr">
+                    <a:lnL w="0" cap="flat" cmpd="sng" algn="ctr">
+                      <a:noFill/>
+                    </a:lnL>
+                    <a:lnR w="0" cap="flat" cmpd="sng" algn="ctr">
+                      <a:noFill/>
+                    </a:lnR>
+                    <a:lnT w="0" cap="flat" cmpd="sng" algn="ctr">
+                      <a:noFill/>
+                    </a:lnT>
+                    <a:lnB w="3175" cap="flat" cmpd="sng" algn="ctr">
+                      <a:solidFill>
+                        <a:srgbClr val="D0D8E8"/>
+                      </a:solidFill>
+                      <a:prstDash val="solid"/>
+                      <a:round/>
+                      <a:headEnd type="none" w="med" len="med"/>
+                      <a:tailEnd type="none" w="med" len="med"/>
+                    </a:lnB>
+                    <a:solidFill>
+                      <a:srgbClr val="F5F7FA"/>
+                    </a:solidFill>
+                  </a:tcPr>
+                </a:tc>
+                <a:tc>
+                  <a:txBody>
+                    <a:bodyPr/>
+                    <a:lstStyle/>
+                    <a:p>
+                      <a:pPr algn="r" indent="0" marL="0">
+                        <a:buNone/>
+                      </a:pPr>
+                      <a:r>
+                        <a:rPr lang="en-US" sz="1100" dirty="0">
+                          <a:solidFill>
+                            <a:srgbClr val="334155"/>
+                          </a:solidFill>
+                          <a:latin typeface="Consolas" pitchFamily="34" charset="0"/>
+                          <a:ea typeface="Consolas" pitchFamily="34" charset="-122"/>
+                          <a:cs typeface="Consolas" pitchFamily="34" charset="-120"/>
+                        </a:rPr>
+                        <a:t>30</a:t>
+                      </a:r>
+                      <a:endParaRPr lang="en-US" sz="1100" dirty="0">
+                        <a:latin typeface="Consolas" charset="0"/>
+                        <a:ea typeface="Consolas" charset="0"/>
+                        <a:cs typeface="Consolas" charset="0"/>
+                      </a:endParaRPr>
+                    </a:p>
+                  </a:txBody>
+                  <a:tcPr marL="91440" marR="91440" marT="45720" marB="45720" anchor="ctr">
+                    <a:lnL w="0" cap="flat" cmpd="sng" algn="ctr">
+                      <a:noFill/>
+                    </a:lnL>
+                    <a:lnR w="0" cap="flat" cmpd="sng" algn="ctr">
+                      <a:noFill/>
+                    </a:lnR>
+                    <a:lnT w="0" cap="flat" cmpd="sng" algn="ctr">
+                      <a:noFill/>
+                    </a:lnT>
+                    <a:lnB w="3175" cap="flat" cmpd="sng" algn="ctr">
+                      <a:solidFill>
+                        <a:srgbClr val="D0D8E8"/>
+                      </a:solidFill>
+                      <a:prstDash val="solid"/>
+                      <a:round/>
+                      <a:headEnd type="none" w="med" len="med"/>
+                      <a:tailEnd type="none" w="med" len="med"/>
+                    </a:lnB>
+                    <a:solidFill>
+                      <a:srgbClr val="F5F7FA"/>
+                    </a:solidFill>
+                  </a:tcPr>
+                </a:tc>
+                <a:tc>
+                  <a:txBody>
+                    <a:bodyPr/>
+                    <a:lstStyle/>
+                    <a:p>
+                      <a:pPr algn="r" indent="0" marL="0">
+                        <a:buNone/>
+                      </a:pPr>
+                      <a:r>
+                        <a:rPr lang="en-US" sz="1100" dirty="0">
+                          <a:solidFill>
+                            <a:srgbClr val="334155"/>
+                          </a:solidFill>
+                          <a:latin typeface="Consolas" pitchFamily="34" charset="0"/>
+                          <a:ea typeface="Consolas" pitchFamily="34" charset="-122"/>
+                          <a:cs typeface="Consolas" pitchFamily="34" charset="-120"/>
+                        </a:rPr>
+                        <a:t>0.375</a:t>
+                      </a:r>
+                      <a:endParaRPr lang="en-US" sz="1100" dirty="0">
+                        <a:latin typeface="Consolas" charset="0"/>
+                        <a:ea typeface="Consolas" charset="0"/>
+                        <a:cs typeface="Consolas" charset="0"/>
+                      </a:endParaRPr>
+                    </a:p>
+                  </a:txBody>
+                  <a:tcPr marL="91440" marR="91440" marT="45720" marB="45720" anchor="ctr">
+                    <a:lnL w="0" cap="flat" cmpd="sng" algn="ctr">
+                      <a:noFill/>
+                    </a:lnL>
+                    <a:lnR w="0" cap="flat" cmpd="sng" algn="ctr">
+                      <a:noFill/>
+                    </a:lnR>
+                    <a:lnT w="0" cap="flat" cmpd="sng" algn="ctr">
+                      <a:noFill/>
+                    </a:lnT>
+                    <a:lnB w="3175" cap="flat" cmpd="sng" algn="ctr">
+                      <a:solidFill>
+                        <a:srgbClr val="D0D8E8"/>
+                      </a:solidFill>
+                      <a:prstDash val="solid"/>
+                      <a:round/>
+                      <a:headEnd type="none" w="med" len="med"/>
+                      <a:tailEnd type="none" w="med" len="med"/>
+                    </a:lnB>
+                    <a:solidFill>
+                      <a:srgbClr val="F5F7FA"/>
+                    </a:solidFill>
+                  </a:tcPr>
+                </a:tc>
+                <a:tc>
+                  <a:txBody>
+                    <a:bodyPr/>
+                    <a:lstStyle/>
+                    <a:p>
+                      <a:pPr algn="r" indent="0" marL="0">
+                        <a:buNone/>
+                      </a:pPr>
+                      <a:r>
+                        <a:rPr lang="en-US" sz="1100" dirty="0">
+                          <a:solidFill>
+                            <a:srgbClr val="334155"/>
+                          </a:solidFill>
+                          <a:latin typeface="Consolas" pitchFamily="34" charset="0"/>
+                          <a:ea typeface="Consolas" pitchFamily="34" charset="-122"/>
+                          <a:cs typeface="Consolas" pitchFamily="34" charset="-120"/>
+                        </a:rPr>
+                        <a:t>0.5625</a:t>
+                      </a:r>
+                      <a:endParaRPr lang="en-US" sz="1100" dirty="0">
+                        <a:latin typeface="Consolas" charset="0"/>
+                        <a:ea typeface="Consolas" charset="0"/>
+                        <a:cs typeface="Consolas" charset="0"/>
+                      </a:endParaRPr>
+                    </a:p>
+                  </a:txBody>
+                  <a:tcPr marL="91440" marR="91440" marT="45720" marB="45720" anchor="ctr">
+                    <a:lnL w="0" cap="flat" cmpd="sng" algn="ctr">
+                      <a:noFill/>
+                    </a:lnL>
+                    <a:lnR w="0" cap="flat" cmpd="sng" algn="ctr">
+                      <a:noFill/>
+                    </a:lnR>
+                    <a:lnT w="0" cap="flat" cmpd="sng" algn="ctr">
+                      <a:noFill/>
+                    </a:lnT>
+                    <a:lnB w="3175" cap="flat" cmpd="sng" algn="ctr">
+                      <a:solidFill>
+                        <a:srgbClr val="D0D8E8"/>
+                      </a:solidFill>
+                      <a:prstDash val="solid"/>
+                      <a:round/>
+                      <a:headEnd type="none" w="med" len="med"/>
+                      <a:tailEnd type="none" w="med" len="med"/>
+                    </a:lnB>
+                    <a:solidFill>
+                      <a:srgbClr val="F5F7FA"/>
+                    </a:solidFill>
+                  </a:tcPr>
+                </a:tc>
+                <a:tc>
+                  <a:txBody>
+                    <a:bodyPr/>
+                    <a:lstStyle/>
+                    <a:p>
+                      <a:pPr algn="r" indent="0" marL="0">
+                        <a:buNone/>
+                      </a:pPr>
+                      <a:r>
+                        <a:rPr lang="en-US" sz="1100" dirty="0">
+                          <a:solidFill>
+                            <a:srgbClr val="334155"/>
+                          </a:solidFill>
+                          <a:latin typeface="Consolas" pitchFamily="34" charset="0"/>
+                          <a:ea typeface="Consolas" pitchFamily="34" charset="-122"/>
+                          <a:cs typeface="Consolas" pitchFamily="34" charset="-120"/>
+                        </a:rPr>
+                        <a:t>8.04</a:t>
+                      </a:r>
+                      <a:endParaRPr lang="en-US" sz="1100" dirty="0">
+                        <a:latin typeface="Consolas" charset="0"/>
+                        <a:ea typeface="Consolas" charset="0"/>
+                        <a:cs typeface="Consolas" charset="0"/>
+                      </a:endParaRPr>
+                    </a:p>
+                  </a:txBody>
+                  <a:tcPr marL="91440" marR="91440" marT="45720" marB="45720" anchor="ctr">
+                    <a:lnL w="0" cap="flat" cmpd="sng" algn="ctr">
+                      <a:noFill/>
+                    </a:lnL>
+                    <a:lnR w="0" cap="flat" cmpd="sng" algn="ctr">
+                      <a:noFill/>
+                    </a:lnR>
+                    <a:lnT w="0" cap="flat" cmpd="sng" algn="ctr">
+                      <a:noFill/>
+                    </a:lnT>
+                    <a:lnB w="3175" cap="flat" cmpd="sng" algn="ctr">
+                      <a:solidFill>
+                        <a:srgbClr val="D0D8E8"/>
+                      </a:solidFill>
+                      <a:prstDash val="solid"/>
+                      <a:round/>
+                      <a:headEnd type="none" w="med" len="med"/>
+                      <a:tailEnd type="none" w="med" len="med"/>
+                    </a:lnB>
+                    <a:solidFill>
+                      <a:srgbClr val="F5F7FA"/>
+                    </a:solidFill>
+                  </a:tcPr>
+                </a:tc>
+                <a:tc>
+                  <a:txBody>
+                    <a:bodyPr/>
+                    <a:lstStyle/>
+                    <a:p>
+                      <a:pPr algn="r" indent="0" marL="0">
+                        <a:buNone/>
+                      </a:pPr>
+                      <a:r>
+                        <a:rPr lang="en-US" sz="1100" dirty="0">
+                          <a:solidFill>
+                            <a:srgbClr val="334155"/>
+                          </a:solidFill>
+                          <a:latin typeface="Consolas" pitchFamily="34" charset="0"/>
+                          <a:ea typeface="Consolas" pitchFamily="34" charset="-122"/>
+                          <a:cs typeface="Consolas" pitchFamily="34" charset="-120"/>
+                        </a:rPr>
+                        <a:t>10.42</a:t>
+                      </a:r>
+                      <a:endParaRPr lang="en-US" sz="1100" dirty="0">
+                        <a:latin typeface="Consolas" charset="0"/>
+                        <a:ea typeface="Consolas" charset="0"/>
+                        <a:cs typeface="Consolas" charset="0"/>
+                      </a:endParaRPr>
+                    </a:p>
+                  </a:txBody>
+                  <a:tcPr marL="91440" marR="91440" marT="45720" marB="45720" anchor="ctr">
+                    <a:lnL w="0" cap="flat" cmpd="sng" algn="ctr">
+                      <a:noFill/>
+                    </a:lnL>
+                    <a:lnR w="0" cap="flat" cmpd="sng" algn="ctr">
+                      <a:noFill/>
+                    </a:lnR>
+                    <a:lnT w="0" cap="flat" cmpd="sng" algn="ctr">
+                      <a:noFill/>
+                    </a:lnT>
+                    <a:lnB w="3175" cap="flat" cmpd="sng" algn="ctr">
+                      <a:solidFill>
+                        <a:srgbClr val="D0D8E8"/>
+                      </a:solidFill>
+                      <a:prstDash val="solid"/>
+                      <a:round/>
+                      <a:headEnd type="none" w="med" len="med"/>
+                      <a:tailEnd type="none" w="med" len="med"/>
+                    </a:lnB>
+                    <a:solidFill>
+                      <a:srgbClr val="F5F7FA"/>
+                    </a:solidFill>
+                  </a:tcPr>
+                </a:tc>
+              </a:tr>
+              <a:tr h="274320">
+                <a:tc>
+                  <a:txBody>
+                    <a:bodyPr/>
+                    <a:lstStyle/>
+                    <a:p>
+                      <a:pPr algn="l" indent="0" marL="0">
+                        <a:buNone/>
+                      </a:pPr>
+                      <a:r>
+                        <a:rPr lang="en-US" sz="1100" dirty="0">
+                          <a:solidFill>
+                            <a:srgbClr val="334155"/>
+                          </a:solidFill>
+                          <a:latin typeface="Calibri" pitchFamily="34" charset="0"/>
+                          <a:ea typeface="Calibri" pitchFamily="34" charset="-122"/>
+                          <a:cs typeface="Calibri" pitchFamily="34" charset="-120"/>
+                        </a:rPr>
+                        <a:t>±20%, bullish view q = 0.80</a:t>
+                      </a:r>
+                      <a:endParaRPr lang="en-US" sz="1100" dirty="0">
+                        <a:latin typeface="Calibri" charset="0"/>
+                        <a:ea typeface="Calibri" charset="0"/>
+                        <a:cs typeface="Calibri" charset="0"/>
+                      </a:endParaRPr>
+                    </a:p>
+                  </a:txBody>
+                  <a:tcPr marL="91440" marR="91440" marT="45720" marB="45720" anchor="ctr">
+                    <a:lnL w="0" cap="flat" cmpd="sng" algn="ctr">
+                      <a:noFill/>
+                    </a:lnL>
+                    <a:lnR w="0" cap="flat" cmpd="sng" algn="ctr">
+                      <a:noFill/>
+                    </a:lnR>
+                    <a:lnT w="0" cap="flat" cmpd="sng" algn="ctr">
+                      <a:noFill/>
+                    </a:lnT>
+                    <a:lnB w="3175" cap="flat" cmpd="sng" algn="ctr">
+                      <a:solidFill>
+                        <a:srgbClr val="D0D8E8"/>
+                      </a:solidFill>
+                      <a:prstDash val="solid"/>
+                      <a:round/>
+                      <a:headEnd type="none" w="med" len="med"/>
+                      <a:tailEnd type="none" w="med" len="med"/>
+                    </a:lnB>
+                    <a:solidFill>
+                      <a:srgbClr val="FFFFFF"/>
+                    </a:solidFill>
+                  </a:tcPr>
+                </a:tc>
+                <a:tc>
+                  <a:txBody>
+                    <a:bodyPr/>
+                    <a:lstStyle/>
+                    <a:p>
+                      <a:pPr algn="r" indent="0" marL="0">
+                        <a:buNone/>
+                      </a:pPr>
+                      <a:r>
+                        <a:rPr lang="en-US" sz="1100" dirty="0">
+                          <a:solidFill>
+                            <a:srgbClr val="334155"/>
+                          </a:solidFill>
+                          <a:latin typeface="Consolas" pitchFamily="34" charset="0"/>
+                          <a:ea typeface="Consolas" pitchFamily="34" charset="-122"/>
+                          <a:cs typeface="Consolas" pitchFamily="34" charset="-120"/>
+                        </a:rPr>
+                        <a:t>60</a:t>
+                      </a:r>
+                      <a:endParaRPr lang="en-US" sz="1100" dirty="0">
+                        <a:latin typeface="Consolas" charset="0"/>
+                        <a:ea typeface="Consolas" charset="0"/>
+                        <a:cs typeface="Consolas" charset="0"/>
+                      </a:endParaRPr>
+                    </a:p>
+                  </a:txBody>
+                  <a:tcPr marL="91440" marR="91440" marT="45720" marB="45720" anchor="ctr">
+                    <a:lnL w="0" cap="flat" cmpd="sng" algn="ctr">
+                      <a:noFill/>
+                    </a:lnL>
+                    <a:lnR w="0" cap="flat" cmpd="sng" algn="ctr">
+                      <a:noFill/>
+                    </a:lnR>
+                    <a:lnT w="0" cap="flat" cmpd="sng" algn="ctr">
+                      <a:noFill/>
+                    </a:lnT>
+                    <a:lnB w="3175" cap="flat" cmpd="sng" algn="ctr">
+                      <a:solidFill>
+                        <a:srgbClr val="D0D8E8"/>
+                      </a:solidFill>
+                      <a:prstDash val="solid"/>
+                      <a:round/>
+                      <a:headEnd type="none" w="med" len="med"/>
+                      <a:tailEnd type="none" w="med" len="med"/>
+                    </a:lnB>
+                    <a:solidFill>
+                      <a:srgbClr val="FFFFFF"/>
+                    </a:solidFill>
+                  </a:tcPr>
+                </a:tc>
+                <a:tc>
+                  <a:txBody>
+                    <a:bodyPr/>
+                    <a:lstStyle/>
+                    <a:p>
+                      <a:pPr algn="r" indent="0" marL="0">
+                        <a:buNone/>
+                      </a:pPr>
+                      <a:r>
+                        <a:rPr lang="en-US" sz="1100" dirty="0">
+                          <a:solidFill>
+                            <a:srgbClr val="334155"/>
+                          </a:solidFill>
+                          <a:latin typeface="Consolas" pitchFamily="34" charset="0"/>
+                          <a:ea typeface="Consolas" pitchFamily="34" charset="-122"/>
+                          <a:cs typeface="Consolas" pitchFamily="34" charset="-120"/>
+                        </a:rPr>
+                        <a:t>40</a:t>
                       </a:r>
                       <a:endParaRPr lang="en-US" sz="1100" dirty="0">
                         <a:latin typeface="Consolas" charset="0"/>
@@ -22012,7 +23259,7 @@
                     <a:bodyPr/>
                     <a:lstStyle/>
                     <a:p>
-                      <a:pPr algn="ctr" indent="0" marL="0">
+                      <a:pPr algn="r" indent="0" marL="0">
                         <a:buNone/>
                       </a:pPr>
                       <a:r>
@@ -22024,7 +23271,57 @@
                           <a:ea typeface="Consolas" pitchFamily="34" charset="-122"/>
                           <a:cs typeface="Consolas" pitchFamily="34" charset="-120"/>
                         </a:rPr>
-                        <a:t>USD 2.98</a:t>
+                        <a:t>2.98</a:t>
+                      </a:r>
+                      <a:endParaRPr lang="en-US" sz="1100" dirty="0">
+                        <a:latin typeface="Consolas" charset="0"/>
+                        <a:ea typeface="Consolas" charset="0"/>
+                        <a:cs typeface="Consolas" charset="0"/>
+                      </a:endParaRPr>
+                    </a:p>
+                  </a:txBody>
+                  <a:tcPr marL="91440" marR="91440" marT="45720" marB="45720" anchor="ctr">
+                    <a:lnL w="0" cap="flat" cmpd="sng" algn="ctr">
+                      <a:noFill/>
+                    </a:lnL>
+                    <a:lnR w="0" cap="flat" cmpd="sng" algn="ctr">
+                      <a:noFill/>
+                    </a:lnR>
+                    <a:lnT w="0" cap="flat" cmpd="sng" algn="ctr">
+                      <a:noFill/>
+                    </a:lnT>
+                    <a:lnB w="3175" cap="flat" cmpd="sng" algn="ctr">
+                      <a:solidFill>
+                        <a:srgbClr val="D0D8E8"/>
+                      </a:solidFill>
+                      <a:prstDash val="solid"/>
+                      <a:round/>
+                      <a:headEnd type="none" w="med" len="med"/>
+                      <a:tailEnd type="none" w="med" len="med"/>
+                    </a:lnB>
+                    <a:solidFill>
+                      <a:srgbClr val="FFFFFF"/>
+                    </a:solidFill>
+                  </a:tcPr>
+                </a:tc>
+                <a:tc>
+                  <a:txBody>
+                    <a:bodyPr/>
+                    <a:lstStyle/>
+                    <a:p>
+                      <a:pPr algn="r" indent="0" marL="0">
+                        <a:buNone/>
+                      </a:pPr>
+                      <a:r>
+                        <a:rPr lang="en-US" sz="1100" dirty="0">
+                          <a:solidFill>
+                            <a:srgbClr val="334155"/>
+                          </a:solidFill>
+                          <a:latin typeface="Consolas" pitchFamily="34" charset="0"/>
+                          <a:ea typeface="Consolas" pitchFamily="34" charset="-122"/>
+                          <a:cs typeface="Consolas" pitchFamily="34" charset="-120"/>
+                        </a:rPr>
+                        <a:t>5.36</a:t>
                       </a:r>
                       <a:endParaRPr lang="en-US" sz="1100" dirty="0">
                         <a:latin typeface="Consolas" charset="0"/>
@@ -22076,811 +23373,7 @@
                           <a:ea typeface="Calibri" pitchFamily="34" charset="-122"/>
                           <a:cs typeface="Calibri" pitchFamily="34" charset="-120"/>
                         </a:rPr>
-                        <a:t>±40% move (same)</a:t>
-                      </a:r>
-                      <a:endParaRPr lang="en-US" sz="1100" dirty="0">
-                        <a:latin typeface="Calibri" charset="0"/>
-                        <a:ea typeface="Calibri" charset="0"/>
-                        <a:cs typeface="Calibri" charset="0"/>
-                      </a:endParaRPr>
-                    </a:p>
-                  </a:txBody>
-                  <a:tcPr marL="91440" marR="91440" marT="45720" marB="45720" anchor="ctr">
-                    <a:lnL w="0" cap="flat" cmpd="sng" algn="ctr">
-                      <a:noFill/>
-                    </a:lnL>
-                    <a:lnR w="0" cap="flat" cmpd="sng" algn="ctr">
-                      <a:noFill/>
-                    </a:lnR>
-                    <a:lnT w="0" cap="flat" cmpd="sng" algn="ctr">
-                      <a:noFill/>
-                    </a:lnT>
-                    <a:lnB w="3175" cap="flat" cmpd="sng" algn="ctr">
-                      <a:solidFill>
-                        <a:srgbClr val="D0D8E8"/>
-                      </a:solidFill>
-                      <a:prstDash val="solid"/>
-                      <a:round/>
-                      <a:headEnd type="none" w="med" len="med"/>
-                      <a:tailEnd type="none" w="med" len="med"/>
-                    </a:lnB>
-                    <a:solidFill>
-                      <a:srgbClr val="F5F7FA"/>
-                    </a:solidFill>
-                  </a:tcPr>
-                </a:tc>
-                <a:tc>
-                  <a:txBody>
-                    <a:bodyPr/>
-                    <a:lstStyle/>
-                    <a:p>
-                      <a:pPr algn="r" indent="0" marL="0">
-                        <a:buNone/>
-                      </a:pPr>
-                      <a:r>
-                        <a:rPr lang="en-US" sz="1100" dirty="0">
-                          <a:solidFill>
-                            <a:srgbClr val="334155"/>
-                          </a:solidFill>
-                          <a:latin typeface="Consolas" pitchFamily="34" charset="0"/>
-                          <a:ea typeface="Consolas" pitchFamily="34" charset="-122"/>
-                          <a:cs typeface="Consolas" pitchFamily="34" charset="-120"/>
-                        </a:rPr>
-                        <a:t>70</a:t>
-                      </a:r>
-                      <a:endParaRPr lang="en-US" sz="1100" dirty="0">
-                        <a:latin typeface="Consolas" charset="0"/>
-                        <a:ea typeface="Consolas" charset="0"/>
-                        <a:cs typeface="Consolas" charset="0"/>
-                      </a:endParaRPr>
-                    </a:p>
-                  </a:txBody>
-                  <a:tcPr marL="91440" marR="91440" marT="45720" marB="45720" anchor="ctr">
-                    <a:lnL w="0" cap="flat" cmpd="sng" algn="ctr">
-                      <a:noFill/>
-                    </a:lnL>
-                    <a:lnR w="0" cap="flat" cmpd="sng" algn="ctr">
-                      <a:noFill/>
-                    </a:lnR>
-                    <a:lnT w="0" cap="flat" cmpd="sng" algn="ctr">
-                      <a:noFill/>
-                    </a:lnT>
-                    <a:lnB w="3175" cap="flat" cmpd="sng" algn="ctr">
-                      <a:solidFill>
-                        <a:srgbClr val="D0D8E8"/>
-                      </a:solidFill>
-                      <a:prstDash val="solid"/>
-                      <a:round/>
-                      <a:headEnd type="none" w="med" len="med"/>
-                      <a:tailEnd type="none" w="med" len="med"/>
-                    </a:lnB>
-                    <a:solidFill>
-                      <a:srgbClr val="F5F7FA"/>
-                    </a:solidFill>
-                  </a:tcPr>
-                </a:tc>
-                <a:tc>
-                  <a:txBody>
-                    <a:bodyPr/>
-                    <a:lstStyle/>
-                    <a:p>
-                      <a:pPr algn="r" indent="0" marL="0">
-                        <a:buNone/>
-                      </a:pPr>
-                      <a:r>
-                        <a:rPr lang="en-US" sz="1100" dirty="0">
-                          <a:solidFill>
-                            <a:srgbClr val="334155"/>
-                          </a:solidFill>
-                          <a:latin typeface="Consolas" pitchFamily="34" charset="0"/>
-                          <a:ea typeface="Consolas" pitchFamily="34" charset="-122"/>
-                          <a:cs typeface="Consolas" pitchFamily="34" charset="-120"/>
-                        </a:rPr>
-                        <a:t>30</a:t>
-                      </a:r>
-                      <a:endParaRPr lang="en-US" sz="1100" dirty="0">
-                        <a:latin typeface="Consolas" charset="0"/>
-                        <a:ea typeface="Consolas" charset="0"/>
-                        <a:cs typeface="Consolas" charset="0"/>
-                      </a:endParaRPr>
-                    </a:p>
-                  </a:txBody>
-                  <a:tcPr marL="91440" marR="91440" marT="45720" marB="45720" anchor="ctr">
-                    <a:lnL w="0" cap="flat" cmpd="sng" algn="ctr">
-                      <a:noFill/>
-                    </a:lnL>
-                    <a:lnR w="0" cap="flat" cmpd="sng" algn="ctr">
-                      <a:noFill/>
-                    </a:lnR>
-                    <a:lnT w="0" cap="flat" cmpd="sng" algn="ctr">
-                      <a:noFill/>
-                    </a:lnT>
-                    <a:lnB w="3175" cap="flat" cmpd="sng" algn="ctr">
-                      <a:solidFill>
-                        <a:srgbClr val="D0D8E8"/>
-                      </a:solidFill>
-                      <a:prstDash val="solid"/>
-                      <a:round/>
-                      <a:headEnd type="none" w="med" len="med"/>
-                      <a:tailEnd type="none" w="med" len="med"/>
-                    </a:lnB>
-                    <a:solidFill>
-                      <a:srgbClr val="F5F7FA"/>
-                    </a:solidFill>
-                  </a:tcPr>
-                </a:tc>
-                <a:tc>
-                  <a:txBody>
-                    <a:bodyPr/>
-                    <a:lstStyle/>
-                    <a:p>
-                      <a:pPr algn="r" indent="0" marL="0">
-                        <a:buNone/>
-                      </a:pPr>
-                      <a:r>
-                        <a:rPr lang="en-US" sz="1100" dirty="0">
-                          <a:solidFill>
-                            <a:srgbClr val="334155"/>
-                          </a:solidFill>
-                          <a:latin typeface="Consolas" pitchFamily="34" charset="0"/>
-                          <a:ea typeface="Consolas" pitchFamily="34" charset="-122"/>
-                          <a:cs typeface="Consolas" pitchFamily="34" charset="-120"/>
-                        </a:rPr>
-                        <a:t>1.40</a:t>
-                      </a:r>
-                      <a:endParaRPr lang="en-US" sz="1100" dirty="0">
-                        <a:latin typeface="Consolas" charset="0"/>
-                        <a:ea typeface="Consolas" charset="0"/>
-                        <a:cs typeface="Consolas" charset="0"/>
-                      </a:endParaRPr>
-                    </a:p>
-                  </a:txBody>
-                  <a:tcPr marL="91440" marR="91440" marT="45720" marB="45720" anchor="ctr">
-                    <a:lnL w="0" cap="flat" cmpd="sng" algn="ctr">
-                      <a:noFill/>
-                    </a:lnL>
-                    <a:lnR w="0" cap="flat" cmpd="sng" algn="ctr">
-                      <a:noFill/>
-                    </a:lnR>
-                    <a:lnT w="0" cap="flat" cmpd="sng" algn="ctr">
-                      <a:noFill/>
-                    </a:lnT>
-                    <a:lnB w="3175" cap="flat" cmpd="sng" algn="ctr">
-                      <a:solidFill>
-                        <a:srgbClr val="D0D8E8"/>
-                      </a:solidFill>
-                      <a:prstDash val="solid"/>
-                      <a:round/>
-                      <a:headEnd type="none" w="med" len="med"/>
-                      <a:tailEnd type="none" w="med" len="med"/>
-                    </a:lnB>
-                    <a:solidFill>
-                      <a:srgbClr val="F5F7FA"/>
-                    </a:solidFill>
-                  </a:tcPr>
-                </a:tc>
-                <a:tc>
-                  <a:txBody>
-                    <a:bodyPr/>
-                    <a:lstStyle/>
-                    <a:p>
-                      <a:pPr algn="r" indent="0" marL="0">
-                        <a:buNone/>
-                      </a:pPr>
-                      <a:r>
-                        <a:rPr lang="en-US" sz="1100" dirty="0">
-                          <a:solidFill>
-                            <a:srgbClr val="334155"/>
-                          </a:solidFill>
-                          <a:latin typeface="Consolas" pitchFamily="34" charset="0"/>
-                          <a:ea typeface="Consolas" pitchFamily="34" charset="-122"/>
-                          <a:cs typeface="Consolas" pitchFamily="34" charset="-120"/>
-                        </a:rPr>
-                        <a:t>0.60</a:t>
-                      </a:r>
-                      <a:endParaRPr lang="en-US" sz="1100" dirty="0">
-                        <a:latin typeface="Consolas" charset="0"/>
-                        <a:ea typeface="Consolas" charset="0"/>
-                        <a:cs typeface="Consolas" charset="0"/>
-                      </a:endParaRPr>
-                    </a:p>
-                  </a:txBody>
-                  <a:tcPr marL="91440" marR="91440" marT="45720" marB="45720" anchor="ctr">
-                    <a:lnL w="0" cap="flat" cmpd="sng" algn="ctr">
-                      <a:noFill/>
-                    </a:lnL>
-                    <a:lnR w="0" cap="flat" cmpd="sng" algn="ctr">
-                      <a:noFill/>
-                    </a:lnR>
-                    <a:lnT w="0" cap="flat" cmpd="sng" algn="ctr">
-                      <a:noFill/>
-                    </a:lnT>
-                    <a:lnB w="3175" cap="flat" cmpd="sng" algn="ctr">
-                      <a:solidFill>
-                        <a:srgbClr val="D0D8E8"/>
-                      </a:solidFill>
-                      <a:prstDash val="solid"/>
-                      <a:round/>
-                      <a:headEnd type="none" w="med" len="med"/>
-                      <a:tailEnd type="none" w="med" len="med"/>
-                    </a:lnB>
-                    <a:solidFill>
-                      <a:srgbClr val="F5F7FA"/>
-                    </a:solidFill>
-                  </a:tcPr>
-                </a:tc>
-                <a:tc>
-                  <a:txBody>
-                    <a:bodyPr/>
-                    <a:lstStyle/>
-                    <a:p>
-                      <a:pPr algn="r" indent="0" marL="0">
-                        <a:buNone/>
-                      </a:pPr>
-                      <a:r>
-                        <a:rPr lang="en-US" sz="1100" dirty="0">
-                          <a:solidFill>
-                            <a:srgbClr val="334155"/>
-                          </a:solidFill>
-                          <a:latin typeface="Consolas" pitchFamily="34" charset="0"/>
-                          <a:ea typeface="Consolas" pitchFamily="34" charset="-122"/>
-                          <a:cs typeface="Consolas" pitchFamily="34" charset="-120"/>
-                        </a:rPr>
-                        <a:t>0.375</a:t>
-                      </a:r>
-                      <a:endParaRPr lang="en-US" sz="1100" dirty="0">
-                        <a:latin typeface="Consolas" charset="0"/>
-                        <a:ea typeface="Consolas" charset="0"/>
-                        <a:cs typeface="Consolas" charset="0"/>
-                      </a:endParaRPr>
-                    </a:p>
-                  </a:txBody>
-                  <a:tcPr marL="91440" marR="91440" marT="45720" marB="45720" anchor="ctr">
-                    <a:lnL w="0" cap="flat" cmpd="sng" algn="ctr">
-                      <a:noFill/>
-                    </a:lnL>
-                    <a:lnR w="0" cap="flat" cmpd="sng" algn="ctr">
-                      <a:noFill/>
-                    </a:lnR>
-                    <a:lnT w="0" cap="flat" cmpd="sng" algn="ctr">
-                      <a:noFill/>
-                    </a:lnT>
-                    <a:lnB w="3175" cap="flat" cmpd="sng" algn="ctr">
-                      <a:solidFill>
-                        <a:srgbClr val="D0D8E8"/>
-                      </a:solidFill>
-                      <a:prstDash val="solid"/>
-                      <a:round/>
-                      <a:headEnd type="none" w="med" len="med"/>
-                      <a:tailEnd type="none" w="med" len="med"/>
-                    </a:lnB>
-                    <a:solidFill>
-                      <a:srgbClr val="F5F7FA"/>
-                    </a:solidFill>
-                  </a:tcPr>
-                </a:tc>
-                <a:tc>
-                  <a:txBody>
-                    <a:bodyPr/>
-                    <a:lstStyle/>
-                    <a:p>
-                      <a:pPr algn="r" indent="0" marL="0">
-                        <a:buNone/>
-                      </a:pPr>
-                      <a:r>
-                        <a:rPr lang="en-US" sz="1100" dirty="0">
-                          <a:solidFill>
-                            <a:srgbClr val="334155"/>
-                          </a:solidFill>
-                          <a:latin typeface="Consolas" pitchFamily="34" charset="0"/>
-                          <a:ea typeface="Consolas" pitchFamily="34" charset="-122"/>
-                          <a:cs typeface="Consolas" pitchFamily="34" charset="-120"/>
-                        </a:rPr>
-                        <a:t>0.5625</a:t>
-                      </a:r>
-                      <a:endParaRPr lang="en-US" sz="1100" dirty="0">
-                        <a:latin typeface="Consolas" charset="0"/>
-                        <a:ea typeface="Consolas" charset="0"/>
-                        <a:cs typeface="Consolas" charset="0"/>
-                      </a:endParaRPr>
-                    </a:p>
-                  </a:txBody>
-                  <a:tcPr marL="91440" marR="91440" marT="45720" marB="45720" anchor="ctr">
-                    <a:lnL w="0" cap="flat" cmpd="sng" algn="ctr">
-                      <a:noFill/>
-                    </a:lnL>
-                    <a:lnR w="0" cap="flat" cmpd="sng" algn="ctr">
-                      <a:noFill/>
-                    </a:lnR>
-                    <a:lnT w="0" cap="flat" cmpd="sng" algn="ctr">
-                      <a:noFill/>
-                    </a:lnT>
-                    <a:lnB w="3175" cap="flat" cmpd="sng" algn="ctr">
-                      <a:solidFill>
-                        <a:srgbClr val="D0D8E8"/>
-                      </a:solidFill>
-                      <a:prstDash val="solid"/>
-                      <a:round/>
-                      <a:headEnd type="none" w="med" len="med"/>
-                      <a:tailEnd type="none" w="med" len="med"/>
-                    </a:lnB>
-                    <a:solidFill>
-                      <a:srgbClr val="F5F7FA"/>
-                    </a:solidFill>
-                  </a:tcPr>
-                </a:tc>
-                <a:tc>
-                  <a:txBody>
-                    <a:bodyPr/>
-                    <a:lstStyle/>
-                    <a:p>
-                      <a:pPr algn="ctr" indent="0" marL="0">
-                        <a:buNone/>
-                      </a:pPr>
-                      <a:r>
-                        <a:rPr lang="en-US" sz="1100" dirty="0">
-                          <a:solidFill>
-                            <a:srgbClr val="334155"/>
-                          </a:solidFill>
-                          <a:latin typeface="Consolas" pitchFamily="34" charset="0"/>
-                          <a:ea typeface="Consolas" pitchFamily="34" charset="-122"/>
-                          <a:cs typeface="Consolas" pitchFamily="34" charset="-120"/>
-                        </a:rPr>
-                        <a:t>USD 8.04</a:t>
-                      </a:r>
-                      <a:endParaRPr lang="en-US" sz="1100" dirty="0">
-                        <a:latin typeface="Consolas" charset="0"/>
-                        <a:ea typeface="Consolas" charset="0"/>
-                        <a:cs typeface="Consolas" charset="0"/>
-                      </a:endParaRPr>
-                    </a:p>
-                  </a:txBody>
-                  <a:tcPr marL="91440" marR="91440" marT="45720" marB="45720" anchor="ctr">
-                    <a:lnL w="0" cap="flat" cmpd="sng" algn="ctr">
-                      <a:noFill/>
-                    </a:lnL>
-                    <a:lnR w="0" cap="flat" cmpd="sng" algn="ctr">
-                      <a:noFill/>
-                    </a:lnR>
-                    <a:lnT w="0" cap="flat" cmpd="sng" algn="ctr">
-                      <a:noFill/>
-                    </a:lnT>
-                    <a:lnB w="3175" cap="flat" cmpd="sng" algn="ctr">
-                      <a:solidFill>
-                        <a:srgbClr val="D0D8E8"/>
-                      </a:solidFill>
-                      <a:prstDash val="solid"/>
-                      <a:round/>
-                      <a:headEnd type="none" w="med" len="med"/>
-                      <a:tailEnd type="none" w="med" len="med"/>
-                    </a:lnB>
-                    <a:solidFill>
-                      <a:srgbClr val="F5F7FA"/>
-                    </a:solidFill>
-                  </a:tcPr>
-                </a:tc>
-              </a:tr>
-              <a:tr h="274320">
-                <a:tc>
-                  <a:txBody>
-                    <a:bodyPr/>
-                    <a:lstStyle/>
-                    <a:p>
-                      <a:pPr algn="l" indent="0" marL="0">
-                        <a:buNone/>
-                      </a:pPr>
-                      <a:r>
-                        <a:rPr lang="en-US" sz="1100" dirty="0">
-                          <a:solidFill>
-                            <a:srgbClr val="334155"/>
-                          </a:solidFill>
-                          <a:latin typeface="Calibri" pitchFamily="34" charset="0"/>
-                          <a:ea typeface="Calibri" pitchFamily="34" charset="-122"/>
-                          <a:cs typeface="Calibri" pitchFamily="34" charset="-120"/>
-                        </a:rPr>
-                        <a:t>±20% + bullish view (q=0.80)</a:t>
-                      </a:r>
-                      <a:endParaRPr lang="en-US" sz="1100" dirty="0">
-                        <a:latin typeface="Calibri" charset="0"/>
-                        <a:ea typeface="Calibri" charset="0"/>
-                        <a:cs typeface="Calibri" charset="0"/>
-                      </a:endParaRPr>
-                    </a:p>
-                  </a:txBody>
-                  <a:tcPr marL="91440" marR="91440" marT="45720" marB="45720" anchor="ctr">
-                    <a:lnL w="0" cap="flat" cmpd="sng" algn="ctr">
-                      <a:noFill/>
-                    </a:lnL>
-                    <a:lnR w="0" cap="flat" cmpd="sng" algn="ctr">
-                      <a:noFill/>
-                    </a:lnR>
-                    <a:lnT w="0" cap="flat" cmpd="sng" algn="ctr">
-                      <a:noFill/>
-                    </a:lnT>
-                    <a:lnB w="3175" cap="flat" cmpd="sng" algn="ctr">
-                      <a:solidFill>
-                        <a:srgbClr val="D0D8E8"/>
-                      </a:solidFill>
-                      <a:prstDash val="solid"/>
-                      <a:round/>
-                      <a:headEnd type="none" w="med" len="med"/>
-                      <a:tailEnd type="none" w="med" len="med"/>
-                    </a:lnB>
-                    <a:solidFill>
-                      <a:srgbClr val="FFFFFF"/>
-                    </a:solidFill>
-                  </a:tcPr>
-                </a:tc>
-                <a:tc>
-                  <a:txBody>
-                    <a:bodyPr/>
-                    <a:lstStyle/>
-                    <a:p>
-                      <a:pPr algn="r" indent="0" marL="0">
-                        <a:buNone/>
-                      </a:pPr>
-                      <a:r>
-                        <a:rPr lang="en-US" sz="1100" dirty="0">
-                          <a:solidFill>
-                            <a:srgbClr val="334155"/>
-                          </a:solidFill>
-                          <a:latin typeface="Consolas" pitchFamily="34" charset="0"/>
-                          <a:ea typeface="Consolas" pitchFamily="34" charset="-122"/>
-                          <a:cs typeface="Consolas" pitchFamily="34" charset="-120"/>
-                        </a:rPr>
-                        <a:t>60</a:t>
-                      </a:r>
-                      <a:endParaRPr lang="en-US" sz="1100" dirty="0">
-                        <a:latin typeface="Consolas" charset="0"/>
-                        <a:ea typeface="Consolas" charset="0"/>
-                        <a:cs typeface="Consolas" charset="0"/>
-                      </a:endParaRPr>
-                    </a:p>
-                  </a:txBody>
-                  <a:tcPr marL="91440" marR="91440" marT="45720" marB="45720" anchor="ctr">
-                    <a:lnL w="0" cap="flat" cmpd="sng" algn="ctr">
-                      <a:noFill/>
-                    </a:lnL>
-                    <a:lnR w="0" cap="flat" cmpd="sng" algn="ctr">
-                      <a:noFill/>
-                    </a:lnR>
-                    <a:lnT w="0" cap="flat" cmpd="sng" algn="ctr">
-                      <a:noFill/>
-                    </a:lnT>
-                    <a:lnB w="3175" cap="flat" cmpd="sng" algn="ctr">
-                      <a:solidFill>
-                        <a:srgbClr val="D0D8E8"/>
-                      </a:solidFill>
-                      <a:prstDash val="solid"/>
-                      <a:round/>
-                      <a:headEnd type="none" w="med" len="med"/>
-                      <a:tailEnd type="none" w="med" len="med"/>
-                    </a:lnB>
-                    <a:solidFill>
-                      <a:srgbClr val="FFFFFF"/>
-                    </a:solidFill>
-                  </a:tcPr>
-                </a:tc>
-                <a:tc>
-                  <a:txBody>
-                    <a:bodyPr/>
-                    <a:lstStyle/>
-                    <a:p>
-                      <a:pPr algn="r" indent="0" marL="0">
-                        <a:buNone/>
-                      </a:pPr>
-                      <a:r>
-                        <a:rPr lang="en-US" sz="1100" dirty="0">
-                          <a:solidFill>
-                            <a:srgbClr val="334155"/>
-                          </a:solidFill>
-                          <a:latin typeface="Consolas" pitchFamily="34" charset="0"/>
-                          <a:ea typeface="Consolas" pitchFamily="34" charset="-122"/>
-                          <a:cs typeface="Consolas" pitchFamily="34" charset="-120"/>
-                        </a:rPr>
-                        <a:t>40</a:t>
-                      </a:r>
-                      <a:endParaRPr lang="en-US" sz="1100" dirty="0">
-                        <a:latin typeface="Consolas" charset="0"/>
-                        <a:ea typeface="Consolas" charset="0"/>
-                        <a:cs typeface="Consolas" charset="0"/>
-                      </a:endParaRPr>
-                    </a:p>
-                  </a:txBody>
-                  <a:tcPr marL="91440" marR="91440" marT="45720" marB="45720" anchor="ctr">
-                    <a:lnL w="0" cap="flat" cmpd="sng" algn="ctr">
-                      <a:noFill/>
-                    </a:lnL>
-                    <a:lnR w="0" cap="flat" cmpd="sng" algn="ctr">
-                      <a:noFill/>
-                    </a:lnR>
-                    <a:lnT w="0" cap="flat" cmpd="sng" algn="ctr">
-                      <a:noFill/>
-                    </a:lnT>
-                    <a:lnB w="3175" cap="flat" cmpd="sng" algn="ctr">
-                      <a:solidFill>
-                        <a:srgbClr val="D0D8E8"/>
-                      </a:solidFill>
-                      <a:prstDash val="solid"/>
-                      <a:round/>
-                      <a:headEnd type="none" w="med" len="med"/>
-                      <a:tailEnd type="none" w="med" len="med"/>
-                    </a:lnB>
-                    <a:solidFill>
-                      <a:srgbClr val="FFFFFF"/>
-                    </a:solidFill>
-                  </a:tcPr>
-                </a:tc>
-                <a:tc>
-                  <a:txBody>
-                    <a:bodyPr/>
-                    <a:lstStyle/>
-                    <a:p>
-                      <a:pPr algn="r" indent="0" marL="0">
-                        <a:buNone/>
-                      </a:pPr>
-                      <a:r>
-                        <a:rPr lang="en-US" sz="1100" dirty="0">
-                          <a:solidFill>
-                            <a:srgbClr val="334155"/>
-                          </a:solidFill>
-                          <a:latin typeface="Consolas" pitchFamily="34" charset="0"/>
-                          <a:ea typeface="Consolas" pitchFamily="34" charset="-122"/>
-                          <a:cs typeface="Consolas" pitchFamily="34" charset="-120"/>
-                        </a:rPr>
-                        <a:t>1.20</a:t>
-                      </a:r>
-                      <a:endParaRPr lang="en-US" sz="1100" dirty="0">
-                        <a:latin typeface="Consolas" charset="0"/>
-                        <a:ea typeface="Consolas" charset="0"/>
-                        <a:cs typeface="Consolas" charset="0"/>
-                      </a:endParaRPr>
-                    </a:p>
-                  </a:txBody>
-                  <a:tcPr marL="91440" marR="91440" marT="45720" marB="45720" anchor="ctr">
-                    <a:lnL w="0" cap="flat" cmpd="sng" algn="ctr">
-                      <a:noFill/>
-                    </a:lnL>
-                    <a:lnR w="0" cap="flat" cmpd="sng" algn="ctr">
-                      <a:noFill/>
-                    </a:lnR>
-                    <a:lnT w="0" cap="flat" cmpd="sng" algn="ctr">
-                      <a:noFill/>
-                    </a:lnT>
-                    <a:lnB w="3175" cap="flat" cmpd="sng" algn="ctr">
-                      <a:solidFill>
-                        <a:srgbClr val="D0D8E8"/>
-                      </a:solidFill>
-                      <a:prstDash val="solid"/>
-                      <a:round/>
-                      <a:headEnd type="none" w="med" len="med"/>
-                      <a:tailEnd type="none" w="med" len="med"/>
-                    </a:lnB>
-                    <a:solidFill>
-                      <a:srgbClr val="FFFFFF"/>
-                    </a:solidFill>
-                  </a:tcPr>
-                </a:tc>
-                <a:tc>
-                  <a:txBody>
-                    <a:bodyPr/>
-                    <a:lstStyle/>
-                    <a:p>
-                      <a:pPr algn="r" indent="0" marL="0">
-                        <a:buNone/>
-                      </a:pPr>
-                      <a:r>
-                        <a:rPr lang="en-US" sz="1100" dirty="0">
-                          <a:solidFill>
-                            <a:srgbClr val="334155"/>
-                          </a:solidFill>
-                          <a:latin typeface="Consolas" pitchFamily="34" charset="0"/>
-                          <a:ea typeface="Consolas" pitchFamily="34" charset="-122"/>
-                          <a:cs typeface="Consolas" pitchFamily="34" charset="-120"/>
-                        </a:rPr>
-                        <a:t>0.80</a:t>
-                      </a:r>
-                      <a:endParaRPr lang="en-US" sz="1100" dirty="0">
-                        <a:latin typeface="Consolas" charset="0"/>
-                        <a:ea typeface="Consolas" charset="0"/>
-                        <a:cs typeface="Consolas" charset="0"/>
-                      </a:endParaRPr>
-                    </a:p>
-                  </a:txBody>
-                  <a:tcPr marL="91440" marR="91440" marT="45720" marB="45720" anchor="ctr">
-                    <a:lnL w="0" cap="flat" cmpd="sng" algn="ctr">
-                      <a:noFill/>
-                    </a:lnL>
-                    <a:lnR w="0" cap="flat" cmpd="sng" algn="ctr">
-                      <a:noFill/>
-                    </a:lnR>
-                    <a:lnT w="0" cap="flat" cmpd="sng" algn="ctr">
-                      <a:noFill/>
-                    </a:lnT>
-                    <a:lnB w="3175" cap="flat" cmpd="sng" algn="ctr">
-                      <a:solidFill>
-                        <a:srgbClr val="D0D8E8"/>
-                      </a:solidFill>
-                      <a:prstDash val="solid"/>
-                      <a:round/>
-                      <a:headEnd type="none" w="med" len="med"/>
-                      <a:tailEnd type="none" w="med" len="med"/>
-                    </a:lnB>
-                    <a:solidFill>
-                      <a:srgbClr val="FFFFFF"/>
-                    </a:solidFill>
-                  </a:tcPr>
-                </a:tc>
-                <a:tc>
-                  <a:txBody>
-                    <a:bodyPr/>
-                    <a:lstStyle/>
-                    <a:p>
-                      <a:pPr algn="r" indent="0" marL="0">
-                        <a:buNone/>
-                      </a:pPr>
-                      <a:r>
-                        <a:rPr lang="en-US" sz="1100" dirty="0">
-                          <a:solidFill>
-                            <a:srgbClr val="334155"/>
-                          </a:solidFill>
-                          <a:latin typeface="Consolas" pitchFamily="34" charset="0"/>
-                          <a:ea typeface="Consolas" pitchFamily="34" charset="-122"/>
-                          <a:cs typeface="Consolas" pitchFamily="34" charset="-120"/>
-                        </a:rPr>
-                        <a:t>0.25</a:t>
-                      </a:r>
-                      <a:endParaRPr lang="en-US" sz="1100" dirty="0">
-                        <a:latin typeface="Consolas" charset="0"/>
-                        <a:ea typeface="Consolas" charset="0"/>
-                        <a:cs typeface="Consolas" charset="0"/>
-                      </a:endParaRPr>
-                    </a:p>
-                  </a:txBody>
-                  <a:tcPr marL="91440" marR="91440" marT="45720" marB="45720" anchor="ctr">
-                    <a:lnL w="0" cap="flat" cmpd="sng" algn="ctr">
-                      <a:noFill/>
-                    </a:lnL>
-                    <a:lnR w="0" cap="flat" cmpd="sng" algn="ctr">
-                      <a:noFill/>
-                    </a:lnR>
-                    <a:lnT w="0" cap="flat" cmpd="sng" algn="ctr">
-                      <a:noFill/>
-                    </a:lnT>
-                    <a:lnB w="3175" cap="flat" cmpd="sng" algn="ctr">
-                      <a:solidFill>
-                        <a:srgbClr val="D0D8E8"/>
-                      </a:solidFill>
-                      <a:prstDash val="solid"/>
-                      <a:round/>
-                      <a:headEnd type="none" w="med" len="med"/>
-                      <a:tailEnd type="none" w="med" len="med"/>
-                    </a:lnB>
-                    <a:solidFill>
-                      <a:srgbClr val="FFFFFF"/>
-                    </a:solidFill>
-                  </a:tcPr>
-                </a:tc>
-                <a:tc>
-                  <a:txBody>
-                    <a:bodyPr/>
-                    <a:lstStyle/>
-                    <a:p>
-                      <a:pPr algn="r" indent="0" marL="0">
-                        <a:buNone/>
-                      </a:pPr>
-                      <a:r>
-                        <a:rPr lang="en-US" sz="1100" dirty="0">
-                          <a:solidFill>
-                            <a:srgbClr val="334155"/>
-                          </a:solidFill>
-                          <a:latin typeface="Consolas" pitchFamily="34" charset="0"/>
-                          <a:ea typeface="Consolas" pitchFamily="34" charset="-122"/>
-                          <a:cs typeface="Consolas" pitchFamily="34" charset="-120"/>
-                        </a:rPr>
-                        <a:t>0.625</a:t>
-                      </a:r>
-                      <a:endParaRPr lang="en-US" sz="1100" dirty="0">
-                        <a:latin typeface="Consolas" charset="0"/>
-                        <a:ea typeface="Consolas" charset="0"/>
-                        <a:cs typeface="Consolas" charset="0"/>
-                      </a:endParaRPr>
-                    </a:p>
-                  </a:txBody>
-                  <a:tcPr marL="91440" marR="91440" marT="45720" marB="45720" anchor="ctr">
-                    <a:lnL w="0" cap="flat" cmpd="sng" algn="ctr">
-                      <a:noFill/>
-                    </a:lnL>
-                    <a:lnR w="0" cap="flat" cmpd="sng" algn="ctr">
-                      <a:noFill/>
-                    </a:lnR>
-                    <a:lnT w="0" cap="flat" cmpd="sng" algn="ctr">
-                      <a:noFill/>
-                    </a:lnT>
-                    <a:lnB w="3175" cap="flat" cmpd="sng" algn="ctr">
-                      <a:solidFill>
-                        <a:srgbClr val="D0D8E8"/>
-                      </a:solidFill>
-                      <a:prstDash val="solid"/>
-                      <a:round/>
-                      <a:headEnd type="none" w="med" len="med"/>
-                      <a:tailEnd type="none" w="med" len="med"/>
-                    </a:lnB>
-                    <a:solidFill>
-                      <a:srgbClr val="FFFFFF"/>
-                    </a:solidFill>
-                  </a:tcPr>
-                </a:tc>
-                <a:tc>
-                  <a:txBody>
-                    <a:bodyPr/>
-                    <a:lstStyle/>
-                    <a:p>
-                      <a:pPr algn="ctr" indent="0" marL="0">
-                        <a:buNone/>
-                      </a:pPr>
-                      <a:r>
-                        <a:rPr lang="en-US" sz="1100" dirty="0">
-                          <a:solidFill>
-                            <a:srgbClr val="334155"/>
-                          </a:solidFill>
-                          <a:latin typeface="Consolas" pitchFamily="34" charset="0"/>
-                          <a:ea typeface="Consolas" pitchFamily="34" charset="-122"/>
-                          <a:cs typeface="Consolas" pitchFamily="34" charset="-120"/>
-                        </a:rPr>
-                        <a:t>USD 2.98</a:t>
-                      </a:r>
-                      <a:endParaRPr lang="en-US" sz="1100" dirty="0">
-                        <a:latin typeface="Consolas" charset="0"/>
-                        <a:ea typeface="Consolas" charset="0"/>
-                        <a:cs typeface="Consolas" charset="0"/>
-                      </a:endParaRPr>
-                    </a:p>
-                  </a:txBody>
-                  <a:tcPr marL="91440" marR="91440" marT="45720" marB="45720" anchor="ctr">
-                    <a:lnL w="0" cap="flat" cmpd="sng" algn="ctr">
-                      <a:noFill/>
-                    </a:lnL>
-                    <a:lnR w="0" cap="flat" cmpd="sng" algn="ctr">
-                      <a:noFill/>
-                    </a:lnR>
-                    <a:lnT w="0" cap="flat" cmpd="sng" algn="ctr">
-                      <a:noFill/>
-                    </a:lnT>
-                    <a:lnB w="3175" cap="flat" cmpd="sng" algn="ctr">
-                      <a:solidFill>
-                        <a:srgbClr val="D0D8E8"/>
-                      </a:solidFill>
-                      <a:prstDash val="solid"/>
-                      <a:round/>
-                      <a:headEnd type="none" w="med" len="med"/>
-                      <a:tailEnd type="none" w="med" len="med"/>
-                    </a:lnB>
-                    <a:solidFill>
-                      <a:srgbClr val="FFFFFF"/>
-                    </a:solidFill>
-                  </a:tcPr>
-                </a:tc>
-              </a:tr>
-              <a:tr h="274320">
-                <a:tc>
-                  <a:txBody>
-                    <a:bodyPr/>
-                    <a:lstStyle/>
-                    <a:p>
-                      <a:pPr algn="l" indent="0" marL="0">
-                        <a:buNone/>
-                      </a:pPr>
-                      <a:r>
-                        <a:rPr lang="en-US" sz="1100" dirty="0">
-                          <a:solidFill>
-                            <a:srgbClr val="334155"/>
-                          </a:solidFill>
-                          <a:latin typeface="Calibri" pitchFamily="34" charset="0"/>
-                          <a:ea typeface="Calibri" pitchFamily="34" charset="-122"/>
-                          <a:cs typeface="Calibri" pitchFamily="34" charset="-120"/>
-                        </a:rPr>
-                        <a:t>±20% + bearish view (q=0.20)</a:t>
+                        <a:t>±20%, bearish view q = 0.20</a:t>
                       </a:r>
                       <a:endParaRPr lang="en-US" sz="1100" dirty="0">
                         <a:latin typeface="Calibri" charset="0"/>
@@ -23030,106 +23523,6 @@
                           <a:ea typeface="Consolas" pitchFamily="34" charset="-122"/>
                           <a:cs typeface="Consolas" pitchFamily="34" charset="-120"/>
                         </a:rPr>
-                        <a:t>1.20</a:t>
-                      </a:r>
-                      <a:endParaRPr lang="en-US" sz="1100" dirty="0">
-                        <a:latin typeface="Consolas" charset="0"/>
-                        <a:ea typeface="Consolas" charset="0"/>
-                        <a:cs typeface="Consolas" charset="0"/>
-                      </a:endParaRPr>
-                    </a:p>
-                  </a:txBody>
-                  <a:tcPr marL="91440" marR="91440" marT="45720" marB="45720" anchor="ctr">
-                    <a:lnL w="0" cap="flat" cmpd="sng" algn="ctr">
-                      <a:noFill/>
-                    </a:lnL>
-                    <a:lnR w="0" cap="flat" cmpd="sng" algn="ctr">
-                      <a:noFill/>
-                    </a:lnR>
-                    <a:lnT w="0" cap="flat" cmpd="sng" algn="ctr">
-                      <a:noFill/>
-                    </a:lnT>
-                    <a:lnB w="3175" cap="flat" cmpd="sng" algn="ctr">
-                      <a:solidFill>
-                        <a:srgbClr val="D0D8E8"/>
-                      </a:solidFill>
-                      <a:prstDash val="solid"/>
-                      <a:round/>
-                      <a:headEnd type="none" w="med" len="med"/>
-                      <a:tailEnd type="none" w="med" len="med"/>
-                    </a:lnB>
-                    <a:solidFill>
-                      <a:srgbClr val="F5F7FA"/>
-                    </a:solidFill>
-                  </a:tcPr>
-                </a:tc>
-                <a:tc>
-                  <a:txBody>
-                    <a:bodyPr/>
-                    <a:lstStyle/>
-                    <a:p>
-                      <a:pPr algn="r" indent="0" marL="0">
-                        <a:buNone/>
-                      </a:pPr>
-                      <a:r>
-                        <a:rPr lang="en-US" sz="1100" dirty="0">
-                          <a:solidFill>
-                            <a:srgbClr val="334155"/>
-                          </a:solidFill>
-                          <a:latin typeface="Consolas" pitchFamily="34" charset="0"/>
-                          <a:ea typeface="Consolas" pitchFamily="34" charset="-122"/>
-                          <a:cs typeface="Consolas" pitchFamily="34" charset="-120"/>
-                        </a:rPr>
-                        <a:t>0.80</a:t>
-                      </a:r>
-                      <a:endParaRPr lang="en-US" sz="1100" dirty="0">
-                        <a:latin typeface="Consolas" charset="0"/>
-                        <a:ea typeface="Consolas" charset="0"/>
-                        <a:cs typeface="Consolas" charset="0"/>
-                      </a:endParaRPr>
-                    </a:p>
-                  </a:txBody>
-                  <a:tcPr marL="91440" marR="91440" marT="45720" marB="45720" anchor="ctr">
-                    <a:lnL w="0" cap="flat" cmpd="sng" algn="ctr">
-                      <a:noFill/>
-                    </a:lnL>
-                    <a:lnR w="0" cap="flat" cmpd="sng" algn="ctr">
-                      <a:noFill/>
-                    </a:lnR>
-                    <a:lnT w="0" cap="flat" cmpd="sng" algn="ctr">
-                      <a:noFill/>
-                    </a:lnT>
-                    <a:lnB w="3175" cap="flat" cmpd="sng" algn="ctr">
-                      <a:solidFill>
-                        <a:srgbClr val="D0D8E8"/>
-                      </a:solidFill>
-                      <a:prstDash val="solid"/>
-                      <a:round/>
-                      <a:headEnd type="none" w="med" len="med"/>
-                      <a:tailEnd type="none" w="med" len="med"/>
-                    </a:lnB>
-                    <a:solidFill>
-                      <a:srgbClr val="F5F7FA"/>
-                    </a:solidFill>
-                  </a:tcPr>
-                </a:tc>
-                <a:tc>
-                  <a:txBody>
-                    <a:bodyPr/>
-                    <a:lstStyle/>
-                    <a:p>
-                      <a:pPr algn="r" indent="0" marL="0">
-                        <a:buNone/>
-                      </a:pPr>
-                      <a:r>
-                        <a:rPr lang="en-US" sz="1100" dirty="0">
-                          <a:solidFill>
-                            <a:srgbClr val="334155"/>
-                          </a:solidFill>
-                          <a:latin typeface="Consolas" pitchFamily="34" charset="0"/>
-                          <a:ea typeface="Consolas" pitchFamily="34" charset="-122"/>
-                          <a:cs typeface="Consolas" pitchFamily="34" charset="-120"/>
-                        </a:rPr>
                         <a:t>0.25</a:t>
                       </a:r>
                       <a:endParaRPr lang="en-US" sz="1100" dirty="0">
@@ -23218,7 +23611,7 @@
                     <a:bodyPr/>
                     <a:lstStyle/>
                     <a:p>
-                      <a:pPr algn="ctr" indent="0" marL="0">
+                      <a:pPr algn="r" indent="0" marL="0">
                         <a:buNone/>
                       </a:pPr>
                       <a:r>
@@ -23230,7 +23623,57 @@
                           <a:ea typeface="Consolas" pitchFamily="34" charset="-122"/>
                           <a:cs typeface="Consolas" pitchFamily="34" charset="-120"/>
                         </a:rPr>
-                        <a:t>USD 2.98</a:t>
+                        <a:t>2.98</a:t>
+                      </a:r>
+                      <a:endParaRPr lang="en-US" sz="1100" dirty="0">
+                        <a:latin typeface="Consolas" charset="0"/>
+                        <a:ea typeface="Consolas" charset="0"/>
+                        <a:cs typeface="Consolas" charset="0"/>
+                      </a:endParaRPr>
+                    </a:p>
+                  </a:txBody>
+                  <a:tcPr marL="91440" marR="91440" marT="45720" marB="45720" anchor="ctr">
+                    <a:lnL w="0" cap="flat" cmpd="sng" algn="ctr">
+                      <a:noFill/>
+                    </a:lnL>
+                    <a:lnR w="0" cap="flat" cmpd="sng" algn="ctr">
+                      <a:noFill/>
+                    </a:lnR>
+                    <a:lnT w="0" cap="flat" cmpd="sng" algn="ctr">
+                      <a:noFill/>
+                    </a:lnT>
+                    <a:lnB w="3175" cap="flat" cmpd="sng" algn="ctr">
+                      <a:solidFill>
+                        <a:srgbClr val="D0D8E8"/>
+                      </a:solidFill>
+                      <a:prstDash val="solid"/>
+                      <a:round/>
+                      <a:headEnd type="none" w="med" len="med"/>
+                      <a:tailEnd type="none" w="med" len="med"/>
+                    </a:lnB>
+                    <a:solidFill>
+                      <a:srgbClr val="F5F7FA"/>
+                    </a:solidFill>
+                  </a:tcPr>
+                </a:tc>
+                <a:tc>
+                  <a:txBody>
+                    <a:bodyPr/>
+                    <a:lstStyle/>
+                    <a:p>
+                      <a:pPr algn="r" indent="0" marL="0">
+                        <a:buNone/>
+                      </a:pPr>
+                      <a:r>
+                        <a:rPr lang="en-US" sz="1100" dirty="0">
+                          <a:solidFill>
+                            <a:srgbClr val="334155"/>
+                          </a:solidFill>
+                          <a:latin typeface="Consolas" pitchFamily="34" charset="0"/>
+                          <a:ea typeface="Consolas" pitchFamily="34" charset="-122"/>
+                          <a:cs typeface="Consolas" pitchFamily="34" charset="-120"/>
+                        </a:rPr>
+                        <a:t>5.36</a:t>
                       </a:r>
                       <a:endParaRPr lang="en-US" sz="1100" dirty="0">
                         <a:latin typeface="Consolas" charset="0"/>
@@ -23276,8 +23719,8 @@
         </p:nvSpPr>
         <p:spPr>
           <a:xfrm>
-            <a:off x="320040" y="3200400"/>
-            <a:ext cx="8503920" cy="1097280"/>
+            <a:off x="320040" y="2743200"/>
+            <a:ext cx="8503920" cy="1554480"/>
           </a:xfrm>
           <a:prstGeom prst="rect">
             <a:avLst/>
@@ -23296,8 +23739,8 @@
         </p:nvSpPr>
         <p:spPr>
           <a:xfrm>
-            <a:off x="320040" y="3200400"/>
-            <a:ext cx="73152" cy="1097280"/>
+            <a:off x="320040" y="2743200"/>
+            <a:ext cx="73152" cy="1554480"/>
           </a:xfrm>
           <a:prstGeom prst="rect">
             <a:avLst/>
@@ -23316,7 +23759,7 @@
         </p:nvSpPr>
         <p:spPr>
           <a:xfrm>
-            <a:off x="457200" y="3246120"/>
+            <a:off x="457200" y="2788920"/>
             <a:ext cx="8275320" cy="256032"/>
           </a:xfrm>
           <a:prstGeom prst="rect">
@@ -23358,8 +23801,8 @@
         </p:nvSpPr>
         <p:spPr>
           <a:xfrm>
-            <a:off x="457200" y="3520440"/>
-            <a:ext cx="8275320" cy="731520"/>
+            <a:off x="457200" y="3063240"/>
+            <a:ext cx="8275320" cy="1188720"/>
           </a:xfrm>
           <a:prstGeom prst="rect">
             <a:avLst/>
@@ -23386,7 +23829,53 @@
                 <a:ea typeface="Calibri" pitchFamily="34" charset="-122"/>
                 <a:cs typeface="Calibri" pitchFamily="34" charset="-120"/>
               </a:rPr>
-              <a:t>Rows 1→2: doubling volatility lifts call price 2.7x (2.98 → 8.04). Rows 1, 3, 4: changing the real-world probability q from 50% to 80% to 20% leaves the price unchanged at 2.98 — because q does not appear anywhere in the pricing formula. This is the single most counter-intuitive fact in options pricing.</a:t>
+              <a:t>Rows 1 → 2: doubling the width of the tree lifts the call 2.7x, from 2.98 to 8.04, and the put from 5.36 to 10.42. Volatility is the factor that pays.</a:t>
+            </a:r>
+            <a:endParaRPr lang="en-US" sz="1200" dirty="0"/>
+          </a:p>
+          <a:p>
+            <a:pPr algn="l" indent="0" marL="0">
+              <a:buNone/>
+            </a:pPr>
+            <a:endParaRPr lang="en-US" sz="1200" dirty="0"/>
+          </a:p>
+          <a:p>
+            <a:pPr algn="l" indent="0" marL="0">
+              <a:buNone/>
+            </a:pPr>
+            <a:r>
+              <a:rPr lang="en-US" sz="1200" dirty="0">
+                <a:solidFill>
+                  <a:srgbClr val="334155"/>
+                </a:solidFill>
+                <a:latin typeface="Calibri" pitchFamily="34" charset="0"/>
+                <a:ea typeface="Calibri" pitchFamily="34" charset="-122"/>
+                <a:cs typeface="Calibri" pitchFamily="34" charset="-120"/>
+              </a:rPr>
+              <a:t>Rows 1, 3, 4: changing the real-world probability q from 0.50 to 0.80 to 0.20 leaves every price untouched — because q appears nowhere in either pricing route. The curriculum is blunt about it: a more optimistic outlook does not change the option price, because the seller can hedge the risk away with h* units of stock.</a:t>
+            </a:r>
+            <a:endParaRPr lang="en-US" sz="1200" dirty="0"/>
+          </a:p>
+          <a:p>
+            <a:pPr algn="l" indent="0" marL="0">
+              <a:buNone/>
+            </a:pPr>
+            <a:endParaRPr lang="en-US" sz="1200" dirty="0"/>
+          </a:p>
+          <a:p>
+            <a:pPr algn="l" indent="0" marL="0">
+              <a:buNone/>
+            </a:pPr>
+            <a:r>
+              <a:rPr lang="en-US" sz="1200" dirty="0">
+                <a:solidFill>
+                  <a:srgbClr val="334155"/>
+                </a:solidFill>
+                <a:latin typeface="Calibri" pitchFamily="34" charset="0"/>
+                <a:ea typeface="Calibri" pitchFamily="34" charset="-122"/>
+                <a:cs typeface="Calibri" pitchFamily="34" charset="-120"/>
+              </a:rPr>
+              <a:t>Puts here come straight from parity: p₀ = c₀ − S₀ + X(1 + r)⁻ᵀ, and the risk-neutral route confirms them.</a:t>
             </a:r>
             <a:endParaRPr lang="en-US" sz="1200" dirty="0"/>
           </a:p>
@@ -23485,7 +23974,7 @@
               <a:buNone/>
             </a:pPr>
             <a:r>
-              <a:rPr lang="en-US" sz="1600" b="1" dirty="0">
+              <a:rPr lang="en-US" sz="1700" b="1" dirty="0">
                 <a:solidFill>
                   <a:srgbClr val="FFFFFF"/>
                 </a:solidFill>
@@ -23493,9 +23982,9 @@
                 <a:ea typeface="Trebuchet MS" pitchFamily="34" charset="-122"/>
                 <a:cs typeface="Trebuchet MS" pitchFamily="34" charset="-120"/>
               </a:rPr>
-              <a:t>As the number of steps grows, the binomial model converges to Black-Scholes — the continuous-time limit that prices most traded options</a:t>
-            </a:r>
-            <a:endParaRPr lang="en-US" sz="1600" dirty="0"/>
+              <a:t>Push the steps to infinity and the tree becomes Black-Scholes — context beyond Vol 7, examined at Level II</a:t>
+            </a:r>
+            <a:endParaRPr lang="en-US" sz="1700" dirty="0"/>
           </a:p>
         </p:txBody>
       </p:sp>
@@ -23594,7 +24083,7 @@
                 <a:ea typeface="Calibri" pitchFamily="34" charset="-122"/>
                 <a:cs typeface="Calibri" pitchFamily="34" charset="-120"/>
               </a:rPr>
-              <a:t>¹ CFA L1 formula sheet only requires the one-period binomial. Black-Scholes is introduced conceptually here and priced in L2.
+              <a:t>¹ Black-Scholes does not appear in CFA Vol 7. Level I examines only the one-period binomial model.
 </a:t>
             </a:r>
             <a:pPr indent="0" marL="0">
@@ -23609,7 +24098,7 @@
                 <a:ea typeface="Calibri" pitchFamily="34" charset="-122"/>
                 <a:cs typeface="Calibri" pitchFamily="34" charset="-120"/>
               </a:rPr>
-              <a:t>² Trees remain the industry standard for pricing American options and any feature with early exercise — Black-Scholes doesn't admit early-exercise directly.
+              <a:t>² Trees remain standard for American exercise and discrete dividends; Black-Scholes admits neither.
 </a:t>
             </a:r>
             <a:endParaRPr lang="en-US" sz="1000" dirty="0"/>
@@ -23652,7 +24141,7 @@
                 <a:ea typeface="Calibri" pitchFamily="34" charset="-122"/>
                 <a:cs typeface="Calibri" pitchFamily="34" charset="-120"/>
               </a:rPr>
-              <a:t>Source: CFA Institute, Curriculum Vol 7, Learning Module 10, §5 closing discussion; LM 8 volatility factor, pp. 232–234.</a:t>
+              <a:t>Source: The formula and the up/down factors are NOT in CFA Vol 7 — shown as context. Curriculum note extended here: Learning Module 10, §5, printed p. 231.</a:t>
             </a:r>
             <a:endParaRPr lang="en-US" sz="750" dirty="0"/>
           </a:p>
@@ -23694,7 +24183,7 @@
                 <a:ea typeface="Calibri" pitchFamily="34" charset="-122"/>
                 <a:cs typeface="Calibri" pitchFamily="34" charset="-120"/>
               </a:rPr>
-              <a:t>Pick R_u = e^(σ√Δt) and R_d = e^(−σ√Δt) at each step, let Δt → 0, and the N-period tree's price converges to the Black-Scholes formula.</a:t>
+              <a:t>Set Rᵤ = e^(σ√Δt) and R_d = e^(−σ√Δt) at every step, let Δt → 0, and the N-period tree converges to the closed-form price.</a:t>
             </a:r>
             <a:endParaRPr lang="en-US" sz="1300" dirty="0"/>
           </a:p>
@@ -23756,7 +24245,24 @@
                 <a:ea typeface="Consolas" pitchFamily="34" charset="-122"/>
                 <a:cs typeface="Consolas" pitchFamily="34" charset="-120"/>
               </a:rPr>
-              <a:t>c₀  =  S₀ · N(d₁)  −  X · e^(−rT) · N(d₂)            d₁,₂  =  [ ln(S₀/X) + (r ± σ²/2)·T ] / (σ·√T)</a:t>
+              <a:t>c₀  =  S₀·N(d₁)  −  X·e^(−rT)·N(d₂)</a:t>
+            </a:r>
+            <a:endParaRPr lang="en-US" sz="1800" dirty="0"/>
+          </a:p>
+          <a:p>
+            <a:pPr algn="ctr" indent="0" marL="0">
+              <a:buNone/>
+            </a:pPr>
+            <a:r>
+              <a:rPr lang="en-US" sz="1800" b="1" dirty="0">
+                <a:solidFill>
+                  <a:srgbClr val="FFFFFF"/>
+                </a:solidFill>
+                <a:latin typeface="Consolas" pitchFamily="34" charset="0"/>
+                <a:ea typeface="Consolas" pitchFamily="34" charset="-122"/>
+                <a:cs typeface="Consolas" pitchFamily="34" charset="-120"/>
+              </a:rPr>
+              <a:t>d₁,₂  =  [ ln(S₀/X) + (r ± σ²/2)T ] / (σ√T)</a:t>
             </a:r>
             <a:endParaRPr lang="en-US" sz="1800" dirty="0"/>
           </a:p>
@@ -23798,7 +24304,7 @@
                 <a:ea typeface="Calibri" pitchFamily="34" charset="-122"/>
                 <a:cs typeface="Calibri" pitchFamily="34" charset="-120"/>
               </a:rPr>
-              <a:t>where: N(·) = standard normal CDF; σ = annualized volatility of continuously compounded returns. Continuous analogue of π.</a:t>
+              <a:t>where: N(·) is the standard normal CDF; σ is the annualised volatility of continuously compounded returns. N(d₂) is the continuous-time cousin of π.</a:t>
             </a:r>
             <a:endParaRPr lang="en-US" sz="1100" dirty="0"/>
           </a:p>
@@ -23812,8 +24318,8 @@
         </p:nvSpPr>
         <p:spPr>
           <a:xfrm>
-            <a:off x="320040" y="2331720"/>
-            <a:ext cx="4160520" cy="1965960"/>
+            <a:off x="320040" y="2286000"/>
+            <a:ext cx="4160520" cy="1828800"/>
           </a:xfrm>
           <a:prstGeom prst="rect">
             <a:avLst/>
@@ -23832,8 +24338,8 @@
         </p:nvSpPr>
         <p:spPr>
           <a:xfrm>
-            <a:off x="320040" y="2331720"/>
-            <a:ext cx="73152" cy="1965960"/>
+            <a:off x="320040" y="2286000"/>
+            <a:ext cx="73152" cy="1828800"/>
           </a:xfrm>
           <a:prstGeom prst="rect">
             <a:avLst/>
@@ -23852,7 +24358,7 @@
         </p:nvSpPr>
         <p:spPr>
           <a:xfrm>
-            <a:off x="457200" y="2377440"/>
+            <a:off x="457200" y="2331720"/>
             <a:ext cx="3931920" cy="256032"/>
           </a:xfrm>
           <a:prstGeom prst="rect">
@@ -23880,7 +24386,7 @@
                 <a:ea typeface="Trebuchet MS" pitchFamily="34" charset="-122"/>
                 <a:cs typeface="Trebuchet MS" pitchFamily="34" charset="-120"/>
               </a:rPr>
-              <a:t>WHY BINOMIAL FIRST</a:t>
+              <a:t>WHY THE TREE COMES FIRST</a:t>
             </a:r>
             <a:endParaRPr lang="en-US" sz="1100" dirty="0"/>
           </a:p>
@@ -23894,8 +24400,8 @@
         </p:nvSpPr>
         <p:spPr>
           <a:xfrm>
-            <a:off x="457200" y="2651760"/>
-            <a:ext cx="3931920" cy="1600200"/>
+            <a:off x="457200" y="2606040"/>
+            <a:ext cx="3931920" cy="1463040"/>
           </a:xfrm>
           <a:prstGeom prst="rect">
             <a:avLst/>
@@ -23922,7 +24428,30 @@
                 <a:ea typeface="Calibri" pitchFamily="34" charset="-122"/>
                 <a:cs typeface="Calibri" pitchFamily="34" charset="-120"/>
               </a:rPr>
-              <a:t>Trees are pedagogy: every step is a replication / arbitrage argument in full view. Black-Scholes is the same argument taken to the continuous-time limit — harder to see but cheaper to compute.</a:t>
+              <a:t>A tree is pedagogy: every step is a visible replication and arbitrage argument. Black-Scholes is the same argument taken to a continuous limit — much harder to see, much cheaper to compute. Level I stops where the argument is still visible.</a:t>
+            </a:r>
+            <a:endParaRPr lang="en-US" sz="1200" dirty="0"/>
+          </a:p>
+          <a:p>
+            <a:pPr algn="l" indent="0" marL="0">
+              <a:buNone/>
+            </a:pPr>
+            <a:endParaRPr lang="en-US" sz="1200" dirty="0"/>
+          </a:p>
+          <a:p>
+            <a:pPr algn="l" indent="0" marL="0">
+              <a:buNone/>
+            </a:pPr>
+            <a:r>
+              <a:rPr lang="en-US" sz="1200" dirty="0">
+                <a:solidFill>
+                  <a:srgbClr val="334155"/>
+                </a:solidFill>
+                <a:latin typeface="Calibri" pitchFamily="34" charset="0"/>
+                <a:ea typeface="Calibri" pitchFamily="34" charset="-122"/>
+                <a:cs typeface="Calibri" pitchFamily="34" charset="-120"/>
+              </a:rPr>
+              <a:t>And the direction matters: the tree is not an approximation to Black-Scholes. Black-Scholes is a limit of the tree.</a:t>
             </a:r>
             <a:endParaRPr lang="en-US" sz="1200" dirty="0"/>
           </a:p>
@@ -23936,8 +24465,8 @@
         </p:nvSpPr>
         <p:spPr>
           <a:xfrm>
-            <a:off x="4663440" y="2331720"/>
-            <a:ext cx="4160520" cy="1965960"/>
+            <a:off x="4663440" y="2286000"/>
+            <a:ext cx="4160520" cy="1828800"/>
           </a:xfrm>
           <a:prstGeom prst="rect">
             <a:avLst/>
@@ -23956,8 +24485,8 @@
         </p:nvSpPr>
         <p:spPr>
           <a:xfrm>
-            <a:off x="4663440" y="2331720"/>
-            <a:ext cx="73152" cy="1965960"/>
+            <a:off x="4663440" y="2286000"/>
+            <a:ext cx="73152" cy="1828800"/>
           </a:xfrm>
           <a:prstGeom prst="rect">
             <a:avLst/>
@@ -23976,7 +24505,7 @@
         </p:nvSpPr>
         <p:spPr>
           <a:xfrm>
-            <a:off x="4800600" y="2377440"/>
+            <a:off x="4800600" y="2331720"/>
             <a:ext cx="3931920" cy="256032"/>
           </a:xfrm>
           <a:prstGeom prst="rect">
@@ -24004,7 +24533,7 @@
                 <a:ea typeface="Trebuchet MS" pitchFamily="34" charset="-122"/>
                 <a:cs typeface="Trebuchet MS" pitchFamily="34" charset="-120"/>
               </a:rPr>
-              <a:t>WHERE TREES WIN</a:t>
+              <a:t>WHERE TREES STILL WIN</a:t>
             </a:r>
             <a:endParaRPr lang="en-US" sz="1100" dirty="0"/>
           </a:p>
@@ -24018,8 +24547,8 @@
         </p:nvSpPr>
         <p:spPr>
           <a:xfrm>
-            <a:off x="4800600" y="2651760"/>
-            <a:ext cx="3931920" cy="1600200"/>
+            <a:off x="4800600" y="2606040"/>
+            <a:ext cx="3931920" cy="1463040"/>
           </a:xfrm>
           <a:prstGeom prst="rect">
             <a:avLst/>
@@ -24046,7 +24575,30 @@
                 <a:ea typeface="Calibri" pitchFamily="34" charset="-122"/>
                 <a:cs typeface="Calibri" pitchFamily="34" charset="-120"/>
               </a:rPr>
-              <a:t>American options, Bermudan exercise, path-dependent payoffs, dividends at discrete dates — these need a tree (or Monte Carlo). Plain European options get Black-Scholes; everything else gets a tree.</a:t>
+              <a:t>American and Bermudan exercise, path-dependent payoffs, discrete dividend dates — none of these fit a closed form. Plain European options get Black-Scholes; almost everything else on a real book gets a tree or a Monte Carlo.</a:t>
+            </a:r>
+            <a:endParaRPr lang="en-US" sz="1200" dirty="0"/>
+          </a:p>
+          <a:p>
+            <a:pPr algn="l" indent="0" marL="0">
+              <a:buNone/>
+            </a:pPr>
+            <a:endParaRPr lang="en-US" sz="1200" dirty="0"/>
+          </a:p>
+          <a:p>
+            <a:pPr algn="l" indent="0" marL="0">
+              <a:buNone/>
+            </a:pPr>
+            <a:r>
+              <a:rPr lang="en-US" sz="1200" dirty="0">
+                <a:solidFill>
+                  <a:srgbClr val="334155"/>
+                </a:solidFill>
+                <a:latin typeface="Calibri" pitchFamily="34" charset="0"/>
+                <a:ea typeface="Calibri" pitchFamily="34" charset="-122"/>
+                <a:cs typeface="Calibri" pitchFamily="34" charset="-120"/>
+              </a:rPr>
+              <a:t>Which is why the model you have just learned is not the toy version of the real one. It IS the real one, at N = 1.</a:t>
             </a:r>
             <a:endParaRPr lang="en-US" sz="1200" dirty="0"/>
           </a:p>
@@ -24310,7 +24862,7 @@
                 <a:ea typeface="Calibri" pitchFamily="34" charset="-122"/>
                 <a:cs typeface="Calibri" pitchFamily="34" charset="-120"/>
               </a:rPr>
-              <a:t>Draw the payoff diagrams for long/short calls and puts, and for the two most-traded overlays: the covered call and the protective put.
+              <a:t>Write the payoff and the profit for all four basic positions — long/short call, long/short put — and say which single one carries an unlimited loss.
 </a:t>
             </a:r>
             <a:pPr indent="0" marL="0">
@@ -24339,7 +24891,7 @@
                 <a:ea typeface="Calibri" pitchFamily="34" charset="-122"/>
                 <a:cs typeface="Calibri" pitchFamily="34" charset="-120"/>
               </a:rPr>
-              <a:t>Decompose any option premium into exercise value and time value, classify it as ITM / ATM / OTM, and verify it respects the no-arbitrage bounds.
+              <a:t>Split any option premium into exercise value and time value, classify it ITM / ATM / OTM from the holder's side, and check it against the no-arbitrage bounds.
 </a:t>
             </a:r>
             <a:pPr indent="0" marL="0">
@@ -24368,7 +24920,7 @@
                 <a:ea typeface="Calibri" pitchFamily="34" charset="-122"/>
                 <a:cs typeface="Calibri" pitchFamily="34" charset="-120"/>
               </a:rPr>
-              <a:t>State the six factors that move option value and recite the sign of each effect for calls and for puts.
+              <a:t>Contrast arbitrage and replication for a forward versus an option, and explain why an option's replicating portfolio has to be rebalanced.
 </a:t>
             </a:r>
             <a:pPr indent="0" marL="0">
@@ -24397,7 +24949,7 @@
                 <a:ea typeface="Calibri" pitchFamily="34" charset="-122"/>
                 <a:cs typeface="Calibri" pitchFamily="34" charset="-120"/>
               </a:rPr>
-              <a:t>Derive put-call parity from a protective-put vs fiduciary-call no-arbitrage argument, exploit a parity violation for a riskless profit, and build a synthetic long stock from the other three positions.
+              <a:t>Name the six factors that move option value and give the sign of each for a call and for a put, including the two that move both the same way.
 </a:t>
             </a:r>
             <a:pPr indent="0" marL="0">
@@ -24426,7 +24978,36 @@
                 <a:ea typeface="Calibri" pitchFamily="34" charset="-122"/>
                 <a:cs typeface="Calibri" pitchFamily="34" charset="-120"/>
               </a:rPr>
-              <a:t>Price a European option on a one-period binomial tree via both the delta-hedge approach and the risk-neutral expectation, and explain why the actual probability is irrelevant to the price.
+              <a:t>Derive put-call parity from protective put versus fiduciary call, exploit a violation of it, and build any one of the four positions from the other three.
+</a:t>
+            </a:r>
+            <a:pPr indent="0" marL="0">
+              <a:buNone/>
+            </a:pPr>
+            <a:r>
+              <a:rPr lang="en-US" sz="1200" b="1" dirty="0">
+                <a:solidFill>
+                  <a:srgbClr val="E8600A"/>
+                </a:solidFill>
+                <a:latin typeface="Trebuchet MS" pitchFamily="34" charset="0"/>
+                <a:ea typeface="Trebuchet MS" pitchFamily="34" charset="-122"/>
+                <a:cs typeface="Trebuchet MS" pitchFamily="34" charset="-120"/>
+              </a:rPr>
+              <a:t>6. </a:t>
+            </a:r>
+            <a:pPr indent="0" marL="0">
+              <a:buNone/>
+            </a:pPr>
+            <a:r>
+              <a:rPr lang="en-US" sz="1200" dirty="0">
+                <a:solidFill>
+                  <a:srgbClr val="334155"/>
+                </a:solidFill>
+                <a:latin typeface="Calibri" pitchFamily="34" charset="0"/>
+                <a:ea typeface="Calibri" pitchFamily="34" charset="-122"/>
+                <a:cs typeface="Calibri" pitchFamily="34" charset="-120"/>
+              </a:rPr>
+              <a:t>Price a European option on a one-period binomial tree by delta hedge and by risk-neutral expectation, and explain why the real-world probability never appears.
 </a:t>
             </a:r>
             <a:endParaRPr lang="en-US" sz="1200" dirty="0"/>
@@ -24658,7 +25239,7 @@
                 <a:ea typeface="Calibri" pitchFamily="34" charset="-122"/>
                 <a:cs typeface="Calibri" pitchFamily="34" charset="-120"/>
               </a:rPr>
-              <a:t>Option payoffs at expiry: cT = Max(0, ST − X), pT = Max(0, X − ST) — asymmetric, kinked, the source of everything that follows.</a:t>
+              <a:t>Payoffs at expiry: cT = Max(0, ST − X), pT = Max(0, X − ST). Profit subtracts the premium. Only the short call can lose an unlimited amount.</a:t>
             </a:r>
             <a:endParaRPr lang="en-US" sz="1150" dirty="0"/>
           </a:p>
@@ -24740,7 +25321,7 @@
                 <a:ea typeface="Calibri" pitchFamily="34" charset="-122"/>
                 <a:cs typeface="Calibri" pitchFamily="34" charset="-120"/>
               </a:rPr>
-              <a:t>Every option price = exercise value + time value; exercise uses PV(X) not X; time value always ≥ 0 and decays to zero at T.</a:t>
+              <a:t>Price = exercise value + time value. Exercise value discounts X to PV(X). Time value is positive and decays to zero at T.</a:t>
             </a:r>
             <a:endParaRPr lang="en-US" sz="1150" dirty="0"/>
           </a:p>
@@ -24822,7 +25403,7 @@
                 <a:ea typeface="Calibri" pitchFamily="34" charset="-122"/>
                 <a:cs typeface="Calibri" pitchFamily="34" charset="-120"/>
               </a:rPr>
-              <a:t>Six-factor sensitivity memorised: S, X, T, r, σ, income. Volatility is the only factor with the same sign for calls and puts.</a:t>
+              <a:t>Moneyness is the holder's view: a call is ITM when S &gt; X, a put when S &lt; X. Bounds: Max(0, S − PV(X)) &lt; c ≤ S and Max(0, PV(X) − S) &lt; p ≤ X.</a:t>
             </a:r>
             <a:endParaRPr lang="en-US" sz="1150" dirty="0"/>
           </a:p>
@@ -24904,7 +25485,7 @@
                 <a:ea typeface="Calibri" pitchFamily="34" charset="-122"/>
                 <a:cs typeface="Calibri" pitchFamily="34" charset="-120"/>
               </a:rPr>
-              <a:t>Put-call parity: S₀ + p₀ = c₀ + X(1+r)⁻ᵀ — derives from a two-portfolio arbitrage, prices any of the four positions from the other three.</a:t>
+              <a:t>Six factors. Volatility and time to expiration move calls and puts the SAME way; S, X, r and income/carry move them opposite ways.</a:t>
             </a:r>
             <a:endParaRPr lang="en-US" sz="1150" dirty="0"/>
           </a:p>
@@ -24986,7 +25567,7 @@
                 <a:ea typeface="Calibri" pitchFamily="34" charset="-122"/>
                 <a:cs typeface="Calibri" pitchFamily="34" charset="-120"/>
               </a:rPr>
-              <a:t>Synthetics: long stock = +call − put + cash at PV(X); covered call = S₀ − c₀ = long bond − short put; protective put = long call + long bond.</a:t>
+              <a:t>Put-call parity: S₀ + p₀ = c₀ + X(1+r)⁻ᵀ. It is a no-arbitrage identity, so it prices any one of the four positions from the other three.</a:t>
             </a:r>
             <a:endParaRPr lang="en-US" sz="1150" dirty="0"/>
           </a:p>
@@ -25068,7 +25649,7 @@
                 <a:ea typeface="Calibri" pitchFamily="34" charset="-122"/>
                 <a:cs typeface="Calibri" pitchFamily="34" charset="-120"/>
               </a:rPr>
-              <a:t>Binomial hedge ratio h* = (c_u − c_d)/(S_u − S_d) builds a risk-free portfolio; its discounted cost pins the option price.</a:t>
+              <a:t>Synthetics: long stock = call − put + PV(X); covered call = long bond − put; equity in a levered firm = a call on the assets.</a:t>
             </a:r>
             <a:endParaRPr lang="en-US" sz="1150" dirty="0"/>
           </a:p>
@@ -25150,7 +25731,7 @@
                 <a:ea typeface="Calibri" pitchFamily="34" charset="-122"/>
                 <a:cs typeface="Calibri" pitchFamily="34" charset="-120"/>
               </a:rPr>
-              <a:t>Risk-neutral probability π = (1+r − R_d)/(R_u − R_d) gives the same price in one expected-value step; actual probability q is irrelevant.</a:t>
+              <a:t>Binomial: h* = (c₁ᵘ − c₁ᵈ)/(S₁ᵘ − S₁ᵈ) builds a riskless portfolio; its discounted cost pins c₀. h* is negative for a put.</a:t>
             </a:r>
             <a:endParaRPr lang="en-US" sz="1150" dirty="0"/>
           </a:p>
@@ -25232,7 +25813,7 @@
                 <a:ea typeface="Calibri" pitchFamily="34" charset="-122"/>
                 <a:cs typeface="Calibri" pitchFamily="34" charset="-120"/>
               </a:rPr>
-              <a:t>Canonical answer (CFA LM10): S₀=80, X=100, up 37.5% / down 25%, r=5% ⇒ c₀ = 4.57. Black-Scholes is the continuous-time limit of this tree.</a:t>
+              <a:t>Risk-neutral π = (1 + r − R_d)/(Rᵤ − R_d) gives the same price in one step. The real probability q never appears. Canonical answer: EUR 4.57.</a:t>
             </a:r>
             <a:endParaRPr lang="en-US" sz="1150" dirty="0"/>
           </a:p>
@@ -25601,7 +26182,7 @@
               <a:buNone/>
             </a:pPr>
             <a:r>
-              <a:rPr lang="en-US" sz="1800" b="1" dirty="0">
+              <a:rPr lang="en-US" sz="1700" b="1" dirty="0">
                 <a:solidFill>
                   <a:srgbClr val="FFFFFF"/>
                 </a:solidFill>
@@ -25609,9 +26190,9 @@
                 <a:ea typeface="Trebuchet MS" pitchFamily="34" charset="-122"/>
                 <a:cs typeface="Trebuchet MS" pitchFamily="34" charset="-120"/>
               </a:rPr>
-              <a:t>An option's payoff at expiry is Max(0, intrinsic value) — asymmetric, not linear like a forward</a:t>
-            </a:r>
-            <a:endParaRPr lang="en-US" sz="1800" dirty="0"/>
+              <a:t>At expiry an option pays Max(0, ST − X) for a call and Max(0, X − ST) for a put — never negative, never linear</a:t>
+            </a:r>
+            <a:endParaRPr lang="en-US" sz="1700" dirty="0"/>
           </a:p>
         </p:txBody>
       </p:sp>
@@ -25713,7 +26294,7 @@
                 <a:ea typeface="Calibri" pitchFamily="34" charset="-122"/>
                 <a:cs typeface="Calibri" pitchFamily="34" charset="-120"/>
               </a:rPr>
-              <a:t>Source: CFA Institute, Curriculum Vol 7, Learning Module 8, Exhibit 3 and pp. 180–182.</a:t>
+              <a:t>Source: CFA Institute, Curriculum Vol 7, Learning Module 8, §6 "Arbitrage", Equations 5–8 and Exhibit 3, printed pp. 180–181.</a:t>
             </a:r>
             <a:endParaRPr lang="en-US" sz="750" dirty="0"/>
           </a:p>
@@ -25755,7 +26336,7 @@
                 <a:ea typeface="Calibri" pitchFamily="34" charset="-122"/>
                 <a:cs typeface="Calibri" pitchFamily="34" charset="-120"/>
               </a:rPr>
-              <a:t>The kink at the strike is the entire source of option-market richness: below it the payoff is flat, above it grows one-for-one.</a:t>
+              <a:t>The kink at the strike is the whole source of option-market richness: flat on one side of X, one-for-one on the other.</a:t>
             </a:r>
             <a:endParaRPr lang="en-US" sz="1300" dirty="0"/>
           </a:p>
@@ -25859,7 +26440,7 @@
                 <a:ea typeface="Calibri" pitchFamily="34" charset="-122"/>
                 <a:cs typeface="Calibri" pitchFamily="34" charset="-120"/>
               </a:rPr>
-              <a:t>where: ST = underlying spot at expiry T; X = exercise (strike) price. The premium paid at t = 0 offsets the payoff to give the profit.</a:t>
+              <a:t>where: ST = underlying spot at expiry; X = exercise (strike) price. Profit subtracts the premium paid at t = 0: Π = cT − c₀ (call), Π = pT − p₀ (put).</a:t>
             </a:r>
             <a:endParaRPr lang="en-US" sz="1100" dirty="0"/>
           </a:p>
@@ -25901,7 +26482,7 @@
                 <a:ea typeface="Trebuchet MS" pitchFamily="34" charset="-122"/>
                 <a:cs typeface="Trebuchet MS" pitchFamily="34" charset="-120"/>
               </a:rPr>
-              <a:t>Long call — strike 100</a:t>
+              <a:t>Long call payoff — strike 100</a:t>
             </a:r>
             <a:endParaRPr lang="en-US" sz="1200" dirty="0"/>
           </a:p>
@@ -25959,7 +26540,7 @@
                 <a:ea typeface="Trebuchet MS" pitchFamily="34" charset="-122"/>
                 <a:cs typeface="Trebuchet MS" pitchFamily="34" charset="-120"/>
               </a:rPr>
-              <a:t>Long put — strike 100</a:t>
+              <a:t>Long put payoff — strike 100</a:t>
             </a:r>
             <a:endParaRPr lang="en-US" sz="1200" dirty="0"/>
           </a:p>
@@ -26074,7 +26655,7 @@
               <a:buNone/>
             </a:pPr>
             <a:r>
-              <a:rPr lang="en-US" sz="1700" b="1" dirty="0">
+              <a:rPr lang="en-US" sz="1900" b="1" dirty="0">
                 <a:solidFill>
                   <a:srgbClr val="FFFFFF"/>
                 </a:solidFill>
@@ -26082,9 +26663,9 @@
                 <a:ea typeface="Trebuchet MS" pitchFamily="34" charset="-122"/>
                 <a:cs typeface="Trebuchet MS" pitchFamily="34" charset="-120"/>
               </a:rPr>
-              <a:t>Long and short positions are mirror images around the premium — the buyer's max loss equals the seller's max gain</a:t>
-            </a:r>
-            <a:endParaRPr lang="en-US" sz="1700" dirty="0"/>
+              <a:t>Four positions, and exactly one of them can lose an unlimited amount: the short call</a:t>
+            </a:r>
+            <a:endParaRPr lang="en-US" sz="1900" dirty="0"/>
           </a:p>
         </p:txBody>
       </p:sp>
@@ -26158,6 +26739,61 @@
         </p:nvSpPr>
         <p:spPr>
           <a:xfrm>
+            <a:off x="320040" y="4325112"/>
+            <a:ext cx="8503920" cy="338328"/>
+          </a:xfrm>
+          <a:prstGeom prst="rect">
+            <a:avLst/>
+          </a:prstGeom>
+          <a:noFill/>
+          <a:ln/>
+        </p:spPr>
+        <p:txBody>
+          <a:bodyPr wrap="square" lIns="254" tIns="254" rIns="254" bIns="254" rtlCol="0" anchor="t"/>
+          <a:lstStyle/>
+          <a:p>
+            <a:pPr indent="0" marL="0">
+              <a:buNone/>
+            </a:pPr>
+            <a:r>
+              <a:rPr lang="en-US" sz="1000" dirty="0">
+                <a:solidFill>
+                  <a:srgbClr val="6B7A8D"/>
+                </a:solidFill>
+                <a:latin typeface="Calibri" pitchFamily="34" charset="0"/>
+                <a:ea typeface="Calibri" pitchFamily="34" charset="-122"/>
+                <a:cs typeface="Calibri" pitchFamily="34" charset="-120"/>
+              </a:rPr>
+              <a:t>¹ Max loss, max gain and breakeven are profit figures; the payoff column is gross of the premium.
+</a:t>
+            </a:r>
+            <a:pPr indent="0" marL="0">
+              <a:buNone/>
+            </a:pPr>
+            <a:r>
+              <a:rPr lang="en-US" sz="1000" dirty="0">
+                <a:solidFill>
+                  <a:srgbClr val="6B7A8D"/>
+                </a:solidFill>
+                <a:latin typeface="Calibri" pitchFamily="34" charset="0"/>
+                <a:ea typeface="Calibri" pitchFamily="34" charset="-122"/>
+                <a:cs typeface="Calibri" pitchFamily="34" charset="-120"/>
+              </a:rPr>
+              <a:t>² A long put hits its X − p₀ maximum only if the underlying falls all the way to zero.
+</a:t>
+            </a:r>
+            <a:endParaRPr lang="en-US" sz="1000" dirty="0"/>
+          </a:p>
+        </p:txBody>
+      </p:sp>
+      <p:sp>
+        <p:nvSpPr>
+          <p:cNvPr id="8" name="Text 6"/>
+          <p:cNvSpPr txBox="1"/>
+          <p:nvPr/>
+        </p:nvSpPr>
+        <p:spPr>
+          <a:xfrm>
             <a:off x="320040" y="4663440"/>
             <a:ext cx="8503920" cy="201168"/>
           </a:xfrm>
@@ -26186,7 +26822,7 @@
                 <a:ea typeface="Calibri" pitchFamily="34" charset="-122"/>
                 <a:cs typeface="Calibri" pitchFamily="34" charset="-120"/>
               </a:rPr>
-              <a:t>Source: CFA Institute, Curriculum Vol 7, Learning Module 8, pp. 180–184.</a:t>
+              <a:t>Source: CFA Institute, Curriculum Vol 7, Learning Module 8, §6 "Arbitrage", Equations 5–8, printed pp. 181–182.</a:t>
             </a:r>
             <a:endParaRPr lang="en-US" sz="750" dirty="0"/>
           </a:p>
@@ -26194,7 +26830,7 @@
       </p:sp>
       <p:sp>
         <p:nvSpPr>
-          <p:cNvPr id="8" name="Text 6"/>
+          <p:cNvPr id="9" name="Text 7"/>
           <p:cNvSpPr txBox="1"/>
           <p:nvPr/>
         </p:nvSpPr>
@@ -26228,7 +26864,7 @@
                 <a:ea typeface="Calibri" pitchFamily="34" charset="-122"/>
                 <a:cs typeface="Calibri" pitchFamily="34" charset="-120"/>
               </a:rPr>
-              <a:t>The option writer's P&amp;L is the counterparty of the buyer's: sum of the two profits is always exactly zero, minus transaction costs.</a:t>
+              <a:t>Buyer and seller are mirror images around the premium: their two profits sum to exactly zero, before transaction costs.</a:t>
             </a:r>
             <a:endParaRPr lang="en-US" sz="1300" dirty="0"/>
           </a:p>
@@ -26481,7 +27117,7 @@
                           <a:ea typeface="Trebuchet MS" pitchFamily="34" charset="-122"/>
                           <a:cs typeface="Trebuchet MS" pitchFamily="34" charset="-120"/>
                         </a:rPr>
-                        <a:t>Breakeven</a:t>
+                        <a:t>Breakeven ST</a:t>
                       </a:r>
                       <a:endParaRPr lang="en-US" sz="1100" dirty="0">
                         <a:latin typeface="Trebuchet MS" charset="0"/>
@@ -27187,7 +27823,7 @@
                           <a:ea typeface="Consolas" pitchFamily="34" charset="-122"/>
                           <a:cs typeface="Consolas" pitchFamily="34" charset="-120"/>
                         </a:rPr>
-                        <a:t>X − p₀  (if ST = 0)</a:t>
+                        <a:t>X − p₀</a:t>
                       </a:r>
                       <a:endParaRPr lang="en-US" sz="1100" dirty="0">
                         <a:latin typeface="Consolas" charset="0"/>
@@ -27529,14 +28165,14 @@
       </p:graphicFrame>
       <p:sp>
         <p:nvSpPr>
-          <p:cNvPr id="10" name="Shape 7"/>
+          <p:cNvPr id="11" name="Shape 8"/>
           <p:cNvSpPr/>
           <p:nvPr/>
         </p:nvSpPr>
         <p:spPr>
           <a:xfrm>
-            <a:off x="320040" y="3108960"/>
-            <a:ext cx="8503920" cy="1188720"/>
+            <a:off x="320040" y="2788920"/>
+            <a:ext cx="8503920" cy="1463040"/>
           </a:xfrm>
           <a:prstGeom prst="rect">
             <a:avLst/>
@@ -27549,14 +28185,14 @@
       </p:sp>
       <p:sp>
         <p:nvSpPr>
-          <p:cNvPr id="11" name="Shape 8"/>
+          <p:cNvPr id="12" name="Shape 9"/>
           <p:cNvSpPr/>
           <p:nvPr/>
         </p:nvSpPr>
         <p:spPr>
           <a:xfrm>
-            <a:off x="320040" y="3108960"/>
-            <a:ext cx="73152" cy="1188720"/>
+            <a:off x="320040" y="2788920"/>
+            <a:ext cx="73152" cy="1463040"/>
           </a:xfrm>
           <a:prstGeom prst="rect">
             <a:avLst/>
@@ -27569,13 +28205,13 @@
       </p:sp>
       <p:sp>
         <p:nvSpPr>
-          <p:cNvPr id="12" name="Text 9"/>
+          <p:cNvPr id="13" name="Text 10"/>
           <p:cNvSpPr txBox="1"/>
           <p:nvPr/>
         </p:nvSpPr>
         <p:spPr>
           <a:xfrm>
-            <a:off x="457200" y="3154680"/>
+            <a:off x="457200" y="2834640"/>
             <a:ext cx="8275320" cy="256032"/>
           </a:xfrm>
           <a:prstGeom prst="rect">
@@ -27611,14 +28247,14 @@
       </p:sp>
       <p:sp>
         <p:nvSpPr>
-          <p:cNvPr id="13" name="Text 10"/>
+          <p:cNvPr id="14" name="Text 11"/>
           <p:cNvSpPr txBox="1"/>
           <p:nvPr/>
         </p:nvSpPr>
         <p:spPr>
           <a:xfrm>
-            <a:off x="457200" y="3429000"/>
-            <a:ext cx="8275320" cy="822960"/>
+            <a:off x="457200" y="3108960"/>
+            <a:ext cx="8275320" cy="1097280"/>
           </a:xfrm>
           <a:prstGeom prst="rect">
             <a:avLst/>
@@ -27645,7 +28281,7 @@
                 <a:ea typeface="Calibri" pitchFamily="34" charset="-122"/>
                 <a:cs typeface="Calibri" pitchFamily="34" charset="-120"/>
               </a:rPr>
-              <a:t>• Long options have capped downside (the premium) and, for calls, uncapped upside — you pay for the optionality.</a:t>
+              <a:t>• Buying an option caps your loss at the premium. That cap is what you are paying for.</a:t>
             </a:r>
             <a:endParaRPr lang="en-US" sz="1200" dirty="0"/>
           </a:p>
@@ -27662,7 +28298,7 @@
                 <a:ea typeface="Calibri" pitchFamily="34" charset="-122"/>
                 <a:cs typeface="Calibri" pitchFamily="34" charset="-120"/>
               </a:rPr>
-              <a:t>• Short options have capped upside (the premium) and, for calls, uncapped downside — you are selling insurance.</a:t>
+              <a:t>• Selling an option caps your gain at the premium. You are writing insurance, and you keep the float.</a:t>
             </a:r>
             <a:endParaRPr lang="en-US" sz="1200" dirty="0"/>
           </a:p>
@@ -27679,7 +28315,7 @@
                 <a:ea typeface="Calibri" pitchFamily="34" charset="-122"/>
                 <a:cs typeface="Calibri" pitchFamily="34" charset="-120"/>
               </a:rPr>
-              <a:t>• Short puts are the trade with the worst tail: you can lose X − p₀ if the underlying drops to zero.</a:t>
+              <a:t>• The short call is the ONLY one of the four with an unbounded loss — a stock has no ceiling. The short put is nasty but bounded: the worst case is a bankruptcy, X − p₀.</a:t>
             </a:r>
             <a:endParaRPr lang="en-US" sz="1200" dirty="0"/>
           </a:p>
@@ -27696,7 +28332,7 @@
                 <a:ea typeface="Calibri" pitchFamily="34" charset="-122"/>
                 <a:cs typeface="Calibri" pitchFamily="34" charset="-120"/>
               </a:rPr>
-              <a:t>• The premium is never part of the payoff at T — it's a sunk cost paid at t = 0 that shifts profit vertically.</a:t>
+              <a:t>• The premium never appears in the payoff at T. It is paid at t = 0 and simply shifts the profit line vertically.</a:t>
             </a:r>
             <a:endParaRPr lang="en-US" sz="1200" dirty="0"/>
           </a:p>
@@ -27803,7 +28439,7 @@
                 <a:ea typeface="Trebuchet MS" pitchFamily="34" charset="-122"/>
                 <a:cs typeface="Trebuchet MS" pitchFamily="34" charset="-120"/>
               </a:rPr>
-              <a:t>A covered call sells upside in exchange for option income — the most widely used option overlay in asset management</a:t>
+              <a:t>A covered call sells the upside above X in exchange for the premium — the most-used option overlay in asset management</a:t>
             </a:r>
             <a:endParaRPr lang="en-US" sz="1700" dirty="0"/>
           </a:p>
@@ -27907,7 +28543,7 @@
                 <a:ea typeface="Calibri" pitchFamily="34" charset="-122"/>
                 <a:cs typeface="Calibri" pitchFamily="34" charset="-120"/>
               </a:rPr>
-              <a:t>Source: CFA Institute, Curriculum Vol 7, Learning Module 9, Example 3 "VFO Covered Call", pp. 204–206.</a:t>
+              <a:t>Source: CFA Institute, Curriculum Vol 7, Learning Module 9, §3 Example 3 "VFO Covered Call Strategy", printed pp. 205–206.</a:t>
             </a:r>
             <a:endParaRPr lang="en-US" sz="750" dirty="0"/>
           </a:p>
@@ -27949,7 +28585,7 @@
                 <a:ea typeface="Calibri" pitchFamily="34" charset="-122"/>
                 <a:cs typeface="Calibri" pitchFamily="34" charset="-120"/>
               </a:rPr>
-              <a:t>Long stock + short call: if ST ≤ X, keep the stock and the premium; if ST &gt; X, forfeit upside beyond X but still collect the premium.</a:t>
+              <a:t>Long stock + short call. If ST ≤ X you keep the stock and the premium; above X you are called away at X and keep the premium.</a:t>
             </a:r>
             <a:endParaRPr lang="en-US" sz="1300" dirty="0"/>
           </a:p>
@@ -28011,7 +28647,7 @@
                 <a:ea typeface="Consolas" pitchFamily="34" charset="-122"/>
                 <a:cs typeface="Consolas" pitchFamily="34" charset="-120"/>
               </a:rPr>
-              <a:t>Covered-call payoff  =  ST  −  Max(0, ST − X)  =  Min(ST, X)          (plus premium c₀ received at t = 0)</a:t>
+              <a:t>S₀ − c₀  =  X(1+r)⁻ᵀ − p₀        payoff = Min(ST, X)</a:t>
             </a:r>
             <a:endParaRPr lang="en-US" sz="1800" dirty="0"/>
           </a:p>
@@ -28025,8 +28661,8 @@
         </p:nvSpPr>
         <p:spPr>
           <a:xfrm>
-            <a:off x="320040" y="2331720"/>
-            <a:ext cx="8503920" cy="1965960"/>
+            <a:off x="320040" y="2011680"/>
+            <a:ext cx="8503920" cy="2286000"/>
           </a:xfrm>
           <a:prstGeom prst="rect">
             <a:avLst/>
@@ -28050,7 +28686,7 @@
         </p:nvSpPr>
         <p:spPr>
           <a:xfrm>
-            <a:off x="457200" y="2377440"/>
+            <a:off x="457200" y="2057400"/>
             <a:ext cx="8229600" cy="256032"/>
           </a:xfrm>
           <a:prstGeom prst="rect">
@@ -28078,7 +28714,7 @@
                 <a:ea typeface="Trebuchet MS" pitchFamily="34" charset="-122"/>
                 <a:cs typeface="Trebuchet MS" pitchFamily="34" charset="-120"/>
               </a:rPr>
-              <a:t>CFA LM 9 EXAMPLE 3 — VISWAN FAMILY OFFICE BIOMIAN COVERED CALL</a:t>
+              <a:t>CFA LM 9 EXAMPLE 3 — VFO COVERED CALL ON BIOMIAN</a:t>
             </a:r>
             <a:endParaRPr lang="en-US" sz="1100" dirty="0"/>
           </a:p>
@@ -28092,7 +28728,7 @@
         </p:nvSpPr>
         <p:spPr>
           <a:xfrm>
-            <a:off x="457200" y="2670048"/>
+            <a:off x="457200" y="2350008"/>
             <a:ext cx="8229600" cy="457200"/>
           </a:xfrm>
           <a:prstGeom prst="rect">
@@ -28120,7 +28756,7 @@
                 <a:ea typeface="Calibri" pitchFamily="34" charset="-122"/>
                 <a:cs typeface="Calibri" pitchFamily="34" charset="-120"/>
               </a:rPr>
-              <a:t>VFO holds non-dividend Biomian stock at S₀ = INR 295. CIO sells a 6-month call at X = INR 325 to generate income. Risk-free rate 4%; put (same X, T) priced at INR 56.</a:t>
+              <a:t>VFO holds non-dividend Biomian at S₀ = INR 295. The CIO sells a six-month call at X = INR 325 for income. r = 4%; the six-month put at the same strike trades at INR 56.</a:t>
             </a:r>
             <a:endParaRPr lang="en-US" sz="1200" dirty="0"/>
           </a:p>
@@ -28134,8 +28770,8 @@
         </p:nvSpPr>
         <p:spPr>
           <a:xfrm>
-            <a:off x="457200" y="3182112"/>
-            <a:ext cx="8229600" cy="603504"/>
+            <a:off x="457200" y="2862072"/>
+            <a:ext cx="8229600" cy="923544"/>
           </a:xfrm>
           <a:prstGeom prst="rect">
             <a:avLst/>
@@ -28157,7 +28793,7 @@
               <a:buNone/>
             </a:pPr>
             <a:r>
-              <a:rPr lang="en-US" sz="1050" b="1" dirty="0">
+              <a:rPr lang="en-US" sz="1150" b="1" dirty="0">
                 <a:solidFill>
                   <a:srgbClr val="1B2A4A"/>
                 </a:solidFill>
@@ -28174,7 +28810,7 @@
               <a:buNone/>
             </a:pPr>
             <a:r>
-              <a:rPr lang="en-US" sz="1050" dirty="0">
+              <a:rPr lang="en-US" sz="1150" dirty="0">
                 <a:solidFill>
                   <a:srgbClr val="334155"/>
                 </a:solidFill>
@@ -28182,7 +28818,7 @@
                 <a:ea typeface="Calibri" pitchFamily="34" charset="-122"/>
                 <a:cs typeface="Calibri" pitchFamily="34" charset="-120"/>
               </a:rPr>
-              <a:t>Covered call position = S₀ − c₀ (long stock, short call)
+              <a:t>Covered call = long stock + short call = S₀ − c₀ at inception
 </a:t>
             </a:r>
             <a:pPr indent="0" marL="0">
@@ -28192,7 +28828,7 @@
               <a:buNone/>
             </a:pPr>
             <a:r>
-              <a:rPr lang="en-US" sz="1050" b="1" dirty="0">
+              <a:rPr lang="en-US" sz="1150" b="1" dirty="0">
                 <a:solidFill>
                   <a:srgbClr val="1B2A4A"/>
                 </a:solidFill>
@@ -28209,7 +28845,7 @@
               <a:buNone/>
             </a:pPr>
             <a:r>
-              <a:rPr lang="en-US" sz="1050" dirty="0">
+              <a:rPr lang="en-US" sz="1150" dirty="0">
                 <a:solidFill>
                   <a:srgbClr val="334155"/>
                 </a:solidFill>
@@ -28217,7 +28853,7 @@
                 <a:ea typeface="Calibri" pitchFamily="34" charset="-122"/>
                 <a:cs typeface="Calibri" pitchFamily="34" charset="-120"/>
               </a:rPr>
-              <a:t>By put-call parity: S₀ − c₀ = X(1+r)⁻ᵀ − p₀
+              <a:t>Parity rearranged: S₀ − c₀ = X(1 + r)⁻ᵀ − p₀  (a long bond plus a SHORT put)
 </a:t>
             </a:r>
             <a:pPr indent="0" marL="0">
@@ -28227,7 +28863,7 @@
               <a:buNone/>
             </a:pPr>
             <a:r>
-              <a:rPr lang="en-US" sz="1050" b="1" dirty="0">
+              <a:rPr lang="en-US" sz="1150" b="1" dirty="0">
                 <a:solidFill>
                   <a:srgbClr val="1B2A4A"/>
                 </a:solidFill>
@@ -28244,7 +28880,7 @@
               <a:buNone/>
             </a:pPr>
             <a:r>
-              <a:rPr lang="en-US" sz="1050" dirty="0">
+              <a:rPr lang="en-US" sz="1150" dirty="0">
                 <a:solidFill>
                   <a:srgbClr val="334155"/>
                 </a:solidFill>
@@ -28252,7 +28888,7 @@
                 <a:ea typeface="Calibri" pitchFamily="34" charset="-122"/>
                 <a:cs typeface="Calibri" pitchFamily="34" charset="-120"/>
               </a:rPr>
-              <a:t>Substitute: 295 − c₀ = 325 × 1.04⁻⁰·⁵ − 56 = 318.69 − 56 = 262.69
+              <a:t>295 − c₀ = 325 × 1.04⁻⁰·⁵ − 56 = 318.69 − 56 = 262.69
 </a:t>
             </a:r>
             <a:pPr indent="0" marL="0">
@@ -28262,7 +28898,7 @@
               <a:buNone/>
             </a:pPr>
             <a:r>
-              <a:rPr lang="en-US" sz="1050" b="1" dirty="0">
+              <a:rPr lang="en-US" sz="1150" b="1" dirty="0">
                 <a:solidFill>
                   <a:srgbClr val="1B2A4A"/>
                 </a:solidFill>
@@ -28279,7 +28915,7 @@
               <a:buNone/>
             </a:pPr>
             <a:r>
-              <a:rPr lang="en-US" sz="1050" dirty="0">
+              <a:rPr lang="en-US" sz="1150" dirty="0">
                 <a:solidFill>
                   <a:srgbClr val="334155"/>
                 </a:solidFill>
@@ -28287,9 +28923,9 @@
                 <a:ea typeface="Calibri" pitchFamily="34" charset="-122"/>
                 <a:cs typeface="Calibri" pitchFamily="34" charset="-120"/>
               </a:rPr>
-              <a:t>Solve: c₀ = 295 − 262.69 = INR 32.31</a:t>
-            </a:r>
-            <a:endParaRPr lang="en-US" sz="1050" dirty="0"/>
+              <a:t>c₀ = 295 − 262.69 = INR 32.31</a:t>
+            </a:r>
+            <a:endParaRPr lang="en-US" sz="1150" dirty="0"/>
           </a:p>
         </p:txBody>
       </p:sp>
@@ -28349,7 +28985,7 @@
                 <a:ea typeface="Consolas" pitchFamily="34" charset="-122"/>
                 <a:cs typeface="Consolas" pitchFamily="34" charset="-120"/>
               </a:rPr>
-              <a:t>Sell 6-month X = 325 call for INR 32.31; total income = premium. Max payoff at T capped at 325 + 32.31 = 357.31.</a:t>
+              <a:t>Sell the call for INR 32.31. Payoff at T caps at X = 325; max profit = 325 − 295 + 32.31 = 62.31.</a:t>
             </a:r>
             <a:endParaRPr lang="en-US" sz="1150" dirty="0"/>
           </a:p>
@@ -28456,7 +29092,7 @@
                 <a:ea typeface="Trebuchet MS" pitchFamily="34" charset="-122"/>
                 <a:cs typeface="Trebuchet MS" pitchFamily="34" charset="-120"/>
               </a:rPr>
-              <a:t>A protective put buys insurance against downside at a known upfront cost — the floor everyone wants and few want to pay for</a:t>
+              <a:t>A protective put buys a floor at X for a known upfront cost — the hedge everyone wants and few want to pay for</a:t>
             </a:r>
             <a:endParaRPr lang="en-US" sz="1700" dirty="0"/>
           </a:p>
@@ -28560,7 +29196,7 @@
                 <a:ea typeface="Calibri" pitchFamily="34" charset="-122"/>
                 <a:cs typeface="Calibri" pitchFamily="34" charset="-120"/>
               </a:rPr>
-              <a:t>Source: CFA Institute, Curriculum Vol 7, Learning Module 9, Example 1 "Biomian Put-Call Parity", pp. 202–203.</a:t>
+              <a:t>Source: CFA Institute, Curriculum Vol 7, Learning Module 9, §2 Exhibits 1–3 and Example 1 "Biomian Put–Call Parity", printed pp. 200–202.</a:t>
             </a:r>
             <a:endParaRPr lang="en-US" sz="750" dirty="0"/>
           </a:p>
@@ -28602,7 +29238,7 @@
                 <a:ea typeface="Calibri" pitchFamily="34" charset="-122"/>
                 <a:cs typeface="Calibri" pitchFamily="34" charset="-120"/>
               </a:rPr>
-              <a:t>Long stock + long put: if ST ≥ X, let the put lapse; if ST &lt; X, exercise and sell at X — a floor at X, paid for with premium p₀.</a:t>
+              <a:t>Long stock + long put. Above X you let the put lapse; below X you exercise and sell at X. A floor at X, paid for with p₀.</a:t>
             </a:r>
             <a:endParaRPr lang="en-US" sz="1300" dirty="0"/>
           </a:p>
@@ -28664,7 +29300,7 @@
                 <a:ea typeface="Consolas" pitchFamily="34" charset="-122"/>
                 <a:cs typeface="Consolas" pitchFamily="34" charset="-120"/>
               </a:rPr>
-              <a:t>Protective-put payoff  =  ST  +  Max(0, X − ST)  =  Max(ST, X)          (less premium p₀ paid at t = 0)</a:t>
+              <a:t>S₀ + p₀  (protective put)        payoff = Max(ST, X)</a:t>
             </a:r>
             <a:endParaRPr lang="en-US" sz="1800" dirty="0"/>
           </a:p>
@@ -28678,8 +29314,8 @@
         </p:nvSpPr>
         <p:spPr>
           <a:xfrm>
-            <a:off x="320040" y="2331720"/>
-            <a:ext cx="8503920" cy="1965960"/>
+            <a:off x="320040" y="2011680"/>
+            <a:ext cx="8503920" cy="2286000"/>
           </a:xfrm>
           <a:prstGeom prst="rect">
             <a:avLst/>
@@ -28703,7 +29339,7 @@
         </p:nvSpPr>
         <p:spPr>
           <a:xfrm>
-            <a:off x="457200" y="2377440"/>
+            <a:off x="457200" y="2057400"/>
             <a:ext cx="8229600" cy="256032"/>
           </a:xfrm>
           <a:prstGeom prst="rect">
@@ -28731,7 +29367,7 @@
                 <a:ea typeface="Trebuchet MS" pitchFamily="34" charset="-122"/>
                 <a:cs typeface="Trebuchet MS" pitchFamily="34" charset="-120"/>
               </a:rPr>
-              <a:t>CFA LM 9 EXAMPLE 1 — VFO HEDGING BIOMIAN WITH A 6-MONTH PUT AT X = 265</a:t>
+              <a:t>CFA LM 9 EXAMPLE 1 — PRICING VFO’S SIX-MONTH BIOMIAN PUT AT X = 265</a:t>
             </a:r>
             <a:endParaRPr lang="en-US" sz="1100" dirty="0"/>
           </a:p>
@@ -28745,7 +29381,7 @@
         </p:nvSpPr>
         <p:spPr>
           <a:xfrm>
-            <a:off x="457200" y="2670048"/>
+            <a:off x="457200" y="2350008"/>
             <a:ext cx="8229600" cy="457200"/>
           </a:xfrm>
           <a:prstGeom prst="rect">
@@ -28773,7 +29409,7 @@
                 <a:ea typeface="Calibri" pitchFamily="34" charset="-122"/>
                 <a:cs typeface="Calibri" pitchFamily="34" charset="-120"/>
               </a:rPr>
-              <a:t>S₀ = INR 295, X = INR 265, observed 6-month call at same X priced at c₀ = INR 59, r = 4%, T = 0.5.</a:t>
+              <a:t>Biomian at S₀ = INR 295, no dividends. A traded six-month call at the same X = 265 is quoted at c₀ = INR 59. r = 4%, T = 0.5.</a:t>
             </a:r>
             <a:endParaRPr lang="en-US" sz="1200" dirty="0"/>
           </a:p>
@@ -28787,8 +29423,8 @@
         </p:nvSpPr>
         <p:spPr>
           <a:xfrm>
-            <a:off x="457200" y="3182112"/>
-            <a:ext cx="8229600" cy="603504"/>
+            <a:off x="457200" y="2862072"/>
+            <a:ext cx="8229600" cy="923544"/>
           </a:xfrm>
           <a:prstGeom prst="rect">
             <a:avLst/>
@@ -28810,7 +29446,7 @@
               <a:buNone/>
             </a:pPr>
             <a:r>
-              <a:rPr lang="en-US" sz="1050" b="1" dirty="0">
+              <a:rPr lang="en-US" sz="1150" b="1" dirty="0">
                 <a:solidFill>
                   <a:srgbClr val="1B2A4A"/>
                 </a:solidFill>
@@ -28827,7 +29463,7 @@
               <a:buNone/>
             </a:pPr>
             <a:r>
-              <a:rPr lang="en-US" sz="1050" dirty="0">
+              <a:rPr lang="en-US" sz="1150" dirty="0">
                 <a:solidFill>
                   <a:srgbClr val="334155"/>
                 </a:solidFill>
@@ -28845,7 +29481,7 @@
               <a:buNone/>
             </a:pPr>
             <a:r>
-              <a:rPr lang="en-US" sz="1050" b="1" dirty="0">
+              <a:rPr lang="en-US" sz="1150" b="1" dirty="0">
                 <a:solidFill>
                   <a:srgbClr val="1B2A4A"/>
                 </a:solidFill>
@@ -28862,7 +29498,7 @@
               <a:buNone/>
             </a:pPr>
             <a:r>
-              <a:rPr lang="en-US" sz="1050" dirty="0">
+              <a:rPr lang="en-US" sz="1150" dirty="0">
                 <a:solidFill>
                   <a:srgbClr val="334155"/>
                 </a:solidFill>
@@ -28880,7 +29516,7 @@
               <a:buNone/>
             </a:pPr>
             <a:r>
-              <a:rPr lang="en-US" sz="1050" b="1" dirty="0">
+              <a:rPr lang="en-US" sz="1150" b="1" dirty="0">
                 <a:solidFill>
                   <a:srgbClr val="1B2A4A"/>
                 </a:solidFill>
@@ -28897,7 +29533,7 @@
               <a:buNone/>
             </a:pPr>
             <a:r>
-              <a:rPr lang="en-US" sz="1050" dirty="0">
+              <a:rPr lang="en-US" sz="1150" dirty="0">
                 <a:solidFill>
                   <a:srgbClr val="334155"/>
                 </a:solidFill>
@@ -28905,7 +29541,7 @@
                 <a:ea typeface="Calibri" pitchFamily="34" charset="-122"/>
                 <a:cs typeface="Calibri" pitchFamily="34" charset="-120"/>
               </a:rPr>
-              <a:t>Solve: 295 + p₀ = 59 + 259.85
+              <a:t>295 + p₀ = 59 + 259.85  ⇒  p₀ = 318.85 − 295 = INR 23.85
 </a:t>
             </a:r>
             <a:pPr indent="0" marL="0">
@@ -28915,7 +29551,7 @@
               <a:buNone/>
             </a:pPr>
             <a:r>
-              <a:rPr lang="en-US" sz="1050" b="1" dirty="0">
+              <a:rPr lang="en-US" sz="1150" b="1" dirty="0">
                 <a:solidFill>
                   <a:srgbClr val="1B2A4A"/>
                 </a:solidFill>
@@ -28932,7 +29568,7 @@
               <a:buNone/>
             </a:pPr>
             <a:r>
-              <a:rPr lang="en-US" sz="1050" dirty="0">
+              <a:rPr lang="en-US" sz="1150" dirty="0">
                 <a:solidFill>
                   <a:srgbClr val="334155"/>
                 </a:solidFill>
@@ -28940,9 +29576,9 @@
                 <a:ea typeface="Calibri" pitchFamily="34" charset="-122"/>
                 <a:cs typeface="Calibri" pitchFamily="34" charset="-120"/>
               </a:rPr>
-              <a:t>p₀ = 318.85 − 295 = INR 23.85</a:t>
-            </a:r>
-            <a:endParaRPr lang="en-US" sz="1050" dirty="0"/>
+              <a:t>Cross-check both sides: 295 + 23.85 = 318.85 and 59 + 259.85 = 318.85 ✓</a:t>
+            </a:r>
+            <a:endParaRPr lang="en-US" sz="1150" dirty="0"/>
           </a:p>
         </p:txBody>
       </p:sp>
@@ -29002,7 +29638,7 @@
                 <a:ea typeface="Consolas" pitchFamily="34" charset="-122"/>
                 <a:cs typeface="Consolas" pitchFamily="34" charset="-120"/>
               </a:rPr>
-              <a:t>Put premium INR 23.85 ⇒ hedged floor at 265; VFO caps downside while retaining upside above 265.</a:t>
+              <a:t>Floor at 265 costs 23.85. Max loss = 295 − 265 + 23.85 = 53.85; upside above 265 untouched.</a:t>
             </a:r>
             <a:endParaRPr lang="en-US" sz="1150" dirty="0"/>
           </a:p>
@@ -29109,7 +29745,7 @@
                 <a:ea typeface="Trebuchet MS" pitchFamily="34" charset="-122"/>
                 <a:cs typeface="Trebuchet MS" pitchFamily="34" charset="-120"/>
               </a:rPr>
-              <a:t>A collar stacks a protective put and a covered call on the same stock — floor plus cap, funded cheaply by the call premium</a:t>
+              <a:t>Replicating an option means borrowing to buy only a FRACTION of the underlying — and rebalancing as moneyness moves</a:t>
             </a:r>
             <a:endParaRPr lang="en-US" sz="1700" dirty="0"/>
           </a:p>
@@ -29213,7 +29849,7 @@
                 <a:ea typeface="Calibri" pitchFamily="34" charset="-122"/>
                 <a:cs typeface="Calibri" pitchFamily="34" charset="-120"/>
               </a:rPr>
-              <a:t>Source: CFA Institute, Curriculum Vol 7, Learning Module 9, §3 Option Strategies, pp. 204–206.</a:t>
+              <a:t>Source: CFA Institute, Curriculum Vol 7, Learning Module 8, §7 "Replication", Exhibits 4–5, printed pp. 182–184.</a:t>
             </a:r>
             <a:endParaRPr lang="en-US" sz="750" dirty="0"/>
           </a:p>
@@ -29255,42 +29891,902 @@
                 <a:ea typeface="Calibri" pitchFamily="34" charset="-122"/>
                 <a:cs typeface="Calibri" pitchFamily="34" charset="-120"/>
               </a:rPr>
-              <a:t>When the call premium collected roughly equals the put premium paid, it's a zero-cost collar — a favourite of founders hedging concentrated equity.</a:t>
+              <a:t>A forward is replicated once and left alone. An option has to be re-hedged. That one difference is why option desks exist.</a:t>
             </a:r>
             <a:endParaRPr lang="en-US" sz="1300" dirty="0"/>
           </a:p>
         </p:txBody>
       </p:sp>
-      <p:sp>
-        <p:nvSpPr>
-          <p:cNvPr id="9" name="Shape 7"/>
+      <p:graphicFrame>
+        <p:nvGraphicFramePr>
+          <p:cNvPr id="10" name="Table 0"/>
+          <p:cNvGraphicFramePr>
+            <a:graphicFrameLocks noGrp="1"/>
+          </p:cNvGraphicFramePr>
+          <p:nvPr>
+            <p:extLst>
+              <p:ext uri="{D42A27DB-BD31-4B8C-83A1-F6EECF244321}">
+                <p14:modId xmlns:p14="http://schemas.microsoft.com/office/powerpoint/2010/main" val="1579011935"/>
+              </p:ext>
+            </p:extLst>
+          </p:nvPr>
+        </p:nvGraphicFramePr>
+        <p:xfrm>
+          <a:off x="320040" y="1188720"/>
+          <a:ext cx="8503920" cy="914400"/>
+        </p:xfrm>
+        <a:graphic>
+          <a:graphicData uri="http://schemas.openxmlformats.org/drawingml/2006/table">
+            <a:tbl>
+              <a:tblPr/>
+              <a:tblGrid>
+                <a:gridCol w="1783080"/>
+                <a:gridCol w="2606040"/>
+                <a:gridCol w="2834640"/>
+                <a:gridCol w="1280160"/>
+              </a:tblGrid>
+              <a:tr h="274320">
+                <a:tc>
+                  <a:txBody>
+                    <a:bodyPr/>
+                    <a:lstStyle/>
+                    <a:p>
+                      <a:pPr algn="ctr" indent="0" marL="0">
+                        <a:buNone/>
+                      </a:pPr>
+                      <a:r>
+                        <a:rPr lang="en-US" sz="1100" b="1" dirty="0">
+                          <a:solidFill>
+                            <a:srgbClr val="FFFFFF"/>
+                          </a:solidFill>
+                          <a:latin typeface="Trebuchet MS" pitchFamily="34" charset="0"/>
+                          <a:ea typeface="Trebuchet MS" pitchFamily="34" charset="-122"/>
+                          <a:cs typeface="Trebuchet MS" pitchFamily="34" charset="-120"/>
+                        </a:rPr>
+                        <a:t>Position to replicate</a:t>
+                      </a:r>
+                      <a:endParaRPr lang="en-US" sz="1100" dirty="0">
+                        <a:latin typeface="Trebuchet MS" charset="0"/>
+                        <a:ea typeface="Trebuchet MS" charset="0"/>
+                        <a:cs typeface="Trebuchet MS" charset="0"/>
+                      </a:endParaRPr>
+                    </a:p>
+                  </a:txBody>
+                  <a:tcPr marL="91440" marR="91440" marT="45720" marB="45720" anchor="ctr">
+                    <a:lnL w="0" cap="flat" cmpd="sng" algn="ctr">
+                      <a:noFill/>
+                    </a:lnL>
+                    <a:lnR w="0" cap="flat" cmpd="sng" algn="ctr">
+                      <a:noFill/>
+                    </a:lnR>
+                    <a:lnT w="6350" cap="flat" cmpd="sng" algn="ctr">
+                      <a:solidFill>
+                        <a:srgbClr val="1B2A4A"/>
+                      </a:solidFill>
+                      <a:prstDash val="solid"/>
+                      <a:round/>
+                      <a:headEnd type="none" w="med" len="med"/>
+                      <a:tailEnd type="none" w="med" len="med"/>
+                    </a:lnT>
+                    <a:lnB w="0" cap="flat" cmpd="sng" algn="ctr">
+                      <a:noFill/>
+                    </a:lnB>
+                    <a:solidFill>
+                      <a:srgbClr val="1B2A4A"/>
+                    </a:solidFill>
+                  </a:tcPr>
+                </a:tc>
+                <a:tc>
+                  <a:txBody>
+                    <a:bodyPr/>
+                    <a:lstStyle/>
+                    <a:p>
+                      <a:pPr algn="ctr" indent="0" marL="0">
+                        <a:buNone/>
+                      </a:pPr>
+                      <a:r>
+                        <a:rPr lang="en-US" sz="1100" b="1" dirty="0">
+                          <a:solidFill>
+                            <a:srgbClr val="FFFFFF"/>
+                          </a:solidFill>
+                          <a:latin typeface="Trebuchet MS" pitchFamily="34" charset="0"/>
+                          <a:ea typeface="Trebuchet MS" pitchFamily="34" charset="-122"/>
+                          <a:cs typeface="Trebuchet MS" pitchFamily="34" charset="-120"/>
+                        </a:rPr>
+                        <a:t>Trade at inception (t = 0)</a:t>
+                      </a:r>
+                      <a:endParaRPr lang="en-US" sz="1100" dirty="0">
+                        <a:latin typeface="Trebuchet MS" charset="0"/>
+                        <a:ea typeface="Trebuchet MS" charset="0"/>
+                        <a:cs typeface="Trebuchet MS" charset="0"/>
+                      </a:endParaRPr>
+                    </a:p>
+                  </a:txBody>
+                  <a:tcPr marL="91440" marR="91440" marT="45720" marB="45720" anchor="ctr">
+                    <a:lnL w="0" cap="flat" cmpd="sng" algn="ctr">
+                      <a:noFill/>
+                    </a:lnL>
+                    <a:lnR w="0" cap="flat" cmpd="sng" algn="ctr">
+                      <a:noFill/>
+                    </a:lnR>
+                    <a:lnT w="6350" cap="flat" cmpd="sng" algn="ctr">
+                      <a:solidFill>
+                        <a:srgbClr val="1B2A4A"/>
+                      </a:solidFill>
+                      <a:prstDash val="solid"/>
+                      <a:round/>
+                      <a:headEnd type="none" w="med" len="med"/>
+                      <a:tailEnd type="none" w="med" len="med"/>
+                    </a:lnT>
+                    <a:lnB w="0" cap="flat" cmpd="sng" algn="ctr">
+                      <a:noFill/>
+                    </a:lnB>
+                    <a:solidFill>
+                      <a:srgbClr val="1B2A4A"/>
+                    </a:solidFill>
+                  </a:tcPr>
+                </a:tc>
+                <a:tc>
+                  <a:txBody>
+                    <a:bodyPr/>
+                    <a:lstStyle/>
+                    <a:p>
+                      <a:pPr algn="ctr" indent="0" marL="0">
+                        <a:buNone/>
+                      </a:pPr>
+                      <a:r>
+                        <a:rPr lang="en-US" sz="1100" b="1" dirty="0">
+                          <a:solidFill>
+                            <a:srgbClr val="FFFFFF"/>
+                          </a:solidFill>
+                          <a:latin typeface="Trebuchet MS" pitchFamily="34" charset="0"/>
+                          <a:ea typeface="Trebuchet MS" pitchFamily="34" charset="-122"/>
+                          <a:cs typeface="Trebuchet MS" pitchFamily="34" charset="-120"/>
+                        </a:rPr>
+                        <a:t>Settlement at t = T if exercised</a:t>
+                      </a:r>
+                      <a:endParaRPr lang="en-US" sz="1100" dirty="0">
+                        <a:latin typeface="Trebuchet MS" charset="0"/>
+                        <a:ea typeface="Trebuchet MS" charset="0"/>
+                        <a:cs typeface="Trebuchet MS" charset="0"/>
+                      </a:endParaRPr>
+                    </a:p>
+                  </a:txBody>
+                  <a:tcPr marL="91440" marR="91440" marT="45720" marB="45720" anchor="ctr">
+                    <a:lnL w="0" cap="flat" cmpd="sng" algn="ctr">
+                      <a:noFill/>
+                    </a:lnL>
+                    <a:lnR w="0" cap="flat" cmpd="sng" algn="ctr">
+                      <a:noFill/>
+                    </a:lnR>
+                    <a:lnT w="6350" cap="flat" cmpd="sng" algn="ctr">
+                      <a:solidFill>
+                        <a:srgbClr val="1B2A4A"/>
+                      </a:solidFill>
+                      <a:prstDash val="solid"/>
+                      <a:round/>
+                      <a:headEnd type="none" w="med" len="med"/>
+                      <a:tailEnd type="none" w="med" len="med"/>
+                    </a:lnT>
+                    <a:lnB w="0" cap="flat" cmpd="sng" algn="ctr">
+                      <a:noFill/>
+                    </a:lnB>
+                    <a:solidFill>
+                      <a:srgbClr val="1B2A4A"/>
+                    </a:solidFill>
+                  </a:tcPr>
+                </a:tc>
+                <a:tc>
+                  <a:txBody>
+                    <a:bodyPr/>
+                    <a:lstStyle/>
+                    <a:p>
+                      <a:pPr algn="ctr" indent="0" marL="0">
+                        <a:buNone/>
+                      </a:pPr>
+                      <a:r>
+                        <a:rPr lang="en-US" sz="1100" b="1" dirty="0">
+                          <a:solidFill>
+                            <a:srgbClr val="FFFFFF"/>
+                          </a:solidFill>
+                          <a:latin typeface="Trebuchet MS" pitchFamily="34" charset="0"/>
+                          <a:ea typeface="Trebuchet MS" pitchFamily="34" charset="-122"/>
+                          <a:cs typeface="Trebuchet MS" pitchFamily="34" charset="-120"/>
+                        </a:rPr>
+                        <a:t>Rebalance?</a:t>
+                      </a:r>
+                      <a:endParaRPr lang="en-US" sz="1100" dirty="0">
+                        <a:latin typeface="Trebuchet MS" charset="0"/>
+                        <a:ea typeface="Trebuchet MS" charset="0"/>
+                        <a:cs typeface="Trebuchet MS" charset="0"/>
+                      </a:endParaRPr>
+                    </a:p>
+                  </a:txBody>
+                  <a:tcPr marL="91440" marR="91440" marT="45720" marB="45720" anchor="ctr">
+                    <a:lnL w="0" cap="flat" cmpd="sng" algn="ctr">
+                      <a:noFill/>
+                    </a:lnL>
+                    <a:lnR w="0" cap="flat" cmpd="sng" algn="ctr">
+                      <a:noFill/>
+                    </a:lnR>
+                    <a:lnT w="6350" cap="flat" cmpd="sng" algn="ctr">
+                      <a:solidFill>
+                        <a:srgbClr val="1B2A4A"/>
+                      </a:solidFill>
+                      <a:prstDash val="solid"/>
+                      <a:round/>
+                      <a:headEnd type="none" w="med" len="med"/>
+                      <a:tailEnd type="none" w="med" len="med"/>
+                    </a:lnT>
+                    <a:lnB w="0" cap="flat" cmpd="sng" algn="ctr">
+                      <a:noFill/>
+                    </a:lnB>
+                    <a:solidFill>
+                      <a:srgbClr val="1B2A4A"/>
+                    </a:solidFill>
+                  </a:tcPr>
+                </a:tc>
+              </a:tr>
+              <a:tr h="274320">
+                <a:tc>
+                  <a:txBody>
+                    <a:bodyPr/>
+                    <a:lstStyle/>
+                    <a:p>
+                      <a:pPr algn="l" indent="0" marL="0">
+                        <a:buNone/>
+                      </a:pPr>
+                      <a:r>
+                        <a:rPr lang="en-US" sz="1100" dirty="0">
+                          <a:solidFill>
+                            <a:srgbClr val="334155"/>
+                          </a:solidFill>
+                          <a:latin typeface="Calibri" pitchFamily="34" charset="0"/>
+                          <a:ea typeface="Calibri" pitchFamily="34" charset="-122"/>
+                          <a:cs typeface="Calibri" pitchFamily="34" charset="-120"/>
+                        </a:rPr>
+                        <a:t>Long forward</a:t>
+                      </a:r>
+                      <a:endParaRPr lang="en-US" sz="1100" dirty="0">
+                        <a:latin typeface="Calibri" charset="0"/>
+                        <a:ea typeface="Calibri" charset="0"/>
+                        <a:cs typeface="Calibri" charset="0"/>
+                      </a:endParaRPr>
+                    </a:p>
+                  </a:txBody>
+                  <a:tcPr marL="91440" marR="91440" marT="45720" marB="45720" anchor="ctr">
+                    <a:lnL w="0" cap="flat" cmpd="sng" algn="ctr">
+                      <a:noFill/>
+                    </a:lnL>
+                    <a:lnR w="0" cap="flat" cmpd="sng" algn="ctr">
+                      <a:noFill/>
+                    </a:lnR>
+                    <a:lnT w="0" cap="flat" cmpd="sng" algn="ctr">
+                      <a:noFill/>
+                    </a:lnT>
+                    <a:lnB w="3175" cap="flat" cmpd="sng" algn="ctr">
+                      <a:solidFill>
+                        <a:srgbClr val="D0D8E8"/>
+                      </a:solidFill>
+                      <a:prstDash val="solid"/>
+                      <a:round/>
+                      <a:headEnd type="none" w="med" len="med"/>
+                      <a:tailEnd type="none" w="med" len="med"/>
+                    </a:lnB>
+                    <a:solidFill>
+                      <a:srgbClr val="FFFFFF"/>
+                    </a:solidFill>
+                  </a:tcPr>
+                </a:tc>
+                <a:tc>
+                  <a:txBody>
+                    <a:bodyPr/>
+                    <a:lstStyle/>
+                    <a:p>
+                      <a:pPr algn="ctr" indent="0" marL="0">
+                        <a:buNone/>
+                      </a:pPr>
+                      <a:r>
+                        <a:rPr lang="en-US" sz="1100" dirty="0">
+                          <a:solidFill>
+                            <a:srgbClr val="334155"/>
+                          </a:solidFill>
+                          <a:latin typeface="Consolas" pitchFamily="34" charset="0"/>
+                          <a:ea typeface="Consolas" pitchFamily="34" charset="-122"/>
+                          <a:cs typeface="Consolas" pitchFamily="34" charset="-120"/>
+                        </a:rPr>
+                        <a:t>Borrow PV(F₀); buy the asset</a:t>
+                      </a:r>
+                      <a:endParaRPr lang="en-US" sz="1100" dirty="0">
+                        <a:latin typeface="Consolas" charset="0"/>
+                        <a:ea typeface="Consolas" charset="0"/>
+                        <a:cs typeface="Consolas" charset="0"/>
+                      </a:endParaRPr>
+                    </a:p>
+                  </a:txBody>
+                  <a:tcPr marL="91440" marR="91440" marT="45720" marB="45720" anchor="ctr">
+                    <a:lnL w="0" cap="flat" cmpd="sng" algn="ctr">
+                      <a:noFill/>
+                    </a:lnL>
+                    <a:lnR w="0" cap="flat" cmpd="sng" algn="ctr">
+                      <a:noFill/>
+                    </a:lnR>
+                    <a:lnT w="0" cap="flat" cmpd="sng" algn="ctr">
+                      <a:noFill/>
+                    </a:lnT>
+                    <a:lnB w="3175" cap="flat" cmpd="sng" algn="ctr">
+                      <a:solidFill>
+                        <a:srgbClr val="D0D8E8"/>
+                      </a:solidFill>
+                      <a:prstDash val="solid"/>
+                      <a:round/>
+                      <a:headEnd type="none" w="med" len="med"/>
+                      <a:tailEnd type="none" w="med" len="med"/>
+                    </a:lnB>
+                    <a:solidFill>
+                      <a:srgbClr val="FFFFFF"/>
+                    </a:solidFill>
+                  </a:tcPr>
+                </a:tc>
+                <a:tc>
+                  <a:txBody>
+                    <a:bodyPr/>
+                    <a:lstStyle/>
+                    <a:p>
+                      <a:pPr algn="ctr" indent="0" marL="0">
+                        <a:buNone/>
+                      </a:pPr>
+                      <a:r>
+                        <a:rPr lang="en-US" sz="1100" dirty="0">
+                          <a:solidFill>
+                            <a:srgbClr val="334155"/>
+                          </a:solidFill>
+                          <a:latin typeface="Consolas" pitchFamily="34" charset="0"/>
+                          <a:ea typeface="Consolas" pitchFamily="34" charset="-122"/>
+                          <a:cs typeface="Consolas" pitchFamily="34" charset="-120"/>
+                        </a:rPr>
+                        <a:t>Sell at ST, repay F₀(T)</a:t>
+                      </a:r>
+                      <a:endParaRPr lang="en-US" sz="1100" dirty="0">
+                        <a:latin typeface="Consolas" charset="0"/>
+                        <a:ea typeface="Consolas" charset="0"/>
+                        <a:cs typeface="Consolas" charset="0"/>
+                      </a:endParaRPr>
+                    </a:p>
+                  </a:txBody>
+                  <a:tcPr marL="91440" marR="91440" marT="45720" marB="45720" anchor="ctr">
+                    <a:lnL w="0" cap="flat" cmpd="sng" algn="ctr">
+                      <a:noFill/>
+                    </a:lnL>
+                    <a:lnR w="0" cap="flat" cmpd="sng" algn="ctr">
+                      <a:noFill/>
+                    </a:lnR>
+                    <a:lnT w="0" cap="flat" cmpd="sng" algn="ctr">
+                      <a:noFill/>
+                    </a:lnT>
+                    <a:lnB w="3175" cap="flat" cmpd="sng" algn="ctr">
+                      <a:solidFill>
+                        <a:srgbClr val="D0D8E8"/>
+                      </a:solidFill>
+                      <a:prstDash val="solid"/>
+                      <a:round/>
+                      <a:headEnd type="none" w="med" len="med"/>
+                      <a:tailEnd type="none" w="med" len="med"/>
+                    </a:lnB>
+                    <a:solidFill>
+                      <a:srgbClr val="FFFFFF"/>
+                    </a:solidFill>
+                  </a:tcPr>
+                </a:tc>
+                <a:tc>
+                  <a:txBody>
+                    <a:bodyPr/>
+                    <a:lstStyle/>
+                    <a:p>
+                      <a:pPr algn="ctr" indent="0" marL="0">
+                        <a:buNone/>
+                      </a:pPr>
+                      <a:r>
+                        <a:rPr lang="en-US" sz="1100" dirty="0">
+                          <a:solidFill>
+                            <a:srgbClr val="334155"/>
+                          </a:solidFill>
+                          <a:latin typeface="Consolas" pitchFamily="34" charset="0"/>
+                          <a:ea typeface="Consolas" pitchFamily="34" charset="-122"/>
+                          <a:cs typeface="Consolas" pitchFamily="34" charset="-120"/>
+                        </a:rPr>
+                        <a:t>No</a:t>
+                      </a:r>
+                      <a:endParaRPr lang="en-US" sz="1100" dirty="0">
+                        <a:latin typeface="Consolas" charset="0"/>
+                        <a:ea typeface="Consolas" charset="0"/>
+                        <a:cs typeface="Consolas" charset="0"/>
+                      </a:endParaRPr>
+                    </a:p>
+                  </a:txBody>
+                  <a:tcPr marL="91440" marR="91440" marT="45720" marB="45720" anchor="ctr">
+                    <a:lnL w="0" cap="flat" cmpd="sng" algn="ctr">
+                      <a:noFill/>
+                    </a:lnL>
+                    <a:lnR w="0" cap="flat" cmpd="sng" algn="ctr">
+                      <a:noFill/>
+                    </a:lnR>
+                    <a:lnT w="0" cap="flat" cmpd="sng" algn="ctr">
+                      <a:noFill/>
+                    </a:lnT>
+                    <a:lnB w="3175" cap="flat" cmpd="sng" algn="ctr">
+                      <a:solidFill>
+                        <a:srgbClr val="D0D8E8"/>
+                      </a:solidFill>
+                      <a:prstDash val="solid"/>
+                      <a:round/>
+                      <a:headEnd type="none" w="med" len="med"/>
+                      <a:tailEnd type="none" w="med" len="med"/>
+                    </a:lnB>
+                    <a:solidFill>
+                      <a:srgbClr val="FFFFFF"/>
+                    </a:solidFill>
+                  </a:tcPr>
+                </a:tc>
+              </a:tr>
+              <a:tr h="274320">
+                <a:tc>
+                  <a:txBody>
+                    <a:bodyPr/>
+                    <a:lstStyle/>
+                    <a:p>
+                      <a:pPr algn="l" indent="0" marL="0">
+                        <a:buNone/>
+                      </a:pPr>
+                      <a:r>
+                        <a:rPr lang="en-US" sz="1100" dirty="0">
+                          <a:solidFill>
+                            <a:srgbClr val="334155"/>
+                          </a:solidFill>
+                          <a:latin typeface="Calibri" pitchFamily="34" charset="0"/>
+                          <a:ea typeface="Calibri" pitchFamily="34" charset="-122"/>
+                          <a:cs typeface="Calibri" pitchFamily="34" charset="-120"/>
+                        </a:rPr>
+                        <a:t>Long call</a:t>
+                      </a:r>
+                      <a:endParaRPr lang="en-US" sz="1100" dirty="0">
+                        <a:latin typeface="Calibri" charset="0"/>
+                        <a:ea typeface="Calibri" charset="0"/>
+                        <a:cs typeface="Calibri" charset="0"/>
+                      </a:endParaRPr>
+                    </a:p>
+                  </a:txBody>
+                  <a:tcPr marL="91440" marR="91440" marT="45720" marB="45720" anchor="ctr">
+                    <a:lnL w="0" cap="flat" cmpd="sng" algn="ctr">
+                      <a:noFill/>
+                    </a:lnL>
+                    <a:lnR w="0" cap="flat" cmpd="sng" algn="ctr">
+                      <a:noFill/>
+                    </a:lnR>
+                    <a:lnT w="0" cap="flat" cmpd="sng" algn="ctr">
+                      <a:noFill/>
+                    </a:lnT>
+                    <a:lnB w="3175" cap="flat" cmpd="sng" algn="ctr">
+                      <a:solidFill>
+                        <a:srgbClr val="D0D8E8"/>
+                      </a:solidFill>
+                      <a:prstDash val="solid"/>
+                      <a:round/>
+                      <a:headEnd type="none" w="med" len="med"/>
+                      <a:tailEnd type="none" w="med" len="med"/>
+                    </a:lnB>
+                    <a:solidFill>
+                      <a:srgbClr val="F5F7FA"/>
+                    </a:solidFill>
+                  </a:tcPr>
+                </a:tc>
+                <a:tc>
+                  <a:txBody>
+                    <a:bodyPr/>
+                    <a:lstStyle/>
+                    <a:p>
+                      <a:pPr algn="ctr" indent="0" marL="0">
+                        <a:buNone/>
+                      </a:pPr>
+                      <a:r>
+                        <a:rPr lang="en-US" sz="1100" dirty="0">
+                          <a:solidFill>
+                            <a:srgbClr val="334155"/>
+                          </a:solidFill>
+                          <a:latin typeface="Consolas" pitchFamily="34" charset="0"/>
+                          <a:ea typeface="Consolas" pitchFamily="34" charset="-122"/>
+                          <a:cs typeface="Consolas" pitchFamily="34" charset="-120"/>
+                        </a:rPr>
+                        <a:t>Borrow part of PV(X); buy hS</a:t>
+                      </a:r>
+                      <a:endParaRPr lang="en-US" sz="1100" dirty="0">
+                        <a:latin typeface="Consolas" charset="0"/>
+                        <a:ea typeface="Consolas" charset="0"/>
+                        <a:cs typeface="Consolas" charset="0"/>
+                      </a:endParaRPr>
+                    </a:p>
+                  </a:txBody>
+                  <a:tcPr marL="91440" marR="91440" marT="45720" marB="45720" anchor="ctr">
+                    <a:lnL w="0" cap="flat" cmpd="sng" algn="ctr">
+                      <a:noFill/>
+                    </a:lnL>
+                    <a:lnR w="0" cap="flat" cmpd="sng" algn="ctr">
+                      <a:noFill/>
+                    </a:lnR>
+                    <a:lnT w="0" cap="flat" cmpd="sng" algn="ctr">
+                      <a:noFill/>
+                    </a:lnT>
+                    <a:lnB w="3175" cap="flat" cmpd="sng" algn="ctr">
+                      <a:solidFill>
+                        <a:srgbClr val="D0D8E8"/>
+                      </a:solidFill>
+                      <a:prstDash val="solid"/>
+                      <a:round/>
+                      <a:headEnd type="none" w="med" len="med"/>
+                      <a:tailEnd type="none" w="med" len="med"/>
+                    </a:lnB>
+                    <a:solidFill>
+                      <a:srgbClr val="F5F7FA"/>
+                    </a:solidFill>
+                  </a:tcPr>
+                </a:tc>
+                <a:tc>
+                  <a:txBody>
+                    <a:bodyPr/>
+                    <a:lstStyle/>
+                    <a:p>
+                      <a:pPr algn="ctr" indent="0" marL="0">
+                        <a:buNone/>
+                      </a:pPr>
+                      <a:r>
+                        <a:rPr lang="en-US" sz="1100" dirty="0">
+                          <a:solidFill>
+                            <a:srgbClr val="334155"/>
+                          </a:solidFill>
+                          <a:latin typeface="Consolas" pitchFamily="34" charset="0"/>
+                          <a:ea typeface="Consolas" pitchFamily="34" charset="-122"/>
+                          <a:cs typeface="Consolas" pitchFamily="34" charset="-120"/>
+                        </a:rPr>
+                        <a:t>Sell at ST, repay X</a:t>
+                      </a:r>
+                      <a:endParaRPr lang="en-US" sz="1100" dirty="0">
+                        <a:latin typeface="Consolas" charset="0"/>
+                        <a:ea typeface="Consolas" charset="0"/>
+                        <a:cs typeface="Consolas" charset="0"/>
+                      </a:endParaRPr>
+                    </a:p>
+                  </a:txBody>
+                  <a:tcPr marL="91440" marR="91440" marT="45720" marB="45720" anchor="ctr">
+                    <a:lnL w="0" cap="flat" cmpd="sng" algn="ctr">
+                      <a:noFill/>
+                    </a:lnL>
+                    <a:lnR w="0" cap="flat" cmpd="sng" algn="ctr">
+                      <a:noFill/>
+                    </a:lnR>
+                    <a:lnT w="0" cap="flat" cmpd="sng" algn="ctr">
+                      <a:noFill/>
+                    </a:lnT>
+                    <a:lnB w="3175" cap="flat" cmpd="sng" algn="ctr">
+                      <a:solidFill>
+                        <a:srgbClr val="D0D8E8"/>
+                      </a:solidFill>
+                      <a:prstDash val="solid"/>
+                      <a:round/>
+                      <a:headEnd type="none" w="med" len="med"/>
+                      <a:tailEnd type="none" w="med" len="med"/>
+                    </a:lnB>
+                    <a:solidFill>
+                      <a:srgbClr val="F5F7FA"/>
+                    </a:solidFill>
+                  </a:tcPr>
+                </a:tc>
+                <a:tc>
+                  <a:txBody>
+                    <a:bodyPr/>
+                    <a:lstStyle/>
+                    <a:p>
+                      <a:pPr algn="ctr" indent="0" marL="0">
+                        <a:buNone/>
+                      </a:pPr>
+                      <a:r>
+                        <a:rPr lang="en-US" sz="1100" dirty="0">
+                          <a:solidFill>
+                            <a:srgbClr val="334155"/>
+                          </a:solidFill>
+                          <a:latin typeface="Consolas" pitchFamily="34" charset="0"/>
+                          <a:ea typeface="Consolas" pitchFamily="34" charset="-122"/>
+                          <a:cs typeface="Consolas" pitchFamily="34" charset="-120"/>
+                        </a:rPr>
+                        <a:t>Yes</a:t>
+                      </a:r>
+                      <a:endParaRPr lang="en-US" sz="1100" dirty="0">
+                        <a:latin typeface="Consolas" charset="0"/>
+                        <a:ea typeface="Consolas" charset="0"/>
+                        <a:cs typeface="Consolas" charset="0"/>
+                      </a:endParaRPr>
+                    </a:p>
+                  </a:txBody>
+                  <a:tcPr marL="91440" marR="91440" marT="45720" marB="45720" anchor="ctr">
+                    <a:lnL w="0" cap="flat" cmpd="sng" algn="ctr">
+                      <a:noFill/>
+                    </a:lnL>
+                    <a:lnR w="0" cap="flat" cmpd="sng" algn="ctr">
+                      <a:noFill/>
+                    </a:lnR>
+                    <a:lnT w="0" cap="flat" cmpd="sng" algn="ctr">
+                      <a:noFill/>
+                    </a:lnT>
+                    <a:lnB w="3175" cap="flat" cmpd="sng" algn="ctr">
+                      <a:solidFill>
+                        <a:srgbClr val="D0D8E8"/>
+                      </a:solidFill>
+                      <a:prstDash val="solid"/>
+                      <a:round/>
+                      <a:headEnd type="none" w="med" len="med"/>
+                      <a:tailEnd type="none" w="med" len="med"/>
+                    </a:lnB>
+                    <a:solidFill>
+                      <a:srgbClr val="F5F7FA"/>
+                    </a:solidFill>
+                  </a:tcPr>
+                </a:tc>
+              </a:tr>
+              <a:tr h="274320">
+                <a:tc>
+                  <a:txBody>
+                    <a:bodyPr/>
+                    <a:lstStyle/>
+                    <a:p>
+                      <a:pPr algn="l" indent="0" marL="0">
+                        <a:buNone/>
+                      </a:pPr>
+                      <a:r>
+                        <a:rPr lang="en-US" sz="1100" dirty="0">
+                          <a:solidFill>
+                            <a:srgbClr val="334155"/>
+                          </a:solidFill>
+                          <a:latin typeface="Calibri" pitchFamily="34" charset="0"/>
+                          <a:ea typeface="Calibri" pitchFamily="34" charset="-122"/>
+                          <a:cs typeface="Calibri" pitchFamily="34" charset="-120"/>
+                        </a:rPr>
+                        <a:t>Long put</a:t>
+                      </a:r>
+                      <a:endParaRPr lang="en-US" sz="1100" dirty="0">
+                        <a:latin typeface="Calibri" charset="0"/>
+                        <a:ea typeface="Calibri" charset="0"/>
+                        <a:cs typeface="Calibri" charset="0"/>
+                      </a:endParaRPr>
+                    </a:p>
+                  </a:txBody>
+                  <a:tcPr marL="91440" marR="91440" marT="45720" marB="45720" anchor="ctr">
+                    <a:lnL w="0" cap="flat" cmpd="sng" algn="ctr">
+                      <a:noFill/>
+                    </a:lnL>
+                    <a:lnR w="0" cap="flat" cmpd="sng" algn="ctr">
+                      <a:noFill/>
+                    </a:lnR>
+                    <a:lnT w="0" cap="flat" cmpd="sng" algn="ctr">
+                      <a:noFill/>
+                    </a:lnT>
+                    <a:lnB w="3175" cap="flat" cmpd="sng" algn="ctr">
+                      <a:solidFill>
+                        <a:srgbClr val="D0D8E8"/>
+                      </a:solidFill>
+                      <a:prstDash val="solid"/>
+                      <a:round/>
+                      <a:headEnd type="none" w="med" len="med"/>
+                      <a:tailEnd type="none" w="med" len="med"/>
+                    </a:lnB>
+                    <a:solidFill>
+                      <a:srgbClr val="FFFFFF"/>
+                    </a:solidFill>
+                  </a:tcPr>
+                </a:tc>
+                <a:tc>
+                  <a:txBody>
+                    <a:bodyPr/>
+                    <a:lstStyle/>
+                    <a:p>
+                      <a:pPr algn="ctr" indent="0" marL="0">
+                        <a:buNone/>
+                      </a:pPr>
+                      <a:r>
+                        <a:rPr lang="en-US" sz="1100" dirty="0">
+                          <a:solidFill>
+                            <a:srgbClr val="334155"/>
+                          </a:solidFill>
+                          <a:latin typeface="Consolas" pitchFamily="34" charset="0"/>
+                          <a:ea typeface="Consolas" pitchFamily="34" charset="-122"/>
+                          <a:cs typeface="Consolas" pitchFamily="34" charset="-120"/>
+                        </a:rPr>
+                        <a:t>Short hS; lend the proceeds</a:t>
+                      </a:r>
+                      <a:endParaRPr lang="en-US" sz="1100" dirty="0">
+                        <a:latin typeface="Consolas" charset="0"/>
+                        <a:ea typeface="Consolas" charset="0"/>
+                        <a:cs typeface="Consolas" charset="0"/>
+                      </a:endParaRPr>
+                    </a:p>
+                  </a:txBody>
+                  <a:tcPr marL="91440" marR="91440" marT="45720" marB="45720" anchor="ctr">
+                    <a:lnL w="0" cap="flat" cmpd="sng" algn="ctr">
+                      <a:noFill/>
+                    </a:lnL>
+                    <a:lnR w="0" cap="flat" cmpd="sng" algn="ctr">
+                      <a:noFill/>
+                    </a:lnR>
+                    <a:lnT w="0" cap="flat" cmpd="sng" algn="ctr">
+                      <a:noFill/>
+                    </a:lnT>
+                    <a:lnB w="3175" cap="flat" cmpd="sng" algn="ctr">
+                      <a:solidFill>
+                        <a:srgbClr val="D0D8E8"/>
+                      </a:solidFill>
+                      <a:prstDash val="solid"/>
+                      <a:round/>
+                      <a:headEnd type="none" w="med" len="med"/>
+                      <a:tailEnd type="none" w="med" len="med"/>
+                    </a:lnB>
+                    <a:solidFill>
+                      <a:srgbClr val="FFFFFF"/>
+                    </a:solidFill>
+                  </a:tcPr>
+                </a:tc>
+                <a:tc>
+                  <a:txBody>
+                    <a:bodyPr/>
+                    <a:lstStyle/>
+                    <a:p>
+                      <a:pPr algn="ctr" indent="0" marL="0">
+                        <a:buNone/>
+                      </a:pPr>
+                      <a:r>
+                        <a:rPr lang="en-US" sz="1100" dirty="0">
+                          <a:solidFill>
+                            <a:srgbClr val="334155"/>
+                          </a:solidFill>
+                          <a:latin typeface="Consolas" pitchFamily="34" charset="0"/>
+                          <a:ea typeface="Consolas" pitchFamily="34" charset="-122"/>
+                          <a:cs typeface="Consolas" pitchFamily="34" charset="-120"/>
+                        </a:rPr>
+                        <a:t>Receive X, buy back at ST</a:t>
+                      </a:r>
+                      <a:endParaRPr lang="en-US" sz="1100" dirty="0">
+                        <a:latin typeface="Consolas" charset="0"/>
+                        <a:ea typeface="Consolas" charset="0"/>
+                        <a:cs typeface="Consolas" charset="0"/>
+                      </a:endParaRPr>
+                    </a:p>
+                  </a:txBody>
+                  <a:tcPr marL="91440" marR="91440" marT="45720" marB="45720" anchor="ctr">
+                    <a:lnL w="0" cap="flat" cmpd="sng" algn="ctr">
+                      <a:noFill/>
+                    </a:lnL>
+                    <a:lnR w="0" cap="flat" cmpd="sng" algn="ctr">
+                      <a:noFill/>
+                    </a:lnR>
+                    <a:lnT w="0" cap="flat" cmpd="sng" algn="ctr">
+                      <a:noFill/>
+                    </a:lnT>
+                    <a:lnB w="3175" cap="flat" cmpd="sng" algn="ctr">
+                      <a:solidFill>
+                        <a:srgbClr val="D0D8E8"/>
+                      </a:solidFill>
+                      <a:prstDash val="solid"/>
+                      <a:round/>
+                      <a:headEnd type="none" w="med" len="med"/>
+                      <a:tailEnd type="none" w="med" len="med"/>
+                    </a:lnB>
+                    <a:solidFill>
+                      <a:srgbClr val="FFFFFF"/>
+                    </a:solidFill>
+                  </a:tcPr>
+                </a:tc>
+                <a:tc>
+                  <a:txBody>
+                    <a:bodyPr/>
+                    <a:lstStyle/>
+                    <a:p>
+                      <a:pPr algn="ctr" indent="0" marL="0">
+                        <a:buNone/>
+                      </a:pPr>
+                      <a:r>
+                        <a:rPr lang="en-US" sz="1100" dirty="0">
+                          <a:solidFill>
+                            <a:srgbClr val="334155"/>
+                          </a:solidFill>
+                          <a:latin typeface="Consolas" pitchFamily="34" charset="0"/>
+                          <a:ea typeface="Consolas" pitchFamily="34" charset="-122"/>
+                          <a:cs typeface="Consolas" pitchFamily="34" charset="-120"/>
+                        </a:rPr>
+                        <a:t>Yes</a:t>
+                      </a:r>
+                      <a:endParaRPr lang="en-US" sz="1100" dirty="0">
+                        <a:latin typeface="Consolas" charset="0"/>
+                        <a:ea typeface="Consolas" charset="0"/>
+                        <a:cs typeface="Consolas" charset="0"/>
+                      </a:endParaRPr>
+                    </a:p>
+                  </a:txBody>
+                  <a:tcPr marL="91440" marR="91440" marT="45720" marB="45720" anchor="ctr">
+                    <a:lnL w="0" cap="flat" cmpd="sng" algn="ctr">
+                      <a:noFill/>
+                    </a:lnL>
+                    <a:lnR w="0" cap="flat" cmpd="sng" algn="ctr">
+                      <a:noFill/>
+                    </a:lnR>
+                    <a:lnT w="0" cap="flat" cmpd="sng" algn="ctr">
+                      <a:noFill/>
+                    </a:lnT>
+                    <a:lnB w="3175" cap="flat" cmpd="sng" algn="ctr">
+                      <a:solidFill>
+                        <a:srgbClr val="D0D8E8"/>
+                      </a:solidFill>
+                      <a:prstDash val="solid"/>
+                      <a:round/>
+                      <a:headEnd type="none" w="med" len="med"/>
+                      <a:tailEnd type="none" w="med" len="med"/>
+                    </a:lnB>
+                    <a:solidFill>
+                      <a:srgbClr val="FFFFFF"/>
+                    </a:solidFill>
+                  </a:tcPr>
+                </a:tc>
+              </a:tr>
+            </a:tbl>
+          </a:graphicData>
+        </a:graphic>
+      </p:graphicFrame>
+      <p:sp>
+        <p:nvSpPr>
+          <p:cNvPr id="10" name="Shape 7"/>
           <p:cNvSpPr/>
           <p:nvPr/>
         </p:nvSpPr>
         <p:spPr>
           <a:xfrm>
-            <a:off x="320040" y="1188720"/>
-            <a:ext cx="8503920" cy="658368"/>
+            <a:off x="320040" y="2468880"/>
+            <a:ext cx="2743200" cy="1828800"/>
           </a:xfrm>
           <a:prstGeom prst="rect">
             <a:avLst/>
           </a:prstGeom>
           <a:solidFill>
-            <a:srgbClr val="1B2A4A"/>
+            <a:srgbClr val="FEF0E7"/>
           </a:solidFill>
           <a:ln/>
         </p:spPr>
       </p:sp>
       <p:sp>
         <p:nvSpPr>
-          <p:cNvPr id="10" name="Text 8"/>
+          <p:cNvPr id="11" name="Shape 8"/>
+          <p:cNvSpPr/>
+          <p:nvPr/>
+        </p:nvSpPr>
+        <p:spPr>
+          <a:xfrm>
+            <a:off x="320040" y="2468880"/>
+            <a:ext cx="73152" cy="1828800"/>
+          </a:xfrm>
+          <a:prstGeom prst="rect">
+            <a:avLst/>
+          </a:prstGeom>
+          <a:solidFill>
+            <a:srgbClr val="E8600A"/>
+          </a:solidFill>
+          <a:ln/>
+        </p:spPr>
+      </p:sp>
+      <p:sp>
+        <p:nvSpPr>
+          <p:cNvPr id="12" name="Text 9"/>
           <p:cNvSpPr txBox="1"/>
           <p:nvPr/>
         </p:nvSpPr>
         <p:spPr>
           <a:xfrm>
-            <a:off x="411480" y="1188720"/>
-            <a:ext cx="8321040" cy="658368"/>
+            <a:off x="457200" y="2514600"/>
+            <a:ext cx="2514600" cy="256032"/>
           </a:xfrm>
           <a:prstGeom prst="rect">
             <a:avLst/>
@@ -29305,34 +30801,116 @@
           </a:bodyPr>
           <a:lstStyle/>
           <a:p>
-            <a:pPr algn="ctr" indent="0" marL="0">
-              <a:buNone/>
-            </a:pPr>
-            <a:r>
-              <a:rPr lang="en-US" sz="1800" b="1" dirty="0">
-                <a:solidFill>
-                  <a:srgbClr val="FFFFFF"/>
-                </a:solidFill>
-                <a:latin typeface="Consolas" pitchFamily="34" charset="0"/>
-                <a:ea typeface="Consolas" pitchFamily="34" charset="-122"/>
-                <a:cs typeface="Consolas" pitchFamily="34" charset="-120"/>
-              </a:rPr>
-              <a:t>Collar payoff at T  =  Max(X_put,  Min(ST,  X_call))          (+ net premium, usually ≈ 0)</a:t>
-            </a:r>
-            <a:endParaRPr lang="en-US" sz="1800" dirty="0"/>
+            <a:pPr algn="l" indent="0" marL="0">
+              <a:buNone/>
+            </a:pPr>
+            <a:r>
+              <a:rPr lang="en-US" sz="1100" b="1" spc="400" kern="0" dirty="0">
+                <a:solidFill>
+                  <a:srgbClr val="E8600A"/>
+                </a:solidFill>
+                <a:latin typeface="Trebuchet MS" pitchFamily="34" charset="0"/>
+                <a:ea typeface="Trebuchet MS" pitchFamily="34" charset="-122"/>
+                <a:cs typeface="Trebuchet MS" pitchFamily="34" charset="-120"/>
+              </a:rPr>
+              <a:t>WHY ONLY A FRACTION</a:t>
+            </a:r>
+            <a:endParaRPr lang="en-US" sz="1100" dirty="0"/>
           </a:p>
         </p:txBody>
       </p:sp>
       <p:sp>
         <p:nvSpPr>
-          <p:cNvPr id="11" name="Text 9"/>
+          <p:cNvPr id="13" name="Text 10"/>
           <p:cNvSpPr txBox="1"/>
           <p:nvPr/>
         </p:nvSpPr>
         <p:spPr>
           <a:xfrm>
-            <a:off x="320040" y="1874520"/>
-            <a:ext cx="8503920" cy="256032"/>
+            <a:off x="457200" y="2788920"/>
+            <a:ext cx="2514600" cy="1463040"/>
+          </a:xfrm>
+          <a:prstGeom prst="rect">
+            <a:avLst/>
+          </a:prstGeom>
+          <a:noFill/>
+          <a:ln/>
+        </p:spPr>
+        <p:txBody>
+          <a:bodyPr wrap="square" lIns="508" tIns="508" rIns="508" bIns="508" rtlCol="0" anchor="t">
+            <a:normAutofit/>
+            <a:spAutoFit/>
+          </a:bodyPr>
+          <a:lstStyle/>
+          <a:p>
+            <a:pPr algn="l" indent="0" marL="0">
+              <a:buNone/>
+            </a:pPr>
+            <a:r>
+              <a:rPr lang="en-US" sz="1200" dirty="0">
+                <a:solidFill>
+                  <a:srgbClr val="334155"/>
+                </a:solidFill>
+                <a:latin typeface="Calibri" pitchFamily="34" charset="0"/>
+                <a:ea typeface="Calibri" pitchFamily="34" charset="-122"/>
+                <a:cs typeface="Calibri" pitchFamily="34" charset="-120"/>
+              </a:rPr>
+              <a:t>If exercise were certain you would borrow the full PV(X), exactly as for a forward. It is not — so you borrow only the proportion that matches the likelihood of exercise. That proportion is h, and it is the same h you meet in the binomial model.</a:t>
+            </a:r>
+            <a:endParaRPr lang="en-US" sz="1200" dirty="0"/>
+          </a:p>
+        </p:txBody>
+      </p:sp>
+      <p:sp>
+        <p:nvSpPr>
+          <p:cNvPr id="14" name="Shape 11"/>
+          <p:cNvSpPr/>
+          <p:nvPr/>
+        </p:nvSpPr>
+        <p:spPr>
+          <a:xfrm>
+            <a:off x="3200400" y="2468880"/>
+            <a:ext cx="2743200" cy="1828800"/>
+          </a:xfrm>
+          <a:prstGeom prst="rect">
+            <a:avLst/>
+          </a:prstGeom>
+          <a:solidFill>
+            <a:srgbClr val="F5F7FA"/>
+          </a:solidFill>
+          <a:ln/>
+        </p:spPr>
+      </p:sp>
+      <p:sp>
+        <p:nvSpPr>
+          <p:cNvPr id="15" name="Shape 12"/>
+          <p:cNvSpPr/>
+          <p:nvPr/>
+        </p:nvSpPr>
+        <p:spPr>
+          <a:xfrm>
+            <a:off x="3200400" y="2468880"/>
+            <a:ext cx="73152" cy="1828800"/>
+          </a:xfrm>
+          <a:prstGeom prst="rect">
+            <a:avLst/>
+          </a:prstGeom>
+          <a:solidFill>
+            <a:srgbClr val="1B2A4A"/>
+          </a:solidFill>
+          <a:ln/>
+        </p:spPr>
+      </p:sp>
+      <p:sp>
+        <p:nvSpPr>
+          <p:cNvPr id="16" name="Text 13"/>
+          <p:cNvSpPr txBox="1"/>
+          <p:nvPr/>
+        </p:nvSpPr>
+        <p:spPr>
+          <a:xfrm>
+            <a:off x="3337560" y="2514600"/>
+            <a:ext cx="2514600" cy="256032"/>
           </a:xfrm>
           <a:prstGeom prst="rect">
             <a:avLst/>
@@ -29351,7 +30929,49 @@
               <a:buNone/>
             </a:pPr>
             <a:r>
-              <a:rPr lang="en-US" sz="1100" i="1" dirty="0">
+              <a:rPr lang="en-US" sz="1100" b="1" spc="400" kern="0" dirty="0">
+                <a:solidFill>
+                  <a:srgbClr val="1B2A4A"/>
+                </a:solidFill>
+                <a:latin typeface="Trebuchet MS" pitchFamily="34" charset="0"/>
+                <a:ea typeface="Trebuchet MS" pitchFamily="34" charset="-122"/>
+                <a:cs typeface="Trebuchet MS" pitchFamily="34" charset="-120"/>
+              </a:rPr>
+              <a:t>WHY h KEEPS MOVING</a:t>
+            </a:r>
+            <a:endParaRPr lang="en-US" sz="1100" dirty="0"/>
+          </a:p>
+        </p:txBody>
+      </p:sp>
+      <p:sp>
+        <p:nvSpPr>
+          <p:cNvPr id="17" name="Text 14"/>
+          <p:cNvSpPr txBox="1"/>
+          <p:nvPr/>
+        </p:nvSpPr>
+        <p:spPr>
+          <a:xfrm>
+            <a:off x="3337560" y="2788920"/>
+            <a:ext cx="2514600" cy="1463040"/>
+          </a:xfrm>
+          <a:prstGeom prst="rect">
+            <a:avLst/>
+          </a:prstGeom>
+          <a:noFill/>
+          <a:ln/>
+        </p:spPr>
+        <p:txBody>
+          <a:bodyPr wrap="square" lIns="508" tIns="508" rIns="508" bIns="508" rtlCol="0" anchor="t">
+            <a:normAutofit/>
+            <a:spAutoFit/>
+          </a:bodyPr>
+          <a:lstStyle/>
+          <a:p>
+            <a:pPr algn="l" indent="0" marL="0">
+              <a:buNone/>
+            </a:pPr>
+            <a:r>
+              <a:rPr lang="en-US" sz="1200" dirty="0">
                 <a:solidFill>
                   <a:srgbClr val="334155"/>
                 </a:solidFill>
@@ -29359,22 +30979,22 @@
                 <a:ea typeface="Calibri" pitchFamily="34" charset="-122"/>
                 <a:cs typeface="Calibri" pitchFamily="34" charset="-120"/>
               </a:rPr>
-              <a:t>where: X_put &lt; S₀ &lt; X_call. Downside floored at X_put, upside capped at X_call; profile is a "squashed stock".</a:t>
-            </a:r>
-            <a:endParaRPr lang="en-US" sz="1100" dirty="0"/>
+              <a:t>A forward settles with certainty, so its replicating trades never change. An option’s likelihood of exercise moves with every tick, so h moves too. Re-hedging cost is the real economic content of the premium.</a:t>
+            </a:r>
+            <a:endParaRPr lang="en-US" sz="1200" dirty="0"/>
           </a:p>
         </p:txBody>
       </p:sp>
       <p:sp>
         <p:nvSpPr>
-          <p:cNvPr id="12" name="Shape 10"/>
+          <p:cNvPr id="18" name="Shape 15"/>
           <p:cNvSpPr/>
           <p:nvPr/>
         </p:nvSpPr>
         <p:spPr>
           <a:xfrm>
-            <a:off x="320040" y="2331720"/>
-            <a:ext cx="8503920" cy="1965960"/>
+            <a:off x="6080760" y="2468880"/>
+            <a:ext cx="2743200" cy="1828800"/>
           </a:xfrm>
           <a:prstGeom prst="rect">
             <a:avLst/>
@@ -29382,24 +31002,39 @@
           <a:solidFill>
             <a:srgbClr val="FEF0E7"/>
           </a:solidFill>
-          <a:ln w="9525">
-            <a:solidFill>
-              <a:srgbClr val="E8600A"/>
-            </a:solidFill>
-            <a:prstDash val="solid"/>
-          </a:ln>
-        </p:spPr>
-      </p:sp>
-      <p:sp>
-        <p:nvSpPr>
-          <p:cNvPr id="13" name="Text 11"/>
+          <a:ln/>
+        </p:spPr>
+      </p:sp>
+      <p:sp>
+        <p:nvSpPr>
+          <p:cNvPr id="19" name="Shape 16"/>
+          <p:cNvSpPr/>
+          <p:nvPr/>
+        </p:nvSpPr>
+        <p:spPr>
+          <a:xfrm>
+            <a:off x="6080760" y="2468880"/>
+            <a:ext cx="73152" cy="1828800"/>
+          </a:xfrm>
+          <a:prstGeom prst="rect">
+            <a:avLst/>
+          </a:prstGeom>
+          <a:solidFill>
+            <a:srgbClr val="E8600A"/>
+          </a:solidFill>
+          <a:ln/>
+        </p:spPr>
+      </p:sp>
+      <p:sp>
+        <p:nvSpPr>
+          <p:cNvPr id="20" name="Text 17"/>
           <p:cNvSpPr txBox="1"/>
           <p:nvPr/>
         </p:nvSpPr>
         <p:spPr>
           <a:xfrm>
-            <a:off x="457200" y="2377440"/>
-            <a:ext cx="8229600" cy="256032"/>
+            <a:off x="6217920" y="2514600"/>
+            <a:ext cx="2514600" cy="256032"/>
           </a:xfrm>
           <a:prstGeom prst="rect">
             <a:avLst/>
@@ -29426,7 +31061,7 @@
                 <a:ea typeface="Trebuchet MS" pitchFamily="34" charset="-122"/>
                 <a:cs typeface="Trebuchet MS" pitchFamily="34" charset="-120"/>
               </a:rPr>
-              <a:t>ZERO-COST COLLAR — BIOMIAN CEO HEDGING A CONCENTRATED HOLDING</a:t>
+              <a:t>AND IN REVERSE</a:t>
             </a:r>
             <a:endParaRPr lang="en-US" sz="1100" dirty="0"/>
           </a:p>
@@ -29434,14 +31069,14 @@
       </p:sp>
       <p:sp>
         <p:nvSpPr>
-          <p:cNvPr id="14" name="Text 12"/>
+          <p:cNvPr id="21" name="Text 18"/>
           <p:cNvSpPr txBox="1"/>
           <p:nvPr/>
         </p:nvSpPr>
         <p:spPr>
           <a:xfrm>
-            <a:off x="457200" y="2670048"/>
-            <a:ext cx="8229600" cy="457200"/>
+            <a:off x="6217920" y="2788920"/>
+            <a:ext cx="2514600" cy="1463040"/>
           </a:xfrm>
           <a:prstGeom prst="rect">
             <a:avLst/>
@@ -29468,238 +31103,9 @@
                 <a:ea typeface="Calibri" pitchFamily="34" charset="-122"/>
                 <a:cs typeface="Calibri" pitchFamily="34" charset="-120"/>
               </a:rPr>
-              <a:t>CEO long 100k shares at S₀ = INR 295. Wants to lock in a 10% downside floor and fund it by capping upside. r = 4%, T = 1y.</a:t>
+              <a:t>To replicate SELLING a call, short the underlying and lend the proceeds — the exact mirror of buying one. LM 8 practice problem 6 tests precisely this, and the sign is the only thing candidates get wrong.</a:t>
             </a:r>
             <a:endParaRPr lang="en-US" sz="1200" dirty="0"/>
-          </a:p>
-        </p:txBody>
-      </p:sp>
-      <p:sp>
-        <p:nvSpPr>
-          <p:cNvPr id="15" name="Text 13"/>
-          <p:cNvSpPr txBox="1"/>
-          <p:nvPr/>
-        </p:nvSpPr>
-        <p:spPr>
-          <a:xfrm>
-            <a:off x="457200" y="3182112"/>
-            <a:ext cx="8229600" cy="603504"/>
-          </a:xfrm>
-          <a:prstGeom prst="rect">
-            <a:avLst/>
-          </a:prstGeom>
-          <a:noFill/>
-          <a:ln/>
-        </p:spPr>
-        <p:txBody>
-          <a:bodyPr wrap="square" lIns="254" tIns="254" rIns="254" bIns="254" rtlCol="0" anchor="t">
-            <a:normAutofit/>
-            <a:spAutoFit/>
-          </a:bodyPr>
-          <a:lstStyle/>
-          <a:p>
-            <a:pPr indent="0" marL="0">
-              <a:spcAft>
-                <a:spcPts val="200"/>
-              </a:spcAft>
-              <a:buNone/>
-            </a:pPr>
-            <a:r>
-              <a:rPr lang="en-US" sz="1050" b="1" dirty="0">
-                <a:solidFill>
-                  <a:srgbClr val="1B2A4A"/>
-                </a:solidFill>
-                <a:latin typeface="Calibri" pitchFamily="34" charset="0"/>
-                <a:ea typeface="Calibri" pitchFamily="34" charset="-122"/>
-                <a:cs typeface="Calibri" pitchFamily="34" charset="-120"/>
-              </a:rPr>
-              <a:t>1. </a:t>
-            </a:r>
-            <a:pPr indent="0" marL="0">
-              <a:spcAft>
-                <a:spcPts val="200"/>
-              </a:spcAft>
-              <a:buNone/>
-            </a:pPr>
-            <a:r>
-              <a:rPr lang="en-US" sz="1050" dirty="0">
-                <a:solidFill>
-                  <a:srgbClr val="334155"/>
-                </a:solidFill>
-                <a:latin typeface="Calibri" pitchFamily="34" charset="0"/>
-                <a:ea typeface="Calibri" pitchFamily="34" charset="-122"/>
-                <a:cs typeface="Calibri" pitchFamily="34" charset="-120"/>
-              </a:rPr>
-              <a:t>Buy 6-month put at X_put = 265 ⇒ pay p₀ = INR 23.85 per share (from parity example)
-</a:t>
-            </a:r>
-            <a:pPr indent="0" marL="0">
-              <a:spcAft>
-                <a:spcPts val="200"/>
-              </a:spcAft>
-              <a:buNone/>
-            </a:pPr>
-            <a:r>
-              <a:rPr lang="en-US" sz="1050" b="1" dirty="0">
-                <a:solidFill>
-                  <a:srgbClr val="1B2A4A"/>
-                </a:solidFill>
-                <a:latin typeface="Calibri" pitchFamily="34" charset="0"/>
-                <a:ea typeface="Calibri" pitchFamily="34" charset="-122"/>
-                <a:cs typeface="Calibri" pitchFamily="34" charset="-120"/>
-              </a:rPr>
-              <a:t>2. </a:t>
-            </a:r>
-            <a:pPr indent="0" marL="0">
-              <a:spcAft>
-                <a:spcPts val="200"/>
-              </a:spcAft>
-              <a:buNone/>
-            </a:pPr>
-            <a:r>
-              <a:rPr lang="en-US" sz="1050" dirty="0">
-                <a:solidFill>
-                  <a:srgbClr val="334155"/>
-                </a:solidFill>
-                <a:latin typeface="Calibri" pitchFamily="34" charset="0"/>
-                <a:ea typeface="Calibri" pitchFamily="34" charset="-122"/>
-                <a:cs typeface="Calibri" pitchFamily="34" charset="-120"/>
-              </a:rPr>
-              <a:t>Sell 6-month call at X_call = 325 ⇒ receive c₀ = INR 32.31 per share (from covered-call example)
-</a:t>
-            </a:r>
-            <a:pPr indent="0" marL="0">
-              <a:spcAft>
-                <a:spcPts val="200"/>
-              </a:spcAft>
-              <a:buNone/>
-            </a:pPr>
-            <a:r>
-              <a:rPr lang="en-US" sz="1050" b="1" dirty="0">
-                <a:solidFill>
-                  <a:srgbClr val="1B2A4A"/>
-                </a:solidFill>
-                <a:latin typeface="Calibri" pitchFamily="34" charset="0"/>
-                <a:ea typeface="Calibri" pitchFamily="34" charset="-122"/>
-                <a:cs typeface="Calibri" pitchFamily="34" charset="-120"/>
-              </a:rPr>
-              <a:t>3. </a:t>
-            </a:r>
-            <a:pPr indent="0" marL="0">
-              <a:spcAft>
-                <a:spcPts val="200"/>
-              </a:spcAft>
-              <a:buNone/>
-            </a:pPr>
-            <a:r>
-              <a:rPr lang="en-US" sz="1050" dirty="0">
-                <a:solidFill>
-                  <a:srgbClr val="334155"/>
-                </a:solidFill>
-                <a:latin typeface="Calibri" pitchFamily="34" charset="0"/>
-                <a:ea typeface="Calibri" pitchFamily="34" charset="-122"/>
-                <a:cs typeface="Calibri" pitchFamily="34" charset="-120"/>
-              </a:rPr>
-              <a:t>Net premium = +32.31 − 23.85 = +INR 8.46 per share INFLOW (collar earns carry)
-</a:t>
-            </a:r>
-            <a:pPr indent="0" marL="0">
-              <a:spcAft>
-                <a:spcPts val="200"/>
-              </a:spcAft>
-              <a:buNone/>
-            </a:pPr>
-            <a:r>
-              <a:rPr lang="en-US" sz="1050" b="1" dirty="0">
-                <a:solidFill>
-                  <a:srgbClr val="1B2A4A"/>
-                </a:solidFill>
-                <a:latin typeface="Calibri" pitchFamily="34" charset="0"/>
-                <a:ea typeface="Calibri" pitchFamily="34" charset="-122"/>
-                <a:cs typeface="Calibri" pitchFamily="34" charset="-120"/>
-              </a:rPr>
-              <a:t>4. </a:t>
-            </a:r>
-            <a:pPr indent="0" marL="0">
-              <a:spcAft>
-                <a:spcPts val="200"/>
-              </a:spcAft>
-              <a:buNone/>
-            </a:pPr>
-            <a:r>
-              <a:rPr lang="en-US" sz="1050" dirty="0">
-                <a:solidFill>
-                  <a:srgbClr val="334155"/>
-                </a:solidFill>
-                <a:latin typeface="Calibri" pitchFamily="34" charset="0"/>
-                <a:ea typeface="Calibri" pitchFamily="34" charset="-122"/>
-                <a:cs typeface="Calibri" pitchFamily="34" charset="-120"/>
-              </a:rPr>
-              <a:t>Downside at T: floored at 265. Upside at T: capped at 325. P&amp;L band: −30 / +30 per share before premium.</a:t>
-            </a:r>
-            <a:endParaRPr lang="en-US" sz="1050" dirty="0"/>
-          </a:p>
-        </p:txBody>
-      </p:sp>
-      <p:sp>
-        <p:nvSpPr>
-          <p:cNvPr id="16" name="Shape 14"/>
-          <p:cNvSpPr/>
-          <p:nvPr/>
-        </p:nvSpPr>
-        <p:spPr>
-          <a:xfrm>
-            <a:off x="411480" y="3858768"/>
-            <a:ext cx="8321040" cy="365760"/>
-          </a:xfrm>
-          <a:prstGeom prst="rect">
-            <a:avLst/>
-          </a:prstGeom>
-          <a:solidFill>
-            <a:srgbClr val="E8600A"/>
-          </a:solidFill>
-          <a:ln/>
-        </p:spPr>
-      </p:sp>
-      <p:sp>
-        <p:nvSpPr>
-          <p:cNvPr id="17" name="Text 15"/>
-          <p:cNvSpPr txBox="1"/>
-          <p:nvPr/>
-        </p:nvSpPr>
-        <p:spPr>
-          <a:xfrm>
-            <a:off x="457200" y="3858768"/>
-            <a:ext cx="8229600" cy="365760"/>
-          </a:xfrm>
-          <a:prstGeom prst="rect">
-            <a:avLst/>
-          </a:prstGeom>
-          <a:noFill/>
-          <a:ln/>
-        </p:spPr>
-        <p:txBody>
-          <a:bodyPr wrap="square" lIns="508" tIns="508" rIns="508" bIns="508" rtlCol="0" anchor="ctr">
-            <a:normAutofit/>
-            <a:spAutoFit/>
-          </a:bodyPr>
-          <a:lstStyle/>
-          <a:p>
-            <a:pPr algn="l" indent="0" marL="0">
-              <a:buNone/>
-            </a:pPr>
-            <a:r>
-              <a:rPr lang="en-US" sz="1150" b="1" dirty="0">
-                <a:solidFill>
-                  <a:srgbClr val="FFFFFF"/>
-                </a:solidFill>
-                <a:latin typeface="Consolas" pitchFamily="34" charset="0"/>
-                <a:ea typeface="Consolas" pitchFamily="34" charset="-122"/>
-                <a:cs typeface="Consolas" pitchFamily="34" charset="-120"/>
-              </a:rPr>
-              <a:t>Net cash-positive collar: floor 265, cap 325, fat INR 8.46/share credit. Works when OTM calls trade rich vs OTM puts.</a:t>
-            </a:r>
-            <a:endParaRPr lang="en-US" sz="1150" dirty="0"/>
           </a:p>
         </p:txBody>
       </p:sp>
